--- a/ppt/SynCura_Deck_V2.pptx
+++ b/ppt/SynCura_Deck_V2.pptx
@@ -3671,14 +3671,6 @@
               <a:buChar char="•"/>
             </a:pPr>
             <a:r>
-              <a:rPr lang="en-US" sz="1450" dirty="0">
-                <a:solidFill>
-                  <a:srgbClr val="000000"/>
-                </a:solidFill>
-                <a:latin typeface="Times New Roman" pitchFamily="34" charset="0"/>
-                <a:ea typeface="Times New Roman" pitchFamily="34" charset="-122"/>
-                <a:cs typeface="Times New Roman" pitchFamily="34" charset="-120"/>
-              </a:rPr>
               <a:t>[1] Y. Wang, Y. Bai, and G. Jin, Explainable Deep-Learning Models..., Frontiers in Physiology, vol. 17, 2026.</a:t>
             </a:r>
             <a:endParaRPr sz="1450"/>
@@ -3695,14 +3687,6 @@
               <a:buChar char="•"/>
             </a:pPr>
             <a:r>
-              <a:rPr lang="en-US" sz="1450" dirty="0">
-                <a:solidFill>
-                  <a:srgbClr val="000000"/>
-                </a:solidFill>
-                <a:latin typeface="Times New Roman" pitchFamily="34" charset="0"/>
-                <a:ea typeface="Times New Roman" pitchFamily="34" charset="-122"/>
-                <a:cs typeface="Times New Roman" pitchFamily="34" charset="-120"/>
-              </a:rPr>
               <a:t>[2] Z. Yan et al., Deep learning-based in-hospital mortality prediction..., PeerJ, vol. 14, e21631, 2026.</a:t>
             </a:r>
             <a:endParaRPr sz="1450"/>
@@ -3719,14 +3703,6 @@
               <a:buChar char="•"/>
             </a:pPr>
             <a:r>
-              <a:rPr lang="en-US" sz="1450" dirty="0">
-                <a:solidFill>
-                  <a:srgbClr val="000000"/>
-                </a:solidFill>
-                <a:latin typeface="Times New Roman" pitchFamily="34" charset="0"/>
-                <a:ea typeface="Times New Roman" pitchFamily="34" charset="-122"/>
-                <a:cs typeface="Times New Roman" pitchFamily="34" charset="-120"/>
-              </a:rPr>
               <a:t>[3] B. Sadanandan, Multimodal Deep Learning for Early Prediction..., arXiv:2603.14719, 2026.</a:t>
             </a:r>
             <a:endParaRPr sz="1450"/>
@@ -3743,14 +3719,6 @@
               <a:buChar char="•"/>
             </a:pPr>
             <a:r>
-              <a:rPr lang="en-US" sz="1450" dirty="0">
-                <a:solidFill>
-                  <a:srgbClr val="000000"/>
-                </a:solidFill>
-                <a:latin typeface="Times New Roman" pitchFamily="34" charset="0"/>
-                <a:ea typeface="Times New Roman" pitchFamily="34" charset="-122"/>
-                <a:cs typeface="Times New Roman" pitchFamily="34" charset="-120"/>
-              </a:rPr>
               <a:t>[4] Y. Wu et al., Revisiting the potential value of vital signs..., Journal of Big Data, vol. 11, no. 40, 2024.</a:t>
             </a:r>
             <a:endParaRPr sz="1450"/>
@@ -3767,15 +3735,7 @@
               <a:buChar char="•"/>
             </a:pPr>
             <a:r>
-              <a:rPr lang="en-US" sz="1450" dirty="0">
-                <a:solidFill>
-                  <a:srgbClr val="000000"/>
-                </a:solidFill>
-                <a:latin typeface="Times New Roman" pitchFamily="34" charset="0"/>
-                <a:ea typeface="Times New Roman" pitchFamily="34" charset="-122"/>
-                <a:cs typeface="Times New Roman" pitchFamily="34" charset="-120"/>
-              </a:rPr>
-              <a:t>[5] M. Nguyen et al., Deep Learning to Attend to Risk in ICU, arXiv:1707.05010, 2017.</a:t>
+              <a:t>[5] P. Xie et al., Unlocking real-time ICU mortality prediction..., npj Digital Medicine, vol. 8, 733, 2025.</a:t>
             </a:r>
             <a:endParaRPr sz="1450"/>
           </a:p>
@@ -3791,15 +3751,7 @@
               <a:buChar char="•"/>
             </a:pPr>
             <a:r>
-              <a:rPr lang="en-US" sz="1450" dirty="0">
-                <a:solidFill>
-                  <a:srgbClr val="000000"/>
-                </a:solidFill>
-                <a:latin typeface="Times New Roman" pitchFamily="34" charset="0"/>
-                <a:ea typeface="Times New Roman" pitchFamily="34" charset="-122"/>
-                <a:cs typeface="Times New Roman" pitchFamily="34" charset="-120"/>
-              </a:rPr>
-              <a:t>[6] P. Xie et al., Unlocking real-time ICU mortality prediction..., npj Digital Medicine, vol. 8, 733, 2025.</a:t>
+              <a:t>[6] E. Choi et al., Deep Interpretable Early Warning System..., IEEE JBHI, vol. 24, no. 9, 2020.</a:t>
             </a:r>
             <a:endParaRPr sz="1450"/>
           </a:p>
@@ -3815,15 +3767,7 @@
               <a:buChar char="•"/>
             </a:pPr>
             <a:r>
-              <a:rPr lang="en-US" sz="1450" dirty="0">
-                <a:solidFill>
-                  <a:srgbClr val="000000"/>
-                </a:solidFill>
-                <a:latin typeface="Times New Roman" pitchFamily="34" charset="0"/>
-                <a:ea typeface="Times New Roman" pitchFamily="34" charset="-122"/>
-                <a:cs typeface="Times New Roman" pitchFamily="34" charset="-120"/>
-              </a:rPr>
-              <a:t>[7] E. Choi et al., Deep Interpretable Early Warning System..., IEEE JBHI, vol. 24, no. 9, 2020.</a:t>
+              <a:t>[7] M. R. Scheid et al., Clinical wearable deep learning based deterioration prediction..., Nature Communications, vol. 16, 9513, 2025.</a:t>
             </a:r>
             <a:endParaRPr sz="1450"/>
           </a:p>
@@ -3839,63 +3783,7 @@
               <a:buChar char="•"/>
             </a:pPr>
             <a:r>
-              <a:rPr lang="en-US" sz="1450" dirty="0">
-                <a:solidFill>
-                  <a:srgbClr val="000000"/>
-                </a:solidFill>
-                <a:latin typeface="Times New Roman" pitchFamily="34" charset="0"/>
-                <a:ea typeface="Times New Roman" pitchFamily="34" charset="-122"/>
-                <a:cs typeface="Times New Roman" pitchFamily="34" charset="-120"/>
-              </a:rPr>
-              <a:t>[8] T. C. Do et al., Rapid Response System Based on Graph Attention Network..., IEEE Access, vol. 11, 2023.</a:t>
-            </a:r>
-            <a:endParaRPr sz="1450"/>
-          </a:p>
-          <a:p>
-            <a:pPr marL="406400" indent="-406400">
-              <a:lnSpc>
-                <a:spcPct val="150000"/>
-              </a:lnSpc>
-              <a:spcAft>
-                <a:spcPts val="1400"/>
-              </a:spcAft>
-              <a:buSzPct val="100000"/>
-              <a:buChar char="•"/>
-            </a:pPr>
-            <a:r>
-              <a:rPr lang="en-US" sz="1450" dirty="0">
-                <a:solidFill>
-                  <a:srgbClr val="000000"/>
-                </a:solidFill>
-                <a:latin typeface="Times New Roman" pitchFamily="34" charset="0"/>
-                <a:ea typeface="Times New Roman" pitchFamily="34" charset="-122"/>
-                <a:cs typeface="Times New Roman" pitchFamily="34" charset="-120"/>
-              </a:rPr>
-              <a:t>[9] M. R. Scheid et al., Clinical wearable deep learning based deterioration prediction..., Nature Communications, vol. 16, 9513, 2025.</a:t>
-            </a:r>
-            <a:endParaRPr sz="1450"/>
-          </a:p>
-          <a:p>
-            <a:pPr marL="406400" indent="-406400">
-              <a:lnSpc>
-                <a:spcPct val="150000"/>
-              </a:lnSpc>
-              <a:spcAft>
-                <a:spcPts val="1400"/>
-              </a:spcAft>
-              <a:buSzPct val="100000"/>
-              <a:buChar char="•"/>
-            </a:pPr>
-            <a:r>
-              <a:rPr lang="en-US" sz="1450" dirty="0">
-                <a:solidFill>
-                  <a:srgbClr val="000000"/>
-                </a:solidFill>
-                <a:latin typeface="Times New Roman" pitchFamily="34" charset="0"/>
-                <a:ea typeface="Times New Roman" pitchFamily="34" charset="-122"/>
-                <a:cs typeface="Times New Roman" pitchFamily="34" charset="-120"/>
-              </a:rPr>
-              <a:t>[10] PhysioNet, Computing in Cardiology Challenge 2012, physionet.org/content/challenge-2012/.</a:t>
+              <a:t>[8] PhysioNet, Computing in Cardiology Challenge 2012, physionet.org/content/challenge-2012/.</a:t>
             </a:r>
             <a:endParaRPr sz="1450"/>
           </a:p>
@@ -5560,7 +5448,7 @@
                 </a:solidFill>
                 <a:latin typeface="Times New Roman"/>
               </a:rPr>
-              <a:t>Different/better - evidence: unseen set-B holdout (4,000 patients) AUC 0.844 exceeds validation AUC 0.840.</a:t>
+              <a:t>Different/better - evidence: fresh unseen 20% set-B holdout AUC 0.844 exceeds validation AUC 0.840.</a:t>
             </a:r>
           </a:p>
           <a:p>
@@ -6344,7 +6232,7 @@
                 </a:solidFill>
                 <a:latin typeface="Times New Roman"/>
               </a:rPr>
-              <a:t>Deployed ensemble: 0.840 validation AUC and 0.844 AUC on the unseen set-B holdout of 4,000 patients.</a:t>
+              <a:t>Deployed ensemble: 0.840 validation AUC and 0.844 AUC on the fresh unseen 20% set-B holdout.</a:t>
             </a:r>
             <a:endParaRPr sz="2100"/>
           </a:p>

--- a/ppt/SynCura_Deck_V2.pptx
+++ b/ppt/SynCura_Deck_V2.pptx
@@ -5463,6 +5463,18 @@
               <a:t>Different/better - deployment: an end-to-end FastAPI serving path, alerts, and HTTP and MQTT ingestion - not just a trained model.</a:t>
             </a:r>
           </a:p>
+          <a:p>
+            <a:pPr/>
+            <a:r>
+              <a:rPr sz="2100">
+                <a:solidFill>
+                  <a:srgbClr val="000000"/>
+                </a:solidFill>
+                <a:latin typeface="Times New Roman"/>
+              </a:rPr>
+              <a:t>Different/better - learns from mistakes: confirmed misses/false alarms queue into weighted retraining.</a:t>
+            </a:r>
+          </a:p>
         </p:txBody>
       </p:sp>
     </p:spTree>

--- a/ppt/SynCura_Deck_V2.pptx
+++ b/ppt/SynCura_Deck_V2.pptx
@@ -1,36 +1,35 @@
 
 <file path=ppt/presentation.xml><?xml version="1.0" encoding="utf-8"?>
-<p:presentation xmlns:a="http://schemas.openxmlformats.org/drawingml/2006/main" xmlns:r="http://schemas.openxmlformats.org/officeDocument/2006/relationships" xmlns:mc="http://schemas.openxmlformats.org/markup-compatibility/2006" xmlns:mv="urn:schemas-microsoft-com:mac:vml" xmlns:p="http://schemas.openxmlformats.org/presentationml/2006/main" xmlns:c="http://schemas.openxmlformats.org/drawingml/2006/chart" xmlns:dgm="http://schemas.openxmlformats.org/drawingml/2006/diagram" xmlns:o="urn:schemas-microsoft-com:office:office" xmlns:v="urn:schemas-microsoft-com:vml" xmlns:pvml="urn:schemas-microsoft-com:office:powerpoint" xmlns:com="http://schemas.openxmlformats.org/drawingml/2006/compatibility" xmlns:p14="http://schemas.microsoft.com/office/powerpoint/2010/main" xmlns:p15="http://schemas.microsoft.com/office/powerpoint/2012/main" xmlns:ahyp="http://schemas.microsoft.com/office/drawing/2018/hyperlinkcolor" autoCompressPictures="0" strictFirstAndLastChars="0" saveSubsetFonts="1">
+<p:presentation xmlns:a="http://schemas.openxmlformats.org/drawingml/2006/main" xmlns:r="http://schemas.openxmlformats.org/officeDocument/2006/relationships" xmlns:p="http://schemas.openxmlformats.org/presentationml/2006/main" saveSubsetFonts="1" autoCompressPictures="0">
   <p:sldMasterIdLst>
-    <p:sldMasterId id="2147483648" r:id="rId3"/>
+    <p:sldMasterId id="2147483648" r:id="rId1"/>
   </p:sldMasterIdLst>
-  <p:notesMasterIdLst>
-    <p:notesMasterId r:id="rId4"/>
-  </p:notesMasterIdLst>
   <p:sldIdLst>
-    <p:sldId id="256" r:id="rId5"/>
-    <p:sldId id="260" r:id="rId9"/>
-    <p:sldId id="258" r:id="rId7"/>
-    <p:sldId id="259" r:id="rId8"/>
-    <p:sldId id="268" r:id="rId17"/>
-    <p:sldId id="269" r:id="rId18"/>
-    <p:sldId id="261" r:id="rId10"/>
-    <p:sldId id="270" r:id="rId19"/>
-    <p:sldId id="262" r:id="rId11"/>
-    <p:sldId id="271" r:id="rId20"/>
-    <p:sldId id="265" r:id="rId14"/>
-    <p:sldId id="272" r:id="rId21"/>
-    <p:sldId id="273" r:id="rId13"/>
-    <p:sldId id="263" r:id="rId12"/>
-    <p:sldId id="266" r:id="rId15"/>
-    <p:sldId id="267" r:id="rId16"/>
+    <p:sldId id="256" r:id="rId7"/>
+    <p:sldId id="257" r:id="rId8"/>
+    <p:sldId id="258" r:id="rId9"/>
+    <p:sldId id="259" r:id="rId10"/>
+    <p:sldId id="260" r:id="rId11"/>
+    <p:sldId id="261" r:id="rId12"/>
+    <p:sldId id="262" r:id="rId13"/>
+    <p:sldId id="263" r:id="rId14"/>
+    <p:sldId id="264" r:id="rId15"/>
+    <p:sldId id="265" r:id="rId16"/>
+    <p:sldId id="266" r:id="rId17"/>
+    <p:sldId id="267" r:id="rId18"/>
+    <p:sldId id="268" r:id="rId19"/>
+    <p:sldId id="269" r:id="rId20"/>
+    <p:sldId id="270" r:id="rId21"/>
+    <p:sldId id="271" r:id="rId22"/>
   </p:sldIdLst>
-  <p:sldSz cy="10287000" cx="18288000"/>
-  <p:notesSz cx="10287000" cy="18288000"/>
+  <p:sldSz cx="18288000" cy="10287000" type="screen4x3"/>
+  <p:notesSz cx="6858000" cy="9144000"/>
   <p:defaultTextStyle>
-    <a:defPPr lvl="0"/>
-    <a:lvl1pPr defTabSz="914400" eaLnBrk="1" hangingPunct="1" latinLnBrk="0" lvl="0" marL="0" rtl="0" algn="l">
-      <a:defRPr kern="1200" sz="1800">
+    <a:defPPr>
+      <a:defRPr lang="en-US"/>
+    </a:defPPr>
+    <a:lvl1pPr marL="0" algn="l" defTabSz="457200" rtl="0" eaLnBrk="1" latinLnBrk="0" hangingPunct="1">
+      <a:defRPr sz="1800" kern="1200">
         <a:solidFill>
           <a:schemeClr val="tx1"/>
         </a:solidFill>
@@ -39,8 +38,8 @@
         <a:cs typeface="+mn-cs"/>
       </a:defRPr>
     </a:lvl1pPr>
-    <a:lvl2pPr defTabSz="914400" eaLnBrk="1" hangingPunct="1" latinLnBrk="0" lvl="1" marL="457200" rtl="0" algn="l">
-      <a:defRPr kern="1200" sz="1800">
+    <a:lvl2pPr marL="457200" algn="l" defTabSz="457200" rtl="0" eaLnBrk="1" latinLnBrk="0" hangingPunct="1">
+      <a:defRPr sz="1800" kern="1200">
         <a:solidFill>
           <a:schemeClr val="tx1"/>
         </a:solidFill>
@@ -49,8 +48,8 @@
         <a:cs typeface="+mn-cs"/>
       </a:defRPr>
     </a:lvl2pPr>
-    <a:lvl3pPr defTabSz="914400" eaLnBrk="1" hangingPunct="1" latinLnBrk="0" lvl="2" marL="914400" rtl="0" algn="l">
-      <a:defRPr kern="1200" sz="1800">
+    <a:lvl3pPr marL="914400" algn="l" defTabSz="457200" rtl="0" eaLnBrk="1" latinLnBrk="0" hangingPunct="1">
+      <a:defRPr sz="1800" kern="1200">
         <a:solidFill>
           <a:schemeClr val="tx1"/>
         </a:solidFill>
@@ -59,8 +58,8 @@
         <a:cs typeface="+mn-cs"/>
       </a:defRPr>
     </a:lvl3pPr>
-    <a:lvl4pPr defTabSz="914400" eaLnBrk="1" hangingPunct="1" latinLnBrk="0" lvl="3" marL="1371600" rtl="0" algn="l">
-      <a:defRPr kern="1200" sz="1800">
+    <a:lvl4pPr marL="1371600" algn="l" defTabSz="457200" rtl="0" eaLnBrk="1" latinLnBrk="0" hangingPunct="1">
+      <a:defRPr sz="1800" kern="1200">
         <a:solidFill>
           <a:schemeClr val="tx1"/>
         </a:solidFill>
@@ -69,8 +68,8 @@
         <a:cs typeface="+mn-cs"/>
       </a:defRPr>
     </a:lvl4pPr>
-    <a:lvl5pPr defTabSz="914400" eaLnBrk="1" hangingPunct="1" latinLnBrk="0" lvl="4" marL="1828800" rtl="0" algn="l">
-      <a:defRPr kern="1200" sz="1800">
+    <a:lvl5pPr marL="1828800" algn="l" defTabSz="457200" rtl="0" eaLnBrk="1" latinLnBrk="0" hangingPunct="1">
+      <a:defRPr sz="1800" kern="1200">
         <a:solidFill>
           <a:schemeClr val="tx1"/>
         </a:solidFill>
@@ -79,8 +78,8 @@
         <a:cs typeface="+mn-cs"/>
       </a:defRPr>
     </a:lvl5pPr>
-    <a:lvl6pPr defTabSz="914400" eaLnBrk="1" hangingPunct="1" latinLnBrk="0" lvl="5" marL="2286000" rtl="0" algn="l">
-      <a:defRPr kern="1200" sz="1800">
+    <a:lvl6pPr marL="2286000" algn="l" defTabSz="457200" rtl="0" eaLnBrk="1" latinLnBrk="0" hangingPunct="1">
+      <a:defRPr sz="1800" kern="1200">
         <a:solidFill>
           <a:schemeClr val="tx1"/>
         </a:solidFill>
@@ -89,8 +88,8 @@
         <a:cs typeface="+mn-cs"/>
       </a:defRPr>
     </a:lvl6pPr>
-    <a:lvl7pPr defTabSz="914400" eaLnBrk="1" hangingPunct="1" latinLnBrk="0" lvl="6" marL="2743200" rtl="0" algn="l">
-      <a:defRPr kern="1200" sz="1800">
+    <a:lvl7pPr marL="2743200" algn="l" defTabSz="457200" rtl="0" eaLnBrk="1" latinLnBrk="0" hangingPunct="1">
+      <a:defRPr sz="1800" kern="1200">
         <a:solidFill>
           <a:schemeClr val="tx1"/>
         </a:solidFill>
@@ -99,8 +98,8 @@
         <a:cs typeface="+mn-cs"/>
       </a:defRPr>
     </a:lvl7pPr>
-    <a:lvl8pPr defTabSz="914400" eaLnBrk="1" hangingPunct="1" latinLnBrk="0" lvl="7" marL="3200400" rtl="0" algn="l">
-      <a:defRPr kern="1200" sz="1800">
+    <a:lvl8pPr marL="3200400" algn="l" defTabSz="457200" rtl="0" eaLnBrk="1" latinLnBrk="0" hangingPunct="1">
+      <a:defRPr sz="1800" kern="1200">
         <a:solidFill>
           <a:schemeClr val="tx1"/>
         </a:solidFill>
@@ -109,8 +108,8 @@
         <a:cs typeface="+mn-cs"/>
       </a:defRPr>
     </a:lvl8pPr>
-    <a:lvl9pPr defTabSz="914400" eaLnBrk="1" hangingPunct="1" latinLnBrk="0" lvl="8" marL="3657600" rtl="0" algn="l">
-      <a:defRPr kern="1200" sz="1800">
+    <a:lvl9pPr marL="3657600" algn="l" defTabSz="457200" rtl="0" eaLnBrk="1" latinLnBrk="0" hangingPunct="1">
+      <a:defRPr sz="1800" kern="1200">
         <a:solidFill>
           <a:schemeClr val="tx1"/>
         </a:solidFill>
@@ -123,12 +122,2469 @@
 </p:presentation>
 </file>
 
-<file path=ppt/presProps1.xml><?xml version="1.0" encoding="utf-8"?>
-<p:presentationPr xmlns:a="http://schemas.openxmlformats.org/drawingml/2006/main" xmlns:r="http://schemas.openxmlformats.org/officeDocument/2006/relationships" xmlns:mc="http://schemas.openxmlformats.org/markup-compatibility/2006" xmlns:mv="urn:schemas-microsoft-com:mac:vml" xmlns:p="http://schemas.openxmlformats.org/presentationml/2006/main" xmlns:c="http://schemas.openxmlformats.org/drawingml/2006/chart" xmlns:dgm="http://schemas.openxmlformats.org/drawingml/2006/diagram" xmlns:o="urn:schemas-microsoft-com:office:office" xmlns:v="urn:schemas-microsoft-com:vml" xmlns:pvml="urn:schemas-microsoft-com:office:powerpoint" xmlns:com="http://schemas.openxmlformats.org/drawingml/2006/compatibility" xmlns:p14="http://schemas.microsoft.com/office/powerpoint/2010/main" xmlns:p15="http://schemas.microsoft.com/office/powerpoint/2012/main" xmlns:ahyp="http://schemas.microsoft.com/office/drawing/2018/hyperlinkcolor"/>
+<file path=ppt/slideLayouts/slideLayout1.xml><?xml version="1.0" encoding="utf-8"?>
+<p:sldLayout xmlns:a="http://schemas.openxmlformats.org/drawingml/2006/main" xmlns:r="http://schemas.openxmlformats.org/officeDocument/2006/relationships" xmlns:p="http://schemas.openxmlformats.org/presentationml/2006/main" type="title" preserve="1">
+  <p:cSld name="Title Slide">
+    <p:spTree>
+      <p:nvGrpSpPr>
+        <p:cNvPr id="1" name=""/>
+        <p:cNvGrpSpPr/>
+        <p:nvPr/>
+      </p:nvGrpSpPr>
+      <p:grpSpPr>
+        <a:xfrm>
+          <a:off x="0" y="0"/>
+          <a:ext cx="0" cy="0"/>
+          <a:chOff x="0" y="0"/>
+          <a:chExt cx="0" cy="0"/>
+        </a:xfrm>
+      </p:grpSpPr>
+      <p:sp>
+        <p:nvSpPr>
+          <p:cNvPr id="2" name="Title 1"/>
+          <p:cNvSpPr>
+            <a:spLocks noGrp="1"/>
+          </p:cNvSpPr>
+          <p:nvPr>
+            <p:ph type="ctrTitle"/>
+          </p:nvPr>
+        </p:nvSpPr>
+        <p:spPr>
+          <a:xfrm>
+            <a:off x="685800" y="2130425"/>
+            <a:ext cx="7772400" cy="1470025"/>
+          </a:xfrm>
+        </p:spPr>
+        <p:txBody>
+          <a:bodyPr/>
+          <a:lstStyle/>
+          <a:p>
+            <a:r>
+              <a:rPr lang="en-US" smtClean="0"/>
+              <a:t>Click to edit Master title style</a:t>
+            </a:r>
+            <a:endParaRPr lang="en-US"/>
+          </a:p>
+        </p:txBody>
+      </p:sp>
+      <p:sp>
+        <p:nvSpPr>
+          <p:cNvPr id="3" name="Subtitle 2"/>
+          <p:cNvSpPr>
+            <a:spLocks noGrp="1"/>
+          </p:cNvSpPr>
+          <p:nvPr>
+            <p:ph type="subTitle" idx="1"/>
+          </p:nvPr>
+        </p:nvSpPr>
+        <p:spPr>
+          <a:xfrm>
+            <a:off x="1371600" y="3886200"/>
+            <a:ext cx="6400800" cy="1752600"/>
+          </a:xfrm>
+        </p:spPr>
+        <p:txBody>
+          <a:bodyPr/>
+          <a:lstStyle>
+            <a:lvl1pPr marL="0" indent="0" algn="ctr">
+              <a:buNone/>
+              <a:defRPr>
+                <a:solidFill>
+                  <a:schemeClr val="tx1">
+                    <a:tint val="75000"/>
+                  </a:schemeClr>
+                </a:solidFill>
+              </a:defRPr>
+            </a:lvl1pPr>
+            <a:lvl2pPr marL="457200" indent="0" algn="ctr">
+              <a:buNone/>
+              <a:defRPr>
+                <a:solidFill>
+                  <a:schemeClr val="tx1">
+                    <a:tint val="75000"/>
+                  </a:schemeClr>
+                </a:solidFill>
+              </a:defRPr>
+            </a:lvl2pPr>
+            <a:lvl3pPr marL="914400" indent="0" algn="ctr">
+              <a:buNone/>
+              <a:defRPr>
+                <a:solidFill>
+                  <a:schemeClr val="tx1">
+                    <a:tint val="75000"/>
+                  </a:schemeClr>
+                </a:solidFill>
+              </a:defRPr>
+            </a:lvl3pPr>
+            <a:lvl4pPr marL="1371600" indent="0" algn="ctr">
+              <a:buNone/>
+              <a:defRPr>
+                <a:solidFill>
+                  <a:schemeClr val="tx1">
+                    <a:tint val="75000"/>
+                  </a:schemeClr>
+                </a:solidFill>
+              </a:defRPr>
+            </a:lvl4pPr>
+            <a:lvl5pPr marL="1828800" indent="0" algn="ctr">
+              <a:buNone/>
+              <a:defRPr>
+                <a:solidFill>
+                  <a:schemeClr val="tx1">
+                    <a:tint val="75000"/>
+                  </a:schemeClr>
+                </a:solidFill>
+              </a:defRPr>
+            </a:lvl5pPr>
+            <a:lvl6pPr marL="2286000" indent="0" algn="ctr">
+              <a:buNone/>
+              <a:defRPr>
+                <a:solidFill>
+                  <a:schemeClr val="tx1">
+                    <a:tint val="75000"/>
+                  </a:schemeClr>
+                </a:solidFill>
+              </a:defRPr>
+            </a:lvl6pPr>
+            <a:lvl7pPr marL="2743200" indent="0" algn="ctr">
+              <a:buNone/>
+              <a:defRPr>
+                <a:solidFill>
+                  <a:schemeClr val="tx1">
+                    <a:tint val="75000"/>
+                  </a:schemeClr>
+                </a:solidFill>
+              </a:defRPr>
+            </a:lvl7pPr>
+            <a:lvl8pPr marL="3200400" indent="0" algn="ctr">
+              <a:buNone/>
+              <a:defRPr>
+                <a:solidFill>
+                  <a:schemeClr val="tx1">
+                    <a:tint val="75000"/>
+                  </a:schemeClr>
+                </a:solidFill>
+              </a:defRPr>
+            </a:lvl8pPr>
+            <a:lvl9pPr marL="3657600" indent="0" algn="ctr">
+              <a:buNone/>
+              <a:defRPr>
+                <a:solidFill>
+                  <a:schemeClr val="tx1">
+                    <a:tint val="75000"/>
+                  </a:schemeClr>
+                </a:solidFill>
+              </a:defRPr>
+            </a:lvl9pPr>
+          </a:lstStyle>
+          <a:p>
+            <a:r>
+              <a:rPr lang="en-US" smtClean="0"/>
+              <a:t>Click to edit Master subtitle style</a:t>
+            </a:r>
+            <a:endParaRPr lang="en-US"/>
+          </a:p>
+        </p:txBody>
+      </p:sp>
+      <p:sp>
+        <p:nvSpPr>
+          <p:cNvPr id="4" name="Date Placeholder 3"/>
+          <p:cNvSpPr>
+            <a:spLocks noGrp="1"/>
+          </p:cNvSpPr>
+          <p:nvPr>
+            <p:ph type="dt" sz="half" idx="10"/>
+          </p:nvPr>
+        </p:nvSpPr>
+        <p:spPr/>
+        <p:txBody>
+          <a:bodyPr/>
+          <a:lstStyle/>
+          <a:p>
+            <a:fld id="{5BCAD085-E8A6-8845-BD4E-CB4CCA059FC4}" type="datetimeFigureOut">
+              <a:rPr lang="en-US" smtClean="0"/>
+              <a:t>1/27/13</a:t>
+            </a:fld>
+            <a:endParaRPr lang="en-US"/>
+          </a:p>
+        </p:txBody>
+      </p:sp>
+      <p:sp>
+        <p:nvSpPr>
+          <p:cNvPr id="5" name="Footer Placeholder 4"/>
+          <p:cNvSpPr>
+            <a:spLocks noGrp="1"/>
+          </p:cNvSpPr>
+          <p:nvPr>
+            <p:ph type="ftr" sz="quarter" idx="11"/>
+          </p:nvPr>
+        </p:nvSpPr>
+        <p:spPr/>
+        <p:txBody>
+          <a:bodyPr/>
+          <a:lstStyle/>
+          <a:p>
+            <a:endParaRPr lang="en-US"/>
+          </a:p>
+        </p:txBody>
+      </p:sp>
+      <p:sp>
+        <p:nvSpPr>
+          <p:cNvPr id="6" name="Slide Number Placeholder 5"/>
+          <p:cNvSpPr>
+            <a:spLocks noGrp="1"/>
+          </p:cNvSpPr>
+          <p:nvPr>
+            <p:ph type="sldNum" sz="quarter" idx="12"/>
+          </p:nvPr>
+        </p:nvSpPr>
+        <p:spPr/>
+        <p:txBody>
+          <a:bodyPr/>
+          <a:lstStyle/>
+          <a:p>
+            <a:fld id="{C1FF6DA9-008F-8B48-92A6-B652298478BF}" type="slidenum">
+              <a:rPr lang="en-US" smtClean="0"/>
+              <a:t>‹#›</a:t>
+            </a:fld>
+            <a:endParaRPr lang="en-US"/>
+          </a:p>
+        </p:txBody>
+      </p:sp>
+    </p:spTree>
+    <p:extLst>
+      <p:ext uri="{BB962C8B-B14F-4D97-AF65-F5344CB8AC3E}">
+        <p14:creationId xmlns:p14="http://schemas.microsoft.com/office/powerpoint/2010/main" val="3168075583"/>
+      </p:ext>
+    </p:extLst>
+  </p:cSld>
+  <p:clrMapOvr>
+    <a:masterClrMapping/>
+  </p:clrMapOvr>
+</p:sldLayout>
 </file>
 
-<file path=ppt/notesMasters/notesMaster1.xml><?xml version="1.0" encoding="utf-8"?>
-<p:notesMaster xmlns:a="http://schemas.openxmlformats.org/drawingml/2006/main" xmlns:r="http://schemas.openxmlformats.org/officeDocument/2006/relationships" xmlns:p="http://schemas.openxmlformats.org/presentationml/2006/main">
+<file path=ppt/slideLayouts/slideLayout10.xml><?xml version="1.0" encoding="utf-8"?>
+<p:sldLayout xmlns:a="http://schemas.openxmlformats.org/drawingml/2006/main" xmlns:r="http://schemas.openxmlformats.org/officeDocument/2006/relationships" xmlns:p="http://schemas.openxmlformats.org/presentationml/2006/main" type="vertTx" preserve="1">
+  <p:cSld name="Title and Vertical Text">
+    <p:spTree>
+      <p:nvGrpSpPr>
+        <p:cNvPr id="1" name=""/>
+        <p:cNvGrpSpPr/>
+        <p:nvPr/>
+      </p:nvGrpSpPr>
+      <p:grpSpPr>
+        <a:xfrm>
+          <a:off x="0" y="0"/>
+          <a:ext cx="0" cy="0"/>
+          <a:chOff x="0" y="0"/>
+          <a:chExt cx="0" cy="0"/>
+        </a:xfrm>
+      </p:grpSpPr>
+      <p:sp>
+        <p:nvSpPr>
+          <p:cNvPr id="2" name="Title 1"/>
+          <p:cNvSpPr>
+            <a:spLocks noGrp="1"/>
+          </p:cNvSpPr>
+          <p:nvPr>
+            <p:ph type="title"/>
+          </p:nvPr>
+        </p:nvSpPr>
+        <p:spPr/>
+        <p:txBody>
+          <a:bodyPr/>
+          <a:lstStyle/>
+          <a:p>
+            <a:r>
+              <a:rPr lang="en-US" smtClean="0"/>
+              <a:t>Click to edit Master title style</a:t>
+            </a:r>
+            <a:endParaRPr lang="en-US"/>
+          </a:p>
+        </p:txBody>
+      </p:sp>
+      <p:sp>
+        <p:nvSpPr>
+          <p:cNvPr id="3" name="Vertical Text Placeholder 2"/>
+          <p:cNvSpPr>
+            <a:spLocks noGrp="1"/>
+          </p:cNvSpPr>
+          <p:nvPr>
+            <p:ph type="body" orient="vert" idx="1"/>
+          </p:nvPr>
+        </p:nvSpPr>
+        <p:spPr/>
+        <p:txBody>
+          <a:bodyPr vert="eaVert"/>
+          <a:lstStyle/>
+          <a:p>
+            <a:pPr lvl="0"/>
+            <a:r>
+              <a:rPr lang="en-US" smtClean="0"/>
+              <a:t>Click to edit Master text styles</a:t>
+            </a:r>
+          </a:p>
+          <a:p>
+            <a:pPr lvl="1"/>
+            <a:r>
+              <a:rPr lang="en-US" smtClean="0"/>
+              <a:t>Second level</a:t>
+            </a:r>
+          </a:p>
+          <a:p>
+            <a:pPr lvl="2"/>
+            <a:r>
+              <a:rPr lang="en-US" smtClean="0"/>
+              <a:t>Third level</a:t>
+            </a:r>
+          </a:p>
+          <a:p>
+            <a:pPr lvl="3"/>
+            <a:r>
+              <a:rPr lang="en-US" smtClean="0"/>
+              <a:t>Fourth level</a:t>
+            </a:r>
+          </a:p>
+          <a:p>
+            <a:pPr lvl="4"/>
+            <a:r>
+              <a:rPr lang="en-US" smtClean="0"/>
+              <a:t>Fifth level</a:t>
+            </a:r>
+            <a:endParaRPr lang="en-US"/>
+          </a:p>
+        </p:txBody>
+      </p:sp>
+      <p:sp>
+        <p:nvSpPr>
+          <p:cNvPr id="4" name="Date Placeholder 3"/>
+          <p:cNvSpPr>
+            <a:spLocks noGrp="1"/>
+          </p:cNvSpPr>
+          <p:nvPr>
+            <p:ph type="dt" sz="half" idx="10"/>
+          </p:nvPr>
+        </p:nvSpPr>
+        <p:spPr/>
+        <p:txBody>
+          <a:bodyPr/>
+          <a:lstStyle/>
+          <a:p>
+            <a:fld id="{5BCAD085-E8A6-8845-BD4E-CB4CCA059FC4}" type="datetimeFigureOut">
+              <a:rPr lang="en-US" smtClean="0"/>
+              <a:t>1/27/13</a:t>
+            </a:fld>
+            <a:endParaRPr lang="en-US"/>
+          </a:p>
+        </p:txBody>
+      </p:sp>
+      <p:sp>
+        <p:nvSpPr>
+          <p:cNvPr id="5" name="Footer Placeholder 4"/>
+          <p:cNvSpPr>
+            <a:spLocks noGrp="1"/>
+          </p:cNvSpPr>
+          <p:nvPr>
+            <p:ph type="ftr" sz="quarter" idx="11"/>
+          </p:nvPr>
+        </p:nvSpPr>
+        <p:spPr/>
+        <p:txBody>
+          <a:bodyPr/>
+          <a:lstStyle/>
+          <a:p>
+            <a:endParaRPr lang="en-US"/>
+          </a:p>
+        </p:txBody>
+      </p:sp>
+      <p:sp>
+        <p:nvSpPr>
+          <p:cNvPr id="6" name="Slide Number Placeholder 5"/>
+          <p:cNvSpPr>
+            <a:spLocks noGrp="1"/>
+          </p:cNvSpPr>
+          <p:nvPr>
+            <p:ph type="sldNum" sz="quarter" idx="12"/>
+          </p:nvPr>
+        </p:nvSpPr>
+        <p:spPr/>
+        <p:txBody>
+          <a:bodyPr/>
+          <a:lstStyle/>
+          <a:p>
+            <a:fld id="{C1FF6DA9-008F-8B48-92A6-B652298478BF}" type="slidenum">
+              <a:rPr lang="en-US" smtClean="0"/>
+              <a:t>‹#›</a:t>
+            </a:fld>
+            <a:endParaRPr lang="en-US"/>
+          </a:p>
+        </p:txBody>
+      </p:sp>
+    </p:spTree>
+    <p:extLst>
+      <p:ext uri="{BB962C8B-B14F-4D97-AF65-F5344CB8AC3E}">
+        <p14:creationId xmlns:p14="http://schemas.microsoft.com/office/powerpoint/2010/main" val="2910927964"/>
+      </p:ext>
+    </p:extLst>
+  </p:cSld>
+  <p:clrMapOvr>
+    <a:masterClrMapping/>
+  </p:clrMapOvr>
+</p:sldLayout>
+</file>
+
+<file path=ppt/slideLayouts/slideLayout11.xml><?xml version="1.0" encoding="utf-8"?>
+<p:sldLayout xmlns:a="http://schemas.openxmlformats.org/drawingml/2006/main" xmlns:r="http://schemas.openxmlformats.org/officeDocument/2006/relationships" xmlns:p="http://schemas.openxmlformats.org/presentationml/2006/main" type="vertTitleAndTx" preserve="1">
+  <p:cSld name="Vertical Title and Text">
+    <p:spTree>
+      <p:nvGrpSpPr>
+        <p:cNvPr id="1" name=""/>
+        <p:cNvGrpSpPr/>
+        <p:nvPr/>
+      </p:nvGrpSpPr>
+      <p:grpSpPr>
+        <a:xfrm>
+          <a:off x="0" y="0"/>
+          <a:ext cx="0" cy="0"/>
+          <a:chOff x="0" y="0"/>
+          <a:chExt cx="0" cy="0"/>
+        </a:xfrm>
+      </p:grpSpPr>
+      <p:sp>
+        <p:nvSpPr>
+          <p:cNvPr id="2" name="Vertical Title 1"/>
+          <p:cNvSpPr>
+            <a:spLocks noGrp="1"/>
+          </p:cNvSpPr>
+          <p:nvPr>
+            <p:ph type="title" orient="vert"/>
+          </p:nvPr>
+        </p:nvSpPr>
+        <p:spPr>
+          <a:xfrm>
+            <a:off x="6629400" y="274638"/>
+            <a:ext cx="2057400" cy="5851525"/>
+          </a:xfrm>
+        </p:spPr>
+        <p:txBody>
+          <a:bodyPr vert="eaVert"/>
+          <a:lstStyle/>
+          <a:p>
+            <a:r>
+              <a:rPr lang="en-US" smtClean="0"/>
+              <a:t>Click to edit Master title style</a:t>
+            </a:r>
+            <a:endParaRPr lang="en-US"/>
+          </a:p>
+        </p:txBody>
+      </p:sp>
+      <p:sp>
+        <p:nvSpPr>
+          <p:cNvPr id="3" name="Vertical Text Placeholder 2"/>
+          <p:cNvSpPr>
+            <a:spLocks noGrp="1"/>
+          </p:cNvSpPr>
+          <p:nvPr>
+            <p:ph type="body" orient="vert" idx="1"/>
+          </p:nvPr>
+        </p:nvSpPr>
+        <p:spPr>
+          <a:xfrm>
+            <a:off x="457200" y="274638"/>
+            <a:ext cx="6019800" cy="5851525"/>
+          </a:xfrm>
+        </p:spPr>
+        <p:txBody>
+          <a:bodyPr vert="eaVert"/>
+          <a:lstStyle/>
+          <a:p>
+            <a:pPr lvl="0"/>
+            <a:r>
+              <a:rPr lang="en-US" smtClean="0"/>
+              <a:t>Click to edit Master text styles</a:t>
+            </a:r>
+          </a:p>
+          <a:p>
+            <a:pPr lvl="1"/>
+            <a:r>
+              <a:rPr lang="en-US" smtClean="0"/>
+              <a:t>Second level</a:t>
+            </a:r>
+          </a:p>
+          <a:p>
+            <a:pPr lvl="2"/>
+            <a:r>
+              <a:rPr lang="en-US" smtClean="0"/>
+              <a:t>Third level</a:t>
+            </a:r>
+          </a:p>
+          <a:p>
+            <a:pPr lvl="3"/>
+            <a:r>
+              <a:rPr lang="en-US" smtClean="0"/>
+              <a:t>Fourth level</a:t>
+            </a:r>
+          </a:p>
+          <a:p>
+            <a:pPr lvl="4"/>
+            <a:r>
+              <a:rPr lang="en-US" smtClean="0"/>
+              <a:t>Fifth level</a:t>
+            </a:r>
+            <a:endParaRPr lang="en-US"/>
+          </a:p>
+        </p:txBody>
+      </p:sp>
+      <p:sp>
+        <p:nvSpPr>
+          <p:cNvPr id="4" name="Date Placeholder 3"/>
+          <p:cNvSpPr>
+            <a:spLocks noGrp="1"/>
+          </p:cNvSpPr>
+          <p:nvPr>
+            <p:ph type="dt" sz="half" idx="10"/>
+          </p:nvPr>
+        </p:nvSpPr>
+        <p:spPr/>
+        <p:txBody>
+          <a:bodyPr/>
+          <a:lstStyle/>
+          <a:p>
+            <a:fld id="{5BCAD085-E8A6-8845-BD4E-CB4CCA059FC4}" type="datetimeFigureOut">
+              <a:rPr lang="en-US" smtClean="0"/>
+              <a:t>1/27/13</a:t>
+            </a:fld>
+            <a:endParaRPr lang="en-US"/>
+          </a:p>
+        </p:txBody>
+      </p:sp>
+      <p:sp>
+        <p:nvSpPr>
+          <p:cNvPr id="5" name="Footer Placeholder 4"/>
+          <p:cNvSpPr>
+            <a:spLocks noGrp="1"/>
+          </p:cNvSpPr>
+          <p:nvPr>
+            <p:ph type="ftr" sz="quarter" idx="11"/>
+          </p:nvPr>
+        </p:nvSpPr>
+        <p:spPr/>
+        <p:txBody>
+          <a:bodyPr/>
+          <a:lstStyle/>
+          <a:p>
+            <a:endParaRPr lang="en-US"/>
+          </a:p>
+        </p:txBody>
+      </p:sp>
+      <p:sp>
+        <p:nvSpPr>
+          <p:cNvPr id="6" name="Slide Number Placeholder 5"/>
+          <p:cNvSpPr>
+            <a:spLocks noGrp="1"/>
+          </p:cNvSpPr>
+          <p:nvPr>
+            <p:ph type="sldNum" sz="quarter" idx="12"/>
+          </p:nvPr>
+        </p:nvSpPr>
+        <p:spPr/>
+        <p:txBody>
+          <a:bodyPr/>
+          <a:lstStyle/>
+          <a:p>
+            <a:fld id="{C1FF6DA9-008F-8B48-92A6-B652298478BF}" type="slidenum">
+              <a:rPr lang="en-US" smtClean="0"/>
+              <a:t>‹#›</a:t>
+            </a:fld>
+            <a:endParaRPr lang="en-US"/>
+          </a:p>
+        </p:txBody>
+      </p:sp>
+    </p:spTree>
+    <p:extLst>
+      <p:ext uri="{BB962C8B-B14F-4D97-AF65-F5344CB8AC3E}">
+        <p14:creationId xmlns:p14="http://schemas.microsoft.com/office/powerpoint/2010/main" val="3612223792"/>
+      </p:ext>
+    </p:extLst>
+  </p:cSld>
+  <p:clrMapOvr>
+    <a:masterClrMapping/>
+  </p:clrMapOvr>
+</p:sldLayout>
+</file>
+
+<file path=ppt/slideLayouts/slideLayout2.xml><?xml version="1.0" encoding="utf-8"?>
+<p:sldLayout xmlns:a="http://schemas.openxmlformats.org/drawingml/2006/main" xmlns:r="http://schemas.openxmlformats.org/officeDocument/2006/relationships" xmlns:p="http://schemas.openxmlformats.org/presentationml/2006/main" type="obj" preserve="1">
+  <p:cSld name="Title and Content">
+    <p:spTree>
+      <p:nvGrpSpPr>
+        <p:cNvPr id="1" name=""/>
+        <p:cNvGrpSpPr/>
+        <p:nvPr/>
+      </p:nvGrpSpPr>
+      <p:grpSpPr>
+        <a:xfrm>
+          <a:off x="0" y="0"/>
+          <a:ext cx="0" cy="0"/>
+          <a:chOff x="0" y="0"/>
+          <a:chExt cx="0" cy="0"/>
+        </a:xfrm>
+      </p:grpSpPr>
+      <p:sp>
+        <p:nvSpPr>
+          <p:cNvPr id="2" name="Title 1"/>
+          <p:cNvSpPr>
+            <a:spLocks noGrp="1"/>
+          </p:cNvSpPr>
+          <p:nvPr>
+            <p:ph type="title"/>
+          </p:nvPr>
+        </p:nvSpPr>
+        <p:spPr/>
+        <p:txBody>
+          <a:bodyPr/>
+          <a:lstStyle/>
+          <a:p>
+            <a:r>
+              <a:rPr lang="en-US" smtClean="0"/>
+              <a:t>Click to edit Master title style</a:t>
+            </a:r>
+            <a:endParaRPr lang="en-US"/>
+          </a:p>
+        </p:txBody>
+      </p:sp>
+      <p:sp>
+        <p:nvSpPr>
+          <p:cNvPr id="3" name="Content Placeholder 2"/>
+          <p:cNvSpPr>
+            <a:spLocks noGrp="1"/>
+          </p:cNvSpPr>
+          <p:nvPr>
+            <p:ph idx="1"/>
+          </p:nvPr>
+        </p:nvSpPr>
+        <p:spPr/>
+        <p:txBody>
+          <a:bodyPr/>
+          <a:lstStyle/>
+          <a:p>
+            <a:pPr lvl="0"/>
+            <a:r>
+              <a:rPr lang="en-US" smtClean="0"/>
+              <a:t>Click to edit Master text styles</a:t>
+            </a:r>
+          </a:p>
+          <a:p>
+            <a:pPr lvl="1"/>
+            <a:r>
+              <a:rPr lang="en-US" smtClean="0"/>
+              <a:t>Second level</a:t>
+            </a:r>
+          </a:p>
+          <a:p>
+            <a:pPr lvl="2"/>
+            <a:r>
+              <a:rPr lang="en-US" smtClean="0"/>
+              <a:t>Third level</a:t>
+            </a:r>
+          </a:p>
+          <a:p>
+            <a:pPr lvl="3"/>
+            <a:r>
+              <a:rPr lang="en-US" smtClean="0"/>
+              <a:t>Fourth level</a:t>
+            </a:r>
+          </a:p>
+          <a:p>
+            <a:pPr lvl="4"/>
+            <a:r>
+              <a:rPr lang="en-US" smtClean="0"/>
+              <a:t>Fifth level</a:t>
+            </a:r>
+            <a:endParaRPr lang="en-US"/>
+          </a:p>
+        </p:txBody>
+      </p:sp>
+      <p:sp>
+        <p:nvSpPr>
+          <p:cNvPr id="4" name="Date Placeholder 3"/>
+          <p:cNvSpPr>
+            <a:spLocks noGrp="1"/>
+          </p:cNvSpPr>
+          <p:nvPr>
+            <p:ph type="dt" sz="half" idx="10"/>
+          </p:nvPr>
+        </p:nvSpPr>
+        <p:spPr/>
+        <p:txBody>
+          <a:bodyPr/>
+          <a:lstStyle/>
+          <a:p>
+            <a:fld id="{5BCAD085-E8A6-8845-BD4E-CB4CCA059FC4}" type="datetimeFigureOut">
+              <a:rPr lang="en-US" smtClean="0"/>
+              <a:t>1/27/13</a:t>
+            </a:fld>
+            <a:endParaRPr lang="en-US"/>
+          </a:p>
+        </p:txBody>
+      </p:sp>
+      <p:sp>
+        <p:nvSpPr>
+          <p:cNvPr id="5" name="Footer Placeholder 4"/>
+          <p:cNvSpPr>
+            <a:spLocks noGrp="1"/>
+          </p:cNvSpPr>
+          <p:nvPr>
+            <p:ph type="ftr" sz="quarter" idx="11"/>
+          </p:nvPr>
+        </p:nvSpPr>
+        <p:spPr/>
+        <p:txBody>
+          <a:bodyPr/>
+          <a:lstStyle/>
+          <a:p>
+            <a:endParaRPr lang="en-US"/>
+          </a:p>
+        </p:txBody>
+      </p:sp>
+      <p:sp>
+        <p:nvSpPr>
+          <p:cNvPr id="6" name="Slide Number Placeholder 5"/>
+          <p:cNvSpPr>
+            <a:spLocks noGrp="1"/>
+          </p:cNvSpPr>
+          <p:nvPr>
+            <p:ph type="sldNum" sz="quarter" idx="12"/>
+          </p:nvPr>
+        </p:nvSpPr>
+        <p:spPr/>
+        <p:txBody>
+          <a:bodyPr/>
+          <a:lstStyle/>
+          <a:p>
+            <a:fld id="{C1FF6DA9-008F-8B48-92A6-B652298478BF}" type="slidenum">
+              <a:rPr lang="en-US" smtClean="0"/>
+              <a:t>‹#›</a:t>
+            </a:fld>
+            <a:endParaRPr lang="en-US"/>
+          </a:p>
+        </p:txBody>
+      </p:sp>
+    </p:spTree>
+    <p:extLst>
+      <p:ext uri="{BB962C8B-B14F-4D97-AF65-F5344CB8AC3E}">
+        <p14:creationId xmlns:p14="http://schemas.microsoft.com/office/powerpoint/2010/main" val="2614314258"/>
+      </p:ext>
+    </p:extLst>
+  </p:cSld>
+  <p:clrMapOvr>
+    <a:masterClrMapping/>
+  </p:clrMapOvr>
+</p:sldLayout>
+</file>
+
+<file path=ppt/slideLayouts/slideLayout3.xml><?xml version="1.0" encoding="utf-8"?>
+<p:sldLayout xmlns:a="http://schemas.openxmlformats.org/drawingml/2006/main" xmlns:r="http://schemas.openxmlformats.org/officeDocument/2006/relationships" xmlns:p="http://schemas.openxmlformats.org/presentationml/2006/main" type="secHead" preserve="1">
+  <p:cSld name="Section Header">
+    <p:spTree>
+      <p:nvGrpSpPr>
+        <p:cNvPr id="1" name=""/>
+        <p:cNvGrpSpPr/>
+        <p:nvPr/>
+      </p:nvGrpSpPr>
+      <p:grpSpPr>
+        <a:xfrm>
+          <a:off x="0" y="0"/>
+          <a:ext cx="0" cy="0"/>
+          <a:chOff x="0" y="0"/>
+          <a:chExt cx="0" cy="0"/>
+        </a:xfrm>
+      </p:grpSpPr>
+      <p:sp>
+        <p:nvSpPr>
+          <p:cNvPr id="2" name="Title 1"/>
+          <p:cNvSpPr>
+            <a:spLocks noGrp="1"/>
+          </p:cNvSpPr>
+          <p:nvPr>
+            <p:ph type="title"/>
+          </p:nvPr>
+        </p:nvSpPr>
+        <p:spPr>
+          <a:xfrm>
+            <a:off x="722313" y="4406900"/>
+            <a:ext cx="7772400" cy="1362075"/>
+          </a:xfrm>
+        </p:spPr>
+        <p:txBody>
+          <a:bodyPr anchor="t"/>
+          <a:lstStyle>
+            <a:lvl1pPr algn="l">
+              <a:defRPr sz="4000" b="1" cap="all"/>
+            </a:lvl1pPr>
+          </a:lstStyle>
+          <a:p>
+            <a:r>
+              <a:rPr lang="en-US" smtClean="0"/>
+              <a:t>Click to edit Master title style</a:t>
+            </a:r>
+            <a:endParaRPr lang="en-US"/>
+          </a:p>
+        </p:txBody>
+      </p:sp>
+      <p:sp>
+        <p:nvSpPr>
+          <p:cNvPr id="3" name="Text Placeholder 2"/>
+          <p:cNvSpPr>
+            <a:spLocks noGrp="1"/>
+          </p:cNvSpPr>
+          <p:nvPr>
+            <p:ph type="body" idx="1"/>
+          </p:nvPr>
+        </p:nvSpPr>
+        <p:spPr>
+          <a:xfrm>
+            <a:off x="722313" y="2906713"/>
+            <a:ext cx="7772400" cy="1500187"/>
+          </a:xfrm>
+        </p:spPr>
+        <p:txBody>
+          <a:bodyPr anchor="b"/>
+          <a:lstStyle>
+            <a:lvl1pPr marL="0" indent="0">
+              <a:buNone/>
+              <a:defRPr sz="2000">
+                <a:solidFill>
+                  <a:schemeClr val="tx1">
+                    <a:tint val="75000"/>
+                  </a:schemeClr>
+                </a:solidFill>
+              </a:defRPr>
+            </a:lvl1pPr>
+            <a:lvl2pPr marL="457200" indent="0">
+              <a:buNone/>
+              <a:defRPr sz="1800">
+                <a:solidFill>
+                  <a:schemeClr val="tx1">
+                    <a:tint val="75000"/>
+                  </a:schemeClr>
+                </a:solidFill>
+              </a:defRPr>
+            </a:lvl2pPr>
+            <a:lvl3pPr marL="914400" indent="0">
+              <a:buNone/>
+              <a:defRPr sz="1600">
+                <a:solidFill>
+                  <a:schemeClr val="tx1">
+                    <a:tint val="75000"/>
+                  </a:schemeClr>
+                </a:solidFill>
+              </a:defRPr>
+            </a:lvl3pPr>
+            <a:lvl4pPr marL="1371600" indent="0">
+              <a:buNone/>
+              <a:defRPr sz="1400">
+                <a:solidFill>
+                  <a:schemeClr val="tx1">
+                    <a:tint val="75000"/>
+                  </a:schemeClr>
+                </a:solidFill>
+              </a:defRPr>
+            </a:lvl4pPr>
+            <a:lvl5pPr marL="1828800" indent="0">
+              <a:buNone/>
+              <a:defRPr sz="1400">
+                <a:solidFill>
+                  <a:schemeClr val="tx1">
+                    <a:tint val="75000"/>
+                  </a:schemeClr>
+                </a:solidFill>
+              </a:defRPr>
+            </a:lvl5pPr>
+            <a:lvl6pPr marL="2286000" indent="0">
+              <a:buNone/>
+              <a:defRPr sz="1400">
+                <a:solidFill>
+                  <a:schemeClr val="tx1">
+                    <a:tint val="75000"/>
+                  </a:schemeClr>
+                </a:solidFill>
+              </a:defRPr>
+            </a:lvl6pPr>
+            <a:lvl7pPr marL="2743200" indent="0">
+              <a:buNone/>
+              <a:defRPr sz="1400">
+                <a:solidFill>
+                  <a:schemeClr val="tx1">
+                    <a:tint val="75000"/>
+                  </a:schemeClr>
+                </a:solidFill>
+              </a:defRPr>
+            </a:lvl7pPr>
+            <a:lvl8pPr marL="3200400" indent="0">
+              <a:buNone/>
+              <a:defRPr sz="1400">
+                <a:solidFill>
+                  <a:schemeClr val="tx1">
+                    <a:tint val="75000"/>
+                  </a:schemeClr>
+                </a:solidFill>
+              </a:defRPr>
+            </a:lvl8pPr>
+            <a:lvl9pPr marL="3657600" indent="0">
+              <a:buNone/>
+              <a:defRPr sz="1400">
+                <a:solidFill>
+                  <a:schemeClr val="tx1">
+                    <a:tint val="75000"/>
+                  </a:schemeClr>
+                </a:solidFill>
+              </a:defRPr>
+            </a:lvl9pPr>
+          </a:lstStyle>
+          <a:p>
+            <a:pPr lvl="0"/>
+            <a:r>
+              <a:rPr lang="en-US" smtClean="0"/>
+              <a:t>Click to edit Master text styles</a:t>
+            </a:r>
+          </a:p>
+        </p:txBody>
+      </p:sp>
+      <p:sp>
+        <p:nvSpPr>
+          <p:cNvPr id="4" name="Date Placeholder 3"/>
+          <p:cNvSpPr>
+            <a:spLocks noGrp="1"/>
+          </p:cNvSpPr>
+          <p:nvPr>
+            <p:ph type="dt" sz="half" idx="10"/>
+          </p:nvPr>
+        </p:nvSpPr>
+        <p:spPr/>
+        <p:txBody>
+          <a:bodyPr/>
+          <a:lstStyle/>
+          <a:p>
+            <a:fld id="{5BCAD085-E8A6-8845-BD4E-CB4CCA059FC4}" type="datetimeFigureOut">
+              <a:rPr lang="en-US" smtClean="0"/>
+              <a:t>1/27/13</a:t>
+            </a:fld>
+            <a:endParaRPr lang="en-US"/>
+          </a:p>
+        </p:txBody>
+      </p:sp>
+      <p:sp>
+        <p:nvSpPr>
+          <p:cNvPr id="5" name="Footer Placeholder 4"/>
+          <p:cNvSpPr>
+            <a:spLocks noGrp="1"/>
+          </p:cNvSpPr>
+          <p:nvPr>
+            <p:ph type="ftr" sz="quarter" idx="11"/>
+          </p:nvPr>
+        </p:nvSpPr>
+        <p:spPr/>
+        <p:txBody>
+          <a:bodyPr/>
+          <a:lstStyle/>
+          <a:p>
+            <a:endParaRPr lang="en-US"/>
+          </a:p>
+        </p:txBody>
+      </p:sp>
+      <p:sp>
+        <p:nvSpPr>
+          <p:cNvPr id="6" name="Slide Number Placeholder 5"/>
+          <p:cNvSpPr>
+            <a:spLocks noGrp="1"/>
+          </p:cNvSpPr>
+          <p:nvPr>
+            <p:ph type="sldNum" sz="quarter" idx="12"/>
+          </p:nvPr>
+        </p:nvSpPr>
+        <p:spPr/>
+        <p:txBody>
+          <a:bodyPr/>
+          <a:lstStyle/>
+          <a:p>
+            <a:fld id="{C1FF6DA9-008F-8B48-92A6-B652298478BF}" type="slidenum">
+              <a:rPr lang="en-US" smtClean="0"/>
+              <a:t>‹#›</a:t>
+            </a:fld>
+            <a:endParaRPr lang="en-US"/>
+          </a:p>
+        </p:txBody>
+      </p:sp>
+    </p:spTree>
+    <p:extLst>
+      <p:ext uri="{BB962C8B-B14F-4D97-AF65-F5344CB8AC3E}">
+        <p14:creationId xmlns:p14="http://schemas.microsoft.com/office/powerpoint/2010/main" val="960648375"/>
+      </p:ext>
+    </p:extLst>
+  </p:cSld>
+  <p:clrMapOvr>
+    <a:masterClrMapping/>
+  </p:clrMapOvr>
+</p:sldLayout>
+</file>
+
+<file path=ppt/slideLayouts/slideLayout4.xml><?xml version="1.0" encoding="utf-8"?>
+<p:sldLayout xmlns:a="http://schemas.openxmlformats.org/drawingml/2006/main" xmlns:r="http://schemas.openxmlformats.org/officeDocument/2006/relationships" xmlns:p="http://schemas.openxmlformats.org/presentationml/2006/main" type="twoObj" preserve="1">
+  <p:cSld name="Two Content">
+    <p:spTree>
+      <p:nvGrpSpPr>
+        <p:cNvPr id="1" name=""/>
+        <p:cNvGrpSpPr/>
+        <p:nvPr/>
+      </p:nvGrpSpPr>
+      <p:grpSpPr>
+        <a:xfrm>
+          <a:off x="0" y="0"/>
+          <a:ext cx="0" cy="0"/>
+          <a:chOff x="0" y="0"/>
+          <a:chExt cx="0" cy="0"/>
+        </a:xfrm>
+      </p:grpSpPr>
+      <p:sp>
+        <p:nvSpPr>
+          <p:cNvPr id="2" name="Title 1"/>
+          <p:cNvSpPr>
+            <a:spLocks noGrp="1"/>
+          </p:cNvSpPr>
+          <p:nvPr>
+            <p:ph type="title"/>
+          </p:nvPr>
+        </p:nvSpPr>
+        <p:spPr/>
+        <p:txBody>
+          <a:bodyPr/>
+          <a:lstStyle/>
+          <a:p>
+            <a:r>
+              <a:rPr lang="en-US" smtClean="0"/>
+              <a:t>Click to edit Master title style</a:t>
+            </a:r>
+            <a:endParaRPr lang="en-US"/>
+          </a:p>
+        </p:txBody>
+      </p:sp>
+      <p:sp>
+        <p:nvSpPr>
+          <p:cNvPr id="3" name="Content Placeholder 2"/>
+          <p:cNvSpPr>
+            <a:spLocks noGrp="1"/>
+          </p:cNvSpPr>
+          <p:nvPr>
+            <p:ph sz="half" idx="1"/>
+          </p:nvPr>
+        </p:nvSpPr>
+        <p:spPr>
+          <a:xfrm>
+            <a:off x="457200" y="1600200"/>
+            <a:ext cx="4038600" cy="4525963"/>
+          </a:xfrm>
+        </p:spPr>
+        <p:txBody>
+          <a:bodyPr/>
+          <a:lstStyle>
+            <a:lvl1pPr>
+              <a:defRPr sz="2800"/>
+            </a:lvl1pPr>
+            <a:lvl2pPr>
+              <a:defRPr sz="2400"/>
+            </a:lvl2pPr>
+            <a:lvl3pPr>
+              <a:defRPr sz="2000"/>
+            </a:lvl3pPr>
+            <a:lvl4pPr>
+              <a:defRPr sz="1800"/>
+            </a:lvl4pPr>
+            <a:lvl5pPr>
+              <a:defRPr sz="1800"/>
+            </a:lvl5pPr>
+            <a:lvl6pPr>
+              <a:defRPr sz="1800"/>
+            </a:lvl6pPr>
+            <a:lvl7pPr>
+              <a:defRPr sz="1800"/>
+            </a:lvl7pPr>
+            <a:lvl8pPr>
+              <a:defRPr sz="1800"/>
+            </a:lvl8pPr>
+            <a:lvl9pPr>
+              <a:defRPr sz="1800"/>
+            </a:lvl9pPr>
+          </a:lstStyle>
+          <a:p>
+            <a:pPr lvl="0"/>
+            <a:r>
+              <a:rPr lang="en-US" smtClean="0"/>
+              <a:t>Click to edit Master text styles</a:t>
+            </a:r>
+          </a:p>
+          <a:p>
+            <a:pPr lvl="1"/>
+            <a:r>
+              <a:rPr lang="en-US" smtClean="0"/>
+              <a:t>Second level</a:t>
+            </a:r>
+          </a:p>
+          <a:p>
+            <a:pPr lvl="2"/>
+            <a:r>
+              <a:rPr lang="en-US" smtClean="0"/>
+              <a:t>Third level</a:t>
+            </a:r>
+          </a:p>
+          <a:p>
+            <a:pPr lvl="3"/>
+            <a:r>
+              <a:rPr lang="en-US" smtClean="0"/>
+              <a:t>Fourth level</a:t>
+            </a:r>
+          </a:p>
+          <a:p>
+            <a:pPr lvl="4"/>
+            <a:r>
+              <a:rPr lang="en-US" smtClean="0"/>
+              <a:t>Fifth level</a:t>
+            </a:r>
+            <a:endParaRPr lang="en-US"/>
+          </a:p>
+        </p:txBody>
+      </p:sp>
+      <p:sp>
+        <p:nvSpPr>
+          <p:cNvPr id="4" name="Content Placeholder 3"/>
+          <p:cNvSpPr>
+            <a:spLocks noGrp="1"/>
+          </p:cNvSpPr>
+          <p:nvPr>
+            <p:ph sz="half" idx="2"/>
+          </p:nvPr>
+        </p:nvSpPr>
+        <p:spPr>
+          <a:xfrm>
+            <a:off x="4648200" y="1600200"/>
+            <a:ext cx="4038600" cy="4525963"/>
+          </a:xfrm>
+        </p:spPr>
+        <p:txBody>
+          <a:bodyPr/>
+          <a:lstStyle>
+            <a:lvl1pPr>
+              <a:defRPr sz="2800"/>
+            </a:lvl1pPr>
+            <a:lvl2pPr>
+              <a:defRPr sz="2400"/>
+            </a:lvl2pPr>
+            <a:lvl3pPr>
+              <a:defRPr sz="2000"/>
+            </a:lvl3pPr>
+            <a:lvl4pPr>
+              <a:defRPr sz="1800"/>
+            </a:lvl4pPr>
+            <a:lvl5pPr>
+              <a:defRPr sz="1800"/>
+            </a:lvl5pPr>
+            <a:lvl6pPr>
+              <a:defRPr sz="1800"/>
+            </a:lvl6pPr>
+            <a:lvl7pPr>
+              <a:defRPr sz="1800"/>
+            </a:lvl7pPr>
+            <a:lvl8pPr>
+              <a:defRPr sz="1800"/>
+            </a:lvl8pPr>
+            <a:lvl9pPr>
+              <a:defRPr sz="1800"/>
+            </a:lvl9pPr>
+          </a:lstStyle>
+          <a:p>
+            <a:pPr lvl="0"/>
+            <a:r>
+              <a:rPr lang="en-US" smtClean="0"/>
+              <a:t>Click to edit Master text styles</a:t>
+            </a:r>
+          </a:p>
+          <a:p>
+            <a:pPr lvl="1"/>
+            <a:r>
+              <a:rPr lang="en-US" smtClean="0"/>
+              <a:t>Second level</a:t>
+            </a:r>
+          </a:p>
+          <a:p>
+            <a:pPr lvl="2"/>
+            <a:r>
+              <a:rPr lang="en-US" smtClean="0"/>
+              <a:t>Third level</a:t>
+            </a:r>
+          </a:p>
+          <a:p>
+            <a:pPr lvl="3"/>
+            <a:r>
+              <a:rPr lang="en-US" smtClean="0"/>
+              <a:t>Fourth level</a:t>
+            </a:r>
+          </a:p>
+          <a:p>
+            <a:pPr lvl="4"/>
+            <a:r>
+              <a:rPr lang="en-US" smtClean="0"/>
+              <a:t>Fifth level</a:t>
+            </a:r>
+            <a:endParaRPr lang="en-US"/>
+          </a:p>
+        </p:txBody>
+      </p:sp>
+      <p:sp>
+        <p:nvSpPr>
+          <p:cNvPr id="5" name="Date Placeholder 4"/>
+          <p:cNvSpPr>
+            <a:spLocks noGrp="1"/>
+          </p:cNvSpPr>
+          <p:nvPr>
+            <p:ph type="dt" sz="half" idx="10"/>
+          </p:nvPr>
+        </p:nvSpPr>
+        <p:spPr/>
+        <p:txBody>
+          <a:bodyPr/>
+          <a:lstStyle/>
+          <a:p>
+            <a:fld id="{5BCAD085-E8A6-8845-BD4E-CB4CCA059FC4}" type="datetimeFigureOut">
+              <a:rPr lang="en-US" smtClean="0"/>
+              <a:t>1/27/13</a:t>
+            </a:fld>
+            <a:endParaRPr lang="en-US"/>
+          </a:p>
+        </p:txBody>
+      </p:sp>
+      <p:sp>
+        <p:nvSpPr>
+          <p:cNvPr id="6" name="Footer Placeholder 5"/>
+          <p:cNvSpPr>
+            <a:spLocks noGrp="1"/>
+          </p:cNvSpPr>
+          <p:nvPr>
+            <p:ph type="ftr" sz="quarter" idx="11"/>
+          </p:nvPr>
+        </p:nvSpPr>
+        <p:spPr/>
+        <p:txBody>
+          <a:bodyPr/>
+          <a:lstStyle/>
+          <a:p>
+            <a:endParaRPr lang="en-US"/>
+          </a:p>
+        </p:txBody>
+      </p:sp>
+      <p:sp>
+        <p:nvSpPr>
+          <p:cNvPr id="7" name="Slide Number Placeholder 6"/>
+          <p:cNvSpPr>
+            <a:spLocks noGrp="1"/>
+          </p:cNvSpPr>
+          <p:nvPr>
+            <p:ph type="sldNum" sz="quarter" idx="12"/>
+          </p:nvPr>
+        </p:nvSpPr>
+        <p:spPr/>
+        <p:txBody>
+          <a:bodyPr/>
+          <a:lstStyle/>
+          <a:p>
+            <a:fld id="{C1FF6DA9-008F-8B48-92A6-B652298478BF}" type="slidenum">
+              <a:rPr lang="en-US" smtClean="0"/>
+              <a:t>‹#›</a:t>
+            </a:fld>
+            <a:endParaRPr lang="en-US"/>
+          </a:p>
+        </p:txBody>
+      </p:sp>
+    </p:spTree>
+    <p:extLst>
+      <p:ext uri="{BB962C8B-B14F-4D97-AF65-F5344CB8AC3E}">
+        <p14:creationId xmlns:p14="http://schemas.microsoft.com/office/powerpoint/2010/main" val="2782244947"/>
+      </p:ext>
+    </p:extLst>
+  </p:cSld>
+  <p:clrMapOvr>
+    <a:masterClrMapping/>
+  </p:clrMapOvr>
+</p:sldLayout>
+</file>
+
+<file path=ppt/slideLayouts/slideLayout5.xml><?xml version="1.0" encoding="utf-8"?>
+<p:sldLayout xmlns:a="http://schemas.openxmlformats.org/drawingml/2006/main" xmlns:r="http://schemas.openxmlformats.org/officeDocument/2006/relationships" xmlns:p="http://schemas.openxmlformats.org/presentationml/2006/main" type="twoTxTwoObj" preserve="1">
+  <p:cSld name="Comparison">
+    <p:spTree>
+      <p:nvGrpSpPr>
+        <p:cNvPr id="1" name=""/>
+        <p:cNvGrpSpPr/>
+        <p:nvPr/>
+      </p:nvGrpSpPr>
+      <p:grpSpPr>
+        <a:xfrm>
+          <a:off x="0" y="0"/>
+          <a:ext cx="0" cy="0"/>
+          <a:chOff x="0" y="0"/>
+          <a:chExt cx="0" cy="0"/>
+        </a:xfrm>
+      </p:grpSpPr>
+      <p:sp>
+        <p:nvSpPr>
+          <p:cNvPr id="2" name="Title 1"/>
+          <p:cNvSpPr>
+            <a:spLocks noGrp="1"/>
+          </p:cNvSpPr>
+          <p:nvPr>
+            <p:ph type="title"/>
+          </p:nvPr>
+        </p:nvSpPr>
+        <p:spPr/>
+        <p:txBody>
+          <a:bodyPr/>
+          <a:lstStyle>
+            <a:lvl1pPr>
+              <a:defRPr/>
+            </a:lvl1pPr>
+          </a:lstStyle>
+          <a:p>
+            <a:r>
+              <a:rPr lang="en-US" smtClean="0"/>
+              <a:t>Click to edit Master title style</a:t>
+            </a:r>
+            <a:endParaRPr lang="en-US"/>
+          </a:p>
+        </p:txBody>
+      </p:sp>
+      <p:sp>
+        <p:nvSpPr>
+          <p:cNvPr id="3" name="Text Placeholder 2"/>
+          <p:cNvSpPr>
+            <a:spLocks noGrp="1"/>
+          </p:cNvSpPr>
+          <p:nvPr>
+            <p:ph type="body" idx="1"/>
+          </p:nvPr>
+        </p:nvSpPr>
+        <p:spPr>
+          <a:xfrm>
+            <a:off x="457200" y="1535113"/>
+            <a:ext cx="4040188" cy="639762"/>
+          </a:xfrm>
+        </p:spPr>
+        <p:txBody>
+          <a:bodyPr anchor="b"/>
+          <a:lstStyle>
+            <a:lvl1pPr marL="0" indent="0">
+              <a:buNone/>
+              <a:defRPr sz="2400" b="1"/>
+            </a:lvl1pPr>
+            <a:lvl2pPr marL="457200" indent="0">
+              <a:buNone/>
+              <a:defRPr sz="2000" b="1"/>
+            </a:lvl2pPr>
+            <a:lvl3pPr marL="914400" indent="0">
+              <a:buNone/>
+              <a:defRPr sz="1800" b="1"/>
+            </a:lvl3pPr>
+            <a:lvl4pPr marL="1371600" indent="0">
+              <a:buNone/>
+              <a:defRPr sz="1600" b="1"/>
+            </a:lvl4pPr>
+            <a:lvl5pPr marL="1828800" indent="0">
+              <a:buNone/>
+              <a:defRPr sz="1600" b="1"/>
+            </a:lvl5pPr>
+            <a:lvl6pPr marL="2286000" indent="0">
+              <a:buNone/>
+              <a:defRPr sz="1600" b="1"/>
+            </a:lvl6pPr>
+            <a:lvl7pPr marL="2743200" indent="0">
+              <a:buNone/>
+              <a:defRPr sz="1600" b="1"/>
+            </a:lvl7pPr>
+            <a:lvl8pPr marL="3200400" indent="0">
+              <a:buNone/>
+              <a:defRPr sz="1600" b="1"/>
+            </a:lvl8pPr>
+            <a:lvl9pPr marL="3657600" indent="0">
+              <a:buNone/>
+              <a:defRPr sz="1600" b="1"/>
+            </a:lvl9pPr>
+          </a:lstStyle>
+          <a:p>
+            <a:pPr lvl="0"/>
+            <a:r>
+              <a:rPr lang="en-US" smtClean="0"/>
+              <a:t>Click to edit Master text styles</a:t>
+            </a:r>
+          </a:p>
+        </p:txBody>
+      </p:sp>
+      <p:sp>
+        <p:nvSpPr>
+          <p:cNvPr id="4" name="Content Placeholder 3"/>
+          <p:cNvSpPr>
+            <a:spLocks noGrp="1"/>
+          </p:cNvSpPr>
+          <p:nvPr>
+            <p:ph sz="half" idx="2"/>
+          </p:nvPr>
+        </p:nvSpPr>
+        <p:spPr>
+          <a:xfrm>
+            <a:off x="457200" y="2174875"/>
+            <a:ext cx="4040188" cy="3951288"/>
+          </a:xfrm>
+        </p:spPr>
+        <p:txBody>
+          <a:bodyPr/>
+          <a:lstStyle>
+            <a:lvl1pPr>
+              <a:defRPr sz="2400"/>
+            </a:lvl1pPr>
+            <a:lvl2pPr>
+              <a:defRPr sz="2000"/>
+            </a:lvl2pPr>
+            <a:lvl3pPr>
+              <a:defRPr sz="1800"/>
+            </a:lvl3pPr>
+            <a:lvl4pPr>
+              <a:defRPr sz="1600"/>
+            </a:lvl4pPr>
+            <a:lvl5pPr>
+              <a:defRPr sz="1600"/>
+            </a:lvl5pPr>
+            <a:lvl6pPr>
+              <a:defRPr sz="1600"/>
+            </a:lvl6pPr>
+            <a:lvl7pPr>
+              <a:defRPr sz="1600"/>
+            </a:lvl7pPr>
+            <a:lvl8pPr>
+              <a:defRPr sz="1600"/>
+            </a:lvl8pPr>
+            <a:lvl9pPr>
+              <a:defRPr sz="1600"/>
+            </a:lvl9pPr>
+          </a:lstStyle>
+          <a:p>
+            <a:pPr lvl="0"/>
+            <a:r>
+              <a:rPr lang="en-US" smtClean="0"/>
+              <a:t>Click to edit Master text styles</a:t>
+            </a:r>
+          </a:p>
+          <a:p>
+            <a:pPr lvl="1"/>
+            <a:r>
+              <a:rPr lang="en-US" smtClean="0"/>
+              <a:t>Second level</a:t>
+            </a:r>
+          </a:p>
+          <a:p>
+            <a:pPr lvl="2"/>
+            <a:r>
+              <a:rPr lang="en-US" smtClean="0"/>
+              <a:t>Third level</a:t>
+            </a:r>
+          </a:p>
+          <a:p>
+            <a:pPr lvl="3"/>
+            <a:r>
+              <a:rPr lang="en-US" smtClean="0"/>
+              <a:t>Fourth level</a:t>
+            </a:r>
+          </a:p>
+          <a:p>
+            <a:pPr lvl="4"/>
+            <a:r>
+              <a:rPr lang="en-US" smtClean="0"/>
+              <a:t>Fifth level</a:t>
+            </a:r>
+            <a:endParaRPr lang="en-US"/>
+          </a:p>
+        </p:txBody>
+      </p:sp>
+      <p:sp>
+        <p:nvSpPr>
+          <p:cNvPr id="5" name="Text Placeholder 4"/>
+          <p:cNvSpPr>
+            <a:spLocks noGrp="1"/>
+          </p:cNvSpPr>
+          <p:nvPr>
+            <p:ph type="body" sz="quarter" idx="3"/>
+          </p:nvPr>
+        </p:nvSpPr>
+        <p:spPr>
+          <a:xfrm>
+            <a:off x="4645025" y="1535113"/>
+            <a:ext cx="4041775" cy="639762"/>
+          </a:xfrm>
+        </p:spPr>
+        <p:txBody>
+          <a:bodyPr anchor="b"/>
+          <a:lstStyle>
+            <a:lvl1pPr marL="0" indent="0">
+              <a:buNone/>
+              <a:defRPr sz="2400" b="1"/>
+            </a:lvl1pPr>
+            <a:lvl2pPr marL="457200" indent="0">
+              <a:buNone/>
+              <a:defRPr sz="2000" b="1"/>
+            </a:lvl2pPr>
+            <a:lvl3pPr marL="914400" indent="0">
+              <a:buNone/>
+              <a:defRPr sz="1800" b="1"/>
+            </a:lvl3pPr>
+            <a:lvl4pPr marL="1371600" indent="0">
+              <a:buNone/>
+              <a:defRPr sz="1600" b="1"/>
+            </a:lvl4pPr>
+            <a:lvl5pPr marL="1828800" indent="0">
+              <a:buNone/>
+              <a:defRPr sz="1600" b="1"/>
+            </a:lvl5pPr>
+            <a:lvl6pPr marL="2286000" indent="0">
+              <a:buNone/>
+              <a:defRPr sz="1600" b="1"/>
+            </a:lvl6pPr>
+            <a:lvl7pPr marL="2743200" indent="0">
+              <a:buNone/>
+              <a:defRPr sz="1600" b="1"/>
+            </a:lvl7pPr>
+            <a:lvl8pPr marL="3200400" indent="0">
+              <a:buNone/>
+              <a:defRPr sz="1600" b="1"/>
+            </a:lvl8pPr>
+            <a:lvl9pPr marL="3657600" indent="0">
+              <a:buNone/>
+              <a:defRPr sz="1600" b="1"/>
+            </a:lvl9pPr>
+          </a:lstStyle>
+          <a:p>
+            <a:pPr lvl="0"/>
+            <a:r>
+              <a:rPr lang="en-US" smtClean="0"/>
+              <a:t>Click to edit Master text styles</a:t>
+            </a:r>
+          </a:p>
+        </p:txBody>
+      </p:sp>
+      <p:sp>
+        <p:nvSpPr>
+          <p:cNvPr id="6" name="Content Placeholder 5"/>
+          <p:cNvSpPr>
+            <a:spLocks noGrp="1"/>
+          </p:cNvSpPr>
+          <p:nvPr>
+            <p:ph sz="quarter" idx="4"/>
+          </p:nvPr>
+        </p:nvSpPr>
+        <p:spPr>
+          <a:xfrm>
+            <a:off x="4645025" y="2174875"/>
+            <a:ext cx="4041775" cy="3951288"/>
+          </a:xfrm>
+        </p:spPr>
+        <p:txBody>
+          <a:bodyPr/>
+          <a:lstStyle>
+            <a:lvl1pPr>
+              <a:defRPr sz="2400"/>
+            </a:lvl1pPr>
+            <a:lvl2pPr>
+              <a:defRPr sz="2000"/>
+            </a:lvl2pPr>
+            <a:lvl3pPr>
+              <a:defRPr sz="1800"/>
+            </a:lvl3pPr>
+            <a:lvl4pPr>
+              <a:defRPr sz="1600"/>
+            </a:lvl4pPr>
+            <a:lvl5pPr>
+              <a:defRPr sz="1600"/>
+            </a:lvl5pPr>
+            <a:lvl6pPr>
+              <a:defRPr sz="1600"/>
+            </a:lvl6pPr>
+            <a:lvl7pPr>
+              <a:defRPr sz="1600"/>
+            </a:lvl7pPr>
+            <a:lvl8pPr>
+              <a:defRPr sz="1600"/>
+            </a:lvl8pPr>
+            <a:lvl9pPr>
+              <a:defRPr sz="1600"/>
+            </a:lvl9pPr>
+          </a:lstStyle>
+          <a:p>
+            <a:pPr lvl="0"/>
+            <a:r>
+              <a:rPr lang="en-US" smtClean="0"/>
+              <a:t>Click to edit Master text styles</a:t>
+            </a:r>
+          </a:p>
+          <a:p>
+            <a:pPr lvl="1"/>
+            <a:r>
+              <a:rPr lang="en-US" smtClean="0"/>
+              <a:t>Second level</a:t>
+            </a:r>
+          </a:p>
+          <a:p>
+            <a:pPr lvl="2"/>
+            <a:r>
+              <a:rPr lang="en-US" smtClean="0"/>
+              <a:t>Third level</a:t>
+            </a:r>
+          </a:p>
+          <a:p>
+            <a:pPr lvl="3"/>
+            <a:r>
+              <a:rPr lang="en-US" smtClean="0"/>
+              <a:t>Fourth level</a:t>
+            </a:r>
+          </a:p>
+          <a:p>
+            <a:pPr lvl="4"/>
+            <a:r>
+              <a:rPr lang="en-US" smtClean="0"/>
+              <a:t>Fifth level</a:t>
+            </a:r>
+            <a:endParaRPr lang="en-US"/>
+          </a:p>
+        </p:txBody>
+      </p:sp>
+      <p:sp>
+        <p:nvSpPr>
+          <p:cNvPr id="7" name="Date Placeholder 6"/>
+          <p:cNvSpPr>
+            <a:spLocks noGrp="1"/>
+          </p:cNvSpPr>
+          <p:nvPr>
+            <p:ph type="dt" sz="half" idx="10"/>
+          </p:nvPr>
+        </p:nvSpPr>
+        <p:spPr/>
+        <p:txBody>
+          <a:bodyPr/>
+          <a:lstStyle/>
+          <a:p>
+            <a:fld id="{5BCAD085-E8A6-8845-BD4E-CB4CCA059FC4}" type="datetimeFigureOut">
+              <a:rPr lang="en-US" smtClean="0"/>
+              <a:t>1/27/13</a:t>
+            </a:fld>
+            <a:endParaRPr lang="en-US"/>
+          </a:p>
+        </p:txBody>
+      </p:sp>
+      <p:sp>
+        <p:nvSpPr>
+          <p:cNvPr id="8" name="Footer Placeholder 7"/>
+          <p:cNvSpPr>
+            <a:spLocks noGrp="1"/>
+          </p:cNvSpPr>
+          <p:nvPr>
+            <p:ph type="ftr" sz="quarter" idx="11"/>
+          </p:nvPr>
+        </p:nvSpPr>
+        <p:spPr/>
+        <p:txBody>
+          <a:bodyPr/>
+          <a:lstStyle/>
+          <a:p>
+            <a:endParaRPr lang="en-US"/>
+          </a:p>
+        </p:txBody>
+      </p:sp>
+      <p:sp>
+        <p:nvSpPr>
+          <p:cNvPr id="9" name="Slide Number Placeholder 8"/>
+          <p:cNvSpPr>
+            <a:spLocks noGrp="1"/>
+          </p:cNvSpPr>
+          <p:nvPr>
+            <p:ph type="sldNum" sz="quarter" idx="12"/>
+          </p:nvPr>
+        </p:nvSpPr>
+        <p:spPr/>
+        <p:txBody>
+          <a:bodyPr/>
+          <a:lstStyle/>
+          <a:p>
+            <a:fld id="{C1FF6DA9-008F-8B48-92A6-B652298478BF}" type="slidenum">
+              <a:rPr lang="en-US" smtClean="0"/>
+              <a:t>‹#›</a:t>
+            </a:fld>
+            <a:endParaRPr lang="en-US"/>
+          </a:p>
+        </p:txBody>
+      </p:sp>
+    </p:spTree>
+    <p:extLst>
+      <p:ext uri="{BB962C8B-B14F-4D97-AF65-F5344CB8AC3E}">
+        <p14:creationId xmlns:p14="http://schemas.microsoft.com/office/powerpoint/2010/main" val="990158736"/>
+      </p:ext>
+    </p:extLst>
+  </p:cSld>
+  <p:clrMapOvr>
+    <a:masterClrMapping/>
+  </p:clrMapOvr>
+</p:sldLayout>
+</file>
+
+<file path=ppt/slideLayouts/slideLayout6.xml><?xml version="1.0" encoding="utf-8"?>
+<p:sldLayout xmlns:a="http://schemas.openxmlformats.org/drawingml/2006/main" xmlns:r="http://schemas.openxmlformats.org/officeDocument/2006/relationships" xmlns:p="http://schemas.openxmlformats.org/presentationml/2006/main" type="titleOnly" preserve="1">
+  <p:cSld name="Title Only">
+    <p:spTree>
+      <p:nvGrpSpPr>
+        <p:cNvPr id="1" name=""/>
+        <p:cNvGrpSpPr/>
+        <p:nvPr/>
+      </p:nvGrpSpPr>
+      <p:grpSpPr>
+        <a:xfrm>
+          <a:off x="0" y="0"/>
+          <a:ext cx="0" cy="0"/>
+          <a:chOff x="0" y="0"/>
+          <a:chExt cx="0" cy="0"/>
+        </a:xfrm>
+      </p:grpSpPr>
+      <p:sp>
+        <p:nvSpPr>
+          <p:cNvPr id="2" name="Title 1"/>
+          <p:cNvSpPr>
+            <a:spLocks noGrp="1"/>
+          </p:cNvSpPr>
+          <p:nvPr>
+            <p:ph type="title"/>
+          </p:nvPr>
+        </p:nvSpPr>
+        <p:spPr/>
+        <p:txBody>
+          <a:bodyPr/>
+          <a:lstStyle/>
+          <a:p>
+            <a:r>
+              <a:rPr lang="en-US" smtClean="0"/>
+              <a:t>Click to edit Master title style</a:t>
+            </a:r>
+            <a:endParaRPr lang="en-US"/>
+          </a:p>
+        </p:txBody>
+      </p:sp>
+      <p:sp>
+        <p:nvSpPr>
+          <p:cNvPr id="3" name="Date Placeholder 2"/>
+          <p:cNvSpPr>
+            <a:spLocks noGrp="1"/>
+          </p:cNvSpPr>
+          <p:nvPr>
+            <p:ph type="dt" sz="half" idx="10"/>
+          </p:nvPr>
+        </p:nvSpPr>
+        <p:spPr/>
+        <p:txBody>
+          <a:bodyPr/>
+          <a:lstStyle/>
+          <a:p>
+            <a:fld id="{5BCAD085-E8A6-8845-BD4E-CB4CCA059FC4}" type="datetimeFigureOut">
+              <a:rPr lang="en-US" smtClean="0"/>
+              <a:t>1/27/13</a:t>
+            </a:fld>
+            <a:endParaRPr lang="en-US"/>
+          </a:p>
+        </p:txBody>
+      </p:sp>
+      <p:sp>
+        <p:nvSpPr>
+          <p:cNvPr id="4" name="Footer Placeholder 3"/>
+          <p:cNvSpPr>
+            <a:spLocks noGrp="1"/>
+          </p:cNvSpPr>
+          <p:nvPr>
+            <p:ph type="ftr" sz="quarter" idx="11"/>
+          </p:nvPr>
+        </p:nvSpPr>
+        <p:spPr/>
+        <p:txBody>
+          <a:bodyPr/>
+          <a:lstStyle/>
+          <a:p>
+            <a:endParaRPr lang="en-US"/>
+          </a:p>
+        </p:txBody>
+      </p:sp>
+      <p:sp>
+        <p:nvSpPr>
+          <p:cNvPr id="5" name="Slide Number Placeholder 4"/>
+          <p:cNvSpPr>
+            <a:spLocks noGrp="1"/>
+          </p:cNvSpPr>
+          <p:nvPr>
+            <p:ph type="sldNum" sz="quarter" idx="12"/>
+          </p:nvPr>
+        </p:nvSpPr>
+        <p:spPr/>
+        <p:txBody>
+          <a:bodyPr/>
+          <a:lstStyle/>
+          <a:p>
+            <a:fld id="{C1FF6DA9-008F-8B48-92A6-B652298478BF}" type="slidenum">
+              <a:rPr lang="en-US" smtClean="0"/>
+              <a:t>‹#›</a:t>
+            </a:fld>
+            <a:endParaRPr lang="en-US"/>
+          </a:p>
+        </p:txBody>
+      </p:sp>
+    </p:spTree>
+    <p:extLst>
+      <p:ext uri="{BB962C8B-B14F-4D97-AF65-F5344CB8AC3E}">
+        <p14:creationId xmlns:p14="http://schemas.microsoft.com/office/powerpoint/2010/main" val="727027711"/>
+      </p:ext>
+    </p:extLst>
+  </p:cSld>
+  <p:clrMapOvr>
+    <a:masterClrMapping/>
+  </p:clrMapOvr>
+</p:sldLayout>
+</file>
+
+<file path=ppt/slideLayouts/slideLayout7.xml><?xml version="1.0" encoding="utf-8"?>
+<p:sldLayout xmlns:a="http://schemas.openxmlformats.org/drawingml/2006/main" xmlns:r="http://schemas.openxmlformats.org/officeDocument/2006/relationships" xmlns:p="http://schemas.openxmlformats.org/presentationml/2006/main" type="blank" preserve="1">
+  <p:cSld name="Blank">
+    <p:spTree>
+      <p:nvGrpSpPr>
+        <p:cNvPr id="1" name=""/>
+        <p:cNvGrpSpPr/>
+        <p:nvPr/>
+      </p:nvGrpSpPr>
+      <p:grpSpPr>
+        <a:xfrm>
+          <a:off x="0" y="0"/>
+          <a:ext cx="0" cy="0"/>
+          <a:chOff x="0" y="0"/>
+          <a:chExt cx="0" cy="0"/>
+        </a:xfrm>
+      </p:grpSpPr>
+      <p:sp>
+        <p:nvSpPr>
+          <p:cNvPr id="2" name="Date Placeholder 1"/>
+          <p:cNvSpPr>
+            <a:spLocks noGrp="1"/>
+          </p:cNvSpPr>
+          <p:nvPr>
+            <p:ph type="dt" sz="half" idx="10"/>
+          </p:nvPr>
+        </p:nvSpPr>
+        <p:spPr/>
+        <p:txBody>
+          <a:bodyPr/>
+          <a:lstStyle/>
+          <a:p>
+            <a:fld id="{5BCAD085-E8A6-8845-BD4E-CB4CCA059FC4}" type="datetimeFigureOut">
+              <a:rPr lang="en-US" smtClean="0"/>
+              <a:t>1/27/13</a:t>
+            </a:fld>
+            <a:endParaRPr lang="en-US"/>
+          </a:p>
+        </p:txBody>
+      </p:sp>
+      <p:sp>
+        <p:nvSpPr>
+          <p:cNvPr id="3" name="Footer Placeholder 2"/>
+          <p:cNvSpPr>
+            <a:spLocks noGrp="1"/>
+          </p:cNvSpPr>
+          <p:nvPr>
+            <p:ph type="ftr" sz="quarter" idx="11"/>
+          </p:nvPr>
+        </p:nvSpPr>
+        <p:spPr/>
+        <p:txBody>
+          <a:bodyPr/>
+          <a:lstStyle/>
+          <a:p>
+            <a:endParaRPr lang="en-US"/>
+          </a:p>
+        </p:txBody>
+      </p:sp>
+      <p:sp>
+        <p:nvSpPr>
+          <p:cNvPr id="4" name="Slide Number Placeholder 3"/>
+          <p:cNvSpPr>
+            <a:spLocks noGrp="1"/>
+          </p:cNvSpPr>
+          <p:nvPr>
+            <p:ph type="sldNum" sz="quarter" idx="12"/>
+          </p:nvPr>
+        </p:nvSpPr>
+        <p:spPr/>
+        <p:txBody>
+          <a:bodyPr/>
+          <a:lstStyle/>
+          <a:p>
+            <a:fld id="{C1FF6DA9-008F-8B48-92A6-B652298478BF}" type="slidenum">
+              <a:rPr lang="en-US" smtClean="0"/>
+              <a:t>‹#›</a:t>
+            </a:fld>
+            <a:endParaRPr lang="en-US"/>
+          </a:p>
+        </p:txBody>
+      </p:sp>
+    </p:spTree>
+    <p:extLst>
+      <p:ext uri="{BB962C8B-B14F-4D97-AF65-F5344CB8AC3E}">
+        <p14:creationId xmlns:p14="http://schemas.microsoft.com/office/powerpoint/2010/main" val="1212999818"/>
+      </p:ext>
+    </p:extLst>
+  </p:cSld>
+  <p:clrMapOvr>
+    <a:masterClrMapping/>
+  </p:clrMapOvr>
+</p:sldLayout>
+</file>
+
+<file path=ppt/slideLayouts/slideLayout8.xml><?xml version="1.0" encoding="utf-8"?>
+<p:sldLayout xmlns:a="http://schemas.openxmlformats.org/drawingml/2006/main" xmlns:r="http://schemas.openxmlformats.org/officeDocument/2006/relationships" xmlns:p="http://schemas.openxmlformats.org/presentationml/2006/main" type="objTx" preserve="1">
+  <p:cSld name="Content with Caption">
+    <p:spTree>
+      <p:nvGrpSpPr>
+        <p:cNvPr id="1" name=""/>
+        <p:cNvGrpSpPr/>
+        <p:nvPr/>
+      </p:nvGrpSpPr>
+      <p:grpSpPr>
+        <a:xfrm>
+          <a:off x="0" y="0"/>
+          <a:ext cx="0" cy="0"/>
+          <a:chOff x="0" y="0"/>
+          <a:chExt cx="0" cy="0"/>
+        </a:xfrm>
+      </p:grpSpPr>
+      <p:sp>
+        <p:nvSpPr>
+          <p:cNvPr id="2" name="Title 1"/>
+          <p:cNvSpPr>
+            <a:spLocks noGrp="1"/>
+          </p:cNvSpPr>
+          <p:nvPr>
+            <p:ph type="title"/>
+          </p:nvPr>
+        </p:nvSpPr>
+        <p:spPr>
+          <a:xfrm>
+            <a:off x="457200" y="273050"/>
+            <a:ext cx="3008313" cy="1162050"/>
+          </a:xfrm>
+        </p:spPr>
+        <p:txBody>
+          <a:bodyPr anchor="b"/>
+          <a:lstStyle>
+            <a:lvl1pPr algn="l">
+              <a:defRPr sz="2000" b="1"/>
+            </a:lvl1pPr>
+          </a:lstStyle>
+          <a:p>
+            <a:r>
+              <a:rPr lang="en-US" smtClean="0"/>
+              <a:t>Click to edit Master title style</a:t>
+            </a:r>
+            <a:endParaRPr lang="en-US"/>
+          </a:p>
+        </p:txBody>
+      </p:sp>
+      <p:sp>
+        <p:nvSpPr>
+          <p:cNvPr id="3" name="Content Placeholder 2"/>
+          <p:cNvSpPr>
+            <a:spLocks noGrp="1"/>
+          </p:cNvSpPr>
+          <p:nvPr>
+            <p:ph idx="1"/>
+          </p:nvPr>
+        </p:nvSpPr>
+        <p:spPr>
+          <a:xfrm>
+            <a:off x="3575050" y="273050"/>
+            <a:ext cx="5111750" cy="5853113"/>
+          </a:xfrm>
+        </p:spPr>
+        <p:txBody>
+          <a:bodyPr/>
+          <a:lstStyle>
+            <a:lvl1pPr>
+              <a:defRPr sz="3200"/>
+            </a:lvl1pPr>
+            <a:lvl2pPr>
+              <a:defRPr sz="2800"/>
+            </a:lvl2pPr>
+            <a:lvl3pPr>
+              <a:defRPr sz="2400"/>
+            </a:lvl3pPr>
+            <a:lvl4pPr>
+              <a:defRPr sz="2000"/>
+            </a:lvl4pPr>
+            <a:lvl5pPr>
+              <a:defRPr sz="2000"/>
+            </a:lvl5pPr>
+            <a:lvl6pPr>
+              <a:defRPr sz="2000"/>
+            </a:lvl6pPr>
+            <a:lvl7pPr>
+              <a:defRPr sz="2000"/>
+            </a:lvl7pPr>
+            <a:lvl8pPr>
+              <a:defRPr sz="2000"/>
+            </a:lvl8pPr>
+            <a:lvl9pPr>
+              <a:defRPr sz="2000"/>
+            </a:lvl9pPr>
+          </a:lstStyle>
+          <a:p>
+            <a:pPr lvl="0"/>
+            <a:r>
+              <a:rPr lang="en-US" smtClean="0"/>
+              <a:t>Click to edit Master text styles</a:t>
+            </a:r>
+          </a:p>
+          <a:p>
+            <a:pPr lvl="1"/>
+            <a:r>
+              <a:rPr lang="en-US" smtClean="0"/>
+              <a:t>Second level</a:t>
+            </a:r>
+          </a:p>
+          <a:p>
+            <a:pPr lvl="2"/>
+            <a:r>
+              <a:rPr lang="en-US" smtClean="0"/>
+              <a:t>Third level</a:t>
+            </a:r>
+          </a:p>
+          <a:p>
+            <a:pPr lvl="3"/>
+            <a:r>
+              <a:rPr lang="en-US" smtClean="0"/>
+              <a:t>Fourth level</a:t>
+            </a:r>
+          </a:p>
+          <a:p>
+            <a:pPr lvl="4"/>
+            <a:r>
+              <a:rPr lang="en-US" smtClean="0"/>
+              <a:t>Fifth level</a:t>
+            </a:r>
+            <a:endParaRPr lang="en-US"/>
+          </a:p>
+        </p:txBody>
+      </p:sp>
+      <p:sp>
+        <p:nvSpPr>
+          <p:cNvPr id="4" name="Text Placeholder 3"/>
+          <p:cNvSpPr>
+            <a:spLocks noGrp="1"/>
+          </p:cNvSpPr>
+          <p:nvPr>
+            <p:ph type="body" sz="half" idx="2"/>
+          </p:nvPr>
+        </p:nvSpPr>
+        <p:spPr>
+          <a:xfrm>
+            <a:off x="457200" y="1435100"/>
+            <a:ext cx="3008313" cy="4691063"/>
+          </a:xfrm>
+        </p:spPr>
+        <p:txBody>
+          <a:bodyPr/>
+          <a:lstStyle>
+            <a:lvl1pPr marL="0" indent="0">
+              <a:buNone/>
+              <a:defRPr sz="1400"/>
+            </a:lvl1pPr>
+            <a:lvl2pPr marL="457200" indent="0">
+              <a:buNone/>
+              <a:defRPr sz="1200"/>
+            </a:lvl2pPr>
+            <a:lvl3pPr marL="914400" indent="0">
+              <a:buNone/>
+              <a:defRPr sz="1000"/>
+            </a:lvl3pPr>
+            <a:lvl4pPr marL="1371600" indent="0">
+              <a:buNone/>
+              <a:defRPr sz="900"/>
+            </a:lvl4pPr>
+            <a:lvl5pPr marL="1828800" indent="0">
+              <a:buNone/>
+              <a:defRPr sz="900"/>
+            </a:lvl5pPr>
+            <a:lvl6pPr marL="2286000" indent="0">
+              <a:buNone/>
+              <a:defRPr sz="900"/>
+            </a:lvl6pPr>
+            <a:lvl7pPr marL="2743200" indent="0">
+              <a:buNone/>
+              <a:defRPr sz="900"/>
+            </a:lvl7pPr>
+            <a:lvl8pPr marL="3200400" indent="0">
+              <a:buNone/>
+              <a:defRPr sz="900"/>
+            </a:lvl8pPr>
+            <a:lvl9pPr marL="3657600" indent="0">
+              <a:buNone/>
+              <a:defRPr sz="900"/>
+            </a:lvl9pPr>
+          </a:lstStyle>
+          <a:p>
+            <a:pPr lvl="0"/>
+            <a:r>
+              <a:rPr lang="en-US" smtClean="0"/>
+              <a:t>Click to edit Master text styles</a:t>
+            </a:r>
+          </a:p>
+        </p:txBody>
+      </p:sp>
+      <p:sp>
+        <p:nvSpPr>
+          <p:cNvPr id="5" name="Date Placeholder 4"/>
+          <p:cNvSpPr>
+            <a:spLocks noGrp="1"/>
+          </p:cNvSpPr>
+          <p:nvPr>
+            <p:ph type="dt" sz="half" idx="10"/>
+          </p:nvPr>
+        </p:nvSpPr>
+        <p:spPr/>
+        <p:txBody>
+          <a:bodyPr/>
+          <a:lstStyle/>
+          <a:p>
+            <a:fld id="{5BCAD085-E8A6-8845-BD4E-CB4CCA059FC4}" type="datetimeFigureOut">
+              <a:rPr lang="en-US" smtClean="0"/>
+              <a:t>1/27/13</a:t>
+            </a:fld>
+            <a:endParaRPr lang="en-US"/>
+          </a:p>
+        </p:txBody>
+      </p:sp>
+      <p:sp>
+        <p:nvSpPr>
+          <p:cNvPr id="6" name="Footer Placeholder 5"/>
+          <p:cNvSpPr>
+            <a:spLocks noGrp="1"/>
+          </p:cNvSpPr>
+          <p:nvPr>
+            <p:ph type="ftr" sz="quarter" idx="11"/>
+          </p:nvPr>
+        </p:nvSpPr>
+        <p:spPr/>
+        <p:txBody>
+          <a:bodyPr/>
+          <a:lstStyle/>
+          <a:p>
+            <a:endParaRPr lang="en-US"/>
+          </a:p>
+        </p:txBody>
+      </p:sp>
+      <p:sp>
+        <p:nvSpPr>
+          <p:cNvPr id="7" name="Slide Number Placeholder 6"/>
+          <p:cNvSpPr>
+            <a:spLocks noGrp="1"/>
+          </p:cNvSpPr>
+          <p:nvPr>
+            <p:ph type="sldNum" sz="quarter" idx="12"/>
+          </p:nvPr>
+        </p:nvSpPr>
+        <p:spPr/>
+        <p:txBody>
+          <a:bodyPr/>
+          <a:lstStyle/>
+          <a:p>
+            <a:fld id="{C1FF6DA9-008F-8B48-92A6-B652298478BF}" type="slidenum">
+              <a:rPr lang="en-US" smtClean="0"/>
+              <a:t>‹#›</a:t>
+            </a:fld>
+            <a:endParaRPr lang="en-US"/>
+          </a:p>
+        </p:txBody>
+      </p:sp>
+    </p:spTree>
+    <p:extLst>
+      <p:ext uri="{BB962C8B-B14F-4D97-AF65-F5344CB8AC3E}">
+        <p14:creationId xmlns:p14="http://schemas.microsoft.com/office/powerpoint/2010/main" val="1840726560"/>
+      </p:ext>
+    </p:extLst>
+  </p:cSld>
+  <p:clrMapOvr>
+    <a:masterClrMapping/>
+  </p:clrMapOvr>
+</p:sldLayout>
+</file>
+
+<file path=ppt/slideLayouts/slideLayout9.xml><?xml version="1.0" encoding="utf-8"?>
+<p:sldLayout xmlns:a="http://schemas.openxmlformats.org/drawingml/2006/main" xmlns:r="http://schemas.openxmlformats.org/officeDocument/2006/relationships" xmlns:p="http://schemas.openxmlformats.org/presentationml/2006/main" type="picTx" preserve="1">
+  <p:cSld name="Picture with Caption">
+    <p:spTree>
+      <p:nvGrpSpPr>
+        <p:cNvPr id="1" name=""/>
+        <p:cNvGrpSpPr/>
+        <p:nvPr/>
+      </p:nvGrpSpPr>
+      <p:grpSpPr>
+        <a:xfrm>
+          <a:off x="0" y="0"/>
+          <a:ext cx="0" cy="0"/>
+          <a:chOff x="0" y="0"/>
+          <a:chExt cx="0" cy="0"/>
+        </a:xfrm>
+      </p:grpSpPr>
+      <p:sp>
+        <p:nvSpPr>
+          <p:cNvPr id="2" name="Title 1"/>
+          <p:cNvSpPr>
+            <a:spLocks noGrp="1"/>
+          </p:cNvSpPr>
+          <p:nvPr>
+            <p:ph type="title"/>
+          </p:nvPr>
+        </p:nvSpPr>
+        <p:spPr>
+          <a:xfrm>
+            <a:off x="1792288" y="4800600"/>
+            <a:ext cx="5486400" cy="566738"/>
+          </a:xfrm>
+        </p:spPr>
+        <p:txBody>
+          <a:bodyPr anchor="b"/>
+          <a:lstStyle>
+            <a:lvl1pPr algn="l">
+              <a:defRPr sz="2000" b="1"/>
+            </a:lvl1pPr>
+          </a:lstStyle>
+          <a:p>
+            <a:r>
+              <a:rPr lang="en-US" smtClean="0"/>
+              <a:t>Click to edit Master title style</a:t>
+            </a:r>
+            <a:endParaRPr lang="en-US"/>
+          </a:p>
+        </p:txBody>
+      </p:sp>
+      <p:sp>
+        <p:nvSpPr>
+          <p:cNvPr id="3" name="Picture Placeholder 2"/>
+          <p:cNvSpPr>
+            <a:spLocks noGrp="1"/>
+          </p:cNvSpPr>
+          <p:nvPr>
+            <p:ph type="pic" idx="1"/>
+          </p:nvPr>
+        </p:nvSpPr>
+        <p:spPr>
+          <a:xfrm>
+            <a:off x="1792288" y="612775"/>
+            <a:ext cx="5486400" cy="4114800"/>
+          </a:xfrm>
+        </p:spPr>
+        <p:txBody>
+          <a:bodyPr/>
+          <a:lstStyle>
+            <a:lvl1pPr marL="0" indent="0">
+              <a:buNone/>
+              <a:defRPr sz="3200"/>
+            </a:lvl1pPr>
+            <a:lvl2pPr marL="457200" indent="0">
+              <a:buNone/>
+              <a:defRPr sz="2800"/>
+            </a:lvl2pPr>
+            <a:lvl3pPr marL="914400" indent="0">
+              <a:buNone/>
+              <a:defRPr sz="2400"/>
+            </a:lvl3pPr>
+            <a:lvl4pPr marL="1371600" indent="0">
+              <a:buNone/>
+              <a:defRPr sz="2000"/>
+            </a:lvl4pPr>
+            <a:lvl5pPr marL="1828800" indent="0">
+              <a:buNone/>
+              <a:defRPr sz="2000"/>
+            </a:lvl5pPr>
+            <a:lvl6pPr marL="2286000" indent="0">
+              <a:buNone/>
+              <a:defRPr sz="2000"/>
+            </a:lvl6pPr>
+            <a:lvl7pPr marL="2743200" indent="0">
+              <a:buNone/>
+              <a:defRPr sz="2000"/>
+            </a:lvl7pPr>
+            <a:lvl8pPr marL="3200400" indent="0">
+              <a:buNone/>
+              <a:defRPr sz="2000"/>
+            </a:lvl8pPr>
+            <a:lvl9pPr marL="3657600" indent="0">
+              <a:buNone/>
+              <a:defRPr sz="2000"/>
+            </a:lvl9pPr>
+          </a:lstStyle>
+          <a:p>
+            <a:endParaRPr lang="en-US"/>
+          </a:p>
+        </p:txBody>
+      </p:sp>
+      <p:sp>
+        <p:nvSpPr>
+          <p:cNvPr id="4" name="Text Placeholder 3"/>
+          <p:cNvSpPr>
+            <a:spLocks noGrp="1"/>
+          </p:cNvSpPr>
+          <p:nvPr>
+            <p:ph type="body" sz="half" idx="2"/>
+          </p:nvPr>
+        </p:nvSpPr>
+        <p:spPr>
+          <a:xfrm>
+            <a:off x="1792288" y="5367338"/>
+            <a:ext cx="5486400" cy="804862"/>
+          </a:xfrm>
+        </p:spPr>
+        <p:txBody>
+          <a:bodyPr/>
+          <a:lstStyle>
+            <a:lvl1pPr marL="0" indent="0">
+              <a:buNone/>
+              <a:defRPr sz="1400"/>
+            </a:lvl1pPr>
+            <a:lvl2pPr marL="457200" indent="0">
+              <a:buNone/>
+              <a:defRPr sz="1200"/>
+            </a:lvl2pPr>
+            <a:lvl3pPr marL="914400" indent="0">
+              <a:buNone/>
+              <a:defRPr sz="1000"/>
+            </a:lvl3pPr>
+            <a:lvl4pPr marL="1371600" indent="0">
+              <a:buNone/>
+              <a:defRPr sz="900"/>
+            </a:lvl4pPr>
+            <a:lvl5pPr marL="1828800" indent="0">
+              <a:buNone/>
+              <a:defRPr sz="900"/>
+            </a:lvl5pPr>
+            <a:lvl6pPr marL="2286000" indent="0">
+              <a:buNone/>
+              <a:defRPr sz="900"/>
+            </a:lvl6pPr>
+            <a:lvl7pPr marL="2743200" indent="0">
+              <a:buNone/>
+              <a:defRPr sz="900"/>
+            </a:lvl7pPr>
+            <a:lvl8pPr marL="3200400" indent="0">
+              <a:buNone/>
+              <a:defRPr sz="900"/>
+            </a:lvl8pPr>
+            <a:lvl9pPr marL="3657600" indent="0">
+              <a:buNone/>
+              <a:defRPr sz="900"/>
+            </a:lvl9pPr>
+          </a:lstStyle>
+          <a:p>
+            <a:pPr lvl="0"/>
+            <a:r>
+              <a:rPr lang="en-US" smtClean="0"/>
+              <a:t>Click to edit Master text styles</a:t>
+            </a:r>
+          </a:p>
+        </p:txBody>
+      </p:sp>
+      <p:sp>
+        <p:nvSpPr>
+          <p:cNvPr id="5" name="Date Placeholder 4"/>
+          <p:cNvSpPr>
+            <a:spLocks noGrp="1"/>
+          </p:cNvSpPr>
+          <p:nvPr>
+            <p:ph type="dt" sz="half" idx="10"/>
+          </p:nvPr>
+        </p:nvSpPr>
+        <p:spPr/>
+        <p:txBody>
+          <a:bodyPr/>
+          <a:lstStyle/>
+          <a:p>
+            <a:fld id="{5BCAD085-E8A6-8845-BD4E-CB4CCA059FC4}" type="datetimeFigureOut">
+              <a:rPr lang="en-US" smtClean="0"/>
+              <a:t>1/27/13</a:t>
+            </a:fld>
+            <a:endParaRPr lang="en-US"/>
+          </a:p>
+        </p:txBody>
+      </p:sp>
+      <p:sp>
+        <p:nvSpPr>
+          <p:cNvPr id="6" name="Footer Placeholder 5"/>
+          <p:cNvSpPr>
+            <a:spLocks noGrp="1"/>
+          </p:cNvSpPr>
+          <p:nvPr>
+            <p:ph type="ftr" sz="quarter" idx="11"/>
+          </p:nvPr>
+        </p:nvSpPr>
+        <p:spPr/>
+        <p:txBody>
+          <a:bodyPr/>
+          <a:lstStyle/>
+          <a:p>
+            <a:endParaRPr lang="en-US"/>
+          </a:p>
+        </p:txBody>
+      </p:sp>
+      <p:sp>
+        <p:nvSpPr>
+          <p:cNvPr id="7" name="Slide Number Placeholder 6"/>
+          <p:cNvSpPr>
+            <a:spLocks noGrp="1"/>
+          </p:cNvSpPr>
+          <p:nvPr>
+            <p:ph type="sldNum" sz="quarter" idx="12"/>
+          </p:nvPr>
+        </p:nvSpPr>
+        <p:spPr/>
+        <p:txBody>
+          <a:bodyPr/>
+          <a:lstStyle/>
+          <a:p>
+            <a:fld id="{C1FF6DA9-008F-8B48-92A6-B652298478BF}" type="slidenum">
+              <a:rPr lang="en-US" smtClean="0"/>
+              <a:t>‹#›</a:t>
+            </a:fld>
+            <a:endParaRPr lang="en-US"/>
+          </a:p>
+        </p:txBody>
+      </p:sp>
+    </p:spTree>
+    <p:extLst>
+      <p:ext uri="{BB962C8B-B14F-4D97-AF65-F5344CB8AC3E}">
+        <p14:creationId xmlns:p14="http://schemas.microsoft.com/office/powerpoint/2010/main" val="3889236939"/>
+      </p:ext>
+    </p:extLst>
+  </p:cSld>
+  <p:clrMapOvr>
+    <a:masterClrMapping/>
+  </p:clrMapOvr>
+</p:sldLayout>
+</file>
+
+<file path=ppt/slideMasters/slideMaster1.xml><?xml version="1.0" encoding="utf-8"?>
+<p:sldMaster xmlns:a="http://schemas.openxmlformats.org/drawingml/2006/main" xmlns:r="http://schemas.openxmlformats.org/officeDocument/2006/relationships" xmlns:p="http://schemas.openxmlformats.org/presentationml/2006/main">
   <p:cSld>
     <p:bg>
       <p:bgRef idx="1001">
@@ -151,363 +2607,40 @@
       </p:grpSpPr>
       <p:sp>
         <p:nvSpPr>
-          <p:cNvPr id="2" name="Header Placeholder 1"/>
+          <p:cNvPr id="2" name="Title Placeholder 1"/>
           <p:cNvSpPr>
             <a:spLocks noGrp="1"/>
           </p:cNvSpPr>
           <p:nvPr>
-            <p:ph type="hdr" sz="quarter"/>
+            <p:ph type="title"/>
           </p:nvPr>
         </p:nvSpPr>
         <p:spPr>
           <a:xfrm>
-            <a:off x="0" y="0"/>
-            <a:ext cx="2971800" cy="458788"/>
-          </a:xfrm>
-          <a:prstGeom prst="rect">
-            <a:avLst/>
-          </a:prstGeom>
-        </p:spPr>
-        <p:txBody>
-          <a:bodyPr vert="horz" lIns="91440" tIns="45720" rIns="91440" bIns="45720" rtlCol="0"/>
-          <a:lstStyle>
-            <a:lvl1pPr algn="l">
-              <a:defRPr sz="1200"/>
-            </a:lvl1pPr>
-          </a:lstStyle>
-          <a:p>
+            <a:off x="457200" y="274638"/>
+            <a:ext cx="8229600" cy="1143000"/>
+          </a:xfrm>
+          <a:prstGeom prst="rect">
+            <a:avLst/>
+          </a:prstGeom>
+        </p:spPr>
+        <p:txBody>
+          <a:bodyPr vert="horz" lIns="91440" tIns="45720" rIns="91440" bIns="45720" rtlCol="0" anchor="ctr">
+            <a:normAutofit/>
+          </a:bodyPr>
+          <a:lstStyle/>
+          <a:p>
+            <a:r>
+              <a:rPr lang="en-US" smtClean="0"/>
+              <a:t>Click to edit Master title style</a:t>
+            </a:r>
             <a:endParaRPr lang="en-US"/>
           </a:p>
         </p:txBody>
       </p:sp>
       <p:sp>
         <p:nvSpPr>
-          <p:cNvPr id="3" name="Date Placeholder 2"/>
-          <p:cNvSpPr>
-            <a:spLocks noGrp="1"/>
-          </p:cNvSpPr>
-          <p:nvPr>
-            <p:ph type="dt" idx="1"/>
-          </p:nvPr>
-        </p:nvSpPr>
-        <p:spPr>
-          <a:xfrm>
-            <a:off x="3884613" y="0"/>
-            <a:ext cx="2971800" cy="458788"/>
-          </a:xfrm>
-          <a:prstGeom prst="rect">
-            <a:avLst/>
-          </a:prstGeom>
-        </p:spPr>
-        <p:txBody>
-          <a:bodyPr vert="horz" lIns="91440" tIns="45720" rIns="91440" bIns="45720" rtlCol="0"/>
-          <a:lstStyle>
-            <a:lvl1pPr algn="r">
-              <a:defRPr sz="1200"/>
-            </a:lvl1pPr>
-          </a:lstStyle>
-          <a:p>
-            <a:fld id="{5282F153-3F37-0F45-9E97-73ACFA13230C}" type="datetimeFigureOut">
-              <a:rPr lang="en-US"/>
-              <a:t>7/23/19</a:t>
-            </a:fld>
-            <a:endParaRPr lang="en-US"/>
-          </a:p>
-        </p:txBody>
-      </p:sp>
-      <p:sp>
-        <p:nvSpPr>
-          <p:cNvPr id="4" name="Slide Image Placeholder 3"/>
-          <p:cNvSpPr>
-            <a:spLocks noGrp="1" noRot="1" noChangeAspect="1"/>
-          </p:cNvSpPr>
-          <p:nvPr>
-            <p:ph type="sldImg" idx="2"/>
-          </p:nvPr>
-        </p:nvSpPr>
-        <p:spPr>
-          <a:xfrm>
-            <a:off x="685800" y="1143000"/>
-            <a:ext cx="5486400" cy="3086100"/>
-          </a:xfrm>
-          <a:prstGeom prst="rect">
-            <a:avLst/>
-          </a:prstGeom>
-          <a:noFill/>
-          <a:ln w="12700">
-            <a:solidFill>
-              <a:prstClr val="black"/>
-            </a:solidFill>
-          </a:ln>
-        </p:spPr>
-        <p:txBody>
-          <a:bodyPr vert="horz" lIns="91440" tIns="45720" rIns="91440" bIns="45720" rtlCol="0" anchor="ctr"/>
-          <a:lstStyle/>
-          <a:p>
-            <a:endParaRPr lang="en-US"/>
-          </a:p>
-        </p:txBody>
-      </p:sp>
-      <p:sp>
-        <p:nvSpPr>
-          <p:cNvPr id="5" name="Notes Placeholder 4"/>
-          <p:cNvSpPr>
-            <a:spLocks noGrp="1"/>
-          </p:cNvSpPr>
-          <p:nvPr>
-            <p:ph type="body" sz="quarter" idx="3"/>
-          </p:nvPr>
-        </p:nvSpPr>
-        <p:spPr>
-          <a:xfrm>
-            <a:off x="685800" y="4400550"/>
-            <a:ext cx="5486400" cy="3600450"/>
-          </a:xfrm>
-          <a:prstGeom prst="rect">
-            <a:avLst/>
-          </a:prstGeom>
-        </p:spPr>
-        <p:txBody>
-          <a:bodyPr vert="horz" lIns="91440" tIns="45720" rIns="91440" bIns="45720" rtlCol="0"/>
-          <a:lstStyle/>
-          <a:p>
-            <a:pPr lvl="0"/>
-            <a:r>
-              <a:rPr lang="en-US"/>
-              <a:t>Click to edit Master text styles</a:t>
-            </a:r>
-          </a:p>
-          <a:p>
-            <a:pPr lvl="1"/>
-            <a:r>
-              <a:rPr lang="en-US"/>
-              <a:t>Second level</a:t>
-            </a:r>
-          </a:p>
-          <a:p>
-            <a:pPr lvl="2"/>
-            <a:r>
-              <a:rPr lang="en-US"/>
-              <a:t>Third level</a:t>
-            </a:r>
-          </a:p>
-          <a:p>
-            <a:pPr lvl="3"/>
-            <a:r>
-              <a:rPr lang="en-US"/>
-              <a:t>Fourth level</a:t>
-            </a:r>
-          </a:p>
-          <a:p>
-            <a:pPr lvl="4"/>
-            <a:r>
-              <a:rPr lang="en-US"/>
-              <a:t>Fifth level</a:t>
-            </a:r>
-          </a:p>
-        </p:txBody>
-      </p:sp>
-      <p:sp>
-        <p:nvSpPr>
-          <p:cNvPr id="6" name="Footer Placeholder 5"/>
-          <p:cNvSpPr>
-            <a:spLocks noGrp="1"/>
-          </p:cNvSpPr>
-          <p:nvPr>
-            <p:ph type="ftr" sz="quarter" idx="4"/>
-          </p:nvPr>
-        </p:nvSpPr>
-        <p:spPr>
-          <a:xfrm>
-            <a:off x="0" y="8685213"/>
-            <a:ext cx="2971800" cy="458787"/>
-          </a:xfrm>
-          <a:prstGeom prst="rect">
-            <a:avLst/>
-          </a:prstGeom>
-        </p:spPr>
-        <p:txBody>
-          <a:bodyPr vert="horz" lIns="91440" tIns="45720" rIns="91440" bIns="45720" rtlCol="0" anchor="b"/>
-          <a:lstStyle>
-            <a:lvl1pPr algn="l">
-              <a:defRPr sz="1200"/>
-            </a:lvl1pPr>
-          </a:lstStyle>
-          <a:p>
-            <a:endParaRPr lang="en-US"/>
-          </a:p>
-        </p:txBody>
-      </p:sp>
-      <p:sp>
-        <p:nvSpPr>
-          <p:cNvPr id="7" name="Slide Number Placeholder 6"/>
-          <p:cNvSpPr>
-            <a:spLocks noGrp="1"/>
-          </p:cNvSpPr>
-          <p:nvPr>
-            <p:ph type="sldNum" sz="quarter" idx="5"/>
-          </p:nvPr>
-        </p:nvSpPr>
-        <p:spPr>
-          <a:xfrm>
-            <a:off x="3884613" y="8685213"/>
-            <a:ext cx="2971800" cy="458787"/>
-          </a:xfrm>
-          <a:prstGeom prst="rect">
-            <a:avLst/>
-          </a:prstGeom>
-        </p:spPr>
-        <p:txBody>
-          <a:bodyPr vert="horz" lIns="91440" tIns="45720" rIns="91440" bIns="45720" rtlCol="0" anchor="b"/>
-          <a:lstStyle>
-            <a:lvl1pPr algn="r">
-              <a:defRPr sz="1200"/>
-            </a:lvl1pPr>
-          </a:lstStyle>
-          <a:p>
-            <a:fld id="{CE5E9CC1-C706-0F49-92D6-E571CC5EEA8F}" type="slidenum">
-              <a:rPr lang="en-US"/>
-              <a:t>‹#›</a:t>
-            </a:fld>
-            <a:endParaRPr lang="en-US"/>
-          </a:p>
-        </p:txBody>
-      </p:sp>
-    </p:spTree>
-    <p:extLst>
-      <p:ext uri="{BB962C8B-B14F-4D97-AF65-F5344CB8AC3E}">
-        <p14:creationId xmlns:p14="http://schemas.microsoft.com/office/powerpoint/2010/main" val="1024086991"/>
-      </p:ext>
-    </p:extLst>
-  </p:cSld>
-  <p:clrMap bg1="lt1" tx1="dk1" bg2="lt2" tx2="dk2" accent1="accent1" accent2="accent2" accent3="accent3" accent4="accent4" accent5="accent5" accent6="accent6" hlink="hlink" folHlink="folHlink"/>
-  <p:notesStyle>
-    <a:lvl1pPr marL="0" algn="l" defTabSz="914400" rtl="0" eaLnBrk="1" latinLnBrk="0" hangingPunct="1">
-      <a:defRPr sz="1200" kern="1200">
-        <a:solidFill>
-          <a:schemeClr val="tx1"/>
-        </a:solidFill>
-        <a:latin typeface="+mn-lt"/>
-        <a:ea typeface="+mn-ea"/>
-        <a:cs typeface="+mn-cs"/>
-      </a:defRPr>
-    </a:lvl1pPr>
-    <a:lvl2pPr marL="457200" algn="l" defTabSz="914400" rtl="0" eaLnBrk="1" latinLnBrk="0" hangingPunct="1">
-      <a:defRPr sz="1200" kern="1200">
-        <a:solidFill>
-          <a:schemeClr val="tx1"/>
-        </a:solidFill>
-        <a:latin typeface="+mn-lt"/>
-        <a:ea typeface="+mn-ea"/>
-        <a:cs typeface="+mn-cs"/>
-      </a:defRPr>
-    </a:lvl2pPr>
-    <a:lvl3pPr marL="914400" algn="l" defTabSz="914400" rtl="0" eaLnBrk="1" latinLnBrk="0" hangingPunct="1">
-      <a:defRPr sz="1200" kern="1200">
-        <a:solidFill>
-          <a:schemeClr val="tx1"/>
-        </a:solidFill>
-        <a:latin typeface="+mn-lt"/>
-        <a:ea typeface="+mn-ea"/>
-        <a:cs typeface="+mn-cs"/>
-      </a:defRPr>
-    </a:lvl3pPr>
-    <a:lvl4pPr marL="1371600" algn="l" defTabSz="914400" rtl="0" eaLnBrk="1" latinLnBrk="0" hangingPunct="1">
-      <a:defRPr sz="1200" kern="1200">
-        <a:solidFill>
-          <a:schemeClr val="tx1"/>
-        </a:solidFill>
-        <a:latin typeface="+mn-lt"/>
-        <a:ea typeface="+mn-ea"/>
-        <a:cs typeface="+mn-cs"/>
-      </a:defRPr>
-    </a:lvl4pPr>
-    <a:lvl5pPr marL="1828800" algn="l" defTabSz="914400" rtl="0" eaLnBrk="1" latinLnBrk="0" hangingPunct="1">
-      <a:defRPr sz="1200" kern="1200">
-        <a:solidFill>
-          <a:schemeClr val="tx1"/>
-        </a:solidFill>
-        <a:latin typeface="+mn-lt"/>
-        <a:ea typeface="+mn-ea"/>
-        <a:cs typeface="+mn-cs"/>
-      </a:defRPr>
-    </a:lvl5pPr>
-    <a:lvl6pPr marL="2286000" algn="l" defTabSz="914400" rtl="0" eaLnBrk="1" latinLnBrk="0" hangingPunct="1">
-      <a:defRPr sz="1200" kern="1200">
-        <a:solidFill>
-          <a:schemeClr val="tx1"/>
-        </a:solidFill>
-        <a:latin typeface="+mn-lt"/>
-        <a:ea typeface="+mn-ea"/>
-        <a:cs typeface="+mn-cs"/>
-      </a:defRPr>
-    </a:lvl6pPr>
-    <a:lvl7pPr marL="2743200" algn="l" defTabSz="914400" rtl="0" eaLnBrk="1" latinLnBrk="0" hangingPunct="1">
-      <a:defRPr sz="1200" kern="1200">
-        <a:solidFill>
-          <a:schemeClr val="tx1"/>
-        </a:solidFill>
-        <a:latin typeface="+mn-lt"/>
-        <a:ea typeface="+mn-ea"/>
-        <a:cs typeface="+mn-cs"/>
-      </a:defRPr>
-    </a:lvl7pPr>
-    <a:lvl8pPr marL="3200400" algn="l" defTabSz="914400" rtl="0" eaLnBrk="1" latinLnBrk="0" hangingPunct="1">
-      <a:defRPr sz="1200" kern="1200">
-        <a:solidFill>
-          <a:schemeClr val="tx1"/>
-        </a:solidFill>
-        <a:latin typeface="+mn-lt"/>
-        <a:ea typeface="+mn-ea"/>
-        <a:cs typeface="+mn-cs"/>
-      </a:defRPr>
-    </a:lvl8pPr>
-    <a:lvl9pPr marL="3657600" algn="l" defTabSz="914400" rtl="0" eaLnBrk="1" latinLnBrk="0" hangingPunct="1">
-      <a:defRPr sz="1200" kern="1200">
-        <a:solidFill>
-          <a:schemeClr val="tx1"/>
-        </a:solidFill>
-        <a:latin typeface="+mn-lt"/>
-        <a:ea typeface="+mn-ea"/>
-        <a:cs typeface="+mn-cs"/>
-      </a:defRPr>
-    </a:lvl9pPr>
-  </p:notesStyle>
-</p:notesMaster>
-</file>
-
-<file path=ppt/notesSlides/notesSlide1.xml><?xml version="1.0" encoding="utf-8"?>
-<p:notes xmlns:a="http://schemas.openxmlformats.org/drawingml/2006/main" xmlns:r="http://schemas.openxmlformats.org/officeDocument/2006/relationships" xmlns:p="http://schemas.openxmlformats.org/presentationml/2006/main">
-  <p:cSld>
-    <p:spTree>
-      <p:nvGrpSpPr>
-        <p:cNvPr id="1" name=""/>
-        <p:cNvGrpSpPr/>
-        <p:nvPr/>
-      </p:nvGrpSpPr>
-      <p:grpSpPr>
-        <a:xfrm>
-          <a:off x="0" y="0"/>
-          <a:ext cx="0" cy="0"/>
-          <a:chOff x="0" y="0"/>
-          <a:chExt cx="0" cy="0"/>
-        </a:xfrm>
-      </p:grpSpPr>
-      <p:sp>
-        <p:nvSpPr>
-          <p:cNvPr id="2" name="Slide Image Placeholder 1"/>
-          <p:cNvSpPr>
-            <a:spLocks noGrp="1" noRot="1" noChangeAspect="1"/>
-          </p:cNvSpPr>
-          <p:nvPr>
-            <p:ph type="sldImg"/>
-          </p:nvPr>
-        </p:nvSpPr>
-        <p:spPr/>
-      </p:sp>
-      <p:sp>
-        <p:nvSpPr>
-          <p:cNvPr id="3" name="Notes Placeholder 2"/>
+          <p:cNvPr id="3" name="Text Placeholder 2"/>
           <p:cNvSpPr>
             <a:spLocks noGrp="1"/>
           </p:cNvSpPr>
@@ -515,125 +2648,172 @@
             <p:ph type="body" idx="1"/>
           </p:nvPr>
         </p:nvSpPr>
-        <p:spPr/>
-        <p:txBody>
-          <a:bodyPr/>
-          <a:lstStyle/>
-          <a:p>
-            <a:r>
-              <a:rPr lang="en-US" dirty="0"/>
-              <a:t/>
-            </a:r>
-            <a:endParaRPr lang="en-US" dirty="0"/>
-          </a:p>
-        </p:txBody>
-      </p:sp>
-      <p:sp>
-        <p:nvSpPr>
-          <p:cNvPr id="4" name="Slide Number Placeholder 3"/>
+        <p:spPr>
+          <a:xfrm>
+            <a:off x="457200" y="1600200"/>
+            <a:ext cx="8229600" cy="4525963"/>
+          </a:xfrm>
+          <a:prstGeom prst="rect">
+            <a:avLst/>
+          </a:prstGeom>
+        </p:spPr>
+        <p:txBody>
+          <a:bodyPr vert="horz" lIns="91440" tIns="45720" rIns="91440" bIns="45720" rtlCol="0">
+            <a:normAutofit/>
+          </a:bodyPr>
+          <a:lstStyle/>
+          <a:p>
+            <a:pPr lvl="0"/>
+            <a:r>
+              <a:rPr lang="en-US" smtClean="0"/>
+              <a:t>Click to edit Master text styles</a:t>
+            </a:r>
+          </a:p>
+          <a:p>
+            <a:pPr lvl="1"/>
+            <a:r>
+              <a:rPr lang="en-US" smtClean="0"/>
+              <a:t>Second level</a:t>
+            </a:r>
+          </a:p>
+          <a:p>
+            <a:pPr lvl="2"/>
+            <a:r>
+              <a:rPr lang="en-US" smtClean="0"/>
+              <a:t>Third level</a:t>
+            </a:r>
+          </a:p>
+          <a:p>
+            <a:pPr lvl="3"/>
+            <a:r>
+              <a:rPr lang="en-US" smtClean="0"/>
+              <a:t>Fourth level</a:t>
+            </a:r>
+          </a:p>
+          <a:p>
+            <a:pPr lvl="4"/>
+            <a:r>
+              <a:rPr lang="en-US" smtClean="0"/>
+              <a:t>Fifth level</a:t>
+            </a:r>
+            <a:endParaRPr lang="en-US"/>
+          </a:p>
+        </p:txBody>
+      </p:sp>
+      <p:sp>
+        <p:nvSpPr>
+          <p:cNvPr id="4" name="Date Placeholder 3"/>
           <p:cNvSpPr>
             <a:spLocks noGrp="1"/>
           </p:cNvSpPr>
           <p:nvPr>
-            <p:ph type="sldNum" sz="quarter" idx="10"/>
+            <p:ph type="dt" sz="half" idx="2"/>
           </p:nvPr>
         </p:nvSpPr>
-        <p:spPr/>
-        <p:txBody>
-          <a:bodyPr/>
-          <a:lstStyle/>
-          <a:p>
-            <a:fld id="{F7021451-1387-4CA6-816F-3879F97B5CBC}" type="slidenum">
-              <a:rPr lang="en-US"/>
-              <a:t>1</a:t>
+        <p:spPr>
+          <a:xfrm>
+            <a:off x="457200" y="6356350"/>
+            <a:ext cx="2133600" cy="365125"/>
+          </a:xfrm>
+          <a:prstGeom prst="rect">
+            <a:avLst/>
+          </a:prstGeom>
+        </p:spPr>
+        <p:txBody>
+          <a:bodyPr vert="horz" lIns="91440" tIns="45720" rIns="91440" bIns="45720" rtlCol="0" anchor="ctr"/>
+          <a:lstStyle>
+            <a:lvl1pPr algn="l">
+              <a:defRPr sz="1200">
+                <a:solidFill>
+                  <a:schemeClr val="tx1">
+                    <a:tint val="75000"/>
+                  </a:schemeClr>
+                </a:solidFill>
+              </a:defRPr>
+            </a:lvl1pPr>
+          </a:lstStyle>
+          <a:p>
+            <a:fld id="{5BCAD085-E8A6-8845-BD4E-CB4CCA059FC4}" type="datetimeFigureOut">
+              <a:rPr lang="en-US" smtClean="0"/>
+              <a:t>1/27/13</a:t>
             </a:fld>
             <a:endParaRPr lang="en-US"/>
           </a:p>
         </p:txBody>
       </p:sp>
-    </p:spTree>
-    <p:extLst>
-      <p:ext uri="{BB962C8B-B14F-4D97-AF65-F5344CB8AC3E}">
-        <p14:creationId xmlns:p14="http://schemas.microsoft.com/office/powerpoint/2010/main" val="1024086991"/>
-      </p:ext>
-    </p:extLst>
-  </p:cSld>
-  <p:clrMapOvr>
-    <a:masterClrMapping/>
-  </p:clrMapOvr>
-</p:notes>
-</file>
-
-<file path=ppt/notesSlides/notesSlide10.xml><?xml version="1.0" encoding="utf-8"?>
-<p:notes xmlns:a="http://schemas.openxmlformats.org/drawingml/2006/main" xmlns:r="http://schemas.openxmlformats.org/officeDocument/2006/relationships" xmlns:p="http://schemas.openxmlformats.org/presentationml/2006/main">
-  <p:cSld>
-    <p:spTree>
-      <p:nvGrpSpPr>
-        <p:cNvPr id="1" name=""/>
-        <p:cNvGrpSpPr/>
-        <p:nvPr/>
-      </p:nvGrpSpPr>
-      <p:grpSpPr>
-        <a:xfrm>
-          <a:off x="0" y="0"/>
-          <a:ext cx="0" cy="0"/>
-          <a:chOff x="0" y="0"/>
-          <a:chExt cx="0" cy="0"/>
-        </a:xfrm>
-      </p:grpSpPr>
-      <p:sp>
-        <p:nvSpPr>
-          <p:cNvPr id="2" name="Slide Image Placeholder 1"/>
-          <p:cNvSpPr>
-            <a:spLocks noGrp="1" noRot="1" noChangeAspect="1"/>
-          </p:cNvSpPr>
-          <p:nvPr>
-            <p:ph type="sldImg"/>
-          </p:nvPr>
-        </p:nvSpPr>
-        <p:spPr/>
-      </p:sp>
-      <p:sp>
-        <p:nvSpPr>
-          <p:cNvPr id="3" name="Notes Placeholder 2"/>
+      <p:sp>
+        <p:nvSpPr>
+          <p:cNvPr id="5" name="Footer Placeholder 4"/>
           <p:cNvSpPr>
             <a:spLocks noGrp="1"/>
           </p:cNvSpPr>
           <p:nvPr>
-            <p:ph type="body" idx="1"/>
+            <p:ph type="ftr" sz="quarter" idx="3"/>
           </p:nvPr>
         </p:nvSpPr>
-        <p:spPr/>
-        <p:txBody>
-          <a:bodyPr/>
-          <a:lstStyle/>
-          <a:p>
-            <a:r>
-              <a:rPr lang="en-US" dirty="0"/>
-              <a:t/>
-            </a:r>
-            <a:endParaRPr lang="en-US" dirty="0"/>
-          </a:p>
-        </p:txBody>
-      </p:sp>
-      <p:sp>
-        <p:nvSpPr>
-          <p:cNvPr id="4" name="Slide Number Placeholder 3"/>
+        <p:spPr>
+          <a:xfrm>
+            <a:off x="3124200" y="6356350"/>
+            <a:ext cx="2895600" cy="365125"/>
+          </a:xfrm>
+          <a:prstGeom prst="rect">
+            <a:avLst/>
+          </a:prstGeom>
+        </p:spPr>
+        <p:txBody>
+          <a:bodyPr vert="horz" lIns="91440" tIns="45720" rIns="91440" bIns="45720" rtlCol="0" anchor="ctr"/>
+          <a:lstStyle>
+            <a:lvl1pPr algn="ctr">
+              <a:defRPr sz="1200">
+                <a:solidFill>
+                  <a:schemeClr val="tx1">
+                    <a:tint val="75000"/>
+                  </a:schemeClr>
+                </a:solidFill>
+              </a:defRPr>
+            </a:lvl1pPr>
+          </a:lstStyle>
+          <a:p>
+            <a:endParaRPr lang="en-US"/>
+          </a:p>
+        </p:txBody>
+      </p:sp>
+      <p:sp>
+        <p:nvSpPr>
+          <p:cNvPr id="6" name="Slide Number Placeholder 5"/>
           <p:cNvSpPr>
             <a:spLocks noGrp="1"/>
           </p:cNvSpPr>
           <p:nvPr>
-            <p:ph type="sldNum" sz="quarter" idx="10"/>
+            <p:ph type="sldNum" sz="quarter" idx="4"/>
           </p:nvPr>
         </p:nvSpPr>
-        <p:spPr/>
-        <p:txBody>
-          <a:bodyPr/>
-          <a:lstStyle/>
-          <a:p>
-            <a:fld id="{F7021451-1387-4CA6-816F-3879F97B5CBC}" type="slidenum">
-              <a:rPr lang="en-US"/>
-              <a:t>10</a:t>
+        <p:spPr>
+          <a:xfrm>
+            <a:off x="6553200" y="6356350"/>
+            <a:ext cx="2133600" cy="365125"/>
+          </a:xfrm>
+          <a:prstGeom prst="rect">
+            <a:avLst/>
+          </a:prstGeom>
+        </p:spPr>
+        <p:txBody>
+          <a:bodyPr vert="horz" lIns="91440" tIns="45720" rIns="91440" bIns="45720" rtlCol="0" anchor="ctr"/>
+          <a:lstStyle>
+            <a:lvl1pPr algn="r">
+              <a:defRPr sz="1200">
+                <a:solidFill>
+                  <a:schemeClr val="tx1">
+                    <a:tint val="75000"/>
+                  </a:schemeClr>
+                </a:solidFill>
+              </a:defRPr>
+            </a:lvl1pPr>
+          </a:lstStyle>
+          <a:p>
+            <a:fld id="{C1FF6DA9-008F-8B48-92A6-B652298478BF}" type="slidenum">
+              <a:rPr lang="en-US" smtClean="0"/>
+              <a:t>‹#›</a:t>
             </a:fld>
             <a:endParaRPr lang="en-US"/>
           </a:p>
@@ -642,865 +2822,27 @@
     </p:spTree>
     <p:extLst>
       <p:ext uri="{BB962C8B-B14F-4D97-AF65-F5344CB8AC3E}">
-        <p14:creationId xmlns:p14="http://schemas.microsoft.com/office/powerpoint/2010/main" val="1024086991"/>
+        <p14:creationId xmlns:p14="http://schemas.microsoft.com/office/powerpoint/2010/main" val="2209977519"/>
       </p:ext>
     </p:extLst>
-  </p:cSld>
-  <p:clrMapOvr>
-    <a:masterClrMapping/>
-  </p:clrMapOvr>
-</p:notes>
-</file>
-
-<file path=ppt/notesSlides/notesSlide11.xml><?xml version="1.0" encoding="utf-8"?>
-<p:notes xmlns:a="http://schemas.openxmlformats.org/drawingml/2006/main" xmlns:r="http://schemas.openxmlformats.org/officeDocument/2006/relationships" xmlns:p="http://schemas.openxmlformats.org/presentationml/2006/main">
-  <p:cSld>
-    <p:spTree>
-      <p:nvGrpSpPr>
-        <p:cNvPr id="1" name=""/>
-        <p:cNvGrpSpPr/>
-        <p:nvPr/>
-      </p:nvGrpSpPr>
-      <p:grpSpPr>
-        <a:xfrm>
-          <a:off x="0" y="0"/>
-          <a:ext cx="0" cy="0"/>
-          <a:chOff x="0" y="0"/>
-          <a:chExt cx="0" cy="0"/>
-        </a:xfrm>
-      </p:grpSpPr>
-      <p:sp>
-        <p:nvSpPr>
-          <p:cNvPr id="2" name="Slide Image Placeholder 1"/>
-          <p:cNvSpPr>
-            <a:spLocks noGrp="1" noRot="1" noChangeAspect="1"/>
-          </p:cNvSpPr>
-          <p:nvPr>
-            <p:ph type="sldImg"/>
-          </p:nvPr>
-        </p:nvSpPr>
-        <p:spPr/>
-      </p:sp>
-      <p:sp>
-        <p:nvSpPr>
-          <p:cNvPr id="3" name="Notes Placeholder 2"/>
-          <p:cNvSpPr>
-            <a:spLocks noGrp="1"/>
-          </p:cNvSpPr>
-          <p:nvPr>
-            <p:ph type="body" idx="1"/>
-          </p:nvPr>
-        </p:nvSpPr>
-        <p:spPr/>
-        <p:txBody>
-          <a:bodyPr/>
-          <a:lstStyle/>
-          <a:p>
-            <a:r>
-              <a:rPr lang="en-US" dirty="0"/>
-              <a:t/>
-            </a:r>
-            <a:endParaRPr lang="en-US" dirty="0"/>
-          </a:p>
-        </p:txBody>
-      </p:sp>
-      <p:sp>
-        <p:nvSpPr>
-          <p:cNvPr id="4" name="Slide Number Placeholder 3"/>
-          <p:cNvSpPr>
-            <a:spLocks noGrp="1"/>
-          </p:cNvSpPr>
-          <p:nvPr>
-            <p:ph type="sldNum" sz="quarter" idx="10"/>
-          </p:nvPr>
-        </p:nvSpPr>
-        <p:spPr/>
-        <p:txBody>
-          <a:bodyPr/>
-          <a:lstStyle/>
-          <a:p>
-            <a:fld id="{F7021451-1387-4CA6-816F-3879F97B5CBC}" type="slidenum">
-              <a:rPr lang="en-US"/>
-              <a:t>11</a:t>
-            </a:fld>
-            <a:endParaRPr lang="en-US"/>
-          </a:p>
-        </p:txBody>
-      </p:sp>
-    </p:spTree>
-    <p:extLst>
-      <p:ext uri="{BB962C8B-B14F-4D97-AF65-F5344CB8AC3E}">
-        <p14:creationId xmlns:p14="http://schemas.microsoft.com/office/powerpoint/2010/main" val="1024086991"/>
-      </p:ext>
-    </p:extLst>
-  </p:cSld>
-  <p:clrMapOvr>
-    <a:masterClrMapping/>
-  </p:clrMapOvr>
-</p:notes>
-</file>
-
-<file path=ppt/notesSlides/notesSlide12.xml><?xml version="1.0" encoding="utf-8"?>
-<p:notes xmlns:a="http://schemas.openxmlformats.org/drawingml/2006/main" xmlns:r="http://schemas.openxmlformats.org/officeDocument/2006/relationships" xmlns:p="http://schemas.openxmlformats.org/presentationml/2006/main">
-  <p:cSld>
-    <p:spTree>
-      <p:nvGrpSpPr>
-        <p:cNvPr id="1" name=""/>
-        <p:cNvGrpSpPr/>
-        <p:nvPr/>
-      </p:nvGrpSpPr>
-      <p:grpSpPr>
-        <a:xfrm>
-          <a:off x="0" y="0"/>
-          <a:ext cx="0" cy="0"/>
-          <a:chOff x="0" y="0"/>
-          <a:chExt cx="0" cy="0"/>
-        </a:xfrm>
-      </p:grpSpPr>
-      <p:sp>
-        <p:nvSpPr>
-          <p:cNvPr id="2" name="Slide Image Placeholder 1"/>
-          <p:cNvSpPr>
-            <a:spLocks noGrp="1" noRot="1" noChangeAspect="1"/>
-          </p:cNvSpPr>
-          <p:nvPr>
-            <p:ph type="sldImg"/>
-          </p:nvPr>
-        </p:nvSpPr>
-        <p:spPr/>
-      </p:sp>
-      <p:sp>
-        <p:nvSpPr>
-          <p:cNvPr id="3" name="Notes Placeholder 2"/>
-          <p:cNvSpPr>
-            <a:spLocks noGrp="1"/>
-          </p:cNvSpPr>
-          <p:nvPr>
-            <p:ph type="body" idx="1"/>
-          </p:nvPr>
-        </p:nvSpPr>
-        <p:spPr/>
-        <p:txBody>
-          <a:bodyPr/>
-          <a:lstStyle/>
-          <a:p>
-            <a:r>
-              <a:rPr lang="en-US" dirty="0"/>
-              <a:t/>
-            </a:r>
-            <a:endParaRPr lang="en-US" dirty="0"/>
-          </a:p>
-        </p:txBody>
-      </p:sp>
-      <p:sp>
-        <p:nvSpPr>
-          <p:cNvPr id="4" name="Slide Number Placeholder 3"/>
-          <p:cNvSpPr>
-            <a:spLocks noGrp="1"/>
-          </p:cNvSpPr>
-          <p:nvPr>
-            <p:ph type="sldNum" sz="quarter" idx="10"/>
-          </p:nvPr>
-        </p:nvSpPr>
-        <p:spPr/>
-        <p:txBody>
-          <a:bodyPr/>
-          <a:lstStyle/>
-          <a:p>
-            <a:fld id="{F7021451-1387-4CA6-816F-3879F97B5CBC}" type="slidenum">
-              <a:rPr lang="en-US"/>
-              <a:t>12</a:t>
-            </a:fld>
-            <a:endParaRPr lang="en-US"/>
-          </a:p>
-        </p:txBody>
-      </p:sp>
-    </p:spTree>
-    <p:extLst>
-      <p:ext uri="{BB962C8B-B14F-4D97-AF65-F5344CB8AC3E}">
-        <p14:creationId xmlns:p14="http://schemas.microsoft.com/office/powerpoint/2010/main" val="1024086991"/>
-      </p:ext>
-    </p:extLst>
-  </p:cSld>
-  <p:clrMapOvr>
-    <a:masterClrMapping/>
-  </p:clrMapOvr>
-</p:notes>
-</file>
-
-<file path=ppt/notesSlides/notesSlide3.xml><?xml version="1.0" encoding="utf-8"?>
-<p:notes xmlns:a="http://schemas.openxmlformats.org/drawingml/2006/main" xmlns:r="http://schemas.openxmlformats.org/officeDocument/2006/relationships" xmlns:p="http://schemas.openxmlformats.org/presentationml/2006/main">
-  <p:cSld>
-    <p:spTree>
-      <p:nvGrpSpPr>
-        <p:cNvPr id="1" name=""/>
-        <p:cNvGrpSpPr/>
-        <p:nvPr/>
-      </p:nvGrpSpPr>
-      <p:grpSpPr>
-        <a:xfrm>
-          <a:off x="0" y="0"/>
-          <a:ext cx="0" cy="0"/>
-          <a:chOff x="0" y="0"/>
-          <a:chExt cx="0" cy="0"/>
-        </a:xfrm>
-      </p:grpSpPr>
-      <p:sp>
-        <p:nvSpPr>
-          <p:cNvPr id="2" name="Slide Image Placeholder 1"/>
-          <p:cNvSpPr>
-            <a:spLocks noGrp="1" noRot="1" noChangeAspect="1"/>
-          </p:cNvSpPr>
-          <p:nvPr>
-            <p:ph type="sldImg"/>
-          </p:nvPr>
-        </p:nvSpPr>
-        <p:spPr/>
-      </p:sp>
-      <p:sp>
-        <p:nvSpPr>
-          <p:cNvPr id="3" name="Notes Placeholder 2"/>
-          <p:cNvSpPr>
-            <a:spLocks noGrp="1"/>
-          </p:cNvSpPr>
-          <p:nvPr>
-            <p:ph type="body" idx="1"/>
-          </p:nvPr>
-        </p:nvSpPr>
-        <p:spPr/>
-        <p:txBody>
-          <a:bodyPr/>
-          <a:lstStyle/>
-          <a:p>
-            <a:r>
-              <a:rPr lang="en-US" dirty="0"/>
-              <a:t/>
-            </a:r>
-            <a:endParaRPr lang="en-US" dirty="0"/>
-          </a:p>
-        </p:txBody>
-      </p:sp>
-      <p:sp>
-        <p:nvSpPr>
-          <p:cNvPr id="4" name="Slide Number Placeholder 3"/>
-          <p:cNvSpPr>
-            <a:spLocks noGrp="1"/>
-          </p:cNvSpPr>
-          <p:nvPr>
-            <p:ph type="sldNum" sz="quarter" idx="10"/>
-          </p:nvPr>
-        </p:nvSpPr>
-        <p:spPr/>
-        <p:txBody>
-          <a:bodyPr/>
-          <a:lstStyle/>
-          <a:p>
-            <a:fld id="{F7021451-1387-4CA6-816F-3879F97B5CBC}" type="slidenum">
-              <a:rPr lang="en-US"/>
-              <a:t>3</a:t>
-            </a:fld>
-            <a:endParaRPr lang="en-US"/>
-          </a:p>
-        </p:txBody>
-      </p:sp>
-    </p:spTree>
-    <p:extLst>
-      <p:ext uri="{BB962C8B-B14F-4D97-AF65-F5344CB8AC3E}">
-        <p14:creationId xmlns:p14="http://schemas.microsoft.com/office/powerpoint/2010/main" val="1024086991"/>
-      </p:ext>
-    </p:extLst>
-  </p:cSld>
-  <p:clrMapOvr>
-    <a:masterClrMapping/>
-  </p:clrMapOvr>
-</p:notes>
-</file>
-
-<file path=ppt/notesSlides/notesSlide4.xml><?xml version="1.0" encoding="utf-8"?>
-<p:notes xmlns:a="http://schemas.openxmlformats.org/drawingml/2006/main" xmlns:r="http://schemas.openxmlformats.org/officeDocument/2006/relationships" xmlns:p="http://schemas.openxmlformats.org/presentationml/2006/main">
-  <p:cSld>
-    <p:spTree>
-      <p:nvGrpSpPr>
-        <p:cNvPr id="1" name=""/>
-        <p:cNvGrpSpPr/>
-        <p:nvPr/>
-      </p:nvGrpSpPr>
-      <p:grpSpPr>
-        <a:xfrm>
-          <a:off x="0" y="0"/>
-          <a:ext cx="0" cy="0"/>
-          <a:chOff x="0" y="0"/>
-          <a:chExt cx="0" cy="0"/>
-        </a:xfrm>
-      </p:grpSpPr>
-      <p:sp>
-        <p:nvSpPr>
-          <p:cNvPr id="2" name="Slide Image Placeholder 1"/>
-          <p:cNvSpPr>
-            <a:spLocks noGrp="1" noRot="1" noChangeAspect="1"/>
-          </p:cNvSpPr>
-          <p:nvPr>
-            <p:ph type="sldImg"/>
-          </p:nvPr>
-        </p:nvSpPr>
-        <p:spPr/>
-      </p:sp>
-      <p:sp>
-        <p:nvSpPr>
-          <p:cNvPr id="3" name="Notes Placeholder 2"/>
-          <p:cNvSpPr>
-            <a:spLocks noGrp="1"/>
-          </p:cNvSpPr>
-          <p:nvPr>
-            <p:ph type="body" idx="1"/>
-          </p:nvPr>
-        </p:nvSpPr>
-        <p:spPr/>
-        <p:txBody>
-          <a:bodyPr/>
-          <a:lstStyle/>
-          <a:p>
-            <a:r>
-              <a:rPr lang="en-US" dirty="0"/>
-              <a:t/>
-            </a:r>
-            <a:endParaRPr lang="en-US" dirty="0"/>
-          </a:p>
-        </p:txBody>
-      </p:sp>
-      <p:sp>
-        <p:nvSpPr>
-          <p:cNvPr id="4" name="Slide Number Placeholder 3"/>
-          <p:cNvSpPr>
-            <a:spLocks noGrp="1"/>
-          </p:cNvSpPr>
-          <p:nvPr>
-            <p:ph type="sldNum" sz="quarter" idx="10"/>
-          </p:nvPr>
-        </p:nvSpPr>
-        <p:spPr/>
-        <p:txBody>
-          <a:bodyPr/>
-          <a:lstStyle/>
-          <a:p>
-            <a:fld id="{F7021451-1387-4CA6-816F-3879F97B5CBC}" type="slidenum">
-              <a:rPr lang="en-US"/>
-              <a:t>4</a:t>
-            </a:fld>
-            <a:endParaRPr lang="en-US"/>
-          </a:p>
-        </p:txBody>
-      </p:sp>
-    </p:spTree>
-    <p:extLst>
-      <p:ext uri="{BB962C8B-B14F-4D97-AF65-F5344CB8AC3E}">
-        <p14:creationId xmlns:p14="http://schemas.microsoft.com/office/powerpoint/2010/main" val="1024086991"/>
-      </p:ext>
-    </p:extLst>
-  </p:cSld>
-  <p:clrMapOvr>
-    <a:masterClrMapping/>
-  </p:clrMapOvr>
-</p:notes>
-</file>
-
-<file path=ppt/notesSlides/notesSlide5.xml><?xml version="1.0" encoding="utf-8"?>
-<p:notes xmlns:a="http://schemas.openxmlformats.org/drawingml/2006/main" xmlns:r="http://schemas.openxmlformats.org/officeDocument/2006/relationships" xmlns:p="http://schemas.openxmlformats.org/presentationml/2006/main">
-  <p:cSld>
-    <p:spTree>
-      <p:nvGrpSpPr>
-        <p:cNvPr id="1" name=""/>
-        <p:cNvGrpSpPr/>
-        <p:nvPr/>
-      </p:nvGrpSpPr>
-      <p:grpSpPr>
-        <a:xfrm>
-          <a:off x="0" y="0"/>
-          <a:ext cx="0" cy="0"/>
-          <a:chOff x="0" y="0"/>
-          <a:chExt cx="0" cy="0"/>
-        </a:xfrm>
-      </p:grpSpPr>
-      <p:sp>
-        <p:nvSpPr>
-          <p:cNvPr id="2" name="Slide Image Placeholder 1"/>
-          <p:cNvSpPr>
-            <a:spLocks noGrp="1" noRot="1" noChangeAspect="1"/>
-          </p:cNvSpPr>
-          <p:nvPr>
-            <p:ph type="sldImg"/>
-          </p:nvPr>
-        </p:nvSpPr>
-        <p:spPr/>
-      </p:sp>
-      <p:sp>
-        <p:nvSpPr>
-          <p:cNvPr id="3" name="Notes Placeholder 2"/>
-          <p:cNvSpPr>
-            <a:spLocks noGrp="1"/>
-          </p:cNvSpPr>
-          <p:nvPr>
-            <p:ph type="body" idx="1"/>
-          </p:nvPr>
-        </p:nvSpPr>
-        <p:spPr/>
-        <p:txBody>
-          <a:bodyPr/>
-          <a:lstStyle/>
-          <a:p>
-            <a:r>
-              <a:rPr lang="en-US" dirty="0"/>
-              <a:t/>
-            </a:r>
-            <a:endParaRPr lang="en-US" dirty="0"/>
-          </a:p>
-        </p:txBody>
-      </p:sp>
-      <p:sp>
-        <p:nvSpPr>
-          <p:cNvPr id="4" name="Slide Number Placeholder 3"/>
-          <p:cNvSpPr>
-            <a:spLocks noGrp="1"/>
-          </p:cNvSpPr>
-          <p:nvPr>
-            <p:ph type="sldNum" sz="quarter" idx="10"/>
-          </p:nvPr>
-        </p:nvSpPr>
-        <p:spPr/>
-        <p:txBody>
-          <a:bodyPr/>
-          <a:lstStyle/>
-          <a:p>
-            <a:fld id="{F7021451-1387-4CA6-816F-3879F97B5CBC}" type="slidenum">
-              <a:rPr lang="en-US"/>
-              <a:t>5</a:t>
-            </a:fld>
-            <a:endParaRPr lang="en-US"/>
-          </a:p>
-        </p:txBody>
-      </p:sp>
-    </p:spTree>
-    <p:extLst>
-      <p:ext uri="{BB962C8B-B14F-4D97-AF65-F5344CB8AC3E}">
-        <p14:creationId xmlns:p14="http://schemas.microsoft.com/office/powerpoint/2010/main" val="1024086991"/>
-      </p:ext>
-    </p:extLst>
-  </p:cSld>
-  <p:clrMapOvr>
-    <a:masterClrMapping/>
-  </p:clrMapOvr>
-</p:notes>
-</file>
-
-<file path=ppt/notesSlides/notesSlide6.xml><?xml version="1.0" encoding="utf-8"?>
-<p:notes xmlns:a="http://schemas.openxmlformats.org/drawingml/2006/main" xmlns:r="http://schemas.openxmlformats.org/officeDocument/2006/relationships" xmlns:p="http://schemas.openxmlformats.org/presentationml/2006/main">
-  <p:cSld>
-    <p:spTree>
-      <p:nvGrpSpPr>
-        <p:cNvPr id="1" name=""/>
-        <p:cNvGrpSpPr/>
-        <p:nvPr/>
-      </p:nvGrpSpPr>
-      <p:grpSpPr>
-        <a:xfrm>
-          <a:off x="0" y="0"/>
-          <a:ext cx="0" cy="0"/>
-          <a:chOff x="0" y="0"/>
-          <a:chExt cx="0" cy="0"/>
-        </a:xfrm>
-      </p:grpSpPr>
-      <p:sp>
-        <p:nvSpPr>
-          <p:cNvPr id="2" name="Slide Image Placeholder 1"/>
-          <p:cNvSpPr>
-            <a:spLocks noGrp="1" noRot="1" noChangeAspect="1"/>
-          </p:cNvSpPr>
-          <p:nvPr>
-            <p:ph type="sldImg"/>
-          </p:nvPr>
-        </p:nvSpPr>
-        <p:spPr/>
-      </p:sp>
-      <p:sp>
-        <p:nvSpPr>
-          <p:cNvPr id="3" name="Notes Placeholder 2"/>
-          <p:cNvSpPr>
-            <a:spLocks noGrp="1"/>
-          </p:cNvSpPr>
-          <p:nvPr>
-            <p:ph type="body" idx="1"/>
-          </p:nvPr>
-        </p:nvSpPr>
-        <p:spPr/>
-        <p:txBody>
-          <a:bodyPr/>
-          <a:lstStyle/>
-          <a:p>
-            <a:r>
-              <a:rPr lang="en-US" dirty="0"/>
-              <a:t/>
-            </a:r>
-            <a:endParaRPr lang="en-US" dirty="0"/>
-          </a:p>
-        </p:txBody>
-      </p:sp>
-      <p:sp>
-        <p:nvSpPr>
-          <p:cNvPr id="4" name="Slide Number Placeholder 3"/>
-          <p:cNvSpPr>
-            <a:spLocks noGrp="1"/>
-          </p:cNvSpPr>
-          <p:nvPr>
-            <p:ph type="sldNum" sz="quarter" idx="10"/>
-          </p:nvPr>
-        </p:nvSpPr>
-        <p:spPr/>
-        <p:txBody>
-          <a:bodyPr/>
-          <a:lstStyle/>
-          <a:p>
-            <a:fld id="{F7021451-1387-4CA6-816F-3879F97B5CBC}" type="slidenum">
-              <a:rPr lang="en-US"/>
-              <a:t>6</a:t>
-            </a:fld>
-            <a:endParaRPr lang="en-US"/>
-          </a:p>
-        </p:txBody>
-      </p:sp>
-    </p:spTree>
-    <p:extLst>
-      <p:ext uri="{BB962C8B-B14F-4D97-AF65-F5344CB8AC3E}">
-        <p14:creationId xmlns:p14="http://schemas.microsoft.com/office/powerpoint/2010/main" val="1024086991"/>
-      </p:ext>
-    </p:extLst>
-  </p:cSld>
-  <p:clrMapOvr>
-    <a:masterClrMapping/>
-  </p:clrMapOvr>
-</p:notes>
-</file>
-
-<file path=ppt/notesSlides/notesSlide7.xml><?xml version="1.0" encoding="utf-8"?>
-<p:notes xmlns:a="http://schemas.openxmlformats.org/drawingml/2006/main" xmlns:r="http://schemas.openxmlformats.org/officeDocument/2006/relationships" xmlns:p="http://schemas.openxmlformats.org/presentationml/2006/main">
-  <p:cSld>
-    <p:spTree>
-      <p:nvGrpSpPr>
-        <p:cNvPr id="1" name=""/>
-        <p:cNvGrpSpPr/>
-        <p:nvPr/>
-      </p:nvGrpSpPr>
-      <p:grpSpPr>
-        <a:xfrm>
-          <a:off x="0" y="0"/>
-          <a:ext cx="0" cy="0"/>
-          <a:chOff x="0" y="0"/>
-          <a:chExt cx="0" cy="0"/>
-        </a:xfrm>
-      </p:grpSpPr>
-      <p:sp>
-        <p:nvSpPr>
-          <p:cNvPr id="2" name="Slide Image Placeholder 1"/>
-          <p:cNvSpPr>
-            <a:spLocks noGrp="1" noRot="1" noChangeAspect="1"/>
-          </p:cNvSpPr>
-          <p:nvPr>
-            <p:ph type="sldImg"/>
-          </p:nvPr>
-        </p:nvSpPr>
-        <p:spPr/>
-      </p:sp>
-      <p:sp>
-        <p:nvSpPr>
-          <p:cNvPr id="3" name="Notes Placeholder 2"/>
-          <p:cNvSpPr>
-            <a:spLocks noGrp="1"/>
-          </p:cNvSpPr>
-          <p:nvPr>
-            <p:ph type="body" idx="1"/>
-          </p:nvPr>
-        </p:nvSpPr>
-        <p:spPr/>
-        <p:txBody>
-          <a:bodyPr/>
-          <a:lstStyle/>
-          <a:p>
-            <a:r>
-              <a:rPr lang="en-US" dirty="0"/>
-              <a:t/>
-            </a:r>
-            <a:endParaRPr lang="en-US" dirty="0"/>
-          </a:p>
-        </p:txBody>
-      </p:sp>
-      <p:sp>
-        <p:nvSpPr>
-          <p:cNvPr id="4" name="Slide Number Placeholder 3"/>
-          <p:cNvSpPr>
-            <a:spLocks noGrp="1"/>
-          </p:cNvSpPr>
-          <p:nvPr>
-            <p:ph type="sldNum" sz="quarter" idx="10"/>
-          </p:nvPr>
-        </p:nvSpPr>
-        <p:spPr/>
-        <p:txBody>
-          <a:bodyPr/>
-          <a:lstStyle/>
-          <a:p>
-            <a:fld id="{F7021451-1387-4CA6-816F-3879F97B5CBC}" type="slidenum">
-              <a:rPr lang="en-US"/>
-              <a:t>7</a:t>
-            </a:fld>
-            <a:endParaRPr lang="en-US"/>
-          </a:p>
-        </p:txBody>
-      </p:sp>
-    </p:spTree>
-    <p:extLst>
-      <p:ext uri="{BB962C8B-B14F-4D97-AF65-F5344CB8AC3E}">
-        <p14:creationId xmlns:p14="http://schemas.microsoft.com/office/powerpoint/2010/main" val="1024086991"/>
-      </p:ext>
-    </p:extLst>
-  </p:cSld>
-  <p:clrMapOvr>
-    <a:masterClrMapping/>
-  </p:clrMapOvr>
-</p:notes>
-</file>
-
-<file path=ppt/notesSlides/notesSlide8.xml><?xml version="1.0" encoding="utf-8"?>
-<p:notes xmlns:a="http://schemas.openxmlformats.org/drawingml/2006/main" xmlns:r="http://schemas.openxmlformats.org/officeDocument/2006/relationships" xmlns:p="http://schemas.openxmlformats.org/presentationml/2006/main">
-  <p:cSld>
-    <p:spTree>
-      <p:nvGrpSpPr>
-        <p:cNvPr id="1" name=""/>
-        <p:cNvGrpSpPr/>
-        <p:nvPr/>
-      </p:nvGrpSpPr>
-      <p:grpSpPr>
-        <a:xfrm>
-          <a:off x="0" y="0"/>
-          <a:ext cx="0" cy="0"/>
-          <a:chOff x="0" y="0"/>
-          <a:chExt cx="0" cy="0"/>
-        </a:xfrm>
-      </p:grpSpPr>
-      <p:sp>
-        <p:nvSpPr>
-          <p:cNvPr id="2" name="Slide Image Placeholder 1"/>
-          <p:cNvSpPr>
-            <a:spLocks noGrp="1" noRot="1" noChangeAspect="1"/>
-          </p:cNvSpPr>
-          <p:nvPr>
-            <p:ph type="sldImg"/>
-          </p:nvPr>
-        </p:nvSpPr>
-        <p:spPr/>
-      </p:sp>
-      <p:sp>
-        <p:nvSpPr>
-          <p:cNvPr id="3" name="Notes Placeholder 2"/>
-          <p:cNvSpPr>
-            <a:spLocks noGrp="1"/>
-          </p:cNvSpPr>
-          <p:nvPr>
-            <p:ph type="body" idx="1"/>
-          </p:nvPr>
-        </p:nvSpPr>
-        <p:spPr/>
-        <p:txBody>
-          <a:bodyPr/>
-          <a:lstStyle/>
-          <a:p>
-            <a:r>
-              <a:rPr lang="en-US" dirty="0"/>
-              <a:t/>
-            </a:r>
-            <a:endParaRPr lang="en-US" dirty="0"/>
-          </a:p>
-        </p:txBody>
-      </p:sp>
-      <p:sp>
-        <p:nvSpPr>
-          <p:cNvPr id="4" name="Slide Number Placeholder 3"/>
-          <p:cNvSpPr>
-            <a:spLocks noGrp="1"/>
-          </p:cNvSpPr>
-          <p:nvPr>
-            <p:ph type="sldNum" sz="quarter" idx="10"/>
-          </p:nvPr>
-        </p:nvSpPr>
-        <p:spPr/>
-        <p:txBody>
-          <a:bodyPr/>
-          <a:lstStyle/>
-          <a:p>
-            <a:fld id="{F7021451-1387-4CA6-816F-3879F97B5CBC}" type="slidenum">
-              <a:rPr lang="en-US"/>
-              <a:t>8</a:t>
-            </a:fld>
-            <a:endParaRPr lang="en-US"/>
-          </a:p>
-        </p:txBody>
-      </p:sp>
-    </p:spTree>
-    <p:extLst>
-      <p:ext uri="{BB962C8B-B14F-4D97-AF65-F5344CB8AC3E}">
-        <p14:creationId xmlns:p14="http://schemas.microsoft.com/office/powerpoint/2010/main" val="1024086991"/>
-      </p:ext>
-    </p:extLst>
-  </p:cSld>
-  <p:clrMapOvr>
-    <a:masterClrMapping/>
-  </p:clrMapOvr>
-</p:notes>
-</file>
-
-<file path=ppt/notesSlides/notesSlide9.xml><?xml version="1.0" encoding="utf-8"?>
-<p:notes xmlns:a="http://schemas.openxmlformats.org/drawingml/2006/main" xmlns:r="http://schemas.openxmlformats.org/officeDocument/2006/relationships" xmlns:p="http://schemas.openxmlformats.org/presentationml/2006/main">
-  <p:cSld>
-    <p:spTree>
-      <p:nvGrpSpPr>
-        <p:cNvPr id="1" name=""/>
-        <p:cNvGrpSpPr/>
-        <p:nvPr/>
-      </p:nvGrpSpPr>
-      <p:grpSpPr>
-        <a:xfrm>
-          <a:off x="0" y="0"/>
-          <a:ext cx="0" cy="0"/>
-          <a:chOff x="0" y="0"/>
-          <a:chExt cx="0" cy="0"/>
-        </a:xfrm>
-      </p:grpSpPr>
-      <p:sp>
-        <p:nvSpPr>
-          <p:cNvPr id="2" name="Slide Image Placeholder 1"/>
-          <p:cNvSpPr>
-            <a:spLocks noGrp="1" noRot="1" noChangeAspect="1"/>
-          </p:cNvSpPr>
-          <p:nvPr>
-            <p:ph type="sldImg"/>
-          </p:nvPr>
-        </p:nvSpPr>
-        <p:spPr/>
-      </p:sp>
-      <p:sp>
-        <p:nvSpPr>
-          <p:cNvPr id="3" name="Notes Placeholder 2"/>
-          <p:cNvSpPr>
-            <a:spLocks noGrp="1"/>
-          </p:cNvSpPr>
-          <p:nvPr>
-            <p:ph type="body" idx="1"/>
-          </p:nvPr>
-        </p:nvSpPr>
-        <p:spPr/>
-        <p:txBody>
-          <a:bodyPr/>
-          <a:lstStyle/>
-          <a:p>
-            <a:r>
-              <a:rPr lang="en-US" dirty="0"/>
-              <a:t/>
-            </a:r>
-            <a:endParaRPr lang="en-US" dirty="0"/>
-          </a:p>
-        </p:txBody>
-      </p:sp>
-      <p:sp>
-        <p:nvSpPr>
-          <p:cNvPr id="4" name="Slide Number Placeholder 3"/>
-          <p:cNvSpPr>
-            <a:spLocks noGrp="1"/>
-          </p:cNvSpPr>
-          <p:nvPr>
-            <p:ph type="sldNum" sz="quarter" idx="10"/>
-          </p:nvPr>
-        </p:nvSpPr>
-        <p:spPr/>
-        <p:txBody>
-          <a:bodyPr/>
-          <a:lstStyle/>
-          <a:p>
-            <a:fld id="{F7021451-1387-4CA6-816F-3879F97B5CBC}" type="slidenum">
-              <a:rPr lang="en-US"/>
-              <a:t>9</a:t>
-            </a:fld>
-            <a:endParaRPr lang="en-US"/>
-          </a:p>
-        </p:txBody>
-      </p:sp>
-    </p:spTree>
-    <p:extLst>
-      <p:ext uri="{BB962C8B-B14F-4D97-AF65-F5344CB8AC3E}">
-        <p14:creationId xmlns:p14="http://schemas.microsoft.com/office/powerpoint/2010/main" val="1024086991"/>
-      </p:ext>
-    </p:extLst>
-  </p:cSld>
-  <p:clrMapOvr>
-    <a:masterClrMapping/>
-  </p:clrMapOvr>
-</p:notes>
-</file>
-
-<file path=ppt/slideLayouts/slideLayout1.xml><?xml version="1.0" encoding="utf-8"?>
-<p:sldLayout xmlns:a="http://schemas.openxmlformats.org/drawingml/2006/main" xmlns:r="http://schemas.openxmlformats.org/officeDocument/2006/relationships" xmlns:p="http://schemas.openxmlformats.org/presentationml/2006/main" preserve="1">
-  <p:cSld name="DEFAULT">
-    <p:bg>
-      <p:bgRef idx="1001">
-        <a:schemeClr val="bg1"/>
-      </p:bgRef>
-    </p:bg>
-    <p:spTree>
-      <p:nvGrpSpPr>
-        <p:cNvPr id="1" name=""/>
-        <p:cNvGrpSpPr/>
-        <p:nvPr/>
-      </p:nvGrpSpPr>
-      <p:grpSpPr>
-        <a:xfrm>
-          <a:off x="0" y="0"/>
-          <a:ext cx="0" cy="0"/>
-          <a:chOff x="0" y="0"/>
-          <a:chExt cx="0" cy="0"/>
-        </a:xfrm>
-      </p:grpSpPr>
-    </p:spTree>
-  </p:cSld>
-  <p:clrMapOvr>
-    <a:masterClrMapping/>
-  </p:clrMapOvr>
-</p:sldLayout>
-</file>
-
-<file path=ppt/slideMasters/slideMaster1.xml><?xml version="1.0" encoding="utf-8"?>
-<p:sldMaster xmlns:a="http://schemas.openxmlformats.org/drawingml/2006/main" xmlns:r="http://schemas.openxmlformats.org/officeDocument/2006/relationships" xmlns:p="http://schemas.openxmlformats.org/presentationml/2006/main">
-  <p:cSld>
-    <p:spTree>
-      <p:nvGrpSpPr>
-        <p:cNvPr id="1" name=""/>
-        <p:cNvGrpSpPr/>
-        <p:nvPr/>
-      </p:nvGrpSpPr>
-      <p:grpSpPr>
-        <a:xfrm>
-          <a:off x="0" y="0"/>
-          <a:ext cx="0" cy="0"/>
-          <a:chOff x="0" y="0"/>
-          <a:chExt cx="0" cy="0"/>
-        </a:xfrm>
-      </p:grpSpPr>
-    </p:spTree>
   </p:cSld>
   <p:clrMap bg1="lt1" tx1="dk1" bg2="lt2" tx2="dk2" accent1="accent1" accent2="accent2" accent3="accent3" accent4="accent4" accent5="accent5" accent6="accent6" hlink="hlink" folHlink="folHlink"/>
   <p:sldLayoutIdLst>
     <p:sldLayoutId id="2147483649" r:id="rId1"/>
+    <p:sldLayoutId id="2147483650" r:id="rId2"/>
+    <p:sldLayoutId id="2147483651" r:id="rId3"/>
+    <p:sldLayoutId id="2147483652" r:id="rId4"/>
+    <p:sldLayoutId id="2147483653" r:id="rId5"/>
+    <p:sldLayoutId id="2147483654" r:id="rId6"/>
+    <p:sldLayoutId id="2147483655" r:id="rId7"/>
+    <p:sldLayoutId id="2147483656" r:id="rId8"/>
+    <p:sldLayoutId id="2147483657" r:id="rId9"/>
+    <p:sldLayoutId id="2147483658" r:id="rId10"/>
+    <p:sldLayoutId id="2147483659" r:id="rId11"/>
   </p:sldLayoutIdLst>
-  <p:hf sldNum="0" hdr="0" ftr="0" dt="0"/>
   <p:txStyles>
     <p:titleStyle>
-      <a:lvl1pPr algn="ctr" defTabSz="914400" rtl="0" eaLnBrk="1" latinLnBrk="0" hangingPunct="1">
+      <a:lvl1pPr algn="ctr" defTabSz="457200" rtl="0" eaLnBrk="1" latinLnBrk="0" hangingPunct="1">
         <a:spcBef>
           <a:spcPct val="0"/>
         </a:spcBef>
@@ -1516,11 +2858,11 @@
       </a:lvl1pPr>
     </p:titleStyle>
     <p:bodyStyle>
-      <a:lvl1pPr marL="342900" indent="-342900" algn="l" defTabSz="914400" rtl="0" eaLnBrk="1" latinLnBrk="0" hangingPunct="1">
+      <a:lvl1pPr marL="342900" indent="-342900" algn="l" defTabSz="457200" rtl="0" eaLnBrk="1" latinLnBrk="0" hangingPunct="1">
         <a:spcBef>
           <a:spcPct val="20000"/>
         </a:spcBef>
-        <a:buFont typeface="Arial" pitchFamily="34" charset="0"/>
+        <a:buFont typeface="Arial"/>
         <a:buChar char="•"/>
         <a:defRPr sz="3200" kern="1200">
           <a:solidFill>
@@ -1531,11 +2873,11 @@
           <a:cs typeface="+mn-cs"/>
         </a:defRPr>
       </a:lvl1pPr>
-      <a:lvl2pPr marL="742950" indent="-285750" algn="l" defTabSz="914400" rtl="0" eaLnBrk="1" latinLnBrk="0" hangingPunct="1">
+      <a:lvl2pPr marL="742950" indent="-285750" algn="l" defTabSz="457200" rtl="0" eaLnBrk="1" latinLnBrk="0" hangingPunct="1">
         <a:spcBef>
           <a:spcPct val="20000"/>
         </a:spcBef>
-        <a:buFont typeface="Arial" pitchFamily="34" charset="0"/>
+        <a:buFont typeface="Arial"/>
         <a:buChar char="–"/>
         <a:defRPr sz="2800" kern="1200">
           <a:solidFill>
@@ -1546,11 +2888,11 @@
           <a:cs typeface="+mn-cs"/>
         </a:defRPr>
       </a:lvl2pPr>
-      <a:lvl3pPr marL="1143000" indent="-228600" algn="l" defTabSz="914400" rtl="0" eaLnBrk="1" latinLnBrk="0" hangingPunct="1">
+      <a:lvl3pPr marL="1143000" indent="-228600" algn="l" defTabSz="457200" rtl="0" eaLnBrk="1" latinLnBrk="0" hangingPunct="1">
         <a:spcBef>
           <a:spcPct val="20000"/>
         </a:spcBef>
-        <a:buFont typeface="Arial" pitchFamily="34" charset="0"/>
+        <a:buFont typeface="Arial"/>
         <a:buChar char="•"/>
         <a:defRPr sz="2400" kern="1200">
           <a:solidFill>
@@ -1561,11 +2903,11 @@
           <a:cs typeface="+mn-cs"/>
         </a:defRPr>
       </a:lvl3pPr>
-      <a:lvl4pPr marL="1600200" indent="-228600" algn="l" defTabSz="914400" rtl="0" eaLnBrk="1" latinLnBrk="0" hangingPunct="1">
+      <a:lvl4pPr marL="1600200" indent="-228600" algn="l" defTabSz="457200" rtl="0" eaLnBrk="1" latinLnBrk="0" hangingPunct="1">
         <a:spcBef>
           <a:spcPct val="20000"/>
         </a:spcBef>
-        <a:buFont typeface="Arial" pitchFamily="34" charset="0"/>
+        <a:buFont typeface="Arial"/>
         <a:buChar char="–"/>
         <a:defRPr sz="2000" kern="1200">
           <a:solidFill>
@@ -1576,11 +2918,11 @@
           <a:cs typeface="+mn-cs"/>
         </a:defRPr>
       </a:lvl4pPr>
-      <a:lvl5pPr marL="2057400" indent="-228600" algn="l" defTabSz="914400" rtl="0" eaLnBrk="1" latinLnBrk="0" hangingPunct="1">
+      <a:lvl5pPr marL="2057400" indent="-228600" algn="l" defTabSz="457200" rtl="0" eaLnBrk="1" latinLnBrk="0" hangingPunct="1">
         <a:spcBef>
           <a:spcPct val="20000"/>
         </a:spcBef>
-        <a:buFont typeface="Arial" pitchFamily="34" charset="0"/>
+        <a:buFont typeface="Arial"/>
         <a:buChar char="»"/>
         <a:defRPr sz="2000" kern="1200">
           <a:solidFill>
@@ -1591,11 +2933,11 @@
           <a:cs typeface="+mn-cs"/>
         </a:defRPr>
       </a:lvl5pPr>
-      <a:lvl6pPr marL="2514600" indent="-228600" algn="l" defTabSz="914400" rtl="0" eaLnBrk="1" latinLnBrk="0" hangingPunct="1">
+      <a:lvl6pPr marL="2514600" indent="-228600" algn="l" defTabSz="457200" rtl="0" eaLnBrk="1" latinLnBrk="0" hangingPunct="1">
         <a:spcBef>
           <a:spcPct val="20000"/>
         </a:spcBef>
-        <a:buFont typeface="Arial" pitchFamily="34" charset="0"/>
+        <a:buFont typeface="Arial"/>
         <a:buChar char="•"/>
         <a:defRPr sz="2000" kern="1200">
           <a:solidFill>
@@ -1606,11 +2948,11 @@
           <a:cs typeface="+mn-cs"/>
         </a:defRPr>
       </a:lvl6pPr>
-      <a:lvl7pPr marL="2971800" indent="-228600" algn="l" defTabSz="914400" rtl="0" eaLnBrk="1" latinLnBrk="0" hangingPunct="1">
+      <a:lvl7pPr marL="2971800" indent="-228600" algn="l" defTabSz="457200" rtl="0" eaLnBrk="1" latinLnBrk="0" hangingPunct="1">
         <a:spcBef>
           <a:spcPct val="20000"/>
         </a:spcBef>
-        <a:buFont typeface="Arial" pitchFamily="34" charset="0"/>
+        <a:buFont typeface="Arial"/>
         <a:buChar char="•"/>
         <a:defRPr sz="2000" kern="1200">
           <a:solidFill>
@@ -1621,11 +2963,11 @@
           <a:cs typeface="+mn-cs"/>
         </a:defRPr>
       </a:lvl7pPr>
-      <a:lvl8pPr marL="3429000" indent="-228600" algn="l" defTabSz="914400" rtl="0" eaLnBrk="1" latinLnBrk="0" hangingPunct="1">
+      <a:lvl8pPr marL="3429000" indent="-228600" algn="l" defTabSz="457200" rtl="0" eaLnBrk="1" latinLnBrk="0" hangingPunct="1">
         <a:spcBef>
           <a:spcPct val="20000"/>
         </a:spcBef>
-        <a:buFont typeface="Arial" pitchFamily="34" charset="0"/>
+        <a:buFont typeface="Arial"/>
         <a:buChar char="•"/>
         <a:defRPr sz="2000" kern="1200">
           <a:solidFill>
@@ -1636,11 +2978,11 @@
           <a:cs typeface="+mn-cs"/>
         </a:defRPr>
       </a:lvl8pPr>
-      <a:lvl9pPr marL="3886200" indent="-228600" algn="l" defTabSz="914400" rtl="0" eaLnBrk="1" latinLnBrk="0" hangingPunct="1">
+      <a:lvl9pPr marL="3886200" indent="-228600" algn="l" defTabSz="457200" rtl="0" eaLnBrk="1" latinLnBrk="0" hangingPunct="1">
         <a:spcBef>
           <a:spcPct val="20000"/>
         </a:spcBef>
-        <a:buFont typeface="Arial" pitchFamily="34" charset="0"/>
+        <a:buFont typeface="Arial"/>
         <a:buChar char="•"/>
         <a:defRPr sz="2000" kern="1200">
           <a:solidFill>
@@ -1656,7 +2998,7 @@
       <a:defPPr>
         <a:defRPr lang="en-US"/>
       </a:defPPr>
-      <a:lvl1pPr marL="0" algn="l" defTabSz="914400" rtl="0" eaLnBrk="1" latinLnBrk="0" hangingPunct="1">
+      <a:lvl1pPr marL="0" algn="l" defTabSz="457200" rtl="0" eaLnBrk="1" latinLnBrk="0" hangingPunct="1">
         <a:defRPr sz="1800" kern="1200">
           <a:solidFill>
             <a:schemeClr val="tx1"/>
@@ -1666,7 +3008,7 @@
           <a:cs typeface="+mn-cs"/>
         </a:defRPr>
       </a:lvl1pPr>
-      <a:lvl2pPr marL="457200" algn="l" defTabSz="914400" rtl="0" eaLnBrk="1" latinLnBrk="0" hangingPunct="1">
+      <a:lvl2pPr marL="457200" algn="l" defTabSz="457200" rtl="0" eaLnBrk="1" latinLnBrk="0" hangingPunct="1">
         <a:defRPr sz="1800" kern="1200">
           <a:solidFill>
             <a:schemeClr val="tx1"/>
@@ -1676,7 +3018,7 @@
           <a:cs typeface="+mn-cs"/>
         </a:defRPr>
       </a:lvl2pPr>
-      <a:lvl3pPr marL="914400" algn="l" defTabSz="914400" rtl="0" eaLnBrk="1" latinLnBrk="0" hangingPunct="1">
+      <a:lvl3pPr marL="914400" algn="l" defTabSz="457200" rtl="0" eaLnBrk="1" latinLnBrk="0" hangingPunct="1">
         <a:defRPr sz="1800" kern="1200">
           <a:solidFill>
             <a:schemeClr val="tx1"/>
@@ -1686,7 +3028,7 @@
           <a:cs typeface="+mn-cs"/>
         </a:defRPr>
       </a:lvl3pPr>
-      <a:lvl4pPr marL="1371600" algn="l" defTabSz="914400" rtl="0" eaLnBrk="1" latinLnBrk="0" hangingPunct="1">
+      <a:lvl4pPr marL="1371600" algn="l" defTabSz="457200" rtl="0" eaLnBrk="1" latinLnBrk="0" hangingPunct="1">
         <a:defRPr sz="1800" kern="1200">
           <a:solidFill>
             <a:schemeClr val="tx1"/>
@@ -1696,7 +3038,7 @@
           <a:cs typeface="+mn-cs"/>
         </a:defRPr>
       </a:lvl4pPr>
-      <a:lvl5pPr marL="1828800" algn="l" defTabSz="914400" rtl="0" eaLnBrk="1" latinLnBrk="0" hangingPunct="1">
+      <a:lvl5pPr marL="1828800" algn="l" defTabSz="457200" rtl="0" eaLnBrk="1" latinLnBrk="0" hangingPunct="1">
         <a:defRPr sz="1800" kern="1200">
           <a:solidFill>
             <a:schemeClr val="tx1"/>
@@ -1706,7 +3048,7 @@
           <a:cs typeface="+mn-cs"/>
         </a:defRPr>
       </a:lvl5pPr>
-      <a:lvl6pPr marL="2286000" algn="l" defTabSz="914400" rtl="0" eaLnBrk="1" latinLnBrk="0" hangingPunct="1">
+      <a:lvl6pPr marL="2286000" algn="l" defTabSz="457200" rtl="0" eaLnBrk="1" latinLnBrk="0" hangingPunct="1">
         <a:defRPr sz="1800" kern="1200">
           <a:solidFill>
             <a:schemeClr val="tx1"/>
@@ -1716,7 +3058,7 @@
           <a:cs typeface="+mn-cs"/>
         </a:defRPr>
       </a:lvl6pPr>
-      <a:lvl7pPr marL="2743200" algn="l" defTabSz="914400" rtl="0" eaLnBrk="1" latinLnBrk="0" hangingPunct="1">
+      <a:lvl7pPr marL="2743200" algn="l" defTabSz="457200" rtl="0" eaLnBrk="1" latinLnBrk="0" hangingPunct="1">
         <a:defRPr sz="1800" kern="1200">
           <a:solidFill>
             <a:schemeClr val="tx1"/>
@@ -1726,7 +3068,7 @@
           <a:cs typeface="+mn-cs"/>
         </a:defRPr>
       </a:lvl7pPr>
-      <a:lvl8pPr marL="3200400" algn="l" defTabSz="914400" rtl="0" eaLnBrk="1" latinLnBrk="0" hangingPunct="1">
+      <a:lvl8pPr marL="3200400" algn="l" defTabSz="457200" rtl="0" eaLnBrk="1" latinLnBrk="0" hangingPunct="1">
         <a:defRPr sz="1800" kern="1200">
           <a:solidFill>
             <a:schemeClr val="tx1"/>
@@ -1736,7 +3078,7 @@
           <a:cs typeface="+mn-cs"/>
         </a:defRPr>
       </a:lvl8pPr>
-      <a:lvl9pPr marL="3657600" algn="l" defTabSz="914400" rtl="0" eaLnBrk="1" latinLnBrk="0" hangingPunct="1">
+      <a:lvl9pPr marL="3657600" algn="l" defTabSz="457200" rtl="0" eaLnBrk="1" latinLnBrk="0" hangingPunct="1">
         <a:defRPr sz="1800" kern="1200">
           <a:solidFill>
             <a:schemeClr val="tx1"/>
@@ -1752,39 +3094,25 @@
 </file>
 
 <file path=ppt/slides/slide1.xml><?xml version="1.0" encoding="utf-8"?>
-<p:sld xmlns:a="http://schemas.openxmlformats.org/drawingml/2006/main" xmlns:ns2="http://schemas.openxmlformats.org/officeDocument/2006/relationships" xmlns:p="http://schemas.openxmlformats.org/presentationml/2006/main">
-  <p:cSld name="Slide 1">
-    <p:bg>
-      <p:bgPr>
-        <a:solidFill>
-          <a:srgbClr val="FFFFFF"/>
-        </a:solidFill>
-      </p:bgPr>
-    </p:bg>
+<p:sld xmlns:a="http://schemas.openxmlformats.org/drawingml/2006/main" xmlns:p="http://schemas.openxmlformats.org/presentationml/2006/main" xmlns:r="http://schemas.openxmlformats.org/officeDocument/2006/relationships">
+  <p:cSld>
     <p:spTree>
       <p:nvGrpSpPr>
         <p:cNvPr id="1" name=""/>
         <p:cNvGrpSpPr/>
         <p:nvPr/>
       </p:nvGrpSpPr>
-      <p:grpSpPr>
-        <a:xfrm>
-          <a:off x="0" y="0"/>
-          <a:ext cx="0" cy="0"/>
-          <a:chOff x="0" y="0"/>
-          <a:chExt cx="0" cy="0"/>
-        </a:xfrm>
-      </p:grpSpPr>
+      <p:grpSpPr/>
       <p:pic>
         <p:nvPicPr>
-          <p:cNvPr id="2" name="Image 0" descr="vtu_logo.png">    </p:cNvPr>
+          <p:cNvPr id="2" name="Picture 1" descr="image.png"/>
           <p:cNvPicPr>
             <a:picLocks noChangeAspect="1"/>
           </p:cNvPicPr>
           <p:nvPr/>
         </p:nvPicPr>
         <p:blipFill>
-          <a:blip ns2:embed="rId1"/>
+          <a:blip r:embed="rId2"/>
           <a:stretch>
             <a:fillRect/>
           </a:stretch>
@@ -1801,14 +3129,14 @@
       </p:pic>
       <p:pic>
         <p:nvPicPr>
-          <p:cNvPr id="3" name="Image 1" descr="pace_logo.png">    </p:cNvPr>
+          <p:cNvPr id="3" name="Picture 2" descr="image.png"/>
           <p:cNvPicPr>
             <a:picLocks noChangeAspect="1"/>
           </p:cNvPicPr>
           <p:nvPr/>
         </p:nvPicPr>
         <p:blipFill>
-          <a:blip ns2:embed="rId2"/>
+          <a:blip r:embed="rId3"/>
           <a:stretch>
             <a:fillRect/>
           </a:stretch>
@@ -1825,7 +3153,7 @@
       </p:pic>
       <p:sp>
         <p:nvSpPr>
-          <p:cNvPr id="4" name="Text 0"/>
+          <p:cNvPr id="4" name="TextBox 3"/>
           <p:cNvSpPr txBox="1"/>
           <p:nvPr/>
         </p:nvSpPr>
@@ -1838,10 +3166,9 @@
             <a:avLst/>
           </a:prstGeom>
           <a:noFill/>
-          <a:ln/>
-        </p:spPr>
-        <p:txBody>
-          <a:bodyPr wrap="square" lIns="0" tIns="0" rIns="0" bIns="0" rtlCol="0" anchor="ctr"/>
+        </p:spPr>
+        <p:txBody>
+          <a:bodyPr wrap="square"/>
           <a:lstStyle/>
           <a:p>
             <a:pPr algn="ctr" indent="0" marL="0">
@@ -1851,17 +3178,82 @@
               <a:buNone/>
             </a:pPr>
             <a:r>
-              <a:rPr lang="en-US" sz="2800" b="1" dirty="0">
-                <a:solidFill>
-                  <a:srgbClr val="000000"/>
-                </a:solidFill>
-                <a:latin typeface="Times New Roman" pitchFamily="34" charset="0"/>
-                <a:ea typeface="Times New Roman" pitchFamily="34" charset="-122"/>
-                <a:cs typeface="Times New Roman" pitchFamily="34" charset="-120"/>
+              <a:rPr sz="2800" b="1">
+                <a:solidFill>
+                  <a:srgbClr val="000000"/>
+                </a:solidFill>
+                <a:latin typeface="Times New Roman"/>
               </a:rPr>
               <a:t>P.A. COLLEGE OF ENGINEERING
 </a:t>
             </a:r>
+            <a:r>
+              <a:rPr sz="2000" b="1">
+                <a:solidFill>
+                  <a:srgbClr val="000000"/>
+                </a:solidFill>
+                <a:latin typeface="Times New Roman"/>
+              </a:rPr>
+              <a:t>DEPARTMENT OF COMPUTER SCIENCE &amp; ENGINEERING</a:t>
+            </a:r>
+          </a:p>
+        </p:txBody>
+      </p:sp>
+      <p:sp>
+        <p:nvSpPr>
+          <p:cNvPr id="5" name="TextBox 4"/>
+          <p:cNvSpPr txBox="1"/>
+          <p:nvPr/>
+        </p:nvSpPr>
+        <p:spPr>
+          <a:xfrm>
+            <a:off x="914400" y="2011680"/>
+            <a:ext cx="16459200" cy="1005840"/>
+          </a:xfrm>
+          <a:prstGeom prst="rect">
+            <a:avLst/>
+          </a:prstGeom>
+          <a:noFill/>
+        </p:spPr>
+        <p:txBody>
+          <a:bodyPr wrap="square"/>
+          <a:lstStyle/>
+          <a:p>
+            <a:pPr algn="ctr" indent="0" marL="0">
+              <a:buNone/>
+            </a:pPr>
+            <a:r>
+              <a:rPr sz="6000" b="1">
+                <a:solidFill>
+                  <a:srgbClr val="000000"/>
+                </a:solidFill>
+                <a:latin typeface="Times New Roman"/>
+              </a:rPr>
+              <a:t>SynCura</a:t>
+            </a:r>
+          </a:p>
+        </p:txBody>
+      </p:sp>
+      <p:sp>
+        <p:nvSpPr>
+          <p:cNvPr id="6" name="TextBox 5"/>
+          <p:cNvSpPr txBox="1"/>
+          <p:nvPr/>
+        </p:nvSpPr>
+        <p:spPr>
+          <a:xfrm>
+            <a:off x="1280160" y="3063240"/>
+            <a:ext cx="15727680" cy="1463040"/>
+          </a:xfrm>
+          <a:prstGeom prst="rect">
+            <a:avLst/>
+          </a:prstGeom>
+          <a:noFill/>
+        </p:spPr>
+        <p:txBody>
+          <a:bodyPr wrap="square"/>
+          <a:lstStyle/>
+          <a:p>
             <a:pPr algn="ctr" indent="0" marL="0">
               <a:lnSpc>
                 <a:spcPct val="150000"/>
@@ -1869,104 +3261,20 @@
               <a:buNone/>
             </a:pPr>
             <a:r>
-              <a:rPr lang="en-US" sz="2000" b="1" dirty="0">
-                <a:solidFill>
-                  <a:srgbClr val="000000"/>
-                </a:solidFill>
-                <a:latin typeface="Times New Roman" pitchFamily="34" charset="0"/>
-                <a:ea typeface="Times New Roman" pitchFamily="34" charset="-122"/>
-                <a:cs typeface="Times New Roman" pitchFamily="34" charset="-120"/>
-              </a:rPr>
-              <a:t>DEPARTMENT OF COMPUTER SCIENCE &amp; ENGINEERING</a:t>
-            </a:r>
-            <a:endParaRPr lang="en-US" sz="2800" dirty="0"/>
-          </a:p>
-        </p:txBody>
-      </p:sp>
-      <p:sp>
-        <p:nvSpPr>
-          <p:cNvPr id="5" name="Text 1"/>
-          <p:cNvSpPr txBox="1"/>
-          <p:nvPr/>
-        </p:nvSpPr>
-        <p:spPr>
-          <a:xfrm>
-            <a:off x="914400" y="2011680"/>
-            <a:ext cx="16459200" cy="1005840"/>
-          </a:xfrm>
-          <a:prstGeom prst="rect">
-            <a:avLst/>
-          </a:prstGeom>
-          <a:noFill/>
-          <a:ln/>
-        </p:spPr>
-        <p:txBody>
-          <a:bodyPr wrap="square" lIns="0" tIns="0" rIns="0" bIns="0" rtlCol="0" anchor="ctr"/>
-          <a:lstStyle/>
-          <a:p>
-            <a:pPr algn="ctr" indent="0" marL="0">
-              <a:buNone/>
-            </a:pPr>
-            <a:r>
-              <a:rPr lang="en-US" sz="6000" b="1" dirty="0">
-                <a:solidFill>
-                  <a:srgbClr val="000000"/>
-                </a:solidFill>
-                <a:latin typeface="Times New Roman" pitchFamily="34" charset="0"/>
-                <a:ea typeface="Times New Roman" pitchFamily="34" charset="-122"/>
-                <a:cs typeface="Times New Roman" pitchFamily="34" charset="-120"/>
-              </a:rPr>
-              <a:t>SynCura</a:t>
-            </a:r>
-            <a:endParaRPr lang="en-US" sz="6000" dirty="0"/>
-          </a:p>
-        </p:txBody>
-      </p:sp>
-      <p:sp>
-        <p:nvSpPr>
-          <p:cNvPr id="6" name="Text 2"/>
-          <p:cNvSpPr txBox="1"/>
-          <p:nvPr/>
-        </p:nvSpPr>
-        <p:spPr>
-          <a:xfrm>
-            <a:off x="1280160" y="3063240"/>
-            <a:ext cx="15727680" cy="1463040"/>
-          </a:xfrm>
-          <a:prstGeom prst="rect">
-            <a:avLst/>
-          </a:prstGeom>
-          <a:noFill/>
-          <a:ln/>
-        </p:spPr>
-        <p:txBody>
-          <a:bodyPr wrap="square" lIns="0" tIns="0" rIns="0" bIns="0" rtlCol="0" anchor="ctr"/>
-          <a:lstStyle/>
-          <a:p>
-            <a:pPr algn="ctr" indent="0" marL="0">
-              <a:lnSpc>
-                <a:spcPct val="150000"/>
-              </a:lnSpc>
-              <a:buNone/>
-            </a:pPr>
-            <a:r>
-              <a:rPr lang="en-US" sz="3200" b="1" dirty="0">
-                <a:solidFill>
-                  <a:srgbClr val="000000"/>
-                </a:solidFill>
-                <a:latin typeface="Times New Roman" pitchFamily="34" charset="0"/>
-                <a:ea typeface="Times New Roman" pitchFamily="34" charset="-122"/>
-                <a:cs typeface="Times New Roman" pitchFamily="34" charset="-120"/>
+              <a:rPr sz="3200" b="1">
+                <a:solidFill>
+                  <a:srgbClr val="000000"/>
+                </a:solidFill>
+                <a:latin typeface="Times New Roman"/>
               </a:rPr>
               <a:t>Predictive ICU Monitoring System Using Attention-Based LSTM with Real-Time Explainability</a:t>
             </a:r>
-            <a:endParaRPr lang="en-US" sz="3200" dirty="0"/>
-          </a:p>
-        </p:txBody>
-      </p:sp>
-      <p:sp>
-        <p:nvSpPr>
-          <p:cNvPr id="7" name="Text 3"/>
+          </a:p>
+        </p:txBody>
+      </p:sp>
+      <p:sp>
+        <p:nvSpPr>
+          <p:cNvPr id="7" name="TextBox 6"/>
           <p:cNvSpPr txBox="1"/>
           <p:nvPr/>
         </p:nvSpPr>
@@ -1979,10 +3287,9 @@
             <a:avLst/>
           </a:prstGeom>
           <a:noFill/>
-          <a:ln/>
-        </p:spPr>
-        <p:txBody>
-          <a:bodyPr wrap="square" lIns="0" tIns="0" rIns="0" bIns="0" rtlCol="0" anchor="ctr"/>
+        </p:spPr>
+        <p:txBody>
+          <a:bodyPr wrap="square"/>
           <a:lstStyle/>
           <a:p>
             <a:pPr indent="0" marL="0">
@@ -1992,77 +3299,50 @@
               <a:buNone/>
             </a:pPr>
             <a:r>
-              <a:rPr lang="en-US" sz="2800" b="1" dirty="0">
-                <a:solidFill>
-                  <a:srgbClr val="000000"/>
-                </a:solidFill>
-                <a:latin typeface="Times New Roman" pitchFamily="34" charset="0"/>
-                <a:ea typeface="Times New Roman" pitchFamily="34" charset="-122"/>
-                <a:cs typeface="Times New Roman" pitchFamily="34" charset="-120"/>
+              <a:rPr sz="2800" b="1">
+                <a:solidFill>
+                  <a:srgbClr val="000000"/>
+                </a:solidFill>
+                <a:latin typeface="Times New Roman"/>
               </a:rPr>
               <a:t>TEAM MEMBERS :
 </a:t>
             </a:r>
-            <a:pPr indent="0" marL="0">
-              <a:lnSpc>
-                <a:spcPct val="150000"/>
-              </a:lnSpc>
-              <a:buNone/>
-            </a:pPr>
-            <a:r>
-              <a:rPr lang="en-US" sz="2800" dirty="0">
-                <a:solidFill>
-                  <a:srgbClr val="000000"/>
-                </a:solidFill>
-                <a:latin typeface="Times New Roman" pitchFamily="34" charset="0"/>
-                <a:ea typeface="Times New Roman" pitchFamily="34" charset="-122"/>
-                <a:cs typeface="Times New Roman" pitchFamily="34" charset="-120"/>
+            <a:r>
+              <a:rPr sz="2800">
+                <a:solidFill>
+                  <a:srgbClr val="000000"/>
+                </a:solidFill>
+                <a:latin typeface="Times New Roman"/>
               </a:rPr>
               <a:t>Abdul Ahad Ikkeri – 4PA24CS002
 </a:t>
             </a:r>
-            <a:pPr indent="0" marL="0">
-              <a:lnSpc>
-                <a:spcPct val="150000"/>
-              </a:lnSpc>
-              <a:buNone/>
-            </a:pPr>
-            <a:r>
-              <a:rPr lang="en-US" sz="2800" dirty="0">
-                <a:solidFill>
-                  <a:srgbClr val="000000"/>
-                </a:solidFill>
-                <a:latin typeface="Times New Roman" pitchFamily="34" charset="0"/>
-                <a:ea typeface="Times New Roman" pitchFamily="34" charset="-122"/>
-                <a:cs typeface="Times New Roman" pitchFamily="34" charset="-120"/>
+            <a:r>
+              <a:rPr sz="2800">
+                <a:solidFill>
+                  <a:srgbClr val="000000"/>
+                </a:solidFill>
+                <a:latin typeface="Times New Roman"/>
               </a:rPr>
               <a:t>Fathima Reeha – 4PA24CS026
 </a:t>
             </a:r>
-            <a:pPr indent="0" marL="0">
-              <a:lnSpc>
-                <a:spcPct val="150000"/>
-              </a:lnSpc>
-              <a:buNone/>
-            </a:pPr>
-            <a:r>
-              <a:rPr lang="en-US" sz="2800" dirty="0">
-                <a:solidFill>
-                  <a:srgbClr val="000000"/>
-                </a:solidFill>
-                <a:latin typeface="Times New Roman" pitchFamily="34" charset="0"/>
-                <a:ea typeface="Times New Roman" pitchFamily="34" charset="-122"/>
-                <a:cs typeface="Times New Roman" pitchFamily="34" charset="-120"/>
+            <a:r>
+              <a:rPr sz="2800">
+                <a:solidFill>
+                  <a:srgbClr val="000000"/>
+                </a:solidFill>
+                <a:latin typeface="Times New Roman"/>
               </a:rPr>
               <a:t>Fizan Feroz – 4PA24CS032</a:t>
             </a:r>
-            <a:endParaRPr lang="en-US" sz="2800" dirty="0"/>
-          </a:p>
-        </p:txBody>
-      </p:sp>
-      <p:sp>
-        <p:nvSpPr>
-          <p:cNvPr id="8" name="Text 4"/>
+          </a:p>
+        </p:txBody>
+      </p:sp>
+      <p:sp>
+        <p:nvSpPr>
+          <p:cNvPr id="8" name="TextBox 7"/>
           <p:cNvSpPr txBox="1"/>
           <p:nvPr/>
         </p:nvSpPr>
@@ -2075,13 +3355,12 @@
             <a:avLst/>
           </a:prstGeom>
           <a:noFill/>
-          <a:ln/>
-        </p:spPr>
-        <p:txBody>
-          <a:bodyPr wrap="square" lIns="0" tIns="0" rIns="0" bIns="0" rtlCol="0" anchor="ctr"/>
-          <a:lstStyle/>
-          <a:p>
-            <a:endParaRPr lang="en-US" dirty="0" sz="2800"/>
+        </p:spPr>
+        <p:txBody>
+          <a:bodyPr wrap="square"/>
+          <a:lstStyle/>
+          <a:p>
+            <a:pPr/>
           </a:p>
         </p:txBody>
       </p:sp>
@@ -2105,7 +3384,7 @@
       <p:grpSpPr/>
       <p:pic>
         <p:nvPicPr>
-          <p:cNvPr id="2" name="Image 0" descr="vtu_logo.png">    </p:cNvPr>
+          <p:cNvPr id="2" name="Picture 1" descr="image.png"/>
           <p:cNvPicPr>
             <a:picLocks noChangeAspect="1"/>
           </p:cNvPicPr>
@@ -2129,7 +3408,7 @@
       </p:pic>
       <p:pic>
         <p:nvPicPr>
-          <p:cNvPr id="3" name="Image 1" descr="pace_logo.png">    </p:cNvPr>
+          <p:cNvPr id="3" name="Picture 2" descr="image.png"/>
           <p:cNvPicPr>
             <a:picLocks noChangeAspect="1"/>
           </p:cNvPicPr>
@@ -2153,7 +3432,7 @@
       </p:pic>
       <p:sp>
         <p:nvSpPr>
-          <p:cNvPr id="4" name="Text 0"/>
+          <p:cNvPr id="4" name="TextBox 3"/>
           <p:cNvSpPr txBox="1"/>
           <p:nvPr/>
         </p:nvSpPr>
@@ -2166,10 +3445,9 @@
             <a:avLst/>
           </a:prstGeom>
           <a:noFill/>
-          <a:ln/>
-        </p:spPr>
-        <p:txBody>
-          <a:bodyPr wrap="square" lIns="0" tIns="0" rIns="0" bIns="0" rtlCol="0" anchor="ctr"/>
+        </p:spPr>
+        <p:txBody>
+          <a:bodyPr wrap="square"/>
           <a:lstStyle/>
           <a:p>
             <a:pPr algn="ctr" indent="0" marL="0">
@@ -2179,41 +3457,30 @@
               <a:buNone/>
             </a:pPr>
             <a:r>
-              <a:rPr lang="en-US" sz="2800" b="1" dirty="0">
-                <a:solidFill>
-                  <a:srgbClr val="000000"/>
-                </a:solidFill>
-                <a:latin typeface="Times New Roman" pitchFamily="34" charset="0"/>
-                <a:ea typeface="Times New Roman" pitchFamily="34" charset="-122"/>
-                <a:cs typeface="Times New Roman" pitchFamily="34" charset="-120"/>
+              <a:rPr sz="2800" b="1">
+                <a:solidFill>
+                  <a:srgbClr val="000000"/>
+                </a:solidFill>
+                <a:latin typeface="Times New Roman"/>
               </a:rPr>
               <a:t>P.A. COLLEGE OF ENGINEERING
 </a:t>
             </a:r>
-            <a:pPr algn="ctr" indent="0" marL="0">
-              <a:lnSpc>
-                <a:spcPct val="150000"/>
-              </a:lnSpc>
-              <a:buNone/>
-            </a:pPr>
-            <a:r>
-              <a:rPr lang="en-US" sz="2000" b="1" dirty="0">
-                <a:solidFill>
-                  <a:srgbClr val="000000"/>
-                </a:solidFill>
-                <a:latin typeface="Times New Roman" pitchFamily="34" charset="0"/>
-                <a:ea typeface="Times New Roman" pitchFamily="34" charset="-122"/>
-                <a:cs typeface="Times New Roman" pitchFamily="34" charset="-120"/>
+            <a:r>
+              <a:rPr sz="2000" b="1">
+                <a:solidFill>
+                  <a:srgbClr val="000000"/>
+                </a:solidFill>
+                <a:latin typeface="Times New Roman"/>
               </a:rPr>
               <a:t>DEPARTMENT OF COMPUTER SCIENCE &amp; ENGINEERING</a:t>
             </a:r>
-            <a:endParaRPr lang="en-US" sz="2800" dirty="0"/>
-          </a:p>
-        </p:txBody>
-      </p:sp>
-      <p:sp>
-        <p:nvSpPr>
-          <p:cNvPr id="5" name="Text 1"/>
+          </a:p>
+        </p:txBody>
+      </p:sp>
+      <p:sp>
+        <p:nvSpPr>
+          <p:cNvPr id="5" name="TextBox 4"/>
           <p:cNvSpPr txBox="1"/>
           <p:nvPr/>
         </p:nvSpPr>
@@ -2226,10 +3493,9 @@
             <a:avLst/>
           </a:prstGeom>
           <a:noFill/>
-          <a:ln/>
-        </p:spPr>
-        <p:txBody>
-          <a:bodyPr wrap="square" lIns="0" tIns="0" rIns="0" bIns="0" rtlCol="0" anchor="ctr"/>
+        </p:spPr>
+        <p:txBody>
+          <a:bodyPr wrap="square"/>
           <a:lstStyle/>
           <a:p>
             <a:pPr algn="ctr" indent="0" marL="0">
@@ -2244,13 +3510,12 @@
               </a:rPr>
               <a:t>HOW IT COULD BE BETTER WITH ENOUGH TIME</a:t>
             </a:r>
-            <a:endParaRPr sz="3400"/>
-          </a:p>
-        </p:txBody>
-      </p:sp>
-      <p:sp>
-        <p:nvSpPr>
-          <p:cNvPr id="6" name="Text 2"/>
+          </a:p>
+        </p:txBody>
+      </p:sp>
+      <p:sp>
+        <p:nvSpPr>
+          <p:cNvPr id="6" name="TextBox 5"/>
           <p:cNvSpPr txBox="1"/>
           <p:nvPr/>
         </p:nvSpPr>
@@ -2263,10 +3528,9 @@
             <a:avLst/>
           </a:prstGeom>
           <a:noFill/>
-          <a:ln/>
-        </p:spPr>
-        <p:txBody>
-          <a:bodyPr wrap="square" lIns="0" tIns="0" rIns="0" bIns="0" rtlCol="0" anchor="t"/>
+        </p:spPr>
+        <p:txBody>
+          <a:bodyPr wrap="square"/>
           <a:lstStyle/>
           <a:p>
             <a:pPr marL="406400" indent="-406400">
@@ -2288,7 +3552,6 @@
               </a:rPr>
               <a:t>Paper: 0.936 overall, 98.9 at discharge (hindsight); cross-hospital falls to 0.81 / 0.76, no prospective test.</a:t>
             </a:r>
-            <a:endParaRPr sz="2100"/>
           </a:p>
           <a:p>
             <a:pPr/>
@@ -2349,39 +3612,25 @@
 </file>
 
 <file path=ppt/slides/slide11.xml><?xml version="1.0" encoding="utf-8"?>
-<p:sld xmlns:a="http://schemas.openxmlformats.org/drawingml/2006/main" xmlns:ns2="http://schemas.openxmlformats.org/officeDocument/2006/relationships" xmlns:p="http://schemas.openxmlformats.org/presentationml/2006/main">
-  <p:cSld name="Slide 10">
-    <p:bg>
-      <p:bgPr>
-        <a:solidFill>
-          <a:srgbClr val="FFFFFF"/>
-        </a:solidFill>
-      </p:bgPr>
-    </p:bg>
+<p:sld xmlns:a="http://schemas.openxmlformats.org/drawingml/2006/main" xmlns:p="http://schemas.openxmlformats.org/presentationml/2006/main" xmlns:r="http://schemas.openxmlformats.org/officeDocument/2006/relationships">
+  <p:cSld>
     <p:spTree>
       <p:nvGrpSpPr>
         <p:cNvPr id="1" name=""/>
         <p:cNvGrpSpPr/>
         <p:nvPr/>
       </p:nvGrpSpPr>
-      <p:grpSpPr>
-        <a:xfrm>
-          <a:off x="0" y="0"/>
-          <a:ext cx="0" cy="0"/>
-          <a:chOff x="0" y="0"/>
-          <a:chExt cx="0" cy="0"/>
-        </a:xfrm>
-      </p:grpSpPr>
+      <p:grpSpPr/>
       <p:pic>
         <p:nvPicPr>
-          <p:cNvPr id="2" name="Image 0" descr="vtu_logo.png">    </p:cNvPr>
+          <p:cNvPr id="2" name="Picture 1" descr="image.png"/>
           <p:cNvPicPr>
             <a:picLocks noChangeAspect="1"/>
           </p:cNvPicPr>
           <p:nvPr/>
         </p:nvPicPr>
         <p:blipFill>
-          <a:blip ns2:embed="rId1"/>
+          <a:blip r:embed="rId2"/>
           <a:stretch>
             <a:fillRect/>
           </a:stretch>
@@ -2398,14 +3647,14 @@
       </p:pic>
       <p:pic>
         <p:nvPicPr>
-          <p:cNvPr id="3" name="Image 1" descr="pace_logo.png">    </p:cNvPr>
+          <p:cNvPr id="3" name="Picture 2" descr="image.png"/>
           <p:cNvPicPr>
             <a:picLocks noChangeAspect="1"/>
           </p:cNvPicPr>
           <p:nvPr/>
         </p:nvPicPr>
         <p:blipFill>
-          <a:blip ns2:embed="rId2"/>
+          <a:blip r:embed="rId3"/>
           <a:stretch>
             <a:fillRect/>
           </a:stretch>
@@ -2422,7 +3671,7 @@
       </p:pic>
       <p:sp>
         <p:nvSpPr>
-          <p:cNvPr id="4" name="Text 0"/>
+          <p:cNvPr id="4" name="TextBox 3"/>
           <p:cNvSpPr txBox="1"/>
           <p:nvPr/>
         </p:nvSpPr>
@@ -2435,10 +3684,9 @@
             <a:avLst/>
           </a:prstGeom>
           <a:noFill/>
-          <a:ln/>
-        </p:spPr>
-        <p:txBody>
-          <a:bodyPr wrap="square" lIns="0" tIns="0" rIns="0" bIns="0" rtlCol="0" anchor="ctr"/>
+        </p:spPr>
+        <p:txBody>
+          <a:bodyPr wrap="square"/>
           <a:lstStyle/>
           <a:p>
             <a:pPr algn="ctr" indent="0" marL="0">
@@ -2448,41 +3696,30 @@
               <a:buNone/>
             </a:pPr>
             <a:r>
-              <a:rPr lang="en-US" sz="2800" b="1" dirty="0">
-                <a:solidFill>
-                  <a:srgbClr val="000000"/>
-                </a:solidFill>
-                <a:latin typeface="Times New Roman" pitchFamily="34" charset="0"/>
-                <a:ea typeface="Times New Roman" pitchFamily="34" charset="-122"/>
-                <a:cs typeface="Times New Roman" pitchFamily="34" charset="-120"/>
+              <a:rPr sz="2800" b="1">
+                <a:solidFill>
+                  <a:srgbClr val="000000"/>
+                </a:solidFill>
+                <a:latin typeface="Times New Roman"/>
               </a:rPr>
               <a:t>P.A. COLLEGE OF ENGINEERING
 </a:t>
             </a:r>
-            <a:pPr algn="ctr" indent="0" marL="0">
-              <a:lnSpc>
-                <a:spcPct val="150000"/>
-              </a:lnSpc>
-              <a:buNone/>
-            </a:pPr>
-            <a:r>
-              <a:rPr lang="en-US" sz="2000" b="1" dirty="0">
-                <a:solidFill>
-                  <a:srgbClr val="000000"/>
-                </a:solidFill>
-                <a:latin typeface="Times New Roman" pitchFamily="34" charset="0"/>
-                <a:ea typeface="Times New Roman" pitchFamily="34" charset="-122"/>
-                <a:cs typeface="Times New Roman" pitchFamily="34" charset="-120"/>
+            <a:r>
+              <a:rPr sz="2000" b="1">
+                <a:solidFill>
+                  <a:srgbClr val="000000"/>
+                </a:solidFill>
+                <a:latin typeface="Times New Roman"/>
               </a:rPr>
               <a:t>DEPARTMENT OF COMPUTER SCIENCE &amp; ENGINEERING</a:t>
             </a:r>
-            <a:endParaRPr lang="en-US" sz="2800" dirty="0"/>
-          </a:p>
-        </p:txBody>
-      </p:sp>
-      <p:sp>
-        <p:nvSpPr>
-          <p:cNvPr id="5" name="Text 1"/>
+          </a:p>
+        </p:txBody>
+      </p:sp>
+      <p:sp>
+        <p:nvSpPr>
+          <p:cNvPr id="5" name="TextBox 4"/>
           <p:cNvSpPr txBox="1"/>
           <p:nvPr/>
         </p:nvSpPr>
@@ -2495,33 +3732,29 @@
             <a:avLst/>
           </a:prstGeom>
           <a:noFill/>
-          <a:ln/>
-        </p:spPr>
-        <p:txBody>
-          <a:bodyPr wrap="square" lIns="0" tIns="0" rIns="0" bIns="0" rtlCol="0" anchor="ctr"/>
+        </p:spPr>
+        <p:txBody>
+          <a:bodyPr wrap="square"/>
           <a:lstStyle/>
           <a:p>
             <a:pPr algn="ctr" indent="0" marL="0">
               <a:buNone/>
             </a:pPr>
             <a:r>
-              <a:rPr lang="en-US" sz="3400" b="1" dirty="0">
+              <a:rPr sz="3400" b="1">
                 <a:solidFill>
                   <a:srgbClr val="1757AC"/>
                 </a:solidFill>
-                <a:latin typeface="Times New Roman" pitchFamily="34" charset="0"/>
-                <a:ea typeface="Times New Roman" pitchFamily="34" charset="-122"/>
-                <a:cs typeface="Times New Roman" pitchFamily="34" charset="-120"/>
+                <a:latin typeface="Times New Roman"/>
               </a:rPr>
               <a:t>TECHNOLOGY / TOOLS REQUIRED</a:t>
             </a:r>
-            <a:endParaRPr sz="3400"/>
-          </a:p>
-        </p:txBody>
-      </p:sp>
-      <p:sp>
-        <p:nvSpPr>
-          <p:cNvPr id="6" name="Text 2"/>
+          </a:p>
+        </p:txBody>
+      </p:sp>
+      <p:sp>
+        <p:nvSpPr>
+          <p:cNvPr id="6" name="TextBox 5"/>
           <p:cNvSpPr txBox="1"/>
           <p:nvPr/>
         </p:nvSpPr>
@@ -2534,10 +3767,9 @@
             <a:avLst/>
           </a:prstGeom>
           <a:noFill/>
-          <a:ln/>
-        </p:spPr>
-        <p:txBody>
-          <a:bodyPr wrap="square" lIns="0" tIns="0" rIns="0" bIns="0" rtlCol="0" anchor="t"/>
+        </p:spPr>
+        <p:txBody>
+          <a:bodyPr wrap="square"/>
           <a:lstStyle/>
           <a:p>
             <a:pPr marL="406400" indent="-406400">
@@ -2551,17 +3783,14 @@
               <a:buChar char="•"/>
             </a:pPr>
             <a:r>
-              <a:rPr lang="en-US" sz="2100" dirty="0">
-                <a:solidFill>
-                  <a:srgbClr val="000000"/>
-                </a:solidFill>
-                <a:latin typeface="Times New Roman" pitchFamily="34" charset="0"/>
-                <a:ea typeface="Times New Roman" pitchFamily="34" charset="-122"/>
-                <a:cs typeface="Times New Roman" pitchFamily="34" charset="-120"/>
+              <a:rPr sz="2100">
+                <a:solidFill>
+                  <a:srgbClr val="000000"/>
+                </a:solidFill>
+                <a:latin typeface="Times New Roman"/>
               </a:rPr>
               <a:t>Programming: Python for machine learning and backend services; JavaScript for the frontend.</a:t>
             </a:r>
-            <a:endParaRPr sz="2100"/>
           </a:p>
           <a:p>
             <a:pPr marL="406400" indent="-406400">
@@ -2575,17 +3804,14 @@
               <a:buChar char="•"/>
             </a:pPr>
             <a:r>
-              <a:rPr lang="en-US" sz="2100" dirty="0">
-                <a:solidFill>
-                  <a:srgbClr val="000000"/>
-                </a:solidFill>
-                <a:latin typeface="Times New Roman" pitchFamily="34" charset="0"/>
-                <a:ea typeface="Times New Roman" pitchFamily="34" charset="-122"/>
-                <a:cs typeface="Times New Roman" pitchFamily="34" charset="-120"/>
+              <a:rPr sz="2100">
+                <a:solidFill>
+                  <a:srgbClr val="000000"/>
+                </a:solidFill>
+                <a:latin typeface="Times New Roman"/>
               </a:rPr>
               <a:t>ML and backend: PyTorch, FastAPI, SQLite, scikit-learn, and SHAP.</a:t>
             </a:r>
-            <a:endParaRPr sz="2100"/>
           </a:p>
           <a:p>
             <a:pPr marL="406400" indent="-406400">
@@ -2599,17 +3825,14 @@
               <a:buChar char="•"/>
             </a:pPr>
             <a:r>
-              <a:rPr lang="en-US" sz="2100" dirty="0">
-                <a:solidFill>
-                  <a:srgbClr val="000000"/>
-                </a:solidFill>
-                <a:latin typeface="Times New Roman" pitchFamily="34" charset="0"/>
-                <a:ea typeface="Times New Roman" pitchFamily="34" charset="-122"/>
-                <a:cs typeface="Times New Roman" pitchFamily="34" charset="-120"/>
+              <a:rPr sz="2100">
+                <a:solidFill>
+                  <a:srgbClr val="000000"/>
+                </a:solidFill>
+                <a:latin typeface="Times New Roman"/>
               </a:rPr>
               <a:t>Frontend: React, Vite, and Tailwind CSS.</a:t>
             </a:r>
-            <a:endParaRPr sz="2100"/>
           </a:p>
           <a:p>
             <a:pPr marL="406400" indent="-406400">
@@ -2623,17 +3846,14 @@
               <a:buChar char="•"/>
             </a:pPr>
             <a:r>
-              <a:rPr lang="en-US" sz="2100" dirty="0">
-                <a:solidFill>
-                  <a:srgbClr val="000000"/>
-                </a:solidFill>
-                <a:latin typeface="Times New Roman" pitchFamily="34" charset="0"/>
-                <a:ea typeface="Times New Roman" pitchFamily="34" charset="-122"/>
-                <a:cs typeface="Times New Roman" pitchFamily="34" charset="-120"/>
+              <a:rPr sz="2100">
+                <a:solidFill>
+                  <a:srgbClr val="000000"/>
+                </a:solidFill>
+                <a:latin typeface="Times New Roman"/>
               </a:rPr>
               <a:t>Dataset: PhysioNet / Computing in Cardiology Challenge 2012.</a:t>
             </a:r>
-            <a:endParaRPr sz="2100"/>
           </a:p>
           <a:p>
             <a:pPr marL="406400" indent="-406400">
@@ -2647,17 +3867,14 @@
               <a:buChar char="•"/>
             </a:pPr>
             <a:r>
-              <a:rPr lang="en-US" sz="2100" dirty="0">
-                <a:solidFill>
-                  <a:srgbClr val="000000"/>
-                </a:solidFill>
-                <a:latin typeface="Times New Roman" pitchFamily="34" charset="0"/>
-                <a:ea typeface="Times New Roman" pitchFamily="34" charset="-122"/>
-                <a:cs typeface="Times New Roman" pitchFamily="34" charset="-120"/>
+              <a:rPr sz="2100">
+                <a:solidFill>
+                  <a:srgbClr val="000000"/>
+                </a:solidFill>
+                <a:latin typeface="Times New Roman"/>
               </a:rPr>
               <a:t>SDG relevance: SDG 3 (Good Health and Well-Being) and SDG 9 (Industry, Innovation and Infrastructure).</a:t>
             </a:r>
-            <a:endParaRPr sz="2100"/>
           </a:p>
         </p:txBody>
       </p:sp>
@@ -2681,7 +3898,7 @@
       <p:grpSpPr/>
       <p:pic>
         <p:nvPicPr>
-          <p:cNvPr id="2" name="Image 0" descr="vtu_logo.png">    </p:cNvPr>
+          <p:cNvPr id="2" name="Picture 1" descr="image.png"/>
           <p:cNvPicPr>
             <a:picLocks noChangeAspect="1"/>
           </p:cNvPicPr>
@@ -2705,7 +3922,7 @@
       </p:pic>
       <p:pic>
         <p:nvPicPr>
-          <p:cNvPr id="3" name="Image 1" descr="pace_logo.png">    </p:cNvPr>
+          <p:cNvPr id="3" name="Picture 2" descr="image.png"/>
           <p:cNvPicPr>
             <a:picLocks noChangeAspect="1"/>
           </p:cNvPicPr>
@@ -2729,7 +3946,7 @@
       </p:pic>
       <p:sp>
         <p:nvSpPr>
-          <p:cNvPr id="4" name="Text 0"/>
+          <p:cNvPr id="4" name="TextBox 3"/>
           <p:cNvSpPr txBox="1"/>
           <p:nvPr/>
         </p:nvSpPr>
@@ -2742,10 +3959,9 @@
             <a:avLst/>
           </a:prstGeom>
           <a:noFill/>
-          <a:ln/>
-        </p:spPr>
-        <p:txBody>
-          <a:bodyPr wrap="square" lIns="0" tIns="0" rIns="0" bIns="0" rtlCol="0" anchor="ctr"/>
+        </p:spPr>
+        <p:txBody>
+          <a:bodyPr wrap="square"/>
           <a:lstStyle/>
           <a:p>
             <a:pPr algn="ctr" indent="0" marL="0">
@@ -2755,41 +3971,30 @@
               <a:buNone/>
             </a:pPr>
             <a:r>
-              <a:rPr lang="en-US" sz="2800" b="1" dirty="0">
-                <a:solidFill>
-                  <a:srgbClr val="000000"/>
-                </a:solidFill>
-                <a:latin typeface="Times New Roman" pitchFamily="34" charset="0"/>
-                <a:ea typeface="Times New Roman" pitchFamily="34" charset="-122"/>
-                <a:cs typeface="Times New Roman" pitchFamily="34" charset="-120"/>
+              <a:rPr sz="2800" b="1">
+                <a:solidFill>
+                  <a:srgbClr val="000000"/>
+                </a:solidFill>
+                <a:latin typeface="Times New Roman"/>
               </a:rPr>
               <a:t>P.A. COLLEGE OF ENGINEERING
 </a:t>
             </a:r>
-            <a:pPr algn="ctr" indent="0" marL="0">
-              <a:lnSpc>
-                <a:spcPct val="150000"/>
-              </a:lnSpc>
-              <a:buNone/>
-            </a:pPr>
-            <a:r>
-              <a:rPr lang="en-US" sz="2000" b="1" dirty="0">
-                <a:solidFill>
-                  <a:srgbClr val="000000"/>
-                </a:solidFill>
-                <a:latin typeface="Times New Roman" pitchFamily="34" charset="0"/>
-                <a:ea typeface="Times New Roman" pitchFamily="34" charset="-122"/>
-                <a:cs typeface="Times New Roman" pitchFamily="34" charset="-120"/>
+            <a:r>
+              <a:rPr sz="2000" b="1">
+                <a:solidFill>
+                  <a:srgbClr val="000000"/>
+                </a:solidFill>
+                <a:latin typeface="Times New Roman"/>
               </a:rPr>
               <a:t>DEPARTMENT OF COMPUTER SCIENCE &amp; ENGINEERING</a:t>
             </a:r>
-            <a:endParaRPr lang="en-US" sz="2800" dirty="0"/>
-          </a:p>
-        </p:txBody>
-      </p:sp>
-      <p:sp>
-        <p:nvSpPr>
-          <p:cNvPr id="5" name="Text 1"/>
+          </a:p>
+        </p:txBody>
+      </p:sp>
+      <p:sp>
+        <p:nvSpPr>
+          <p:cNvPr id="5" name="TextBox 4"/>
           <p:cNvSpPr txBox="1"/>
           <p:nvPr/>
         </p:nvSpPr>
@@ -2802,10 +4007,9 @@
             <a:avLst/>
           </a:prstGeom>
           <a:noFill/>
-          <a:ln/>
-        </p:spPr>
-        <p:txBody>
-          <a:bodyPr wrap="square" lIns="0" tIns="0" rIns="0" bIns="0" rtlCol="0" anchor="ctr"/>
+        </p:spPr>
+        <p:txBody>
+          <a:bodyPr wrap="square"/>
           <a:lstStyle/>
           <a:p>
             <a:pPr algn="ctr" indent="0" marL="0">
@@ -2820,13 +4024,12 @@
               </a:rPr>
               <a:t>SDG RELEVANCE</a:t>
             </a:r>
-            <a:endParaRPr sz="3400"/>
-          </a:p>
-        </p:txBody>
-      </p:sp>
-      <p:sp>
-        <p:nvSpPr>
-          <p:cNvPr id="6" name="Text 2"/>
+          </a:p>
+        </p:txBody>
+      </p:sp>
+      <p:sp>
+        <p:nvSpPr>
+          <p:cNvPr id="6" name="TextBox 5"/>
           <p:cNvSpPr txBox="1"/>
           <p:nvPr/>
         </p:nvSpPr>
@@ -2839,10 +4042,9 @@
             <a:avLst/>
           </a:prstGeom>
           <a:noFill/>
-          <a:ln/>
-        </p:spPr>
-        <p:txBody>
-          <a:bodyPr wrap="square" lIns="0" tIns="0" rIns="0" bIns="0" rtlCol="0" anchor="t"/>
+        </p:spPr>
+        <p:txBody>
+          <a:bodyPr wrap="square"/>
           <a:lstStyle/>
           <a:p>
             <a:pPr marL="406400" indent="-406400">
@@ -2864,7 +4066,6 @@
               </a:rPr>
               <a:t>SDG 3 - Good Health and Well-Being: earlier detection of ICU deterioration supports timely clinical review and better patient monitoring.</a:t>
             </a:r>
-            <a:endParaRPr sz="2100"/>
           </a:p>
           <a:p>
             <a:pPr/>
@@ -2889,39 +4090,25 @@
 </file>
 
 <file path=ppt/slides/slide13.xml><?xml version="1.0" encoding="utf-8"?>
-<p:sld xmlns:a="http://schemas.openxmlformats.org/drawingml/2006/main" xmlns:ns2="http://schemas.openxmlformats.org/officeDocument/2006/relationships" xmlns:p="http://schemas.openxmlformats.org/presentationml/2006/main">
-  <p:cSld name="Slide 9">
-    <p:bg>
-      <p:bgPr>
-        <a:solidFill>
-          <a:srgbClr val="FFFFFF"/>
-        </a:solidFill>
-      </p:bgPr>
-    </p:bg>
+<p:sld xmlns:a="http://schemas.openxmlformats.org/drawingml/2006/main" xmlns:p="http://schemas.openxmlformats.org/presentationml/2006/main" xmlns:r="http://schemas.openxmlformats.org/officeDocument/2006/relationships">
+  <p:cSld>
     <p:spTree>
       <p:nvGrpSpPr>
         <p:cNvPr id="1" name=""/>
         <p:cNvGrpSpPr/>
         <p:nvPr/>
       </p:nvGrpSpPr>
-      <p:grpSpPr>
-        <a:xfrm>
-          <a:off x="0" y="0"/>
-          <a:ext cx="0" cy="0"/>
-          <a:chOff x="0" y="0"/>
-          <a:chExt cx="0" cy="0"/>
-        </a:xfrm>
-      </p:grpSpPr>
+      <p:grpSpPr/>
       <p:pic>
         <p:nvPicPr>
-          <p:cNvPr id="2" name="Image 0" descr="vtu_logo.png">    </p:cNvPr>
+          <p:cNvPr id="2" name="Picture 1" descr="image.png"/>
           <p:cNvPicPr>
             <a:picLocks noChangeAspect="1"/>
           </p:cNvPicPr>
           <p:nvPr/>
         </p:nvPicPr>
         <p:blipFill>
-          <a:blip ns2:embed="rId1"/>
+          <a:blip r:embed="rId2"/>
           <a:stretch>
             <a:fillRect/>
           </a:stretch>
@@ -2938,14 +4125,14 @@
       </p:pic>
       <p:pic>
         <p:nvPicPr>
-          <p:cNvPr id="3" name="Image 1" descr="pace_logo.png">    </p:cNvPr>
+          <p:cNvPr id="3" name="Picture 2" descr="image.png"/>
           <p:cNvPicPr>
             <a:picLocks noChangeAspect="1"/>
           </p:cNvPicPr>
           <p:nvPr/>
         </p:nvPicPr>
         <p:blipFill>
-          <a:blip ns2:embed="rId2"/>
+          <a:blip r:embed="rId3"/>
           <a:stretch>
             <a:fillRect/>
           </a:stretch>
@@ -2962,7 +4149,7 @@
       </p:pic>
       <p:sp>
         <p:nvSpPr>
-          <p:cNvPr id="4" name="Text 0"/>
+          <p:cNvPr id="4" name="TextBox 3"/>
           <p:cNvSpPr txBox="1"/>
           <p:nvPr/>
         </p:nvSpPr>
@@ -2975,10 +4162,9 @@
             <a:avLst/>
           </a:prstGeom>
           <a:noFill/>
-          <a:ln/>
-        </p:spPr>
-        <p:txBody>
-          <a:bodyPr wrap="square" lIns="0" tIns="0" rIns="0" bIns="0" rtlCol="0" anchor="ctr"/>
+        </p:spPr>
+        <p:txBody>
+          <a:bodyPr wrap="square"/>
           <a:lstStyle/>
           <a:p>
             <a:pPr algn="ctr" indent="0" marL="0">
@@ -2988,41 +4174,30 @@
               <a:buNone/>
             </a:pPr>
             <a:r>
-              <a:rPr lang="en-US" sz="2800" b="1" dirty="0">
-                <a:solidFill>
-                  <a:srgbClr val="000000"/>
-                </a:solidFill>
-                <a:latin typeface="Times New Roman" pitchFamily="34" charset="0"/>
-                <a:ea typeface="Times New Roman" pitchFamily="34" charset="-122"/>
-                <a:cs typeface="Times New Roman" pitchFamily="34" charset="-120"/>
+              <a:rPr sz="2800" b="1">
+                <a:solidFill>
+                  <a:srgbClr val="000000"/>
+                </a:solidFill>
+                <a:latin typeface="Times New Roman"/>
               </a:rPr>
               <a:t>P.A. COLLEGE OF ENGINEERING
 </a:t>
             </a:r>
-            <a:pPr algn="ctr" indent="0" marL="0">
-              <a:lnSpc>
-                <a:spcPct val="150000"/>
-              </a:lnSpc>
-              <a:buNone/>
-            </a:pPr>
-            <a:r>
-              <a:rPr lang="en-US" sz="2000" b="1" dirty="0">
-                <a:solidFill>
-                  <a:srgbClr val="000000"/>
-                </a:solidFill>
-                <a:latin typeface="Times New Roman" pitchFamily="34" charset="0"/>
-                <a:ea typeface="Times New Roman" pitchFamily="34" charset="-122"/>
-                <a:cs typeface="Times New Roman" pitchFamily="34" charset="-120"/>
+            <a:r>
+              <a:rPr sz="2000" b="1">
+                <a:solidFill>
+                  <a:srgbClr val="000000"/>
+                </a:solidFill>
+                <a:latin typeface="Times New Roman"/>
               </a:rPr>
               <a:t>DEPARTMENT OF COMPUTER SCIENCE &amp; ENGINEERING</a:t>
             </a:r>
-            <a:endParaRPr lang="en-US" sz="2800" dirty="0"/>
-          </a:p>
-        </p:txBody>
-      </p:sp>
-      <p:sp>
-        <p:nvSpPr>
-          <p:cNvPr id="5" name="Text 1"/>
+          </a:p>
+        </p:txBody>
+      </p:sp>
+      <p:sp>
+        <p:nvSpPr>
+          <p:cNvPr id="5" name="TextBox 4"/>
           <p:cNvSpPr txBox="1"/>
           <p:nvPr/>
         </p:nvSpPr>
@@ -3035,33 +4210,29 @@
             <a:avLst/>
           </a:prstGeom>
           <a:noFill/>
-          <a:ln/>
-        </p:spPr>
-        <p:txBody>
-          <a:bodyPr wrap="square" lIns="0" tIns="0" rIns="0" bIns="0" rtlCol="0" anchor="ctr"/>
+        </p:spPr>
+        <p:txBody>
+          <a:bodyPr wrap="square"/>
           <a:lstStyle/>
           <a:p>
             <a:pPr algn="ctr" indent="0" marL="0">
               <a:buNone/>
             </a:pPr>
             <a:r>
-              <a:rPr lang="en-US" sz="3400" b="1" dirty="0">
+              <a:rPr sz="3400" b="1">
                 <a:solidFill>
                   <a:srgbClr val="1757AC"/>
                 </a:solidFill>
-                <a:latin typeface="Times New Roman" pitchFamily="34" charset="0"/>
-                <a:ea typeface="Times New Roman" pitchFamily="34" charset="-122"/>
-                <a:cs typeface="Times New Roman" pitchFamily="34" charset="-120"/>
+                <a:latin typeface="Times New Roman"/>
               </a:rPr>
               <a:t>FUTURE SCOPE</a:t>
             </a:r>
-            <a:endParaRPr sz="3400"/>
-          </a:p>
-        </p:txBody>
-      </p:sp>
-      <p:sp>
-        <p:nvSpPr>
-          <p:cNvPr id="6" name="Text 2"/>
+          </a:p>
+        </p:txBody>
+      </p:sp>
+      <p:sp>
+        <p:nvSpPr>
+          <p:cNvPr id="6" name="TextBox 5"/>
           <p:cNvSpPr txBox="1"/>
           <p:nvPr/>
         </p:nvSpPr>
@@ -3074,10 +4245,9 @@
             <a:avLst/>
           </a:prstGeom>
           <a:noFill/>
-          <a:ln/>
-        </p:spPr>
-        <p:txBody>
-          <a:bodyPr wrap="square" lIns="0" tIns="0" rIns="0" bIns="0" rtlCol="0" anchor="t"/>
+        </p:spPr>
+        <p:txBody>
+          <a:bodyPr wrap="square"/>
           <a:lstStyle/>
           <a:p>
             <a:pPr marL="406400" indent="-406400">
@@ -3091,17 +4261,14 @@
               <a:buChar char="•"/>
             </a:pPr>
             <a:r>
-              <a:rPr lang="en-US" sz="2100" dirty="0">
-                <a:solidFill>
-                  <a:srgbClr val="000000"/>
-                </a:solidFill>
-                <a:latin typeface="Times New Roman" pitchFamily="34" charset="0"/>
-                <a:ea typeface="Times New Roman" pitchFamily="34" charset="-122"/>
-                <a:cs typeface="Times New Roman" pitchFamily="34" charset="-120"/>
+              <a:rPr sz="2100">
+                <a:solidFill>
+                  <a:srgbClr val="000000"/>
+                </a:solidFill>
+                <a:latin typeface="Times New Roman"/>
               </a:rPr>
               <a:t>Perform calibration, decision-curve analysis, and prospective evaluation with clinical collaborators.</a:t>
             </a:r>
-            <a:endParaRPr sz="2100"/>
           </a:p>
           <a:p>
             <a:pPr marL="406400" indent="-406400">
@@ -3115,17 +4282,14 @@
               <a:buChar char="•"/>
             </a:pPr>
             <a:r>
-              <a:rPr lang="en-US" sz="2100" dirty="0">
-                <a:solidFill>
-                  <a:srgbClr val="000000"/>
-                </a:solidFill>
-                <a:latin typeface="Times New Roman" pitchFamily="34" charset="0"/>
-                <a:ea typeface="Times New Roman" pitchFamily="34" charset="-122"/>
-                <a:cs typeface="Times New Roman" pitchFamily="34" charset="-120"/>
+              <a:rPr sz="2100">
+                <a:solidFill>
+                  <a:srgbClr val="000000"/>
+                </a:solidFill>
+                <a:latin typeface="Times New Roman"/>
               </a:rPr>
               <a:t>Add robust missing-data handling and test performance across hospitals and patient subgroups.</a:t>
             </a:r>
-            <a:endParaRPr sz="2100"/>
           </a:p>
           <a:p>
             <a:pPr marL="406400" indent="-406400">
@@ -3139,17 +4303,14 @@
               <a:buChar char="•"/>
             </a:pPr>
             <a:r>
-              <a:rPr lang="en-US" sz="2100" dirty="0">
-                <a:solidFill>
-                  <a:srgbClr val="000000"/>
-                </a:solidFill>
-                <a:latin typeface="Times New Roman" pitchFamily="34" charset="0"/>
-                <a:ea typeface="Times New Roman" pitchFamily="34" charset="-122"/>
-                <a:cs typeface="Times New Roman" pitchFamily="34" charset="-120"/>
+              <a:rPr sz="2100">
+                <a:solidFill>
+                  <a:srgbClr val="000000"/>
+                </a:solidFill>
+                <a:latin typeface="Times New Roman"/>
               </a:rPr>
               <a:t>Compare attention-LSTM with transformer and graph-based temporal models.</a:t>
             </a:r>
-            <a:endParaRPr sz="2100"/>
           </a:p>
           <a:p>
             <a:pPr marL="406400" indent="-406400">
@@ -3163,17 +4324,14 @@
               <a:buChar char="•"/>
             </a:pPr>
             <a:r>
-              <a:rPr lang="en-US" sz="2100" dirty="0">
-                <a:solidFill>
-                  <a:srgbClr val="000000"/>
-                </a:solidFill>
-                <a:latin typeface="Times New Roman" pitchFamily="34" charset="0"/>
-                <a:ea typeface="Times New Roman" pitchFamily="34" charset="-122"/>
-                <a:cs typeface="Times New Roman" pitchFamily="34" charset="-120"/>
+              <a:rPr sz="2100">
+                <a:solidFill>
+                  <a:srgbClr val="000000"/>
+                </a:solidFill>
+                <a:latin typeface="Times New Roman"/>
               </a:rPr>
               <a:t>Explore multimodal fusion with clinical notes and safer integration with real bedside data streams.</a:t>
             </a:r>
-            <a:endParaRPr sz="2100"/>
           </a:p>
           <a:p>
             <a:pPr marL="406400" indent="-406400">
@@ -3187,17 +4345,14 @@
               <a:buChar char="•"/>
             </a:pPr>
             <a:r>
-              <a:rPr lang="en-US" sz="2100" dirty="0">
-                <a:solidFill>
-                  <a:srgbClr val="000000"/>
-                </a:solidFill>
-                <a:latin typeface="Times New Roman" pitchFamily="34" charset="0"/>
-                <a:ea typeface="Times New Roman" pitchFamily="34" charset="-122"/>
-                <a:cs typeface="Times New Roman" pitchFamily="34" charset="-120"/>
+              <a:rPr sz="2100">
+                <a:solidFill>
+                  <a:srgbClr val="000000"/>
+                </a:solidFill>
+                <a:latin typeface="Times New Roman"/>
               </a:rPr>
               <a:t>Investigate privacy-preserving and edge-assisted deployment only after clinical validation.</a:t>
             </a:r>
-            <a:endParaRPr sz="2100"/>
           </a:p>
         </p:txBody>
       </p:sp>
@@ -3210,39 +4365,25 @@
 </file>
 
 <file path=ppt/slides/slide14.xml><?xml version="1.0" encoding="utf-8"?>
-<p:sld xmlns:a="http://schemas.openxmlformats.org/drawingml/2006/main" xmlns:ns2="http://schemas.openxmlformats.org/officeDocument/2006/relationships" xmlns:p="http://schemas.openxmlformats.org/presentationml/2006/main">
-  <p:cSld name="Slide 8">
-    <p:bg>
-      <p:bgPr>
-        <a:solidFill>
-          <a:srgbClr val="FFFFFF"/>
-        </a:solidFill>
-      </p:bgPr>
-    </p:bg>
+<p:sld xmlns:a="http://schemas.openxmlformats.org/drawingml/2006/main" xmlns:p="http://schemas.openxmlformats.org/presentationml/2006/main" xmlns:r="http://schemas.openxmlformats.org/officeDocument/2006/relationships">
+  <p:cSld>
     <p:spTree>
       <p:nvGrpSpPr>
         <p:cNvPr id="1" name=""/>
         <p:cNvGrpSpPr/>
         <p:nvPr/>
       </p:nvGrpSpPr>
-      <p:grpSpPr>
-        <a:xfrm>
-          <a:off x="0" y="0"/>
-          <a:ext cx="0" cy="0"/>
-          <a:chOff x="0" y="0"/>
-          <a:chExt cx="0" cy="0"/>
-        </a:xfrm>
-      </p:grpSpPr>
+      <p:grpSpPr/>
       <p:pic>
         <p:nvPicPr>
-          <p:cNvPr id="2" name="Image 0" descr="vtu_logo.png">    </p:cNvPr>
+          <p:cNvPr id="2" name="Picture 1" descr="image.png"/>
           <p:cNvPicPr>
             <a:picLocks noChangeAspect="1"/>
           </p:cNvPicPr>
           <p:nvPr/>
         </p:nvPicPr>
         <p:blipFill>
-          <a:blip ns2:embed="rId1"/>
+          <a:blip r:embed="rId2"/>
           <a:stretch>
             <a:fillRect/>
           </a:stretch>
@@ -3259,14 +4400,14 @@
       </p:pic>
       <p:pic>
         <p:nvPicPr>
-          <p:cNvPr id="3" name="Image 1" descr="pace_logo.png">    </p:cNvPr>
+          <p:cNvPr id="3" name="Picture 2" descr="image.png"/>
           <p:cNvPicPr>
             <a:picLocks noChangeAspect="1"/>
           </p:cNvPicPr>
           <p:nvPr/>
         </p:nvPicPr>
         <p:blipFill>
-          <a:blip ns2:embed="rId2"/>
+          <a:blip r:embed="rId3"/>
           <a:stretch>
             <a:fillRect/>
           </a:stretch>
@@ -3283,7 +4424,7 @@
       </p:pic>
       <p:sp>
         <p:nvSpPr>
-          <p:cNvPr id="4" name="Text 0"/>
+          <p:cNvPr id="4" name="TextBox 3"/>
           <p:cNvSpPr txBox="1"/>
           <p:nvPr/>
         </p:nvSpPr>
@@ -3296,10 +4437,9 @@
             <a:avLst/>
           </a:prstGeom>
           <a:noFill/>
-          <a:ln/>
-        </p:spPr>
-        <p:txBody>
-          <a:bodyPr wrap="square" lIns="0" tIns="0" rIns="0" bIns="0" rtlCol="0" anchor="ctr"/>
+        </p:spPr>
+        <p:txBody>
+          <a:bodyPr wrap="square"/>
           <a:lstStyle/>
           <a:p>
             <a:pPr algn="ctr" indent="0" marL="0">
@@ -3309,41 +4449,30 @@
               <a:buNone/>
             </a:pPr>
             <a:r>
-              <a:rPr lang="en-US" sz="2800" b="1" dirty="0">
-                <a:solidFill>
-                  <a:srgbClr val="000000"/>
-                </a:solidFill>
-                <a:latin typeface="Times New Roman" pitchFamily="34" charset="0"/>
-                <a:ea typeface="Times New Roman" pitchFamily="34" charset="-122"/>
-                <a:cs typeface="Times New Roman" pitchFamily="34" charset="-120"/>
+              <a:rPr sz="2800" b="1">
+                <a:solidFill>
+                  <a:srgbClr val="000000"/>
+                </a:solidFill>
+                <a:latin typeface="Times New Roman"/>
               </a:rPr>
               <a:t>P.A. COLLEGE OF ENGINEERING
 </a:t>
             </a:r>
-            <a:pPr algn="ctr" indent="0" marL="0">
-              <a:lnSpc>
-                <a:spcPct val="150000"/>
-              </a:lnSpc>
-              <a:buNone/>
-            </a:pPr>
-            <a:r>
-              <a:rPr lang="en-US" sz="2000" b="1" dirty="0">
-                <a:solidFill>
-                  <a:srgbClr val="000000"/>
-                </a:solidFill>
-                <a:latin typeface="Times New Roman" pitchFamily="34" charset="0"/>
-                <a:ea typeface="Times New Roman" pitchFamily="34" charset="-122"/>
-                <a:cs typeface="Times New Roman" pitchFamily="34" charset="-120"/>
+            <a:r>
+              <a:rPr sz="2000" b="1">
+                <a:solidFill>
+                  <a:srgbClr val="000000"/>
+                </a:solidFill>
+                <a:latin typeface="Times New Roman"/>
               </a:rPr>
               <a:t>DEPARTMENT OF COMPUTER SCIENCE &amp; ENGINEERING</a:t>
             </a:r>
-            <a:endParaRPr lang="en-US" sz="2800" dirty="0"/>
-          </a:p>
-        </p:txBody>
-      </p:sp>
-      <p:sp>
-        <p:nvSpPr>
-          <p:cNvPr id="5" name="Text 1"/>
+          </a:p>
+        </p:txBody>
+      </p:sp>
+      <p:sp>
+        <p:nvSpPr>
+          <p:cNvPr id="5" name="TextBox 4"/>
           <p:cNvSpPr txBox="1"/>
           <p:nvPr/>
         </p:nvSpPr>
@@ -3356,33 +4485,29 @@
             <a:avLst/>
           </a:prstGeom>
           <a:noFill/>
-          <a:ln/>
-        </p:spPr>
-        <p:txBody>
-          <a:bodyPr wrap="square" lIns="0" tIns="0" rIns="0" bIns="0" rtlCol="0" anchor="ctr"/>
+        </p:spPr>
+        <p:txBody>
+          <a:bodyPr wrap="square"/>
           <a:lstStyle/>
           <a:p>
             <a:pPr algn="ctr" indent="0" marL="0">
               <a:buNone/>
             </a:pPr>
             <a:r>
-              <a:rPr lang="en-US" sz="3400" b="1" dirty="0">
+              <a:rPr sz="3400" b="1">
                 <a:solidFill>
                   <a:srgbClr val="1757AC"/>
                 </a:solidFill>
-                <a:latin typeface="Times New Roman" pitchFamily="34" charset="0"/>
-                <a:ea typeface="Times New Roman" pitchFamily="34" charset="-122"/>
-                <a:cs typeface="Times New Roman" pitchFamily="34" charset="-120"/>
+                <a:latin typeface="Times New Roman"/>
               </a:rPr>
               <a:t>CONCLUSION</a:t>
             </a:r>
-            <a:endParaRPr sz="3400"/>
-          </a:p>
-        </p:txBody>
-      </p:sp>
-      <p:sp>
-        <p:nvSpPr>
-          <p:cNvPr id="6" name="Text 2"/>
+          </a:p>
+        </p:txBody>
+      </p:sp>
+      <p:sp>
+        <p:nvSpPr>
+          <p:cNvPr id="6" name="TextBox 5"/>
           <p:cNvSpPr txBox="1"/>
           <p:nvPr/>
         </p:nvSpPr>
@@ -3395,10 +4520,9 @@
             <a:avLst/>
           </a:prstGeom>
           <a:noFill/>
-          <a:ln/>
-        </p:spPr>
-        <p:txBody>
-          <a:bodyPr wrap="square" lIns="0" tIns="0" rIns="0" bIns="0" rtlCol="0" anchor="t"/>
+        </p:spPr>
+        <p:txBody>
+          <a:bodyPr wrap="square"/>
           <a:lstStyle/>
           <a:p>
             <a:pPr marL="406400" indent="-406400">
@@ -3420,7 +4544,6 @@
               </a:rPr>
               <a:t>SynCura demonstrates an end-to-end explainable ICU risk-monitoring workflow from clinical time-series input to dashboard output.</a:t>
             </a:r>
-            <a:endParaRPr sz="2100"/>
           </a:p>
           <a:p>
             <a:pPr/>
@@ -3469,39 +4592,25 @@
 </file>
 
 <file path=ppt/slides/slide15.xml><?xml version="1.0" encoding="utf-8"?>
-<p:sld xmlns:a="http://schemas.openxmlformats.org/drawingml/2006/main" xmlns:ns2="http://schemas.openxmlformats.org/officeDocument/2006/relationships" xmlns:p="http://schemas.openxmlformats.org/presentationml/2006/main">
-  <p:cSld name="Slide 11">
-    <p:bg>
-      <p:bgPr>
-        <a:solidFill>
-          <a:srgbClr val="FFFFFF"/>
-        </a:solidFill>
-      </p:bgPr>
-    </p:bg>
+<p:sld xmlns:a="http://schemas.openxmlformats.org/drawingml/2006/main" xmlns:p="http://schemas.openxmlformats.org/presentationml/2006/main" xmlns:r="http://schemas.openxmlformats.org/officeDocument/2006/relationships">
+  <p:cSld>
     <p:spTree>
       <p:nvGrpSpPr>
         <p:cNvPr id="1" name=""/>
         <p:cNvGrpSpPr/>
         <p:nvPr/>
       </p:nvGrpSpPr>
-      <p:grpSpPr>
-        <a:xfrm>
-          <a:off x="0" y="0"/>
-          <a:ext cx="0" cy="0"/>
-          <a:chOff x="0" y="0"/>
-          <a:chExt cx="0" cy="0"/>
-        </a:xfrm>
-      </p:grpSpPr>
+      <p:grpSpPr/>
       <p:pic>
         <p:nvPicPr>
-          <p:cNvPr id="2" name="Image 0" descr="vtu_logo.png">    </p:cNvPr>
+          <p:cNvPr id="2" name="Picture 1" descr="image.png"/>
           <p:cNvPicPr>
             <a:picLocks noChangeAspect="1"/>
           </p:cNvPicPr>
           <p:nvPr/>
         </p:nvPicPr>
         <p:blipFill>
-          <a:blip ns2:embed="rId1"/>
+          <a:blip r:embed="rId2"/>
           <a:stretch>
             <a:fillRect/>
           </a:stretch>
@@ -3518,14 +4627,14 @@
       </p:pic>
       <p:pic>
         <p:nvPicPr>
-          <p:cNvPr id="3" name="Image 1" descr="pace_logo.png">    </p:cNvPr>
+          <p:cNvPr id="3" name="Picture 2" descr="image.png"/>
           <p:cNvPicPr>
             <a:picLocks noChangeAspect="1"/>
           </p:cNvPicPr>
           <p:nvPr/>
         </p:nvPicPr>
         <p:blipFill>
-          <a:blip ns2:embed="rId2"/>
+          <a:blip r:embed="rId3"/>
           <a:stretch>
             <a:fillRect/>
           </a:stretch>
@@ -3542,7 +4651,7 @@
       </p:pic>
       <p:sp>
         <p:nvSpPr>
-          <p:cNvPr id="4" name="Text 0"/>
+          <p:cNvPr id="4" name="TextBox 3"/>
           <p:cNvSpPr txBox="1"/>
           <p:nvPr/>
         </p:nvSpPr>
@@ -3555,10 +4664,9 @@
             <a:avLst/>
           </a:prstGeom>
           <a:noFill/>
-          <a:ln/>
-        </p:spPr>
-        <p:txBody>
-          <a:bodyPr wrap="square" lIns="0" tIns="0" rIns="0" bIns="0" rtlCol="0" anchor="ctr"/>
+        </p:spPr>
+        <p:txBody>
+          <a:bodyPr wrap="square"/>
           <a:lstStyle/>
           <a:p>
             <a:pPr algn="ctr" indent="0" marL="0">
@@ -3568,41 +4676,30 @@
               <a:buNone/>
             </a:pPr>
             <a:r>
-              <a:rPr lang="en-US" sz="2800" b="1" dirty="0">
-                <a:solidFill>
-                  <a:srgbClr val="000000"/>
-                </a:solidFill>
-                <a:latin typeface="Times New Roman" pitchFamily="34" charset="0"/>
-                <a:ea typeface="Times New Roman" pitchFamily="34" charset="-122"/>
-                <a:cs typeface="Times New Roman" pitchFamily="34" charset="-120"/>
+              <a:rPr sz="2800" b="1">
+                <a:solidFill>
+                  <a:srgbClr val="000000"/>
+                </a:solidFill>
+                <a:latin typeface="Times New Roman"/>
               </a:rPr>
               <a:t>P.A. COLLEGE OF ENGINEERING
 </a:t>
             </a:r>
-            <a:pPr algn="ctr" indent="0" marL="0">
-              <a:lnSpc>
-                <a:spcPct val="150000"/>
-              </a:lnSpc>
-              <a:buNone/>
-            </a:pPr>
-            <a:r>
-              <a:rPr lang="en-US" sz="2000" b="1" dirty="0">
-                <a:solidFill>
-                  <a:srgbClr val="000000"/>
-                </a:solidFill>
-                <a:latin typeface="Times New Roman" pitchFamily="34" charset="0"/>
-                <a:ea typeface="Times New Roman" pitchFamily="34" charset="-122"/>
-                <a:cs typeface="Times New Roman" pitchFamily="34" charset="-120"/>
+            <a:r>
+              <a:rPr sz="2000" b="1">
+                <a:solidFill>
+                  <a:srgbClr val="000000"/>
+                </a:solidFill>
+                <a:latin typeface="Times New Roman"/>
               </a:rPr>
               <a:t>DEPARTMENT OF COMPUTER SCIENCE &amp; ENGINEERING</a:t>
             </a:r>
-            <a:endParaRPr lang="en-US" sz="2800" dirty="0"/>
-          </a:p>
-        </p:txBody>
-      </p:sp>
-      <p:sp>
-        <p:nvSpPr>
-          <p:cNvPr id="5" name="Text 1"/>
+          </a:p>
+        </p:txBody>
+      </p:sp>
+      <p:sp>
+        <p:nvSpPr>
+          <p:cNvPr id="5" name="TextBox 4"/>
           <p:cNvSpPr txBox="1"/>
           <p:nvPr/>
         </p:nvSpPr>
@@ -3615,33 +4712,29 @@
             <a:avLst/>
           </a:prstGeom>
           <a:noFill/>
-          <a:ln/>
-        </p:spPr>
-        <p:txBody>
-          <a:bodyPr wrap="square" lIns="0" tIns="0" rIns="0" bIns="0" rtlCol="0" anchor="ctr"/>
+        </p:spPr>
+        <p:txBody>
+          <a:bodyPr wrap="square"/>
           <a:lstStyle/>
           <a:p>
             <a:pPr algn="ctr" indent="0" marL="0">
               <a:buNone/>
             </a:pPr>
             <a:r>
-              <a:rPr lang="en-US" sz="3400" b="1" dirty="0">
+              <a:rPr sz="3400" b="1">
                 <a:solidFill>
                   <a:srgbClr val="1757AC"/>
                 </a:solidFill>
-                <a:latin typeface="Times New Roman" pitchFamily="34" charset="0"/>
-                <a:ea typeface="Times New Roman" pitchFamily="34" charset="-122"/>
-                <a:cs typeface="Times New Roman" pitchFamily="34" charset="-120"/>
+                <a:latin typeface="Times New Roman"/>
               </a:rPr>
               <a:t>REFERENCES</a:t>
             </a:r>
-            <a:endParaRPr sz="3400"/>
-          </a:p>
-        </p:txBody>
-      </p:sp>
-      <p:sp>
-        <p:nvSpPr>
-          <p:cNvPr id="6" name="Text 2"/>
+          </a:p>
+        </p:txBody>
+      </p:sp>
+      <p:sp>
+        <p:nvSpPr>
+          <p:cNvPr id="6" name="TextBox 5"/>
           <p:cNvSpPr txBox="1"/>
           <p:nvPr/>
         </p:nvSpPr>
@@ -3654,10 +4747,9 @@
             <a:avLst/>
           </a:prstGeom>
           <a:noFill/>
-          <a:ln/>
-        </p:spPr>
-        <p:txBody>
-          <a:bodyPr wrap="square" lIns="0" tIns="0" rIns="0" bIns="0" rtlCol="0" anchor="t"/>
+        </p:spPr>
+        <p:txBody>
+          <a:bodyPr wrap="square"/>
           <a:lstStyle/>
           <a:p>
             <a:pPr marL="406400" indent="-406400">
@@ -3671,9 +4763,9 @@
               <a:buChar char="•"/>
             </a:pPr>
             <a:r>
+              <a:rPr/>
               <a:t>[1] Y. Wang, Y. Bai, and G. Jin, Explainable Deep-Learning Models..., Frontiers in Physiology, vol. 17, 2026.</a:t>
             </a:r>
-            <a:endParaRPr sz="1450"/>
           </a:p>
           <a:p>
             <a:pPr marL="406400" indent="-406400">
@@ -3687,9 +4779,9 @@
               <a:buChar char="•"/>
             </a:pPr>
             <a:r>
+              <a:rPr/>
               <a:t>[2] Z. Yan et al., Deep learning-based in-hospital mortality prediction..., PeerJ, vol. 14, e21631, 2026.</a:t>
             </a:r>
-            <a:endParaRPr sz="1450"/>
           </a:p>
           <a:p>
             <a:pPr marL="406400" indent="-406400">
@@ -3703,9 +4795,9 @@
               <a:buChar char="•"/>
             </a:pPr>
             <a:r>
+              <a:rPr/>
               <a:t>[3] B. Sadanandan, Multimodal Deep Learning for Early Prediction..., arXiv:2603.14719, 2026.</a:t>
             </a:r>
-            <a:endParaRPr sz="1450"/>
           </a:p>
           <a:p>
             <a:pPr marL="406400" indent="-406400">
@@ -3719,9 +4811,9 @@
               <a:buChar char="•"/>
             </a:pPr>
             <a:r>
+              <a:rPr/>
               <a:t>[4] Y. Wu et al., Revisiting the potential value of vital signs..., Journal of Big Data, vol. 11, no. 40, 2024.</a:t>
             </a:r>
-            <a:endParaRPr sz="1450"/>
           </a:p>
           <a:p>
             <a:pPr marL="406400" indent="-406400">
@@ -3735,9 +4827,9 @@
               <a:buChar char="•"/>
             </a:pPr>
             <a:r>
+              <a:rPr/>
               <a:t>[5] P. Xie et al., Unlocking real-time ICU mortality prediction..., npj Digital Medicine, vol. 8, 733, 2025.</a:t>
             </a:r>
-            <a:endParaRPr sz="1450"/>
           </a:p>
           <a:p>
             <a:pPr marL="406400" indent="-406400">
@@ -3751,9 +4843,9 @@
               <a:buChar char="•"/>
             </a:pPr>
             <a:r>
+              <a:rPr/>
               <a:t>[6] E. Choi et al., Deep Interpretable Early Warning System..., IEEE JBHI, vol. 24, no. 9, 2020.</a:t>
             </a:r>
-            <a:endParaRPr sz="1450"/>
           </a:p>
           <a:p>
             <a:pPr marL="406400" indent="-406400">
@@ -3767,9 +4859,9 @@
               <a:buChar char="•"/>
             </a:pPr>
             <a:r>
+              <a:rPr/>
               <a:t>[7] M. R. Scheid et al., Clinical wearable deep learning based deterioration prediction..., Nature Communications, vol. 16, 9513, 2025.</a:t>
             </a:r>
-            <a:endParaRPr sz="1450"/>
           </a:p>
           <a:p>
             <a:pPr marL="406400" indent="-406400">
@@ -3783,9 +4875,9 @@
               <a:buChar char="•"/>
             </a:pPr>
             <a:r>
+              <a:rPr/>
               <a:t>[8] PhysioNet, Computing in Cardiology Challenge 2012, physionet.org/content/challenge-2012/.</a:t>
             </a:r>
-            <a:endParaRPr sz="1450"/>
           </a:p>
         </p:txBody>
       </p:sp>
@@ -3798,39 +4890,25 @@
 </file>
 
 <file path=ppt/slides/slide16.xml><?xml version="1.0" encoding="utf-8"?>
-<p:sld xmlns:a="http://schemas.openxmlformats.org/drawingml/2006/main" xmlns:ns2="http://schemas.openxmlformats.org/officeDocument/2006/relationships" xmlns:p="http://schemas.openxmlformats.org/presentationml/2006/main">
-  <p:cSld name="Slide 12">
-    <p:bg>
-      <p:bgPr>
-        <a:solidFill>
-          <a:srgbClr val="FFFFFF"/>
-        </a:solidFill>
-      </p:bgPr>
-    </p:bg>
+<p:sld xmlns:a="http://schemas.openxmlformats.org/drawingml/2006/main" xmlns:p="http://schemas.openxmlformats.org/presentationml/2006/main" xmlns:r="http://schemas.openxmlformats.org/officeDocument/2006/relationships">
+  <p:cSld>
     <p:spTree>
       <p:nvGrpSpPr>
         <p:cNvPr id="1" name=""/>
         <p:cNvGrpSpPr/>
         <p:nvPr/>
       </p:nvGrpSpPr>
-      <p:grpSpPr>
-        <a:xfrm>
-          <a:off x="0" y="0"/>
-          <a:ext cx="0" cy="0"/>
-          <a:chOff x="0" y="0"/>
-          <a:chExt cx="0" cy="0"/>
-        </a:xfrm>
-      </p:grpSpPr>
+      <p:grpSpPr/>
       <p:pic>
         <p:nvPicPr>
-          <p:cNvPr id="2" name="Image 0" descr="vtu_logo.png">    </p:cNvPr>
+          <p:cNvPr id="2" name="Picture 1" descr="image.png"/>
           <p:cNvPicPr>
             <a:picLocks noChangeAspect="1"/>
           </p:cNvPicPr>
           <p:nvPr/>
         </p:nvPicPr>
         <p:blipFill>
-          <a:blip ns2:embed="rId1"/>
+          <a:blip r:embed="rId2"/>
           <a:stretch>
             <a:fillRect/>
           </a:stretch>
@@ -3847,14 +4925,14 @@
       </p:pic>
       <p:pic>
         <p:nvPicPr>
-          <p:cNvPr id="3" name="Image 1" descr="pace_logo.png">    </p:cNvPr>
+          <p:cNvPr id="3" name="Picture 2" descr="image.png"/>
           <p:cNvPicPr>
             <a:picLocks noChangeAspect="1"/>
           </p:cNvPicPr>
           <p:nvPr/>
         </p:nvPicPr>
         <p:blipFill>
-          <a:blip ns2:embed="rId2"/>
+          <a:blip r:embed="rId3"/>
           <a:stretch>
             <a:fillRect/>
           </a:stretch>
@@ -3871,7 +4949,7 @@
       </p:pic>
       <p:sp>
         <p:nvSpPr>
-          <p:cNvPr id="4" name="Text 0"/>
+          <p:cNvPr id="4" name="TextBox 3"/>
           <p:cNvSpPr txBox="1"/>
           <p:nvPr/>
         </p:nvSpPr>
@@ -3884,10 +4962,9 @@
             <a:avLst/>
           </a:prstGeom>
           <a:noFill/>
-          <a:ln/>
-        </p:spPr>
-        <p:txBody>
-          <a:bodyPr wrap="square" lIns="0" tIns="0" rIns="0" bIns="0" rtlCol="0" anchor="ctr"/>
+        </p:spPr>
+        <p:txBody>
+          <a:bodyPr wrap="square"/>
           <a:lstStyle/>
           <a:p>
             <a:pPr algn="ctr" indent="0" marL="0">
@@ -3897,41 +4974,30 @@
               <a:buNone/>
             </a:pPr>
             <a:r>
-              <a:rPr lang="en-US" sz="2800" b="1" dirty="0">
-                <a:solidFill>
-                  <a:srgbClr val="000000"/>
-                </a:solidFill>
-                <a:latin typeface="Times New Roman" pitchFamily="34" charset="0"/>
-                <a:ea typeface="Times New Roman" pitchFamily="34" charset="-122"/>
-                <a:cs typeface="Times New Roman" pitchFamily="34" charset="-120"/>
+              <a:rPr sz="2800" b="1">
+                <a:solidFill>
+                  <a:srgbClr val="000000"/>
+                </a:solidFill>
+                <a:latin typeface="Times New Roman"/>
               </a:rPr>
               <a:t>P.A. COLLEGE OF ENGINEERING
 </a:t>
             </a:r>
-            <a:pPr algn="ctr" indent="0" marL="0">
-              <a:lnSpc>
-                <a:spcPct val="150000"/>
-              </a:lnSpc>
-              <a:buNone/>
-            </a:pPr>
-            <a:r>
-              <a:rPr lang="en-US" sz="2000" b="1" dirty="0">
-                <a:solidFill>
-                  <a:srgbClr val="000000"/>
-                </a:solidFill>
-                <a:latin typeface="Times New Roman" pitchFamily="34" charset="0"/>
-                <a:ea typeface="Times New Roman" pitchFamily="34" charset="-122"/>
-                <a:cs typeface="Times New Roman" pitchFamily="34" charset="-120"/>
+            <a:r>
+              <a:rPr sz="2000" b="1">
+                <a:solidFill>
+                  <a:srgbClr val="000000"/>
+                </a:solidFill>
+                <a:latin typeface="Times New Roman"/>
               </a:rPr>
               <a:t>DEPARTMENT OF COMPUTER SCIENCE &amp; ENGINEERING</a:t>
             </a:r>
-            <a:endParaRPr lang="en-US" sz="2800" dirty="0"/>
-          </a:p>
-        </p:txBody>
-      </p:sp>
-      <p:sp>
-        <p:nvSpPr>
-          <p:cNvPr id="5" name="Text 1"/>
+          </a:p>
+        </p:txBody>
+      </p:sp>
+      <p:sp>
+        <p:nvSpPr>
+          <p:cNvPr id="5" name="TextBox 4"/>
           <p:cNvSpPr txBox="1"/>
           <p:nvPr/>
         </p:nvSpPr>
@@ -3944,27 +5010,23 @@
             <a:avLst/>
           </a:prstGeom>
           <a:noFill/>
-          <a:ln/>
-        </p:spPr>
-        <p:txBody>
-          <a:bodyPr wrap="square" lIns="0" tIns="0" rIns="0" bIns="0" rtlCol="0" anchor="ctr"/>
+        </p:spPr>
+        <p:txBody>
+          <a:bodyPr wrap="square"/>
           <a:lstStyle/>
           <a:p>
             <a:pPr algn="ctr" indent="0" marL="0">
               <a:buNone/>
             </a:pPr>
             <a:r>
-              <a:rPr lang="en-US" sz="6000" b="1" dirty="0">
-                <a:solidFill>
-                  <a:srgbClr val="000000"/>
-                </a:solidFill>
-                <a:latin typeface="Times New Roman" pitchFamily="34" charset="0"/>
-                <a:ea typeface="Times New Roman" pitchFamily="34" charset="-122"/>
-                <a:cs typeface="Times New Roman" pitchFamily="34" charset="-120"/>
+              <a:rPr sz="6000" b="1">
+                <a:solidFill>
+                  <a:srgbClr val="000000"/>
+                </a:solidFill>
+                <a:latin typeface="Times New Roman"/>
               </a:rPr>
               <a:t>THANK YOU</a:t>
             </a:r>
-            <a:endParaRPr lang="en-US" sz="6000" dirty="0"/>
           </a:p>
         </p:txBody>
       </p:sp>
@@ -3977,39 +5039,25 @@
 </file>
 
 <file path=ppt/slides/slide2.xml><?xml version="1.0" encoding="utf-8"?>
-<p:sld xmlns:a="http://schemas.openxmlformats.org/drawingml/2006/main" xmlns:ns2="http://schemas.openxmlformats.org/officeDocument/2006/relationships" xmlns:p="http://schemas.openxmlformats.org/presentationml/2006/main">
-  <p:cSld name="Slide 5">
-    <p:bg>
-      <p:bgPr>
-        <a:solidFill>
-          <a:srgbClr val="FFFFFF"/>
-        </a:solidFill>
-      </p:bgPr>
-    </p:bg>
+<p:sld xmlns:a="http://schemas.openxmlformats.org/drawingml/2006/main" xmlns:p="http://schemas.openxmlformats.org/presentationml/2006/main" xmlns:r="http://schemas.openxmlformats.org/officeDocument/2006/relationships">
+  <p:cSld>
     <p:spTree>
       <p:nvGrpSpPr>
         <p:cNvPr id="1" name=""/>
         <p:cNvGrpSpPr/>
         <p:nvPr/>
       </p:nvGrpSpPr>
-      <p:grpSpPr>
-        <a:xfrm>
-          <a:off x="0" y="0"/>
-          <a:ext cx="0" cy="0"/>
-          <a:chOff x="0" y="0"/>
-          <a:chExt cx="0" cy="0"/>
-        </a:xfrm>
-      </p:grpSpPr>
+      <p:grpSpPr/>
       <p:pic>
         <p:nvPicPr>
-          <p:cNvPr id="2" name="Image 0" descr="vtu_logo.png">    </p:cNvPr>
+          <p:cNvPr id="2" name="Picture 1" descr="image.png"/>
           <p:cNvPicPr>
             <a:picLocks noChangeAspect="1"/>
           </p:cNvPicPr>
           <p:nvPr/>
         </p:nvPicPr>
         <p:blipFill>
-          <a:blip ns2:embed="rId1"/>
+          <a:blip r:embed="rId2"/>
           <a:stretch>
             <a:fillRect/>
           </a:stretch>
@@ -4026,14 +5074,14 @@
       </p:pic>
       <p:pic>
         <p:nvPicPr>
-          <p:cNvPr id="3" name="Image 1" descr="pace_logo.png">    </p:cNvPr>
+          <p:cNvPr id="3" name="Picture 2" descr="image.png"/>
           <p:cNvPicPr>
             <a:picLocks noChangeAspect="1"/>
           </p:cNvPicPr>
           <p:nvPr/>
         </p:nvPicPr>
         <p:blipFill>
-          <a:blip ns2:embed="rId2"/>
+          <a:blip r:embed="rId3"/>
           <a:stretch>
             <a:fillRect/>
           </a:stretch>
@@ -4050,7 +5098,7 @@
       </p:pic>
       <p:sp>
         <p:nvSpPr>
-          <p:cNvPr id="4" name="Text 0"/>
+          <p:cNvPr id="4" name="TextBox 3"/>
           <p:cNvSpPr txBox="1"/>
           <p:nvPr/>
         </p:nvSpPr>
@@ -4063,10 +5111,9 @@
             <a:avLst/>
           </a:prstGeom>
           <a:noFill/>
-          <a:ln/>
-        </p:spPr>
-        <p:txBody>
-          <a:bodyPr wrap="square" lIns="0" tIns="0" rIns="0" bIns="0" rtlCol="0" anchor="ctr"/>
+        </p:spPr>
+        <p:txBody>
+          <a:bodyPr wrap="square"/>
           <a:lstStyle/>
           <a:p>
             <a:pPr algn="ctr" indent="0" marL="0">
@@ -4076,41 +5123,30 @@
               <a:buNone/>
             </a:pPr>
             <a:r>
-              <a:rPr lang="en-US" sz="2800" b="1" dirty="0">
-                <a:solidFill>
-                  <a:srgbClr val="000000"/>
-                </a:solidFill>
-                <a:latin typeface="Times New Roman" pitchFamily="34" charset="0"/>
-                <a:ea typeface="Times New Roman" pitchFamily="34" charset="-122"/>
-                <a:cs typeface="Times New Roman" pitchFamily="34" charset="-120"/>
+              <a:rPr sz="2800" b="1">
+                <a:solidFill>
+                  <a:srgbClr val="000000"/>
+                </a:solidFill>
+                <a:latin typeface="Times New Roman"/>
               </a:rPr>
               <a:t>P.A. COLLEGE OF ENGINEERING
 </a:t>
             </a:r>
-            <a:pPr algn="ctr" indent="0" marL="0">
-              <a:lnSpc>
-                <a:spcPct val="150000"/>
-              </a:lnSpc>
-              <a:buNone/>
-            </a:pPr>
-            <a:r>
-              <a:rPr lang="en-US" sz="2000" b="1" dirty="0">
-                <a:solidFill>
-                  <a:srgbClr val="000000"/>
-                </a:solidFill>
-                <a:latin typeface="Times New Roman" pitchFamily="34" charset="0"/>
-                <a:ea typeface="Times New Roman" pitchFamily="34" charset="-122"/>
-                <a:cs typeface="Times New Roman" pitchFamily="34" charset="-120"/>
+            <a:r>
+              <a:rPr sz="2000" b="1">
+                <a:solidFill>
+                  <a:srgbClr val="000000"/>
+                </a:solidFill>
+                <a:latin typeface="Times New Roman"/>
               </a:rPr>
               <a:t>DEPARTMENT OF COMPUTER SCIENCE &amp; ENGINEERING</a:t>
             </a:r>
-            <a:endParaRPr lang="en-US" sz="2800" dirty="0"/>
-          </a:p>
-        </p:txBody>
-      </p:sp>
-      <p:sp>
-        <p:nvSpPr>
-          <p:cNvPr id="5" name="Text 1"/>
+          </a:p>
+        </p:txBody>
+      </p:sp>
+      <p:sp>
+        <p:nvSpPr>
+          <p:cNvPr id="5" name="TextBox 4"/>
           <p:cNvSpPr txBox="1"/>
           <p:nvPr/>
         </p:nvSpPr>
@@ -4123,33 +5159,29 @@
             <a:avLst/>
           </a:prstGeom>
           <a:noFill/>
-          <a:ln/>
-        </p:spPr>
-        <p:txBody>
-          <a:bodyPr wrap="square" lIns="0" tIns="0" rIns="0" bIns="0" rtlCol="0" anchor="ctr"/>
+        </p:spPr>
+        <p:txBody>
+          <a:bodyPr wrap="square"/>
           <a:lstStyle/>
           <a:p>
             <a:pPr algn="ctr" indent="0" marL="0">
               <a:buNone/>
             </a:pPr>
             <a:r>
-              <a:rPr lang="en-US" sz="3400" b="1" dirty="0">
+              <a:rPr sz="3400" b="1">
                 <a:solidFill>
                   <a:srgbClr val="1757AC"/>
                 </a:solidFill>
-                <a:latin typeface="Times New Roman" pitchFamily="34" charset="0"/>
-                <a:ea typeface="Times New Roman" pitchFamily="34" charset="-122"/>
-                <a:cs typeface="Times New Roman" pitchFamily="34" charset="-120"/>
+                <a:latin typeface="Times New Roman"/>
               </a:rPr>
               <a:t>PROBLEM STATEMENT</a:t>
             </a:r>
-            <a:endParaRPr sz="3400"/>
-          </a:p>
-        </p:txBody>
-      </p:sp>
-      <p:sp>
-        <p:nvSpPr>
-          <p:cNvPr id="6" name="Text 2"/>
+          </a:p>
+        </p:txBody>
+      </p:sp>
+      <p:sp>
+        <p:nvSpPr>
+          <p:cNvPr id="6" name="TextBox 5"/>
           <p:cNvSpPr txBox="1"/>
           <p:nvPr/>
         </p:nvSpPr>
@@ -4162,10 +5194,9 @@
             <a:avLst/>
           </a:prstGeom>
           <a:noFill/>
-          <a:ln/>
-        </p:spPr>
-        <p:txBody>
-          <a:bodyPr wrap="square" lIns="0" tIns="0" rIns="0" bIns="0" rtlCol="0" anchor="ctr"/>
+        </p:spPr>
+        <p:txBody>
+          <a:bodyPr wrap="square"/>
           <a:lstStyle/>
           <a:p>
             <a:pPr indent="0" marL="0">
@@ -4175,17 +5206,14 @@
               <a:buNone/>
             </a:pPr>
             <a:r>
-              <a:rPr lang="en-US" sz="2200" b="1" dirty="0">
-                <a:solidFill>
-                  <a:srgbClr val="000000"/>
-                </a:solidFill>
-                <a:latin typeface="Times New Roman" pitchFamily="34" charset="0"/>
-                <a:ea typeface="Times New Roman" pitchFamily="34" charset="-122"/>
-                <a:cs typeface="Times New Roman" pitchFamily="34" charset="-120"/>
+              <a:rPr sz="2200" b="1">
+                <a:solidFill>
+                  <a:srgbClr val="000000"/>
+                </a:solidFill>
+                <a:latin typeface="Times New Roman"/>
               </a:rPr>
               <a:t>ICU deterioration is difficult to identify early from isolated measurements and manual score calculations.</a:t>
             </a:r>
-            <a:endParaRPr sz="2200"/>
           </a:p>
           <a:p>
             <a:pPr indent="0" marL="0">
@@ -4195,17 +5223,14 @@
               <a:buNone/>
             </a:pPr>
             <a:r>
-              <a:rPr lang="en-US" sz="2200" b="1" dirty="0">
-                <a:solidFill>
-                  <a:srgbClr val="000000"/>
-                </a:solidFill>
-                <a:latin typeface="Times New Roman" pitchFamily="34" charset="0"/>
-                <a:ea typeface="Times New Roman" pitchFamily="34" charset="-122"/>
-                <a:cs typeface="Times New Roman" pitchFamily="34" charset="-120"/>
+              <a:rPr sz="2200" b="1">
+                <a:solidFill>
+                  <a:srgbClr val="000000"/>
+                </a:solidFill>
+                <a:latin typeface="Times New Roman"/>
               </a:rPr>
               <a:t>Existing rule-based scores do not fully capture the direction, duration, and interaction of changing observations.</a:t>
             </a:r>
-            <a:endParaRPr sz="2200"/>
           </a:p>
           <a:p>
             <a:pPr indent="0" marL="0">
@@ -4215,17 +5240,14 @@
               <a:buNone/>
             </a:pPr>
             <a:r>
-              <a:rPr lang="en-US" sz="2200" b="1" dirty="0">
-                <a:solidFill>
-                  <a:srgbClr val="000000"/>
-                </a:solidFill>
-                <a:latin typeface="Times New Roman" pitchFamily="34" charset="0"/>
-                <a:ea typeface="Times New Roman" pitchFamily="34" charset="-122"/>
-                <a:cs typeface="Times New Roman" pitchFamily="34" charset="-120"/>
+              <a:rPr sz="2200" b="1">
+                <a:solidFill>
+                  <a:srgbClr val="000000"/>
+                </a:solidFill>
+                <a:latin typeface="Times New Roman"/>
               </a:rPr>
               <a:t>Clinicians need an early-warning aid that processes recent patient history and presents understandable reasons for its risk score.</a:t>
             </a:r>
-            <a:endParaRPr sz="2200"/>
           </a:p>
           <a:p>
             <a:pPr indent="0" marL="0">
@@ -4235,17 +5257,14 @@
               <a:buNone/>
             </a:pPr>
             <a:r>
-              <a:rPr lang="en-US" sz="2200" b="1" dirty="0">
-                <a:solidFill>
-                  <a:srgbClr val="000000"/>
-                </a:solidFill>
-                <a:latin typeface="Times New Roman" pitchFamily="34" charset="0"/>
-                <a:ea typeface="Times New Roman" pitchFamily="34" charset="-122"/>
-                <a:cs typeface="Times New Roman" pitchFamily="34" charset="-120"/>
+              <a:rPr sz="2200" b="1">
+                <a:solidFill>
+                  <a:srgbClr val="000000"/>
+                </a:solidFill>
+                <a:latin typeface="Times New Roman"/>
               </a:rPr>
               <a:t>The challenge is to build and evaluate a real-time, explainable prototype without presenting it as a validated clinical device.</a:t>
             </a:r>
-            <a:endParaRPr sz="2200"/>
           </a:p>
         </p:txBody>
       </p:sp>
@@ -4258,39 +5277,25 @@
 </file>
 
 <file path=ppt/slides/slide3.xml><?xml version="1.0" encoding="utf-8"?>
-<p:sld xmlns:a="http://schemas.openxmlformats.org/drawingml/2006/main" xmlns:ns2="http://schemas.openxmlformats.org/officeDocument/2006/relationships" xmlns:p="http://schemas.openxmlformats.org/presentationml/2006/main">
-  <p:cSld name="Slide 3">
-    <p:bg>
-      <p:bgPr>
-        <a:solidFill>
-          <a:srgbClr val="FFFFFF"/>
-        </a:solidFill>
-      </p:bgPr>
-    </p:bg>
+<p:sld xmlns:a="http://schemas.openxmlformats.org/drawingml/2006/main" xmlns:p="http://schemas.openxmlformats.org/presentationml/2006/main" xmlns:r="http://schemas.openxmlformats.org/officeDocument/2006/relationships">
+  <p:cSld>
     <p:spTree>
       <p:nvGrpSpPr>
         <p:cNvPr id="1" name=""/>
         <p:cNvGrpSpPr/>
         <p:nvPr/>
       </p:nvGrpSpPr>
-      <p:grpSpPr>
-        <a:xfrm>
-          <a:off x="0" y="0"/>
-          <a:ext cx="0" cy="0"/>
-          <a:chOff x="0" y="0"/>
-          <a:chExt cx="0" cy="0"/>
-        </a:xfrm>
-      </p:grpSpPr>
+      <p:grpSpPr/>
       <p:pic>
         <p:nvPicPr>
-          <p:cNvPr id="2" name="Image 0" descr="vtu_logo.png">    </p:cNvPr>
+          <p:cNvPr id="2" name="Picture 1" descr="image.png"/>
           <p:cNvPicPr>
             <a:picLocks noChangeAspect="1"/>
           </p:cNvPicPr>
           <p:nvPr/>
         </p:nvPicPr>
         <p:blipFill>
-          <a:blip ns2:embed="rId1"/>
+          <a:blip r:embed="rId2"/>
           <a:stretch>
             <a:fillRect/>
           </a:stretch>
@@ -4307,14 +5312,14 @@
       </p:pic>
       <p:pic>
         <p:nvPicPr>
-          <p:cNvPr id="3" name="Image 1" descr="pace_logo.png">    </p:cNvPr>
+          <p:cNvPr id="3" name="Picture 2" descr="image.png"/>
           <p:cNvPicPr>
             <a:picLocks noChangeAspect="1"/>
           </p:cNvPicPr>
           <p:nvPr/>
         </p:nvPicPr>
         <p:blipFill>
-          <a:blip ns2:embed="rId2"/>
+          <a:blip r:embed="rId3"/>
           <a:stretch>
             <a:fillRect/>
           </a:stretch>
@@ -4331,7 +5336,7 @@
       </p:pic>
       <p:sp>
         <p:nvSpPr>
-          <p:cNvPr id="4" name="Text 0"/>
+          <p:cNvPr id="4" name="TextBox 3"/>
           <p:cNvSpPr txBox="1"/>
           <p:nvPr/>
         </p:nvSpPr>
@@ -4344,10 +5349,9 @@
             <a:avLst/>
           </a:prstGeom>
           <a:noFill/>
-          <a:ln/>
-        </p:spPr>
-        <p:txBody>
-          <a:bodyPr wrap="square" lIns="0" tIns="0" rIns="0" bIns="0" rtlCol="0" anchor="ctr"/>
+        </p:spPr>
+        <p:txBody>
+          <a:bodyPr wrap="square"/>
           <a:lstStyle/>
           <a:p>
             <a:pPr algn="ctr" indent="0" marL="0">
@@ -4357,41 +5361,30 @@
               <a:buNone/>
             </a:pPr>
             <a:r>
-              <a:rPr lang="en-US" sz="2800" b="1" dirty="0">
-                <a:solidFill>
-                  <a:srgbClr val="000000"/>
-                </a:solidFill>
-                <a:latin typeface="Times New Roman" pitchFamily="34" charset="0"/>
-                <a:ea typeface="Times New Roman" pitchFamily="34" charset="-122"/>
-                <a:cs typeface="Times New Roman" pitchFamily="34" charset="-120"/>
+              <a:rPr sz="2800" b="1">
+                <a:solidFill>
+                  <a:srgbClr val="000000"/>
+                </a:solidFill>
+                <a:latin typeface="Times New Roman"/>
               </a:rPr>
               <a:t>P.A. COLLEGE OF ENGINEERING
 </a:t>
             </a:r>
-            <a:pPr algn="ctr" indent="0" marL="0">
-              <a:lnSpc>
-                <a:spcPct val="150000"/>
-              </a:lnSpc>
-              <a:buNone/>
-            </a:pPr>
-            <a:r>
-              <a:rPr lang="en-US" sz="2000" b="1" dirty="0">
-                <a:solidFill>
-                  <a:srgbClr val="000000"/>
-                </a:solidFill>
-                <a:latin typeface="Times New Roman" pitchFamily="34" charset="0"/>
-                <a:ea typeface="Times New Roman" pitchFamily="34" charset="-122"/>
-                <a:cs typeface="Times New Roman" pitchFamily="34" charset="-120"/>
+            <a:r>
+              <a:rPr sz="2000" b="1">
+                <a:solidFill>
+                  <a:srgbClr val="000000"/>
+                </a:solidFill>
+                <a:latin typeface="Times New Roman"/>
               </a:rPr>
               <a:t>DEPARTMENT OF COMPUTER SCIENCE &amp; ENGINEERING</a:t>
             </a:r>
-            <a:endParaRPr lang="en-US" sz="2800" dirty="0"/>
-          </a:p>
-        </p:txBody>
-      </p:sp>
-      <p:sp>
-        <p:nvSpPr>
-          <p:cNvPr id="5" name="Text 1"/>
+          </a:p>
+        </p:txBody>
+      </p:sp>
+      <p:sp>
+        <p:nvSpPr>
+          <p:cNvPr id="5" name="TextBox 4"/>
           <p:cNvSpPr txBox="1"/>
           <p:nvPr/>
         </p:nvSpPr>
@@ -4404,10 +5397,9 @@
             <a:avLst/>
           </a:prstGeom>
           <a:noFill/>
-          <a:ln/>
-        </p:spPr>
-        <p:txBody>
-          <a:bodyPr wrap="square" lIns="0" tIns="0" rIns="0" bIns="0" rtlCol="0" anchor="ctr"/>
+        </p:spPr>
+        <p:txBody>
+          <a:bodyPr wrap="square"/>
           <a:lstStyle/>
           <a:p>
             <a:pPr algn="ctr" indent="0" marL="0">
@@ -4422,13 +5414,12 @@
               </a:rPr>
               <a:t>MOTIVATION / NEED FOR THE PROJECT</a:t>
             </a:r>
-            <a:endParaRPr sz="3400"/>
-          </a:p>
-        </p:txBody>
-      </p:sp>
-      <p:sp>
-        <p:nvSpPr>
-          <p:cNvPr id="6" name="Text 2"/>
+          </a:p>
+        </p:txBody>
+      </p:sp>
+      <p:sp>
+        <p:nvSpPr>
+          <p:cNvPr id="6" name="TextBox 5"/>
           <p:cNvSpPr txBox="1"/>
           <p:nvPr/>
         </p:nvSpPr>
@@ -4441,10 +5432,9 @@
             <a:avLst/>
           </a:prstGeom>
           <a:noFill/>
-          <a:ln/>
-        </p:spPr>
-        <p:txBody>
-          <a:bodyPr wrap="square" lIns="0" tIns="0" rIns="0" bIns="0" rtlCol="0" anchor="t"/>
+        </p:spPr>
+        <p:txBody>
+          <a:bodyPr wrap="square"/>
           <a:lstStyle/>
           <a:p>
             <a:pPr marL="406400" indent="-406400">
@@ -4466,7 +5456,6 @@
               </a:rPr>
               <a:t>ICU deterioration can progress rapidly, making early recognition important for timely clinical intervention.</a:t>
             </a:r>
-            <a:endParaRPr sz="2200"/>
           </a:p>
           <a:p>
             <a:pPr/>
@@ -4515,39 +5504,25 @@
 </file>
 
 <file path=ppt/slides/slide4.xml><?xml version="1.0" encoding="utf-8"?>
-<p:sld xmlns:a="http://schemas.openxmlformats.org/drawingml/2006/main" xmlns:ns2="http://schemas.openxmlformats.org/officeDocument/2006/relationships" xmlns:p="http://schemas.openxmlformats.org/presentationml/2006/main">
-  <p:cSld name="Slide 4">
-    <p:bg>
-      <p:bgPr>
-        <a:solidFill>
-          <a:srgbClr val="FFFFFF"/>
-        </a:solidFill>
-      </p:bgPr>
-    </p:bg>
+<p:sld xmlns:a="http://schemas.openxmlformats.org/drawingml/2006/main" xmlns:p="http://schemas.openxmlformats.org/presentationml/2006/main" xmlns:r="http://schemas.openxmlformats.org/officeDocument/2006/relationships">
+  <p:cSld>
     <p:spTree>
       <p:nvGrpSpPr>
         <p:cNvPr id="1" name=""/>
         <p:cNvGrpSpPr/>
         <p:nvPr/>
       </p:nvGrpSpPr>
-      <p:grpSpPr>
-        <a:xfrm>
-          <a:off x="0" y="0"/>
-          <a:ext cx="0" cy="0"/>
-          <a:chOff x="0" y="0"/>
-          <a:chExt cx="0" cy="0"/>
-        </a:xfrm>
-      </p:grpSpPr>
+      <p:grpSpPr/>
       <p:pic>
         <p:nvPicPr>
-          <p:cNvPr id="2" name="Image 0" descr="vtu_logo.png">    </p:cNvPr>
+          <p:cNvPr id="2" name="Picture 1" descr="image.png"/>
           <p:cNvPicPr>
             <a:picLocks noChangeAspect="1"/>
           </p:cNvPicPr>
           <p:nvPr/>
         </p:nvPicPr>
         <p:blipFill>
-          <a:blip ns2:embed="rId1"/>
+          <a:blip r:embed="rId2"/>
           <a:stretch>
             <a:fillRect/>
           </a:stretch>
@@ -4564,14 +5539,14 @@
       </p:pic>
       <p:pic>
         <p:nvPicPr>
-          <p:cNvPr id="3" name="Image 1" descr="pace_logo.png">    </p:cNvPr>
+          <p:cNvPr id="3" name="Picture 2" descr="image.png"/>
           <p:cNvPicPr>
             <a:picLocks noChangeAspect="1"/>
           </p:cNvPicPr>
           <p:nvPr/>
         </p:nvPicPr>
         <p:blipFill>
-          <a:blip ns2:embed="rId2"/>
+          <a:blip r:embed="rId3"/>
           <a:stretch>
             <a:fillRect/>
           </a:stretch>
@@ -4588,7 +5563,7 @@
       </p:pic>
       <p:sp>
         <p:nvSpPr>
-          <p:cNvPr id="4" name="Text 0"/>
+          <p:cNvPr id="4" name="TextBox 3"/>
           <p:cNvSpPr txBox="1"/>
           <p:nvPr/>
         </p:nvSpPr>
@@ -4601,10 +5576,9 @@
             <a:avLst/>
           </a:prstGeom>
           <a:noFill/>
-          <a:ln/>
-        </p:spPr>
-        <p:txBody>
-          <a:bodyPr wrap="square" lIns="0" tIns="0" rIns="0" bIns="0" rtlCol="0" anchor="ctr"/>
+        </p:spPr>
+        <p:txBody>
+          <a:bodyPr wrap="square"/>
           <a:lstStyle/>
           <a:p>
             <a:pPr algn="ctr" indent="0" marL="0">
@@ -4614,41 +5588,30 @@
               <a:buNone/>
             </a:pPr>
             <a:r>
-              <a:rPr lang="en-US" sz="2800" b="1" dirty="0">
-                <a:solidFill>
-                  <a:srgbClr val="000000"/>
-                </a:solidFill>
-                <a:latin typeface="Times New Roman" pitchFamily="34" charset="0"/>
-                <a:ea typeface="Times New Roman" pitchFamily="34" charset="-122"/>
-                <a:cs typeface="Times New Roman" pitchFamily="34" charset="-120"/>
+              <a:rPr sz="2800" b="1">
+                <a:solidFill>
+                  <a:srgbClr val="000000"/>
+                </a:solidFill>
+                <a:latin typeface="Times New Roman"/>
               </a:rPr>
               <a:t>P.A. COLLEGE OF ENGINEERING
 </a:t>
             </a:r>
-            <a:pPr algn="ctr" indent="0" marL="0">
-              <a:lnSpc>
-                <a:spcPct val="150000"/>
-              </a:lnSpc>
-              <a:buNone/>
-            </a:pPr>
-            <a:r>
-              <a:rPr lang="en-US" sz="2000" b="1" dirty="0">
-                <a:solidFill>
-                  <a:srgbClr val="000000"/>
-                </a:solidFill>
-                <a:latin typeface="Times New Roman" pitchFamily="34" charset="0"/>
-                <a:ea typeface="Times New Roman" pitchFamily="34" charset="-122"/>
-                <a:cs typeface="Times New Roman" pitchFamily="34" charset="-120"/>
+            <a:r>
+              <a:rPr sz="2000" b="1">
+                <a:solidFill>
+                  <a:srgbClr val="000000"/>
+                </a:solidFill>
+                <a:latin typeface="Times New Roman"/>
               </a:rPr>
               <a:t>DEPARTMENT OF COMPUTER SCIENCE &amp; ENGINEERING</a:t>
             </a:r>
-            <a:endParaRPr lang="en-US" sz="2800" dirty="0"/>
-          </a:p>
-        </p:txBody>
-      </p:sp>
-      <p:sp>
-        <p:nvSpPr>
-          <p:cNvPr id="5" name="Text 1"/>
+          </a:p>
+        </p:txBody>
+      </p:sp>
+      <p:sp>
+        <p:nvSpPr>
+          <p:cNvPr id="5" name="TextBox 4"/>
           <p:cNvSpPr txBox="1"/>
           <p:nvPr/>
         </p:nvSpPr>
@@ -4661,10 +5624,9 @@
             <a:avLst/>
           </a:prstGeom>
           <a:noFill/>
-          <a:ln/>
-        </p:spPr>
-        <p:txBody>
-          <a:bodyPr wrap="square" lIns="0" tIns="0" rIns="0" bIns="0" rtlCol="0" anchor="ctr"/>
+        </p:spPr>
+        <p:txBody>
+          <a:bodyPr wrap="square"/>
           <a:lstStyle/>
           <a:p>
             <a:pPr algn="ctr" indent="0" marL="0">
@@ -4679,13 +5641,12 @@
               </a:rPr>
               <a:t>EXISTING SYSTEM / RELATED WORK</a:t>
             </a:r>
-            <a:endParaRPr sz="3400"/>
-          </a:p>
-        </p:txBody>
-      </p:sp>
-      <p:sp>
-        <p:nvSpPr>
-          <p:cNvPr id="6" name="Text 2"/>
+          </a:p>
+        </p:txBody>
+      </p:sp>
+      <p:sp>
+        <p:nvSpPr>
+          <p:cNvPr id="6" name="TextBox 5"/>
           <p:cNvSpPr txBox="1"/>
           <p:nvPr/>
         </p:nvSpPr>
@@ -4698,9 +5659,10 @@
             <a:avLst/>
           </a:prstGeom>
           <a:noFill/>
-          <a:ln/>
-        </p:spPr>
-        <p:txBody>
+        </p:spPr>
+        <p:txBody>
+          <a:bodyPr wrap="square"/>
+          <a:lstStyle/>
           <a:p>
             <a:pPr marL="406400" indent="-406400">
               <a:lnSpc>
@@ -4713,17 +5675,14 @@
               <a:buChar char="•"/>
             </a:pPr>
             <a:r>
-              <a:rPr lang="en-US" sz="1500" dirty="0" b="1">
-                <a:solidFill>
-                  <a:srgbClr val="000000"/>
-                </a:solidFill>
-                <a:latin typeface="Times New Roman" pitchFamily="34" charset="0"/>
-                <a:ea typeface="Times New Roman" pitchFamily="34" charset="-122"/>
-                <a:cs typeface="Times New Roman" pitchFamily="34" charset="-120"/>
+              <a:rPr sz="1500" b="1">
+                <a:solidFill>
+                  <a:srgbClr val="000000"/>
+                </a:solidFill>
+                <a:latin typeface="Times New Roman"/>
               </a:rPr>
               <a:t>BASE PAPER - Zheng et al. (2025): Time-aware bidirectional attention LSTM for real-time ICU mortality (MIMIC-IV + eICU, dynamic AUROC 0.936). Adapted by SynCura on PhysioNet 2012.</a:t>
             </a:r>
-            <a:endParaRPr sz="1500"/>
           </a:p>
           <a:p>
             <a:pPr marL="406400" indent="-406400">
@@ -4737,20 +5696,15 @@
               <a:buChar char="•"/>
             </a:pPr>
             <a:r>
-              <a:rPr lang="en-US" sz="1500" dirty="0" b="1">
-                <a:solidFill>
-                  <a:srgbClr val="000000"/>
-                </a:solidFill>
-                <a:latin typeface="Times New Roman" pitchFamily="34" charset="0"/>
-                <a:ea typeface="Times New Roman" pitchFamily="34" charset="-122"/>
-                <a:cs typeface="Times New Roman" pitchFamily="34" charset="-120"/>
+              <a:rPr sz="1500" b="1">
+                <a:solidFill>
+                  <a:srgbClr val="000000"/>
+                </a:solidFill>
+                <a:latin typeface="Times New Roman"/>
               </a:rPr>
               <a:t>Supporting papers:</a:t>
             </a:r>
-            <a:endParaRPr sz="1500"/>
-          </a:p>
-          <a:bodyPr wrap="square" lIns="0" tIns="0" rIns="0" bIns="0" rtlCol="0" anchor="t"/>
-          <a:lstStyle/>
+          </a:p>
           <a:p>
             <a:pPr marL="406400" indent="-406400">
               <a:lnSpc>
@@ -4763,17 +5717,14 @@
               <a:buChar char="•"/>
             </a:pPr>
             <a:r>
-              <a:rPr lang="en-US" sz="1500" dirty="0">
-                <a:solidFill>
-                  <a:srgbClr val="000000"/>
-                </a:solidFill>
-                <a:latin typeface="Times New Roman" pitchFamily="34" charset="0"/>
-                <a:ea typeface="Times New Roman" pitchFamily="34" charset="-122"/>
-                <a:cs typeface="Times New Roman" pitchFamily="34" charset="-120"/>
+              <a:rPr sz="1500">
+                <a:solidFill>
+                  <a:srgbClr val="000000"/>
+                </a:solidFill>
+                <a:latin typeface="Times New Roman"/>
               </a:rPr>
               <a:t>Wang, Bai and Jin (2026) - Explainable LSTM models for ICU outcomes; AUC 0.79-0.87.</a:t>
             </a:r>
-            <a:endParaRPr sz="1500"/>
           </a:p>
           <a:p>
             <a:pPr marL="406400" indent="-406400">
@@ -4787,17 +5738,14 @@
               <a:buChar char="•"/>
             </a:pPr>
             <a:r>
-              <a:rPr lang="en-US" sz="1500" dirty="0">
-                <a:solidFill>
-                  <a:srgbClr val="000000"/>
-                </a:solidFill>
-                <a:latin typeface="Times New Roman" pitchFamily="34" charset="0"/>
-                <a:ea typeface="Times New Roman" pitchFamily="34" charset="-122"/>
-                <a:cs typeface="Times New Roman" pitchFamily="34" charset="-120"/>
+              <a:rPr sz="1500">
+                <a:solidFill>
+                  <a:srgbClr val="000000"/>
+                </a:solidFill>
+                <a:latin typeface="Times New Roman"/>
               </a:rPr>
               <a:t>Yan et al. (2026) - Sequential ICU mortality models; plain LSTM AUC 0.802.</a:t>
             </a:r>
-            <a:endParaRPr sz="1500"/>
           </a:p>
           <a:p>
             <a:pPr marL="406400" indent="-406400">
@@ -4811,17 +5759,14 @@
               <a:buChar char="•"/>
             </a:pPr>
             <a:r>
-              <a:rPr lang="en-US" sz="1500" dirty="0">
-                <a:solidFill>
-                  <a:srgbClr val="000000"/>
-                </a:solidFill>
-                <a:latin typeface="Times New Roman" pitchFamily="34" charset="0"/>
-                <a:ea typeface="Times New Roman" pitchFamily="34" charset="-122"/>
-                <a:cs typeface="Times New Roman" pitchFamily="34" charset="-120"/>
+              <a:rPr sz="1500">
+                <a:solidFill>
+                  <a:srgbClr val="000000"/>
+                </a:solidFill>
+                <a:latin typeface="Times New Roman"/>
               </a:rPr>
               <a:t>Sadanandan (2026) - Multimodal time-series and clinical-note fusion; AUROC 0.7857.</a:t>
             </a:r>
-            <a:endParaRPr sz="1500"/>
           </a:p>
           <a:p>
             <a:pPr marL="406400" indent="-406400">
@@ -4835,17 +5780,14 @@
               <a:buChar char="•"/>
             </a:pPr>
             <a:r>
-              <a:rPr lang="en-US" sz="1500" dirty="0">
-                <a:solidFill>
-                  <a:srgbClr val="000000"/>
-                </a:solidFill>
-                <a:latin typeface="Times New Roman" pitchFamily="34" charset="0"/>
-                <a:ea typeface="Times New Roman" pitchFamily="34" charset="-122"/>
-                <a:cs typeface="Times New Roman" pitchFamily="34" charset="-120"/>
+              <a:rPr sz="1500">
+                <a:solidFill>
+                  <a:srgbClr val="000000"/>
+                </a:solidFill>
+                <a:latin typeface="Times New Roman"/>
               </a:rPr>
               <a:t>Wu et al. (2024) - Real-time vital-sign mortality prediction; LSTM AUC 0.9263.</a:t>
             </a:r>
-            <a:endParaRPr sz="1500"/>
           </a:p>
           <a:p>
             <a:pPr marL="406400" indent="-406400">
@@ -4859,17 +5801,14 @@
               <a:buChar char="•"/>
             </a:pPr>
             <a:r>
-              <a:rPr lang="en-US" sz="1500" dirty="0">
-                <a:solidFill>
-                  <a:srgbClr val="000000"/>
-                </a:solidFill>
-                <a:latin typeface="Times New Roman" pitchFamily="34" charset="0"/>
-                <a:ea typeface="Times New Roman" pitchFamily="34" charset="-122"/>
-                <a:cs typeface="Times New Roman" pitchFamily="34" charset="-120"/>
+              <a:rPr sz="1500">
+                <a:solidFill>
+                  <a:srgbClr val="000000"/>
+                </a:solidFill>
+                <a:latin typeface="Times New Roman"/>
               </a:rPr>
               <a:t>Xie et al. (2025) - RealMIP continuous-data recovery for ICU mortality prediction.</a:t>
             </a:r>
-            <a:endParaRPr sz="1500"/>
           </a:p>
           <a:p>
             <a:pPr marL="406400" indent="-406400">
@@ -4883,17 +5822,14 @@
               <a:buChar char="•"/>
             </a:pPr>
             <a:r>
-              <a:rPr lang="en-US" sz="1500" dirty="0">
-                <a:solidFill>
-                  <a:srgbClr val="000000"/>
-                </a:solidFill>
-                <a:latin typeface="Times New Roman" pitchFamily="34" charset="0"/>
-                <a:ea typeface="Times New Roman" pitchFamily="34" charset="-122"/>
-                <a:cs typeface="Times New Roman" pitchFamily="34" charset="-120"/>
+              <a:rPr sz="1500">
+                <a:solidFill>
+                  <a:srgbClr val="000000"/>
+                </a:solidFill>
+                <a:latin typeface="Times New Roman"/>
               </a:rPr>
               <a:t>Choi et al. (2020) - Deep interpretable early warning with BiLSTM attention.</a:t>
             </a:r>
-            <a:endParaRPr sz="1500"/>
           </a:p>
           <a:p>
             <a:pPr marL="406400" indent="-406400">
@@ -4907,17 +5843,14 @@
               <a:buChar char="•"/>
             </a:pPr>
             <a:r>
-              <a:rPr lang="en-US" sz="1500" dirty="0">
-                <a:solidFill>
-                  <a:srgbClr val="000000"/>
-                </a:solidFill>
-                <a:latin typeface="Times New Roman" pitchFamily="34" charset="0"/>
-                <a:ea typeface="Times New Roman" pitchFamily="34" charset="-122"/>
-                <a:cs typeface="Times New Roman" pitchFamily="34" charset="-120"/>
+              <a:rPr sz="1500">
+                <a:solidFill>
+                  <a:srgbClr val="000000"/>
+                </a:solidFill>
+                <a:latin typeface="Times New Roman"/>
               </a:rPr>
               <a:t>Li et al. (2025) - Attention residual LSTM-FCN for clinical time-series prediction.</a:t>
             </a:r>
-            <a:endParaRPr sz="1500"/>
           </a:p>
           <a:p>
             <a:pPr marL="406400" indent="-406400">
@@ -4931,17 +5864,14 @@
               <a:buChar char="•"/>
             </a:pPr>
             <a:r>
-              <a:rPr lang="en-US" sz="1500" dirty="0">
-                <a:solidFill>
-                  <a:srgbClr val="000000"/>
-                </a:solidFill>
-                <a:latin typeface="Times New Roman" pitchFamily="34" charset="0"/>
-                <a:ea typeface="Times New Roman" pitchFamily="34" charset="-122"/>
-                <a:cs typeface="Times New Roman" pitchFamily="34" charset="-120"/>
+              <a:rPr sz="1500">
+                <a:solidFill>
+                  <a:srgbClr val="000000"/>
+                </a:solidFill>
+                <a:latin typeface="Times New Roman"/>
               </a:rPr>
               <a:t>Scheid et al. (2025) - Wearable deep learning for continuous in-hospital deterioration prediction.</a:t>
             </a:r>
-            <a:endParaRPr sz="1500"/>
           </a:p>
         </p:txBody>
       </p:sp>
@@ -4965,7 +5895,7 @@
       <p:grpSpPr/>
       <p:pic>
         <p:nvPicPr>
-          <p:cNvPr id="2" name="Image 0" descr="vtu_logo.png">    </p:cNvPr>
+          <p:cNvPr id="2" name="Picture 1" descr="image.png"/>
           <p:cNvPicPr>
             <a:picLocks noChangeAspect="1"/>
           </p:cNvPicPr>
@@ -4989,7 +5919,7 @@
       </p:pic>
       <p:pic>
         <p:nvPicPr>
-          <p:cNvPr id="3" name="Image 1" descr="pace_logo.png">    </p:cNvPr>
+          <p:cNvPr id="3" name="Picture 2" descr="image.png"/>
           <p:cNvPicPr>
             <a:picLocks noChangeAspect="1"/>
           </p:cNvPicPr>
@@ -5013,7 +5943,7 @@
       </p:pic>
       <p:sp>
         <p:nvSpPr>
-          <p:cNvPr id="4" name="Text 0"/>
+          <p:cNvPr id="4" name="TextBox 3"/>
           <p:cNvSpPr txBox="1"/>
           <p:nvPr/>
         </p:nvSpPr>
@@ -5026,10 +5956,9 @@
             <a:avLst/>
           </a:prstGeom>
           <a:noFill/>
-          <a:ln/>
-        </p:spPr>
-        <p:txBody>
-          <a:bodyPr wrap="square" lIns="0" tIns="0" rIns="0" bIns="0" rtlCol="0" anchor="ctr"/>
+        </p:spPr>
+        <p:txBody>
+          <a:bodyPr wrap="square"/>
           <a:lstStyle/>
           <a:p>
             <a:pPr algn="ctr" indent="0" marL="0">
@@ -5039,41 +5968,30 @@
               <a:buNone/>
             </a:pPr>
             <a:r>
-              <a:rPr lang="en-US" sz="2800" b="1" dirty="0">
-                <a:solidFill>
-                  <a:srgbClr val="000000"/>
-                </a:solidFill>
-                <a:latin typeface="Times New Roman" pitchFamily="34" charset="0"/>
-                <a:ea typeface="Times New Roman" pitchFamily="34" charset="-122"/>
-                <a:cs typeface="Times New Roman" pitchFamily="34" charset="-120"/>
+              <a:rPr sz="2800" b="1">
+                <a:solidFill>
+                  <a:srgbClr val="000000"/>
+                </a:solidFill>
+                <a:latin typeface="Times New Roman"/>
               </a:rPr>
               <a:t>P.A. COLLEGE OF ENGINEERING
 </a:t>
             </a:r>
-            <a:pPr algn="ctr" indent="0" marL="0">
-              <a:lnSpc>
-                <a:spcPct val="150000"/>
-              </a:lnSpc>
-              <a:buNone/>
-            </a:pPr>
-            <a:r>
-              <a:rPr lang="en-US" sz="2000" b="1" dirty="0">
-                <a:solidFill>
-                  <a:srgbClr val="000000"/>
-                </a:solidFill>
-                <a:latin typeface="Times New Roman" pitchFamily="34" charset="0"/>
-                <a:ea typeface="Times New Roman" pitchFamily="34" charset="-122"/>
-                <a:cs typeface="Times New Roman" pitchFamily="34" charset="-120"/>
+            <a:r>
+              <a:rPr sz="2000" b="1">
+                <a:solidFill>
+                  <a:srgbClr val="000000"/>
+                </a:solidFill>
+                <a:latin typeface="Times New Roman"/>
               </a:rPr>
               <a:t>DEPARTMENT OF COMPUTER SCIENCE &amp; ENGINEERING</a:t>
             </a:r>
-            <a:endParaRPr lang="en-US" sz="2800" dirty="0"/>
-          </a:p>
-        </p:txBody>
-      </p:sp>
-      <p:sp>
-        <p:nvSpPr>
-          <p:cNvPr id="5" name="Text 1"/>
+          </a:p>
+        </p:txBody>
+      </p:sp>
+      <p:sp>
+        <p:nvSpPr>
+          <p:cNvPr id="5" name="TextBox 4"/>
           <p:cNvSpPr txBox="1"/>
           <p:nvPr/>
         </p:nvSpPr>
@@ -5086,10 +6004,9 @@
             <a:avLst/>
           </a:prstGeom>
           <a:noFill/>
-          <a:ln/>
-        </p:spPr>
-        <p:txBody>
-          <a:bodyPr wrap="square" lIns="0" tIns="0" rIns="0" bIns="0" rtlCol="0" anchor="ctr"/>
+        </p:spPr>
+        <p:txBody>
+          <a:bodyPr wrap="square"/>
           <a:lstStyle/>
           <a:p>
             <a:pPr algn="ctr" indent="0" marL="0">
@@ -5104,13 +6021,12 @@
               </a:rPr>
               <a:t>BASE PAPER / REFERENCE PAPER</a:t>
             </a:r>
-            <a:endParaRPr sz="3400"/>
-          </a:p>
-        </p:txBody>
-      </p:sp>
-      <p:sp>
-        <p:nvSpPr>
-          <p:cNvPr id="6" name="Text 2"/>
+          </a:p>
+        </p:txBody>
+      </p:sp>
+      <p:sp>
+        <p:nvSpPr>
+          <p:cNvPr id="6" name="TextBox 5"/>
           <p:cNvSpPr txBox="1"/>
           <p:nvPr/>
         </p:nvSpPr>
@@ -5123,10 +6039,9 @@
             <a:avLst/>
           </a:prstGeom>
           <a:noFill/>
-          <a:ln/>
-        </p:spPr>
-        <p:txBody>
-          <a:bodyPr wrap="square" lIns="0" tIns="0" rIns="0" bIns="0" rtlCol="0" anchor="t"/>
+        </p:spPr>
+        <p:txBody>
+          <a:bodyPr wrap="square"/>
           <a:lstStyle/>
           <a:p>
             <a:pPr marL="406400" indent="-406400">
@@ -5148,7 +6063,6 @@
               </a:rPr>
               <a:t>Title: Development and Validation of a Dynamic Real-Time Risk Prediction Model for ICU Patients Based on Longitudinal Irregular Data.</a:t>
             </a:r>
-            <a:endParaRPr sz="2100"/>
           </a:p>
           <a:p>
             <a:pPr/>
@@ -5218,7 +6132,6 @@
               </a:rPr>
               <a:t>Limitation: retrospective data till discharge; AUROC rises to 98.9 at discharge (hindsight bias). SynCura fixes this with 90-min only, no future info.</a:t>
             </a:r>
-            <a:endParaRPr sz="2100"/>
           </a:p>
         </p:txBody>
       </p:sp>
@@ -5242,7 +6155,7 @@
       <p:grpSpPr/>
       <p:pic>
         <p:nvPicPr>
-          <p:cNvPr id="2" name="Image 0" descr="vtu_logo.png">    </p:cNvPr>
+          <p:cNvPr id="2" name="Picture 1" descr="image.png"/>
           <p:cNvPicPr>
             <a:picLocks noChangeAspect="1"/>
           </p:cNvPicPr>
@@ -5266,7 +6179,7 @@
       </p:pic>
       <p:pic>
         <p:nvPicPr>
-          <p:cNvPr id="3" name="Image 1" descr="pace_logo.png">    </p:cNvPr>
+          <p:cNvPr id="3" name="Picture 2" descr="image.png"/>
           <p:cNvPicPr>
             <a:picLocks noChangeAspect="1"/>
           </p:cNvPicPr>
@@ -5290,7 +6203,7 @@
       </p:pic>
       <p:sp>
         <p:nvSpPr>
-          <p:cNvPr id="4" name="Text 0"/>
+          <p:cNvPr id="4" name="TextBox 3"/>
           <p:cNvSpPr txBox="1"/>
           <p:nvPr/>
         </p:nvSpPr>
@@ -5303,10 +6216,9 @@
             <a:avLst/>
           </a:prstGeom>
           <a:noFill/>
-          <a:ln/>
-        </p:spPr>
-        <p:txBody>
-          <a:bodyPr wrap="square" lIns="0" tIns="0" rIns="0" bIns="0" rtlCol="0" anchor="ctr"/>
+        </p:spPr>
+        <p:txBody>
+          <a:bodyPr wrap="square"/>
           <a:lstStyle/>
           <a:p>
             <a:pPr algn="ctr" indent="0" marL="0">
@@ -5316,41 +6228,30 @@
               <a:buNone/>
             </a:pPr>
             <a:r>
-              <a:rPr lang="en-US" sz="2800" b="1" dirty="0">
-                <a:solidFill>
-                  <a:srgbClr val="000000"/>
-                </a:solidFill>
-                <a:latin typeface="Times New Roman" pitchFamily="34" charset="0"/>
-                <a:ea typeface="Times New Roman" pitchFamily="34" charset="-122"/>
-                <a:cs typeface="Times New Roman" pitchFamily="34" charset="-120"/>
+              <a:rPr sz="2800" b="1">
+                <a:solidFill>
+                  <a:srgbClr val="000000"/>
+                </a:solidFill>
+                <a:latin typeface="Times New Roman"/>
               </a:rPr>
               <a:t>P.A. COLLEGE OF ENGINEERING
 </a:t>
             </a:r>
-            <a:pPr algn="ctr" indent="0" marL="0">
-              <a:lnSpc>
-                <a:spcPct val="150000"/>
-              </a:lnSpc>
-              <a:buNone/>
-            </a:pPr>
-            <a:r>
-              <a:rPr lang="en-US" sz="2000" b="1" dirty="0">
-                <a:solidFill>
-                  <a:srgbClr val="000000"/>
-                </a:solidFill>
-                <a:latin typeface="Times New Roman" pitchFamily="34" charset="0"/>
-                <a:ea typeface="Times New Roman" pitchFamily="34" charset="-122"/>
-                <a:cs typeface="Times New Roman" pitchFamily="34" charset="-120"/>
+            <a:r>
+              <a:rPr sz="2000" b="1">
+                <a:solidFill>
+                  <a:srgbClr val="000000"/>
+                </a:solidFill>
+                <a:latin typeface="Times New Roman"/>
               </a:rPr>
               <a:t>DEPARTMENT OF COMPUTER SCIENCE &amp; ENGINEERING</a:t>
             </a:r>
-            <a:endParaRPr lang="en-US" sz="2800" dirty="0"/>
-          </a:p>
-        </p:txBody>
-      </p:sp>
-      <p:sp>
-        <p:nvSpPr>
-          <p:cNvPr id="5" name="Text 1"/>
+          </a:p>
+        </p:txBody>
+      </p:sp>
+      <p:sp>
+        <p:nvSpPr>
+          <p:cNvPr id="5" name="TextBox 4"/>
           <p:cNvSpPr txBox="1"/>
           <p:nvPr/>
         </p:nvSpPr>
@@ -5363,10 +6264,9 @@
             <a:avLst/>
           </a:prstGeom>
           <a:noFill/>
-          <a:ln/>
-        </p:spPr>
-        <p:txBody>
-          <a:bodyPr wrap="square" lIns="0" tIns="0" rIns="0" bIns="0" rtlCol="0" anchor="ctr"/>
+        </p:spPr>
+        <p:txBody>
+          <a:bodyPr wrap="square"/>
           <a:lstStyle/>
           <a:p>
             <a:pPr algn="ctr" indent="0" marL="0">
@@ -5381,13 +6281,12 @@
               </a:rPr>
               <a:t>PROPOSED SOLUTION</a:t>
             </a:r>
-            <a:endParaRPr sz="3400"/>
-          </a:p>
-        </p:txBody>
-      </p:sp>
-      <p:sp>
-        <p:nvSpPr>
-          <p:cNvPr id="6" name="Text 2"/>
+          </a:p>
+        </p:txBody>
+      </p:sp>
+      <p:sp>
+        <p:nvSpPr>
+          <p:cNvPr id="6" name="TextBox 5"/>
           <p:cNvSpPr txBox="1"/>
           <p:nvPr/>
         </p:nvSpPr>
@@ -5400,10 +6299,9 @@
             <a:avLst/>
           </a:prstGeom>
           <a:noFill/>
-          <a:ln/>
-        </p:spPr>
-        <p:txBody>
-          <a:bodyPr wrap="square" lIns="0" tIns="0" rIns="0" bIns="0" rtlCol="0" anchor="t"/>
+        </p:spPr>
+        <p:txBody>
+          <a:bodyPr wrap="square"/>
           <a:lstStyle/>
           <a:p>
             <a:pPr marL="406400" indent="-406400">
@@ -5425,7 +6323,6 @@
               </a:rPr>
               <a:t>Idea: SynCura - an attention-based LSTM over a rolling 90-minute window of 12 clinical features, returning a 0-100 risk score with explanations.</a:t>
             </a:r>
-            <a:endParaRPr sz="2100"/>
           </a:p>
           <a:p>
             <a:pPr/>
@@ -5486,39 +6383,25 @@
 </file>
 
 <file path=ppt/slides/slide7.xml><?xml version="1.0" encoding="utf-8"?>
-<p:sld xmlns:a="http://schemas.openxmlformats.org/drawingml/2006/main" xmlns:ns2="http://schemas.openxmlformats.org/officeDocument/2006/relationships" xmlns:p="http://schemas.openxmlformats.org/presentationml/2006/main">
-  <p:cSld name="Slide 6">
-    <p:bg>
-      <p:bgPr>
-        <a:solidFill>
-          <a:srgbClr val="FFFFFF"/>
-        </a:solidFill>
-      </p:bgPr>
-    </p:bg>
+<p:sld xmlns:a="http://schemas.openxmlformats.org/drawingml/2006/main" xmlns:p="http://schemas.openxmlformats.org/presentationml/2006/main" xmlns:r="http://schemas.openxmlformats.org/officeDocument/2006/relationships">
+  <p:cSld>
     <p:spTree>
       <p:nvGrpSpPr>
         <p:cNvPr id="1" name=""/>
         <p:cNvGrpSpPr/>
         <p:nvPr/>
       </p:nvGrpSpPr>
-      <p:grpSpPr>
-        <a:xfrm>
-          <a:off x="0" y="0"/>
-          <a:ext cx="0" cy="0"/>
-          <a:chOff x="0" y="0"/>
-          <a:chExt cx="0" cy="0"/>
-        </a:xfrm>
-      </p:grpSpPr>
+      <p:grpSpPr/>
       <p:pic>
         <p:nvPicPr>
-          <p:cNvPr id="2" name="Image 0" descr="vtu_logo.png">    </p:cNvPr>
+          <p:cNvPr id="2" name="Picture 1" descr="image.png"/>
           <p:cNvPicPr>
             <a:picLocks noChangeAspect="1"/>
           </p:cNvPicPr>
           <p:nvPr/>
         </p:nvPicPr>
         <p:blipFill>
-          <a:blip ns2:embed="rId1"/>
+          <a:blip r:embed="rId2"/>
           <a:stretch>
             <a:fillRect/>
           </a:stretch>
@@ -5535,14 +6418,14 @@
       </p:pic>
       <p:pic>
         <p:nvPicPr>
-          <p:cNvPr id="3" name="Image 1" descr="pace_logo.png">    </p:cNvPr>
+          <p:cNvPr id="3" name="Picture 2" descr="image.png"/>
           <p:cNvPicPr>
             <a:picLocks noChangeAspect="1"/>
           </p:cNvPicPr>
           <p:nvPr/>
         </p:nvPicPr>
         <p:blipFill>
-          <a:blip ns2:embed="rId2"/>
+          <a:blip r:embed="rId3"/>
           <a:stretch>
             <a:fillRect/>
           </a:stretch>
@@ -5559,7 +6442,7 @@
       </p:pic>
       <p:sp>
         <p:nvSpPr>
-          <p:cNvPr id="4" name="Text 0"/>
+          <p:cNvPr id="4" name="TextBox 3"/>
           <p:cNvSpPr txBox="1"/>
           <p:nvPr/>
         </p:nvSpPr>
@@ -5572,10 +6455,9 @@
             <a:avLst/>
           </a:prstGeom>
           <a:noFill/>
-          <a:ln/>
-        </p:spPr>
-        <p:txBody>
-          <a:bodyPr wrap="square" lIns="0" tIns="0" rIns="0" bIns="0" rtlCol="0" anchor="ctr"/>
+        </p:spPr>
+        <p:txBody>
+          <a:bodyPr wrap="square"/>
           <a:lstStyle/>
           <a:p>
             <a:pPr algn="ctr" indent="0" marL="0">
@@ -5585,41 +6467,30 @@
               <a:buNone/>
             </a:pPr>
             <a:r>
-              <a:rPr lang="en-US" sz="2800" b="1" dirty="0">
-                <a:solidFill>
-                  <a:srgbClr val="000000"/>
-                </a:solidFill>
-                <a:latin typeface="Times New Roman" pitchFamily="34" charset="0"/>
-                <a:ea typeface="Times New Roman" pitchFamily="34" charset="-122"/>
-                <a:cs typeface="Times New Roman" pitchFamily="34" charset="-120"/>
+              <a:rPr sz="2800" b="1">
+                <a:solidFill>
+                  <a:srgbClr val="000000"/>
+                </a:solidFill>
+                <a:latin typeface="Times New Roman"/>
               </a:rPr>
               <a:t>P.A. COLLEGE OF ENGINEERING
 </a:t>
             </a:r>
-            <a:pPr algn="ctr" indent="0" marL="0">
-              <a:lnSpc>
-                <a:spcPct val="150000"/>
-              </a:lnSpc>
-              <a:buNone/>
-            </a:pPr>
-            <a:r>
-              <a:rPr lang="en-US" sz="2000" b="1" dirty="0">
-                <a:solidFill>
-                  <a:srgbClr val="000000"/>
-                </a:solidFill>
-                <a:latin typeface="Times New Roman" pitchFamily="34" charset="0"/>
-                <a:ea typeface="Times New Roman" pitchFamily="34" charset="-122"/>
-                <a:cs typeface="Times New Roman" pitchFamily="34" charset="-120"/>
+            <a:r>
+              <a:rPr sz="2000" b="1">
+                <a:solidFill>
+                  <a:srgbClr val="000000"/>
+                </a:solidFill>
+                <a:latin typeface="Times New Roman"/>
               </a:rPr>
               <a:t>DEPARTMENT OF COMPUTER SCIENCE &amp; ENGINEERING</a:t>
             </a:r>
-            <a:endParaRPr lang="en-US" sz="2800" dirty="0"/>
-          </a:p>
-        </p:txBody>
-      </p:sp>
-      <p:sp>
-        <p:nvSpPr>
-          <p:cNvPr id="5" name="Text 1"/>
+          </a:p>
+        </p:txBody>
+      </p:sp>
+      <p:sp>
+        <p:nvSpPr>
+          <p:cNvPr id="5" name="TextBox 4"/>
           <p:cNvSpPr txBox="1"/>
           <p:nvPr/>
         </p:nvSpPr>
@@ -5632,10 +6503,9 @@
             <a:avLst/>
           </a:prstGeom>
           <a:noFill/>
-          <a:ln/>
-        </p:spPr>
-        <p:txBody>
-          <a:bodyPr wrap="square" lIns="0" tIns="0" rIns="0" bIns="0" rtlCol="0" anchor="ctr"/>
+        </p:spPr>
+        <p:txBody>
+          <a:bodyPr wrap="square"/>
           <a:lstStyle/>
           <a:p>
             <a:pPr algn="ctr" indent="0" marL="0">
@@ -5650,13 +6520,12 @@
               </a:rPr>
               <a:t>METHODOLOGY / PROPOSED APPROACH</a:t>
             </a:r>
-            <a:endParaRPr sz="3400"/>
-          </a:p>
-        </p:txBody>
-      </p:sp>
-      <p:sp>
-        <p:nvSpPr>
-          <p:cNvPr id="6" name="Text 2"/>
+          </a:p>
+        </p:txBody>
+      </p:sp>
+      <p:sp>
+        <p:nvSpPr>
+          <p:cNvPr id="6" name="TextBox 5"/>
           <p:cNvSpPr txBox="1"/>
           <p:nvPr/>
         </p:nvSpPr>
@@ -5669,10 +6538,9 @@
             <a:avLst/>
           </a:prstGeom>
           <a:noFill/>
-          <a:ln/>
-        </p:spPr>
-        <p:txBody>
-          <a:bodyPr wrap="square" lIns="0" tIns="0" rIns="0" bIns="0" rtlCol="0" anchor="t"/>
+        </p:spPr>
+        <p:txBody>
+          <a:bodyPr wrap="square"/>
           <a:lstStyle/>
           <a:p>
             <a:pPr marL="406400" indent="-406400">
@@ -5686,17 +6554,14 @@
               <a:buChar char="•"/>
             </a:pPr>
             <a:r>
-              <a:rPr lang="en-US" sz="2000" dirty="0">
-                <a:solidFill>
-                  <a:srgbClr val="000000"/>
-                </a:solidFill>
-                <a:latin typeface="Times New Roman" pitchFamily="34" charset="0"/>
-                <a:ea typeface="Times New Roman" pitchFamily="34" charset="-122"/>
-                <a:cs typeface="Times New Roman" pitchFamily="34" charset="-120"/>
+              <a:rPr sz="2000">
+                <a:solidFill>
+                  <a:srgbClr val="000000"/>
+                </a:solidFill>
+                <a:latin typeface="Times New Roman"/>
               </a:rPr>
               <a:t>Dataset: PhysioNet 2012 Challenge with 12 features: six vital signs plus GCS, BUN, Creatinine, WBC, Platelets, and Glucose.</a:t>
             </a:r>
-            <a:endParaRPr sz="2000"/>
           </a:p>
           <a:p>
             <a:pPr marL="406400" indent="-406400">
@@ -5710,17 +6575,14 @@
               <a:buChar char="•"/>
             </a:pPr>
             <a:r>
-              <a:rPr lang="en-US" sz="2000" dirty="0">
-                <a:solidFill>
-                  <a:srgbClr val="000000"/>
-                </a:solidFill>
-                <a:latin typeface="Times New Roman" pitchFamily="34" charset="0"/>
-                <a:ea typeface="Times New Roman" pitchFamily="34" charset="-122"/>
-                <a:cs typeface="Times New Roman" pitchFamily="34" charset="-120"/>
+              <a:rPr sz="2000">
+                <a:solidFill>
+                  <a:srgbClr val="000000"/>
+                </a:solidFill>
+                <a:latin typeface="Times New Roman"/>
               </a:rPr>
               <a:t>Preprocessing: interpolation, train-only population Z-score normalization, 90-minute windows, and 15-minute stride.</a:t>
             </a:r>
-            <a:endParaRPr sz="2000"/>
           </a:p>
           <a:p>
             <a:pPr marL="406400" indent="-406400">
@@ -5734,17 +6596,14 @@
               <a:buChar char="•"/>
             </a:pPr>
             <a:r>
-              <a:rPr lang="en-US" sz="2000" dirty="0">
-                <a:solidFill>
-                  <a:srgbClr val="000000"/>
-                </a:solidFill>
-                <a:latin typeface="Times New Roman" pitchFamily="34" charset="0"/>
-                <a:ea typeface="Times New Roman" pitchFamily="34" charset="-122"/>
-                <a:cs typeface="Times New Roman" pitchFamily="34" charset="-120"/>
+              <a:rPr sz="2000">
+                <a:solidFill>
+                  <a:srgbClr val="000000"/>
+                </a:solidFill>
+                <a:latin typeface="Times New Roman"/>
               </a:rPr>
               <a:t>Model: two-layer LSTM with hidden size 96, additive temporal attention, dropout, batch normalization, and sigmoid risk output.</a:t>
             </a:r>
-            <a:endParaRPr sz="2000"/>
           </a:p>
           <a:p>
             <a:pPr marL="406400" indent="-406400">
@@ -5758,17 +6617,14 @@
               <a:buChar char="•"/>
             </a:pPr>
             <a:r>
-              <a:rPr lang="en-US" sz="2000" dirty="0">
-                <a:solidFill>
-                  <a:srgbClr val="000000"/>
-                </a:solidFill>
-                <a:latin typeface="Times New Roman" pitchFamily="34" charset="0"/>
-                <a:ea typeface="Times New Roman" pitchFamily="34" charset="-122"/>
-                <a:cs typeface="Times New Roman" pitchFamily="34" charset="-120"/>
+              <a:rPr sz="2000">
+                <a:solidFill>
+                  <a:srgbClr val="000000"/>
+                </a:solidFill>
+                <a:latin typeface="Times New Roman"/>
               </a:rPr>
               <a:t>Deployment: FastAPI inference and React visualization, with SHAP feature importance and attention-based temporal explanations.</a:t>
             </a:r>
-            <a:endParaRPr sz="2000"/>
           </a:p>
         </p:txBody>
       </p:sp>
@@ -5792,7 +6648,7 @@
       <p:grpSpPr/>
       <p:pic>
         <p:nvPicPr>
-          <p:cNvPr id="2" name="Image 0" descr="vtu_logo.png">    </p:cNvPr>
+          <p:cNvPr id="2" name="Picture 1" descr="image.png"/>
           <p:cNvPicPr>
             <a:picLocks noChangeAspect="1"/>
           </p:cNvPicPr>
@@ -5816,7 +6672,7 @@
       </p:pic>
       <p:pic>
         <p:nvPicPr>
-          <p:cNvPr id="3" name="Image 1" descr="pace_logo.png">    </p:cNvPr>
+          <p:cNvPr id="3" name="Picture 2" descr="image.png"/>
           <p:cNvPicPr>
             <a:picLocks noChangeAspect="1"/>
           </p:cNvPicPr>
@@ -5840,7 +6696,7 @@
       </p:pic>
       <p:sp>
         <p:nvSpPr>
-          <p:cNvPr id="4" name="Text 0"/>
+          <p:cNvPr id="4" name="TextBox 3"/>
           <p:cNvSpPr txBox="1"/>
           <p:nvPr/>
         </p:nvSpPr>
@@ -5853,10 +6709,9 @@
             <a:avLst/>
           </a:prstGeom>
           <a:noFill/>
-          <a:ln/>
-        </p:spPr>
-        <p:txBody>
-          <a:bodyPr wrap="square" lIns="0" tIns="0" rIns="0" bIns="0" rtlCol="0" anchor="ctr"/>
+        </p:spPr>
+        <p:txBody>
+          <a:bodyPr wrap="square"/>
           <a:lstStyle/>
           <a:p>
             <a:pPr algn="ctr" indent="0" marL="0">
@@ -5866,41 +6721,30 @@
               <a:buNone/>
             </a:pPr>
             <a:r>
-              <a:rPr lang="en-US" sz="2800" b="1" dirty="0">
-                <a:solidFill>
-                  <a:srgbClr val="000000"/>
-                </a:solidFill>
-                <a:latin typeface="Times New Roman" pitchFamily="34" charset="0"/>
-                <a:ea typeface="Times New Roman" pitchFamily="34" charset="-122"/>
-                <a:cs typeface="Times New Roman" pitchFamily="34" charset="-120"/>
+              <a:rPr sz="2800" b="1">
+                <a:solidFill>
+                  <a:srgbClr val="000000"/>
+                </a:solidFill>
+                <a:latin typeface="Times New Roman"/>
               </a:rPr>
               <a:t>P.A. COLLEGE OF ENGINEERING
 </a:t>
             </a:r>
-            <a:pPr algn="ctr" indent="0" marL="0">
-              <a:lnSpc>
-                <a:spcPct val="150000"/>
-              </a:lnSpc>
-              <a:buNone/>
-            </a:pPr>
-            <a:r>
-              <a:rPr lang="en-US" sz="2000" b="1" dirty="0">
-                <a:solidFill>
-                  <a:srgbClr val="000000"/>
-                </a:solidFill>
-                <a:latin typeface="Times New Roman" pitchFamily="34" charset="0"/>
-                <a:ea typeface="Times New Roman" pitchFamily="34" charset="-122"/>
-                <a:cs typeface="Times New Roman" pitchFamily="34" charset="-120"/>
+            <a:r>
+              <a:rPr sz="2000" b="1">
+                <a:solidFill>
+                  <a:srgbClr val="000000"/>
+                </a:solidFill>
+                <a:latin typeface="Times New Roman"/>
               </a:rPr>
               <a:t>DEPARTMENT OF COMPUTER SCIENCE &amp; ENGINEERING</a:t>
             </a:r>
-            <a:endParaRPr lang="en-US" sz="2800" dirty="0"/>
-          </a:p>
-        </p:txBody>
-      </p:sp>
-      <p:sp>
-        <p:nvSpPr>
-          <p:cNvPr id="5" name="Text 1"/>
+          </a:p>
+        </p:txBody>
+      </p:sp>
+      <p:sp>
+        <p:nvSpPr>
+          <p:cNvPr id="5" name="TextBox 4"/>
           <p:cNvSpPr txBox="1"/>
           <p:nvPr/>
         </p:nvSpPr>
@@ -5913,10 +6757,9 @@
             <a:avLst/>
           </a:prstGeom>
           <a:noFill/>
-          <a:ln/>
-        </p:spPr>
-        <p:txBody>
-          <a:bodyPr wrap="square" lIns="0" tIns="0" rIns="0" bIns="0" rtlCol="0" anchor="ctr"/>
+        </p:spPr>
+        <p:txBody>
+          <a:bodyPr wrap="square"/>
           <a:lstStyle/>
           <a:p>
             <a:pPr algn="ctr" indent="0" marL="0">
@@ -5931,13 +6774,12 @@
               </a:rPr>
               <a:t>EXPECTED OUTCOME</a:t>
             </a:r>
-            <a:endParaRPr sz="3400"/>
-          </a:p>
-        </p:txBody>
-      </p:sp>
-      <p:sp>
-        <p:nvSpPr>
-          <p:cNvPr id="6" name="Text 2"/>
+          </a:p>
+        </p:txBody>
+      </p:sp>
+      <p:sp>
+        <p:nvSpPr>
+          <p:cNvPr id="6" name="TextBox 5"/>
           <p:cNvSpPr txBox="1"/>
           <p:nvPr/>
         </p:nvSpPr>
@@ -5950,10 +6792,9 @@
             <a:avLst/>
           </a:prstGeom>
           <a:noFill/>
-          <a:ln/>
-        </p:spPr>
-        <p:txBody>
-          <a:bodyPr wrap="square" lIns="0" tIns="0" rIns="0" bIns="0" rtlCol="0" anchor="t"/>
+        </p:spPr>
+        <p:txBody>
+          <a:bodyPr wrap="square"/>
           <a:lstStyle/>
           <a:p>
             <a:pPr marL="406400" indent="-406400">
@@ -5975,7 +6816,6 @@
               </a:rPr>
               <a:t>A working real-time ICU dashboard displaying deterioration risk from recent clinical measurements.</a:t>
             </a:r>
-            <a:endParaRPr sz="2100"/>
           </a:p>
           <a:p>
             <a:pPr/>
@@ -6036,39 +6876,25 @@
 </file>
 
 <file path=ppt/slides/slide9.xml><?xml version="1.0" encoding="utf-8"?>
-<p:sld xmlns:a="http://schemas.openxmlformats.org/drawingml/2006/main" xmlns:ns2="http://schemas.openxmlformats.org/officeDocument/2006/relationships" xmlns:p="http://schemas.openxmlformats.org/presentationml/2006/main">
-  <p:cSld name="Slide 7">
-    <p:bg>
-      <p:bgPr>
-        <a:solidFill>
-          <a:srgbClr val="FFFFFF"/>
-        </a:solidFill>
-      </p:bgPr>
-    </p:bg>
+<p:sld xmlns:a="http://schemas.openxmlformats.org/drawingml/2006/main" xmlns:p="http://schemas.openxmlformats.org/presentationml/2006/main" xmlns:r="http://schemas.openxmlformats.org/officeDocument/2006/relationships">
+  <p:cSld>
     <p:spTree>
       <p:nvGrpSpPr>
         <p:cNvPr id="1" name=""/>
         <p:cNvGrpSpPr/>
         <p:nvPr/>
       </p:nvGrpSpPr>
-      <p:grpSpPr>
-        <a:xfrm>
-          <a:off x="0" y="0"/>
-          <a:ext cx="0" cy="0"/>
-          <a:chOff x="0" y="0"/>
-          <a:chExt cx="0" cy="0"/>
-        </a:xfrm>
-      </p:grpSpPr>
+      <p:grpSpPr/>
       <p:pic>
         <p:nvPicPr>
-          <p:cNvPr id="2" name="Image 0" descr="vtu_logo.png">    </p:cNvPr>
+          <p:cNvPr id="2" name="Picture 1" descr="image.png"/>
           <p:cNvPicPr>
             <a:picLocks noChangeAspect="1"/>
           </p:cNvPicPr>
           <p:nvPr/>
         </p:nvPicPr>
         <p:blipFill>
-          <a:blip ns2:embed="rId1"/>
+          <a:blip r:embed="rId2"/>
           <a:stretch>
             <a:fillRect/>
           </a:stretch>
@@ -6085,14 +6911,14 @@
       </p:pic>
       <p:pic>
         <p:nvPicPr>
-          <p:cNvPr id="3" name="Image 1" descr="pace_logo.png">    </p:cNvPr>
+          <p:cNvPr id="3" name="Picture 2" descr="image.png"/>
           <p:cNvPicPr>
             <a:picLocks noChangeAspect="1"/>
           </p:cNvPicPr>
           <p:nvPr/>
         </p:nvPicPr>
         <p:blipFill>
-          <a:blip ns2:embed="rId2"/>
+          <a:blip r:embed="rId3"/>
           <a:stretch>
             <a:fillRect/>
           </a:stretch>
@@ -6109,7 +6935,7 @@
       </p:pic>
       <p:sp>
         <p:nvSpPr>
-          <p:cNvPr id="4" name="Text 0"/>
+          <p:cNvPr id="4" name="TextBox 3"/>
           <p:cNvSpPr txBox="1"/>
           <p:nvPr/>
         </p:nvSpPr>
@@ -6122,10 +6948,9 @@
             <a:avLst/>
           </a:prstGeom>
           <a:noFill/>
-          <a:ln/>
-        </p:spPr>
-        <p:txBody>
-          <a:bodyPr wrap="square" lIns="0" tIns="0" rIns="0" bIns="0" rtlCol="0" anchor="ctr"/>
+        </p:spPr>
+        <p:txBody>
+          <a:bodyPr wrap="square"/>
           <a:lstStyle/>
           <a:p>
             <a:pPr algn="ctr" indent="0" marL="0">
@@ -6135,41 +6960,30 @@
               <a:buNone/>
             </a:pPr>
             <a:r>
-              <a:rPr lang="en-US" sz="2800" b="1" dirty="0">
-                <a:solidFill>
-                  <a:srgbClr val="000000"/>
-                </a:solidFill>
-                <a:latin typeface="Times New Roman" pitchFamily="34" charset="0"/>
-                <a:ea typeface="Times New Roman" pitchFamily="34" charset="-122"/>
-                <a:cs typeface="Times New Roman" pitchFamily="34" charset="-120"/>
+              <a:rPr sz="2800" b="1">
+                <a:solidFill>
+                  <a:srgbClr val="000000"/>
+                </a:solidFill>
+                <a:latin typeface="Times New Roman"/>
               </a:rPr>
               <a:t>P.A. COLLEGE OF ENGINEERING
 </a:t>
             </a:r>
-            <a:pPr algn="ctr" indent="0" marL="0">
-              <a:lnSpc>
-                <a:spcPct val="150000"/>
-              </a:lnSpc>
-              <a:buNone/>
-            </a:pPr>
-            <a:r>
-              <a:rPr lang="en-US" sz="2000" b="1" dirty="0">
-                <a:solidFill>
-                  <a:srgbClr val="000000"/>
-                </a:solidFill>
-                <a:latin typeface="Times New Roman" pitchFamily="34" charset="0"/>
-                <a:ea typeface="Times New Roman" pitchFamily="34" charset="-122"/>
-                <a:cs typeface="Times New Roman" pitchFamily="34" charset="-120"/>
+            <a:r>
+              <a:rPr sz="2000" b="1">
+                <a:solidFill>
+                  <a:srgbClr val="000000"/>
+                </a:solidFill>
+                <a:latin typeface="Times New Roman"/>
               </a:rPr>
               <a:t>DEPARTMENT OF COMPUTER SCIENCE &amp; ENGINEERING</a:t>
             </a:r>
-            <a:endParaRPr lang="en-US" sz="2800" dirty="0"/>
-          </a:p>
-        </p:txBody>
-      </p:sp>
-      <p:sp>
-        <p:nvSpPr>
-          <p:cNvPr id="5" name="Text 1"/>
+          </a:p>
+        </p:txBody>
+      </p:sp>
+      <p:sp>
+        <p:nvSpPr>
+          <p:cNvPr id="5" name="TextBox 4"/>
           <p:cNvSpPr txBox="1"/>
           <p:nvPr/>
         </p:nvSpPr>
@@ -6182,33 +6996,29 @@
             <a:avLst/>
           </a:prstGeom>
           <a:noFill/>
-          <a:ln/>
-        </p:spPr>
-        <p:txBody>
-          <a:bodyPr wrap="square" lIns="0" tIns="0" rIns="0" bIns="0" rtlCol="0" anchor="ctr"/>
+        </p:spPr>
+        <p:txBody>
+          <a:bodyPr wrap="square"/>
           <a:lstStyle/>
           <a:p>
             <a:pPr algn="ctr" indent="0" marL="0">
               <a:buNone/>
             </a:pPr>
             <a:r>
-              <a:rPr lang="en-US" sz="3400" b="1" dirty="0">
+              <a:rPr sz="3400" b="1">
                 <a:solidFill>
                   <a:srgbClr val="1757AC"/>
                 </a:solidFill>
-                <a:latin typeface="Times New Roman" pitchFamily="34" charset="0"/>
-                <a:ea typeface="Times New Roman" pitchFamily="34" charset="-122"/>
-                <a:cs typeface="Times New Roman" pitchFamily="34" charset="-120"/>
+                <a:latin typeface="Times New Roman"/>
               </a:rPr>
               <a:t>EXPERIMENTAL RESULT</a:t>
             </a:r>
-            <a:endParaRPr sz="3400"/>
-          </a:p>
-        </p:txBody>
-      </p:sp>
-      <p:sp>
-        <p:nvSpPr>
-          <p:cNvPr id="6" name="Text 2"/>
+          </a:p>
+        </p:txBody>
+      </p:sp>
+      <p:sp>
+        <p:nvSpPr>
+          <p:cNvPr id="6" name="TextBox 5"/>
           <p:cNvSpPr txBox="1"/>
           <p:nvPr/>
         </p:nvSpPr>
@@ -6221,10 +7031,9 @@
             <a:avLst/>
           </a:prstGeom>
           <a:noFill/>
-          <a:ln/>
-        </p:spPr>
-        <p:txBody>
-          <a:bodyPr wrap="square" lIns="0" tIns="0" rIns="0" bIns="0" rtlCol="0" anchor="t"/>
+        </p:spPr>
+        <p:txBody>
+          <a:bodyPr wrap="square"/>
           <a:lstStyle/>
           <a:p>
             <a:pPr marL="406400" indent="-406400">
@@ -6246,7 +7055,6 @@
               </a:rPr>
               <a:t>Deployed ensemble: 0.840 validation AUC and 0.844 AUC on the fresh unseen 20% set-B holdout.</a:t>
             </a:r>
-            <a:endParaRPr sz="2100"/>
           </a:p>
           <a:p>
             <a:pPr/>
@@ -6305,44 +7113,44 @@
         <a:sysClr val="window" lastClr="FFFFFF"/>
       </a:lt1>
       <a:dk2>
-        <a:srgbClr val="44546A"/>
+        <a:srgbClr val="1F497D"/>
       </a:dk2>
       <a:lt2>
-        <a:srgbClr val="E7E6E6"/>
+        <a:srgbClr val="EEECE1"/>
       </a:lt2>
       <a:accent1>
-        <a:srgbClr val="4472C4"/>
+        <a:srgbClr val="4F81BD"/>
       </a:accent1>
       <a:accent2>
-        <a:srgbClr val="ED7D31"/>
+        <a:srgbClr val="C0504D"/>
       </a:accent2>
       <a:accent3>
-        <a:srgbClr val="A5A5A5"/>
+        <a:srgbClr val="9BBB59"/>
       </a:accent3>
       <a:accent4>
-        <a:srgbClr val="FFC000"/>
+        <a:srgbClr val="8064A2"/>
       </a:accent4>
       <a:accent5>
-        <a:srgbClr val="5B9BD5"/>
+        <a:srgbClr val="4BACC6"/>
       </a:accent5>
       <a:accent6>
-        <a:srgbClr val="70AD47"/>
+        <a:srgbClr val="F79646"/>
       </a:accent6>
       <a:hlink>
-        <a:srgbClr val="0563C1"/>
+        <a:srgbClr val="0000FF"/>
       </a:hlink>
       <a:folHlink>
-        <a:srgbClr val="954F72"/>
+        <a:srgbClr val="800080"/>
       </a:folHlink>
     </a:clrScheme>
     <a:fontScheme name="Office">
       <a:majorFont>
-        <a:latin typeface="Calibri Light" panose="020F0302020204030204"/>
+        <a:latin typeface="Calibri"/>
         <a:ea typeface=""/>
         <a:cs typeface=""/>
-        <a:font script="Jpan" typeface="游ゴシック Light"/>
+        <a:font script="Jpan" typeface="ＭＳ Ｐゴシック"/>
         <a:font script="Hang" typeface="맑은 고딕"/>
-        <a:font script="Hans" typeface="等线 Light"/>
+        <a:font script="Hans" typeface="宋体"/>
         <a:font script="Hant" typeface="新細明體"/>
         <a:font script="Arab" typeface="Times New Roman"/>
         <a:font script="Hebr" typeface="Times New Roman"/>
@@ -6370,31 +7178,14 @@
         <a:font script="Viet" typeface="Times New Roman"/>
         <a:font script="Uigh" typeface="Microsoft Uighur"/>
         <a:font script="Geor" typeface="Sylfaen"/>
-        <a:font script="Armn" typeface="Arial"/>
-        <a:font script="Bugi" typeface="Leelawadee UI"/>
-        <a:font script="Bopo" typeface="Microsoft JhengHei"/>
-        <a:font script="Java" typeface="Javanese Text"/>
-        <a:font script="Lisu" typeface="Segoe UI"/>
-        <a:font script="Mymr" typeface="Myanmar Text"/>
-        <a:font script="Nkoo" typeface="Ebrima"/>
-        <a:font script="Olck" typeface="Nirmala UI"/>
-        <a:font script="Osma" typeface="Ebrima"/>
-        <a:font script="Phag" typeface="Phagspa"/>
-        <a:font script="Syrn" typeface="Estrangelo Edessa"/>
-        <a:font script="Syrj" typeface="Estrangelo Edessa"/>
-        <a:font script="Syre" typeface="Estrangelo Edessa"/>
-        <a:font script="Sora" typeface="Nirmala UI"/>
-        <a:font script="Tale" typeface="Microsoft Tai Le"/>
-        <a:font script="Talu" typeface="Microsoft New Tai Lue"/>
-        <a:font script="Tfng" typeface="Ebrima"/>
       </a:majorFont>
       <a:minorFont>
-        <a:latin typeface="Calibri" panose="020F0502020204030204"/>
+        <a:latin typeface="Calibri"/>
         <a:ea typeface=""/>
         <a:cs typeface=""/>
-        <a:font script="Jpan" typeface="游ゴシック"/>
+        <a:font script="Jpan" typeface="ＭＳ Ｐゴシック"/>
         <a:font script="Hang" typeface="맑은 고딕"/>
-        <a:font script="Hans" typeface="等线"/>
+        <a:font script="Hans" typeface="宋体"/>
         <a:font script="Hant" typeface="新細明體"/>
         <a:font script="Arab" typeface="Arial"/>
         <a:font script="Hebr" typeface="Arial"/>
@@ -6422,23 +7213,6 @@
         <a:font script="Viet" typeface="Arial"/>
         <a:font script="Uigh" typeface="Microsoft Uighur"/>
         <a:font script="Geor" typeface="Sylfaen"/>
-        <a:font script="Armn" typeface="Arial"/>
-        <a:font script="Bugi" typeface="Leelawadee UI"/>
-        <a:font script="Bopo" typeface="Microsoft JhengHei"/>
-        <a:font script="Java" typeface="Javanese Text"/>
-        <a:font script="Lisu" typeface="Segoe UI"/>
-        <a:font script="Mymr" typeface="Myanmar Text"/>
-        <a:font script="Nkoo" typeface="Ebrima"/>
-        <a:font script="Olck" typeface="Nirmala UI"/>
-        <a:font script="Osma" typeface="Ebrima"/>
-        <a:font script="Phag" typeface="Phagspa"/>
-        <a:font script="Syrn" typeface="Estrangelo Edessa"/>
-        <a:font script="Syrj" typeface="Estrangelo Edessa"/>
-        <a:font script="Syre" typeface="Estrangelo Edessa"/>
-        <a:font script="Sora" typeface="Nirmala UI"/>
-        <a:font script="Tale" typeface="Microsoft Tai Le"/>
-        <a:font script="Talu" typeface="Microsoft New Tai Lue"/>
-        <a:font script="Tfng" typeface="Ebrima"/>
       </a:minorFont>
     </a:fontScheme>
     <a:fmtScheme name="Office">
@@ -6450,141 +7224,200 @@
           <a:gsLst>
             <a:gs pos="0">
               <a:schemeClr val="phClr">
-                <a:lumMod val="110000"/>
-                <a:satMod val="105000"/>
-                <a:tint val="67000"/>
+                <a:tint val="50000"/>
+                <a:satMod val="300000"/>
               </a:schemeClr>
             </a:gs>
-            <a:gs pos="50000">
+            <a:gs pos="35000">
               <a:schemeClr val="phClr">
-                <a:lumMod val="105000"/>
-                <a:satMod val="103000"/>
-                <a:tint val="73000"/>
+                <a:tint val="37000"/>
+                <a:satMod val="300000"/>
               </a:schemeClr>
             </a:gs>
             <a:gs pos="100000">
               <a:schemeClr val="phClr">
-                <a:lumMod val="105000"/>
-                <a:satMod val="109000"/>
-                <a:tint val="81000"/>
+                <a:tint val="15000"/>
+                <a:satMod val="350000"/>
               </a:schemeClr>
             </a:gs>
           </a:gsLst>
-          <a:lin ang="5400000" scaled="0"/>
+          <a:lin ang="16200000" scaled="1"/>
         </a:gradFill>
         <a:gradFill rotWithShape="1">
           <a:gsLst>
             <a:gs pos="0">
               <a:schemeClr val="phClr">
-                <a:satMod val="103000"/>
-                <a:lumMod val="102000"/>
-                <a:tint val="94000"/>
-              </a:schemeClr>
-            </a:gs>
-            <a:gs pos="50000">
-              <a:schemeClr val="phClr">
-                <a:satMod val="110000"/>
-                <a:lumMod val="100000"/>
+                <a:tint val="100000"/>
                 <a:shade val="100000"/>
+                <a:satMod val="130000"/>
               </a:schemeClr>
             </a:gs>
             <a:gs pos="100000">
               <a:schemeClr val="phClr">
-                <a:lumMod val="99000"/>
-                <a:satMod val="120000"/>
-                <a:shade val="78000"/>
+                <a:tint val="50000"/>
+                <a:shade val="100000"/>
+                <a:satMod val="350000"/>
               </a:schemeClr>
             </a:gs>
           </a:gsLst>
-          <a:lin ang="5400000" scaled="0"/>
+          <a:lin ang="16200000" scaled="0"/>
         </a:gradFill>
       </a:fillStyleLst>
       <a:lnStyleLst>
-        <a:ln w="6350" cap="flat" cmpd="sng" algn="ctr">
+        <a:ln w="9525" cap="flat" cmpd="sng" algn="ctr">
+          <a:solidFill>
+            <a:schemeClr val="phClr">
+              <a:shade val="95000"/>
+              <a:satMod val="105000"/>
+            </a:schemeClr>
+          </a:solidFill>
+          <a:prstDash val="solid"/>
+        </a:ln>
+        <a:ln w="25400" cap="flat" cmpd="sng" algn="ctr">
           <a:solidFill>
             <a:schemeClr val="phClr"/>
           </a:solidFill>
           <a:prstDash val="solid"/>
-          <a:miter lim="800000"/>
         </a:ln>
-        <a:ln w="12700" cap="flat" cmpd="sng" algn="ctr">
+        <a:ln w="38100" cap="flat" cmpd="sng" algn="ctr">
           <a:solidFill>
             <a:schemeClr val="phClr"/>
           </a:solidFill>
           <a:prstDash val="solid"/>
-          <a:miter lim="800000"/>
-        </a:ln>
-        <a:ln w="19050" cap="flat" cmpd="sng" algn="ctr">
-          <a:solidFill>
-            <a:schemeClr val="phClr"/>
-          </a:solidFill>
-          <a:prstDash val="solid"/>
-          <a:miter lim="800000"/>
         </a:ln>
       </a:lnStyleLst>
       <a:effectStyleLst>
         <a:effectStyle>
-          <a:effectLst/>
-        </a:effectStyle>
-        <a:effectStyle>
-          <a:effectLst/>
+          <a:effectLst>
+            <a:outerShdw blurRad="40000" dist="20000" dir="5400000" rotWithShape="0">
+              <a:srgbClr val="000000">
+                <a:alpha val="38000"/>
+              </a:srgbClr>
+            </a:outerShdw>
+          </a:effectLst>
         </a:effectStyle>
         <a:effectStyle>
           <a:effectLst>
-            <a:outerShdw blurRad="57150" dist="19050" dir="5400000" algn="ctr" rotWithShape="0">
+            <a:outerShdw blurRad="40000" dist="23000" dir="5400000" rotWithShape="0">
               <a:srgbClr val="000000">
-                <a:alpha val="63000"/>
+                <a:alpha val="35000"/>
               </a:srgbClr>
             </a:outerShdw>
           </a:effectLst>
+        </a:effectStyle>
+        <a:effectStyle>
+          <a:effectLst>
+            <a:outerShdw blurRad="40000" dist="23000" dir="5400000" rotWithShape="0">
+              <a:srgbClr val="000000">
+                <a:alpha val="35000"/>
+              </a:srgbClr>
+            </a:outerShdw>
+          </a:effectLst>
+          <a:scene3d>
+            <a:camera prst="orthographicFront">
+              <a:rot lat="0" lon="0" rev="0"/>
+            </a:camera>
+            <a:lightRig rig="threePt" dir="t">
+              <a:rot lat="0" lon="0" rev="1200000"/>
+            </a:lightRig>
+          </a:scene3d>
+          <a:sp3d>
+            <a:bevelT w="63500" h="25400"/>
+          </a:sp3d>
         </a:effectStyle>
       </a:effectStyleLst>
       <a:bgFillStyleLst>
         <a:solidFill>
           <a:schemeClr val="phClr"/>
         </a:solidFill>
-        <a:solidFill>
-          <a:schemeClr val="phClr">
-            <a:tint val="95000"/>
-            <a:satMod val="170000"/>
-          </a:schemeClr>
-        </a:solidFill>
         <a:gradFill rotWithShape="1">
           <a:gsLst>
             <a:gs pos="0">
               <a:schemeClr val="phClr">
-                <a:tint val="93000"/>
-                <a:satMod val="150000"/>
-                <a:shade val="98000"/>
-                <a:lumMod val="102000"/>
+                <a:tint val="40000"/>
+                <a:satMod val="350000"/>
               </a:schemeClr>
             </a:gs>
-            <a:gs pos="50000">
+            <a:gs pos="40000">
               <a:schemeClr val="phClr">
-                <a:tint val="98000"/>
-                <a:satMod val="130000"/>
-                <a:shade val="90000"/>
-                <a:lumMod val="103000"/>
+                <a:tint val="45000"/>
+                <a:shade val="99000"/>
+                <a:satMod val="350000"/>
               </a:schemeClr>
             </a:gs>
             <a:gs pos="100000">
               <a:schemeClr val="phClr">
-                <a:shade val="63000"/>
-                <a:satMod val="120000"/>
+                <a:shade val="20000"/>
+                <a:satMod val="255000"/>
               </a:schemeClr>
             </a:gs>
           </a:gsLst>
-          <a:lin ang="5400000" scaled="0"/>
+          <a:path path="circle">
+            <a:fillToRect l="50000" t="-80000" r="50000" b="180000"/>
+          </a:path>
+        </a:gradFill>
+        <a:gradFill rotWithShape="1">
+          <a:gsLst>
+            <a:gs pos="0">
+              <a:schemeClr val="phClr">
+                <a:tint val="80000"/>
+                <a:satMod val="300000"/>
+              </a:schemeClr>
+            </a:gs>
+            <a:gs pos="100000">
+              <a:schemeClr val="phClr">
+                <a:shade val="30000"/>
+                <a:satMod val="200000"/>
+              </a:schemeClr>
+            </a:gs>
+          </a:gsLst>
+          <a:path path="circle">
+            <a:fillToRect l="50000" t="50000" r="50000" b="50000"/>
+          </a:path>
         </a:gradFill>
       </a:bgFillStyleLst>
     </a:fmtScheme>
   </a:themeElements>
-  <a:objectDefaults/>
+  <a:objectDefaults>
+    <a:spDef>
+      <a:spPr/>
+      <a:bodyPr/>
+      <a:lstStyle/>
+      <a:style>
+        <a:lnRef idx="1">
+          <a:schemeClr val="accent1"/>
+        </a:lnRef>
+        <a:fillRef idx="3">
+          <a:schemeClr val="accent1"/>
+        </a:fillRef>
+        <a:effectRef idx="2">
+          <a:schemeClr val="accent1"/>
+        </a:effectRef>
+        <a:fontRef idx="minor">
+          <a:schemeClr val="lt1"/>
+        </a:fontRef>
+      </a:style>
+    </a:spDef>
+    <a:lnDef>
+      <a:spPr/>
+      <a:bodyPr/>
+      <a:lstStyle/>
+      <a:style>
+        <a:lnRef idx="2">
+          <a:schemeClr val="accent1"/>
+        </a:lnRef>
+        <a:fillRef idx="0">
+          <a:schemeClr val="accent1"/>
+        </a:fillRef>
+        <a:effectRef idx="1">
+          <a:schemeClr val="accent1"/>
+        </a:effectRef>
+        <a:fontRef idx="minor">
+          <a:schemeClr val="tx1"/>
+        </a:fontRef>
+      </a:style>
+    </a:lnDef>
+  </a:objectDefaults>
   <a:extraClrSchemeLst/>
-  <a:extLst>
-    <a:ext uri="{05A4C25C-085E-4340-85A3-A5531E510DB2}">
-      <thm15:themeFamily xmlns:thm15="http://schemas.microsoft.com/office/thememl/2012/main" name="Office Theme" id="{62F939B6-93AF-4DB8-9C6B-D6C7DFDC589F}" vid="{4A3C46E8-61CC-4603-A589-7422A47A8E4A}"/>
-    </a:ext>
-  </a:extLst>
 </a:theme>
 </file>
--- a/ppt/SynCura_Deck_V2.pptx
+++ b/ppt/SynCura_Deck_V2.pptx
@@ -6525,14 +6525,541 @@
       </p:sp>
       <p:sp>
         <p:nvSpPr>
-          <p:cNvPr id="6" name="TextBox 5"/>
+          <p:cNvPr id="6" name="Rounded Rectangle 5"/>
+          <p:cNvSpPr/>
+          <p:nvPr/>
+        </p:nvSpPr>
+        <p:spPr>
+          <a:xfrm>
+            <a:off x="1051560" y="3977639"/>
+            <a:ext cx="2606040" cy="2148840"/>
+          </a:xfrm>
+          <a:prstGeom prst="roundRect">
+            <a:avLst/>
+          </a:prstGeom>
+          <a:solidFill>
+            <a:srgbClr val="FFFFFF"/>
+          </a:solidFill>
+          <a:ln w="28575">
+            <a:solidFill>
+              <a:srgbClr val="1757AC"/>
+            </a:solidFill>
+          </a:ln>
+        </p:spPr>
+        <p:style>
+          <a:lnRef idx="1">
+            <a:schemeClr val="accent1"/>
+          </a:lnRef>
+          <a:fillRef idx="3">
+            <a:schemeClr val="accent1"/>
+          </a:fillRef>
+          <a:effectRef idx="2">
+            <a:schemeClr val="accent1"/>
+          </a:effectRef>
+          <a:fontRef idx="minor">
+            <a:schemeClr val="lt1"/>
+          </a:fontRef>
+        </p:style>
+        <p:txBody>
+          <a:bodyPr rtlCol="0" anchor="ctr" wrap="square"/>
+          <a:lstStyle/>
+          <a:p>
+            <a:pPr algn="ctr"/>
+            <a:r>
+              <a:rPr sz="2000" b="1">
+                <a:solidFill>
+                  <a:srgbClr val="1757AC"/>
+                </a:solidFill>
+                <a:latin typeface="Times New Roman"/>
+              </a:rPr>
+              <a:t>1 · DATA</a:t>
+            </a:r>
+          </a:p>
+          <a:p>
+            <a:pPr algn="ctr">
+              <a:spcBef>
+                <a:spcPts val="600"/>
+              </a:spcBef>
+            </a:pPr>
+            <a:r>
+              <a:rPr sz="1500">
+                <a:solidFill>
+                  <a:srgbClr val="000000"/>
+                </a:solidFill>
+                <a:latin typeface="Times New Roman"/>
+              </a:rPr>
+              <a:t>PhysioNet 2012
+12 vitals + labs</a:t>
+            </a:r>
+          </a:p>
+        </p:txBody>
+      </p:sp>
+      <p:sp>
+        <p:nvSpPr>
+          <p:cNvPr id="7" name="Right Arrow 6"/>
+          <p:cNvSpPr/>
+          <p:nvPr/>
+        </p:nvSpPr>
+        <p:spPr>
+          <a:xfrm>
+            <a:off x="3712464" y="4850892"/>
+            <a:ext cx="457200" cy="402336"/>
+          </a:xfrm>
+          <a:prstGeom prst="rightArrow">
+            <a:avLst/>
+          </a:prstGeom>
+          <a:solidFill>
+            <a:srgbClr val="1757AC"/>
+          </a:solidFill>
+          <a:ln>
+            <a:noFill/>
+          </a:ln>
+        </p:spPr>
+        <p:style>
+          <a:lnRef idx="1">
+            <a:schemeClr val="accent1"/>
+          </a:lnRef>
+          <a:fillRef idx="3">
+            <a:schemeClr val="accent1"/>
+          </a:fillRef>
+          <a:effectRef idx="2">
+            <a:schemeClr val="accent1"/>
+          </a:effectRef>
+          <a:fontRef idx="minor">
+            <a:schemeClr val="lt1"/>
+          </a:fontRef>
+        </p:style>
+        <p:txBody>
+          <a:bodyPr rtlCol="0" anchor="ctr"/>
+          <a:lstStyle/>
+          <a:p>
+            <a:pPr algn="ctr"/>
+          </a:p>
+        </p:txBody>
+      </p:sp>
+      <p:sp>
+        <p:nvSpPr>
+          <p:cNvPr id="8" name="Rounded Rectangle 7"/>
+          <p:cNvSpPr/>
+          <p:nvPr/>
+        </p:nvSpPr>
+        <p:spPr>
+          <a:xfrm>
+            <a:off x="4224528" y="3977639"/>
+            <a:ext cx="2606040" cy="2148840"/>
+          </a:xfrm>
+          <a:prstGeom prst="roundRect">
+            <a:avLst/>
+          </a:prstGeom>
+          <a:solidFill>
+            <a:srgbClr val="FFFFFF"/>
+          </a:solidFill>
+          <a:ln w="28575">
+            <a:solidFill>
+              <a:srgbClr val="1757AC"/>
+            </a:solidFill>
+          </a:ln>
+        </p:spPr>
+        <p:style>
+          <a:lnRef idx="1">
+            <a:schemeClr val="accent1"/>
+          </a:lnRef>
+          <a:fillRef idx="3">
+            <a:schemeClr val="accent1"/>
+          </a:fillRef>
+          <a:effectRef idx="2">
+            <a:schemeClr val="accent1"/>
+          </a:effectRef>
+          <a:fontRef idx="minor">
+            <a:schemeClr val="lt1"/>
+          </a:fontRef>
+        </p:style>
+        <p:txBody>
+          <a:bodyPr rtlCol="0" anchor="ctr" wrap="square"/>
+          <a:lstStyle/>
+          <a:p>
+            <a:pPr algn="ctr"/>
+            <a:r>
+              <a:rPr sz="2000" b="1">
+                <a:solidFill>
+                  <a:srgbClr val="1757AC"/>
+                </a:solidFill>
+                <a:latin typeface="Times New Roman"/>
+              </a:rPr>
+              <a:t>2 · PREPARE</a:t>
+            </a:r>
+          </a:p>
+          <a:p>
+            <a:pPr algn="ctr">
+              <a:spcBef>
+                <a:spcPts val="600"/>
+              </a:spcBef>
+            </a:pPr>
+            <a:r>
+              <a:rPr sz="1500">
+                <a:solidFill>
+                  <a:srgbClr val="000000"/>
+                </a:solidFill>
+                <a:latin typeface="Times New Roman"/>
+              </a:rPr>
+              <a:t>Interpolate
+Train-only z-score</a:t>
+            </a:r>
+          </a:p>
+        </p:txBody>
+      </p:sp>
+      <p:sp>
+        <p:nvSpPr>
+          <p:cNvPr id="9" name="Right Arrow 8"/>
+          <p:cNvSpPr/>
+          <p:nvPr/>
+        </p:nvSpPr>
+        <p:spPr>
+          <a:xfrm>
+            <a:off x="6885432" y="4850892"/>
+            <a:ext cx="457200" cy="402336"/>
+          </a:xfrm>
+          <a:prstGeom prst="rightArrow">
+            <a:avLst/>
+          </a:prstGeom>
+          <a:solidFill>
+            <a:srgbClr val="1757AC"/>
+          </a:solidFill>
+          <a:ln>
+            <a:noFill/>
+          </a:ln>
+        </p:spPr>
+        <p:style>
+          <a:lnRef idx="1">
+            <a:schemeClr val="accent1"/>
+          </a:lnRef>
+          <a:fillRef idx="3">
+            <a:schemeClr val="accent1"/>
+          </a:fillRef>
+          <a:effectRef idx="2">
+            <a:schemeClr val="accent1"/>
+          </a:effectRef>
+          <a:fontRef idx="minor">
+            <a:schemeClr val="lt1"/>
+          </a:fontRef>
+        </p:style>
+        <p:txBody>
+          <a:bodyPr rtlCol="0" anchor="ctr"/>
+          <a:lstStyle/>
+          <a:p>
+            <a:pPr algn="ctr"/>
+          </a:p>
+        </p:txBody>
+      </p:sp>
+      <p:sp>
+        <p:nvSpPr>
+          <p:cNvPr id="10" name="Rounded Rectangle 9"/>
+          <p:cNvSpPr/>
+          <p:nvPr/>
+        </p:nvSpPr>
+        <p:spPr>
+          <a:xfrm>
+            <a:off x="7397496" y="3977639"/>
+            <a:ext cx="2606040" cy="2148840"/>
+          </a:xfrm>
+          <a:prstGeom prst="roundRect">
+            <a:avLst/>
+          </a:prstGeom>
+          <a:solidFill>
+            <a:srgbClr val="FFFFFF"/>
+          </a:solidFill>
+          <a:ln w="28575">
+            <a:solidFill>
+              <a:srgbClr val="1757AC"/>
+            </a:solidFill>
+          </a:ln>
+        </p:spPr>
+        <p:style>
+          <a:lnRef idx="1">
+            <a:schemeClr val="accent1"/>
+          </a:lnRef>
+          <a:fillRef idx="3">
+            <a:schemeClr val="accent1"/>
+          </a:fillRef>
+          <a:effectRef idx="2">
+            <a:schemeClr val="accent1"/>
+          </a:effectRef>
+          <a:fontRef idx="minor">
+            <a:schemeClr val="lt1"/>
+          </a:fontRef>
+        </p:style>
+        <p:txBody>
+          <a:bodyPr rtlCol="0" anchor="ctr" wrap="square"/>
+          <a:lstStyle/>
+          <a:p>
+            <a:pPr algn="ctr"/>
+            <a:r>
+              <a:rPr sz="2000" b="1">
+                <a:solidFill>
+                  <a:srgbClr val="1757AC"/>
+                </a:solidFill>
+                <a:latin typeface="Times New Roman"/>
+              </a:rPr>
+              <a:t>3 · WINDOW</a:t>
+            </a:r>
+          </a:p>
+          <a:p>
+            <a:pPr algn="ctr">
+              <a:spcBef>
+                <a:spcPts val="600"/>
+              </a:spcBef>
+            </a:pPr>
+            <a:r>
+              <a:rPr sz="1500">
+                <a:solidFill>
+                  <a:srgbClr val="000000"/>
+                </a:solidFill>
+                <a:latin typeface="Times New Roman"/>
+              </a:rPr>
+              <a:t>90-min rolling
+Stride 15</a:t>
+            </a:r>
+          </a:p>
+        </p:txBody>
+      </p:sp>
+      <p:sp>
+        <p:nvSpPr>
+          <p:cNvPr id="11" name="Right Arrow 10"/>
+          <p:cNvSpPr/>
+          <p:nvPr/>
+        </p:nvSpPr>
+        <p:spPr>
+          <a:xfrm>
+            <a:off x="10058400" y="4850892"/>
+            <a:ext cx="457200" cy="402336"/>
+          </a:xfrm>
+          <a:prstGeom prst="rightArrow">
+            <a:avLst/>
+          </a:prstGeom>
+          <a:solidFill>
+            <a:srgbClr val="1757AC"/>
+          </a:solidFill>
+          <a:ln>
+            <a:noFill/>
+          </a:ln>
+        </p:spPr>
+        <p:style>
+          <a:lnRef idx="1">
+            <a:schemeClr val="accent1"/>
+          </a:lnRef>
+          <a:fillRef idx="3">
+            <a:schemeClr val="accent1"/>
+          </a:fillRef>
+          <a:effectRef idx="2">
+            <a:schemeClr val="accent1"/>
+          </a:effectRef>
+          <a:fontRef idx="minor">
+            <a:schemeClr val="lt1"/>
+          </a:fontRef>
+        </p:style>
+        <p:txBody>
+          <a:bodyPr rtlCol="0" anchor="ctr"/>
+          <a:lstStyle/>
+          <a:p>
+            <a:pPr algn="ctr"/>
+          </a:p>
+        </p:txBody>
+      </p:sp>
+      <p:sp>
+        <p:nvSpPr>
+          <p:cNvPr id="12" name="Rounded Rectangle 11"/>
+          <p:cNvSpPr/>
+          <p:nvPr/>
+        </p:nvSpPr>
+        <p:spPr>
+          <a:xfrm>
+            <a:off x="10570464" y="3977639"/>
+            <a:ext cx="2606040" cy="2148840"/>
+          </a:xfrm>
+          <a:prstGeom prst="roundRect">
+            <a:avLst/>
+          </a:prstGeom>
+          <a:solidFill>
+            <a:srgbClr val="FFFFFF"/>
+          </a:solidFill>
+          <a:ln w="28575">
+            <a:solidFill>
+              <a:srgbClr val="1757AC"/>
+            </a:solidFill>
+          </a:ln>
+        </p:spPr>
+        <p:style>
+          <a:lnRef idx="1">
+            <a:schemeClr val="accent1"/>
+          </a:lnRef>
+          <a:fillRef idx="3">
+            <a:schemeClr val="accent1"/>
+          </a:fillRef>
+          <a:effectRef idx="2">
+            <a:schemeClr val="accent1"/>
+          </a:effectRef>
+          <a:fontRef idx="minor">
+            <a:schemeClr val="lt1"/>
+          </a:fontRef>
+        </p:style>
+        <p:txBody>
+          <a:bodyPr rtlCol="0" anchor="ctr" wrap="square"/>
+          <a:lstStyle/>
+          <a:p>
+            <a:pPr algn="ctr"/>
+            <a:r>
+              <a:rPr sz="2000" b="1">
+                <a:solidFill>
+                  <a:srgbClr val="1757AC"/>
+                </a:solidFill>
+                <a:latin typeface="Times New Roman"/>
+              </a:rPr>
+              <a:t>4 · MODEL</a:t>
+            </a:r>
+          </a:p>
+          <a:p>
+            <a:pPr algn="ctr">
+              <a:spcBef>
+                <a:spcPts val="600"/>
+              </a:spcBef>
+            </a:pPr>
+            <a:r>
+              <a:rPr sz="1500">
+                <a:solidFill>
+                  <a:srgbClr val="000000"/>
+                </a:solidFill>
+                <a:latin typeface="Times New Roman"/>
+              </a:rPr>
+              <a:t>LSTM-96 + attention
+Risk 0–100</a:t>
+            </a:r>
+          </a:p>
+        </p:txBody>
+      </p:sp>
+      <p:sp>
+        <p:nvSpPr>
+          <p:cNvPr id="13" name="Right Arrow 12"/>
+          <p:cNvSpPr/>
+          <p:nvPr/>
+        </p:nvSpPr>
+        <p:spPr>
+          <a:xfrm>
+            <a:off x="13231368" y="4850892"/>
+            <a:ext cx="457200" cy="402336"/>
+          </a:xfrm>
+          <a:prstGeom prst="rightArrow">
+            <a:avLst/>
+          </a:prstGeom>
+          <a:solidFill>
+            <a:srgbClr val="1757AC"/>
+          </a:solidFill>
+          <a:ln>
+            <a:noFill/>
+          </a:ln>
+        </p:spPr>
+        <p:style>
+          <a:lnRef idx="1">
+            <a:schemeClr val="accent1"/>
+          </a:lnRef>
+          <a:fillRef idx="3">
+            <a:schemeClr val="accent1"/>
+          </a:fillRef>
+          <a:effectRef idx="2">
+            <a:schemeClr val="accent1"/>
+          </a:effectRef>
+          <a:fontRef idx="minor">
+            <a:schemeClr val="lt1"/>
+          </a:fontRef>
+        </p:style>
+        <p:txBody>
+          <a:bodyPr rtlCol="0" anchor="ctr"/>
+          <a:lstStyle/>
+          <a:p>
+            <a:pPr algn="ctr"/>
+          </a:p>
+        </p:txBody>
+      </p:sp>
+      <p:sp>
+        <p:nvSpPr>
+          <p:cNvPr id="14" name="Rounded Rectangle 13"/>
+          <p:cNvSpPr/>
+          <p:nvPr/>
+        </p:nvSpPr>
+        <p:spPr>
+          <a:xfrm>
+            <a:off x="13743432" y="3977639"/>
+            <a:ext cx="2606040" cy="2148840"/>
+          </a:xfrm>
+          <a:prstGeom prst="roundRect">
+            <a:avLst/>
+          </a:prstGeom>
+          <a:solidFill>
+            <a:srgbClr val="FFFFFF"/>
+          </a:solidFill>
+          <a:ln w="28575">
+            <a:solidFill>
+              <a:srgbClr val="1757AC"/>
+            </a:solidFill>
+          </a:ln>
+        </p:spPr>
+        <p:style>
+          <a:lnRef idx="1">
+            <a:schemeClr val="accent1"/>
+          </a:lnRef>
+          <a:fillRef idx="3">
+            <a:schemeClr val="accent1"/>
+          </a:fillRef>
+          <a:effectRef idx="2">
+            <a:schemeClr val="accent1"/>
+          </a:effectRef>
+          <a:fontRef idx="minor">
+            <a:schemeClr val="lt1"/>
+          </a:fontRef>
+        </p:style>
+        <p:txBody>
+          <a:bodyPr rtlCol="0" anchor="ctr" wrap="square"/>
+          <a:lstStyle/>
+          <a:p>
+            <a:pPr algn="ctr"/>
+            <a:r>
+              <a:rPr sz="2000" b="1">
+                <a:solidFill>
+                  <a:srgbClr val="1757AC"/>
+                </a:solidFill>
+                <a:latin typeface="Times New Roman"/>
+              </a:rPr>
+              <a:t>5 · SERVE</a:t>
+            </a:r>
+          </a:p>
+          <a:p>
+            <a:pPr algn="ctr">
+              <a:spcBef>
+                <a:spcPts val="600"/>
+              </a:spcBef>
+            </a:pPr>
+            <a:r>
+              <a:rPr sz="1500">
+                <a:solidFill>
+                  <a:srgbClr val="000000"/>
+                </a:solidFill>
+                <a:latin typeface="Times New Roman"/>
+              </a:rPr>
+              <a:t>FastAPI + dashboard
+SHAP explains</a:t>
+            </a:r>
+          </a:p>
+        </p:txBody>
+      </p:sp>
+      <p:sp>
+        <p:nvSpPr>
+          <p:cNvPr id="15" name="TextBox 14"/>
           <p:cNvSpPr txBox="1"/>
           <p:nvPr/>
         </p:nvSpPr>
         <p:spPr>
           <a:xfrm>
-            <a:off x="990295" y="3261665"/>
-            <a:ext cx="16303752" cy="6035040"/>
+            <a:off x="1051560" y="6629400"/>
+            <a:ext cx="15297912" cy="640080"/>
           </a:xfrm>
           <a:prstGeom prst="rect">
             <a:avLst/>
@@ -6540,90 +7067,20 @@
           <a:noFill/>
         </p:spPr>
         <p:txBody>
-          <a:bodyPr wrap="square"/>
-          <a:lstStyle/>
-          <a:p>
-            <a:pPr marL="406400" indent="-406400">
-              <a:lnSpc>
-                <a:spcPct val="150000"/>
-              </a:lnSpc>
-              <a:spcAft>
-                <a:spcPts val="1400"/>
-              </a:spcAft>
-              <a:buSzPct val="100000"/>
-              <a:buChar char="•"/>
-            </a:pPr>
-            <a:r>
-              <a:rPr sz="2000">
-                <a:solidFill>
-                  <a:srgbClr val="000000"/>
-                </a:solidFill>
-                <a:latin typeface="Times New Roman"/>
-              </a:rPr>
-              <a:t>Dataset: PhysioNet 2012 Challenge with 12 features: six vital signs plus GCS, BUN, Creatinine, WBC, Platelets, and Glucose.</a:t>
-            </a:r>
-          </a:p>
-          <a:p>
-            <a:pPr marL="406400" indent="-406400">
-              <a:lnSpc>
-                <a:spcPct val="150000"/>
-              </a:lnSpc>
-              <a:spcAft>
-                <a:spcPts val="1400"/>
-              </a:spcAft>
-              <a:buSzPct val="100000"/>
-              <a:buChar char="•"/>
-            </a:pPr>
-            <a:r>
-              <a:rPr sz="2000">
-                <a:solidFill>
-                  <a:srgbClr val="000000"/>
-                </a:solidFill>
-                <a:latin typeface="Times New Roman"/>
-              </a:rPr>
-              <a:t>Preprocessing: interpolation, train-only population Z-score normalization, 90-minute windows, and 15-minute stride.</a:t>
-            </a:r>
-          </a:p>
-          <a:p>
-            <a:pPr marL="406400" indent="-406400">
-              <a:lnSpc>
-                <a:spcPct val="150000"/>
-              </a:lnSpc>
-              <a:spcAft>
-                <a:spcPts val="1400"/>
-              </a:spcAft>
-              <a:buSzPct val="100000"/>
-              <a:buChar char="•"/>
-            </a:pPr>
-            <a:r>
-              <a:rPr sz="2000">
-                <a:solidFill>
-                  <a:srgbClr val="000000"/>
-                </a:solidFill>
-                <a:latin typeface="Times New Roman"/>
-              </a:rPr>
-              <a:t>Model: two-layer LSTM with hidden size 96, additive temporal attention, dropout, batch normalization, and sigmoid risk output.</a:t>
-            </a:r>
-          </a:p>
-          <a:p>
-            <a:pPr marL="406400" indent="-406400">
-              <a:lnSpc>
-                <a:spcPct val="150000"/>
-              </a:lnSpc>
-              <a:spcAft>
-                <a:spcPts val="1400"/>
-              </a:spcAft>
-              <a:buSzPct val="100000"/>
-              <a:buChar char="•"/>
-            </a:pPr>
-            <a:r>
-              <a:rPr sz="2000">
-                <a:solidFill>
-                  <a:srgbClr val="000000"/>
-                </a:solidFill>
-                <a:latin typeface="Times New Roman"/>
-              </a:rPr>
-              <a:t>Deployment: FastAPI inference and React visualization, with SHAP feature importance and attention-based temporal explanations.</a:t>
+          <a:bodyPr wrap="square">
+            <a:spAutoFit/>
+          </a:bodyPr>
+          <a:lstStyle/>
+          <a:p>
+            <a:pPr algn="ctr"/>
+            <a:r>
+              <a:rPr sz="1500" i="1">
+                <a:solidFill>
+                  <a:srgbClr val="444444"/>
+                </a:solidFill>
+                <a:latin typeface="Times New Roman"/>
+              </a:rPr>
+              <a:t>Leakage controls: train-only stats · patient-level split · past-only windows</a:t>
             </a:r>
           </a:p>
         </p:txBody>

--- a/ppt/SynCura_Deck_V2.pptx
+++ b/ppt/SynCura_Deck_V2.pptx
@@ -3508,7 +3508,7 @@
                 </a:solidFill>
                 <a:latin typeface="Times New Roman"/>
               </a:rPr>
-              <a:t>HOW IT COULD BE BETTER WITH ENOUGH TIME</a:t>
+              <a:t>LIMITATIONS &amp; IMPROVEMENT PATH</a:t>
             </a:r>
           </a:p>
         </p:txBody>
@@ -3550,7 +3550,7 @@
                 </a:solidFill>
                 <a:latin typeface="Times New Roman"/>
               </a:rPr>
-              <a:t>Paper: 0.936 overall, 98.9 at discharge (hindsight); cross-hospital falls to 0.81 / 0.76, no prospective test.</a:t>
+              <a:t>Paper: 0.936, 0.989 at discharge (hindsight); 0.81/0.76 cross-hospital, no bedside test.</a:t>
             </a:r>
           </a:p>
           <a:p>
@@ -3562,7 +3562,7 @@
                 </a:solidFill>
                 <a:latin typeface="Times New Roman"/>
               </a:rPr>
-              <a:t>Real world: US-only retrospective, missing/async vitals, age bias, single-center data.</a:t>
+              <a:t>Reality: US-only retrospective, missing/async vitals, age bias.</a:t>
             </a:r>
           </a:p>
           <a:p>
@@ -3574,7 +3574,7 @@
                 </a:solidFill>
                 <a:latin typeface="Times New Roman"/>
               </a:rPr>
-              <a:t>SynCura stricter: 90-min window only, no future info; unseen holdout 0.844 beats validation 0.840.</a:t>
+              <a:t>Stricter by design: 90-min past-only windows; holdout 0.844 ≥ val 0.840.</a:t>
             </a:r>
           </a:p>
           <a:p>
@@ -3586,7 +3586,7 @@
                 </a:solidFill>
                 <a:latin typeface="Times New Roman"/>
               </a:rPr>
-              <a:t>SynCura reports what papers skip: false alarms, precision, lead time vs NEWS2, calibration.</a:t>
+              <a:t>Reports what papers skip: false alarms, lead time vs NEWS2, calibration.</a:t>
             </a:r>
           </a:p>
           <a:p>
@@ -3598,7 +3598,7 @@
                 </a:solidFill>
                 <a:latin typeface="Times New Roman"/>
               </a:rPr>
-              <a:t>Better-paper path: eICU/MIMIC validation + RealMIP imputation + time-aware attention + pilot.</a:t>
+              <a:t>Path: eICU/MIMIC validation, RealMIP imputation, time-aware attention, pilot.</a:t>
             </a:r>
           </a:p>
         </p:txBody>
@@ -3855,25 +3855,413 @@
               <a:t>Dataset: PhysioNet / Computing in Cardiology Challenge 2012.</a:t>
             </a:r>
           </a:p>
-          <a:p>
-            <a:pPr marL="406400" indent="-406400">
-              <a:lnSpc>
-                <a:spcPct val="150000"/>
-              </a:lnSpc>
-              <a:spcAft>
-                <a:spcPts val="1400"/>
-              </a:spcAft>
-              <a:buSzPct val="100000"/>
-              <a:buChar char="•"/>
+        </p:txBody>
+      </p:sp>
+      <p:sp>
+        <p:nvSpPr>
+          <p:cNvPr id="14" name="Rounded Rectangle 13"/>
+          <p:cNvSpPr/>
+          <p:nvPr/>
+        </p:nvSpPr>
+        <p:spPr>
+          <a:xfrm>
+            <a:off x="1051560" y="6355080"/>
+            <a:ext cx="3246120" cy="2240280"/>
+          </a:xfrm>
+          <a:prstGeom prst="roundRect">
+            <a:avLst/>
+          </a:prstGeom>
+          <a:solidFill>
+            <a:srgbClr val="FFFFFF"/>
+          </a:solidFill>
+          <a:ln w="28575">
+            <a:solidFill>
+              <a:srgbClr val="1757AC"/>
+            </a:solidFill>
+          </a:ln>
+        </p:spPr>
+        <p:style>
+          <a:lnRef idx="1">
+            <a:schemeClr val="accent1"/>
+          </a:lnRef>
+          <a:fillRef idx="3">
+            <a:schemeClr val="accent1"/>
+          </a:fillRef>
+          <a:effectRef idx="2">
+            <a:schemeClr val="accent1"/>
+          </a:effectRef>
+          <a:fontRef idx="minor">
+            <a:schemeClr val="lt1"/>
+          </a:fontRef>
+        </p:style>
+        <p:txBody>
+          <a:bodyPr rtlCol="0" anchor="ctr" wrap="square"/>
+          <a:lstStyle/>
+          <a:p>
+            <a:pPr algn="ctr"/>
+            <a:r>
+              <a:rPr sz="2000" b="1">
+                <a:solidFill>
+                  <a:srgbClr val="1757AC"/>
+                </a:solidFill>
+                <a:latin typeface="Times New Roman"/>
+              </a:rPr>
+              <a:t>SENSE</a:t>
+            </a:r>
+          </a:p>
+          <a:p>
+            <a:pPr algn="ctr">
+              <a:spcBef>
+                <a:spcPts val="600"/>
+              </a:spcBef>
             </a:pPr>
             <a:r>
-              <a:rPr sz="2100">
-                <a:solidFill>
-                  <a:srgbClr val="000000"/>
-                </a:solidFill>
-                <a:latin typeface="Times New Roman"/>
-              </a:rPr>
-              <a:t>SDG relevance: SDG 3 (Good Health and Well-Being) and SDG 9 (Industry, Innovation and Infrastructure).</a:t>
+              <a:rPr sz="1500">
+                <a:solidFill>
+                  <a:srgbClr val="000000"/>
+                </a:solidFill>
+                <a:latin typeface="Times New Roman"/>
+              </a:rPr>
+              <a:t>ESP32 + MAX30105</a:t>
+            </a:r>
+          </a:p>
+        </p:txBody>
+      </p:sp>
+      <p:sp>
+        <p:nvSpPr>
+          <p:cNvPr id="15" name="Right Arrow 14"/>
+          <p:cNvSpPr/>
+          <p:nvPr/>
+        </p:nvSpPr>
+        <p:spPr>
+          <a:xfrm>
+            <a:off x="4370832" y="7274052"/>
+            <a:ext cx="539496" cy="402336"/>
+          </a:xfrm>
+          <a:prstGeom prst="rightArrow">
+            <a:avLst/>
+          </a:prstGeom>
+          <a:solidFill>
+            <a:srgbClr val="1757AC"/>
+          </a:solidFill>
+          <a:ln>
+            <a:noFill/>
+          </a:ln>
+        </p:spPr>
+        <p:style>
+          <a:lnRef idx="1">
+            <a:schemeClr val="accent1"/>
+          </a:lnRef>
+          <a:fillRef idx="3">
+            <a:schemeClr val="accent1"/>
+          </a:fillRef>
+          <a:effectRef idx="2">
+            <a:schemeClr val="accent1"/>
+          </a:effectRef>
+          <a:fontRef idx="minor">
+            <a:schemeClr val="lt1"/>
+          </a:fontRef>
+        </p:style>
+        <p:txBody>
+          <a:bodyPr rtlCol="0" anchor="ctr"/>
+          <a:lstStyle/>
+          <a:p>
+            <a:pPr algn="ctr"/>
+          </a:p>
+        </p:txBody>
+      </p:sp>
+      <p:sp>
+        <p:nvSpPr>
+          <p:cNvPr id="16" name="Rounded Rectangle 15"/>
+          <p:cNvSpPr/>
+          <p:nvPr/>
+        </p:nvSpPr>
+        <p:spPr>
+          <a:xfrm>
+            <a:off x="4983480" y="6355080"/>
+            <a:ext cx="3246120" cy="2240280"/>
+          </a:xfrm>
+          <a:prstGeom prst="roundRect">
+            <a:avLst/>
+          </a:prstGeom>
+          <a:solidFill>
+            <a:srgbClr val="FFFFFF"/>
+          </a:solidFill>
+          <a:ln w="28575">
+            <a:solidFill>
+              <a:srgbClr val="1757AC"/>
+            </a:solidFill>
+          </a:ln>
+        </p:spPr>
+        <p:style>
+          <a:lnRef idx="1">
+            <a:schemeClr val="accent1"/>
+          </a:lnRef>
+          <a:fillRef idx="3">
+            <a:schemeClr val="accent1"/>
+          </a:fillRef>
+          <a:effectRef idx="2">
+            <a:schemeClr val="accent1"/>
+          </a:effectRef>
+          <a:fontRef idx="minor">
+            <a:schemeClr val="lt1"/>
+          </a:fontRef>
+        </p:style>
+        <p:txBody>
+          <a:bodyPr rtlCol="0" anchor="ctr" wrap="square"/>
+          <a:lstStyle/>
+          <a:p>
+            <a:pPr algn="ctr"/>
+            <a:r>
+              <a:rPr sz="2000" b="1">
+                <a:solidFill>
+                  <a:srgbClr val="1757AC"/>
+                </a:solidFill>
+                <a:latin typeface="Times New Roman"/>
+              </a:rPr>
+              <a:t>INGEST</a:t>
+            </a:r>
+          </a:p>
+          <a:p>
+            <a:pPr algn="ctr">
+              <a:spcBef>
+                <a:spcPts val="600"/>
+              </a:spcBef>
+            </a:pPr>
+            <a:r>
+              <a:rPr sz="1500">
+                <a:solidFill>
+                  <a:srgbClr val="000000"/>
+                </a:solidFill>
+                <a:latin typeface="Times New Roman"/>
+              </a:rPr>
+              <a:t>FastAPI + SQLite</a:t>
+            </a:r>
+          </a:p>
+        </p:txBody>
+      </p:sp>
+      <p:sp>
+        <p:nvSpPr>
+          <p:cNvPr id="17" name="Right Arrow 16"/>
+          <p:cNvSpPr/>
+          <p:nvPr/>
+        </p:nvSpPr>
+        <p:spPr>
+          <a:xfrm>
+            <a:off x="8302752" y="7274052"/>
+            <a:ext cx="539496" cy="402336"/>
+          </a:xfrm>
+          <a:prstGeom prst="rightArrow">
+            <a:avLst/>
+          </a:prstGeom>
+          <a:solidFill>
+            <a:srgbClr val="1757AC"/>
+          </a:solidFill>
+          <a:ln>
+            <a:noFill/>
+          </a:ln>
+        </p:spPr>
+        <p:style>
+          <a:lnRef idx="1">
+            <a:schemeClr val="accent1"/>
+          </a:lnRef>
+          <a:fillRef idx="3">
+            <a:schemeClr val="accent1"/>
+          </a:fillRef>
+          <a:effectRef idx="2">
+            <a:schemeClr val="accent1"/>
+          </a:effectRef>
+          <a:fontRef idx="minor">
+            <a:schemeClr val="lt1"/>
+          </a:fontRef>
+        </p:style>
+        <p:txBody>
+          <a:bodyPr rtlCol="0" anchor="ctr"/>
+          <a:lstStyle/>
+          <a:p>
+            <a:pPr algn="ctr"/>
+          </a:p>
+        </p:txBody>
+      </p:sp>
+      <p:sp>
+        <p:nvSpPr>
+          <p:cNvPr id="18" name="Rounded Rectangle 17"/>
+          <p:cNvSpPr/>
+          <p:nvPr/>
+        </p:nvSpPr>
+        <p:spPr>
+          <a:xfrm>
+            <a:off x="8915400" y="6355080"/>
+            <a:ext cx="3246120" cy="2240280"/>
+          </a:xfrm>
+          <a:prstGeom prst="roundRect">
+            <a:avLst/>
+          </a:prstGeom>
+          <a:solidFill>
+            <a:srgbClr val="FFFFFF"/>
+          </a:solidFill>
+          <a:ln w="28575">
+            <a:solidFill>
+              <a:srgbClr val="1757AC"/>
+            </a:solidFill>
+          </a:ln>
+        </p:spPr>
+        <p:style>
+          <a:lnRef idx="1">
+            <a:schemeClr val="accent1"/>
+          </a:lnRef>
+          <a:fillRef idx="3">
+            <a:schemeClr val="accent1"/>
+          </a:fillRef>
+          <a:effectRef idx="2">
+            <a:schemeClr val="accent1"/>
+          </a:effectRef>
+          <a:fontRef idx="minor">
+            <a:schemeClr val="lt1"/>
+          </a:fontRef>
+        </p:style>
+        <p:txBody>
+          <a:bodyPr rtlCol="0" anchor="ctr" wrap="square"/>
+          <a:lstStyle/>
+          <a:p>
+            <a:pPr algn="ctr"/>
+            <a:r>
+              <a:rPr sz="2000" b="1">
+                <a:solidFill>
+                  <a:srgbClr val="1757AC"/>
+                </a:solidFill>
+                <a:latin typeface="Times New Roman"/>
+              </a:rPr>
+              <a:t>SCORE</a:t>
+            </a:r>
+          </a:p>
+          <a:p>
+            <a:pPr algn="ctr">
+              <a:spcBef>
+                <a:spcPts val="600"/>
+              </a:spcBef>
+            </a:pPr>
+            <a:r>
+              <a:rPr sz="1500">
+                <a:solidFill>
+                  <a:srgbClr val="000000"/>
+                </a:solidFill>
+                <a:latin typeface="Times New Roman"/>
+              </a:rPr>
+              <a:t>AttentionLSTM 0–100</a:t>
+            </a:r>
+          </a:p>
+        </p:txBody>
+      </p:sp>
+      <p:sp>
+        <p:nvSpPr>
+          <p:cNvPr id="19" name="Right Arrow 18"/>
+          <p:cNvSpPr/>
+          <p:nvPr/>
+        </p:nvSpPr>
+        <p:spPr>
+          <a:xfrm>
+            <a:off x="12234672" y="7274052"/>
+            <a:ext cx="539496" cy="402336"/>
+          </a:xfrm>
+          <a:prstGeom prst="rightArrow">
+            <a:avLst/>
+          </a:prstGeom>
+          <a:solidFill>
+            <a:srgbClr val="1757AC"/>
+          </a:solidFill>
+          <a:ln>
+            <a:noFill/>
+          </a:ln>
+        </p:spPr>
+        <p:style>
+          <a:lnRef idx="1">
+            <a:schemeClr val="accent1"/>
+          </a:lnRef>
+          <a:fillRef idx="3">
+            <a:schemeClr val="accent1"/>
+          </a:fillRef>
+          <a:effectRef idx="2">
+            <a:schemeClr val="accent1"/>
+          </a:effectRef>
+          <a:fontRef idx="minor">
+            <a:schemeClr val="lt1"/>
+          </a:fontRef>
+        </p:style>
+        <p:txBody>
+          <a:bodyPr rtlCol="0" anchor="ctr"/>
+          <a:lstStyle/>
+          <a:p>
+            <a:pPr algn="ctr"/>
+          </a:p>
+        </p:txBody>
+      </p:sp>
+      <p:sp>
+        <p:nvSpPr>
+          <p:cNvPr id="20" name="Rounded Rectangle 19"/>
+          <p:cNvSpPr/>
+          <p:nvPr/>
+        </p:nvSpPr>
+        <p:spPr>
+          <a:xfrm>
+            <a:off x="12847320" y="6355080"/>
+            <a:ext cx="3246120" cy="2240280"/>
+          </a:xfrm>
+          <a:prstGeom prst="roundRect">
+            <a:avLst/>
+          </a:prstGeom>
+          <a:solidFill>
+            <a:srgbClr val="FFFFFF"/>
+          </a:solidFill>
+          <a:ln w="28575">
+            <a:solidFill>
+              <a:srgbClr val="1757AC"/>
+            </a:solidFill>
+          </a:ln>
+        </p:spPr>
+        <p:style>
+          <a:lnRef idx="1">
+            <a:schemeClr val="accent1"/>
+          </a:lnRef>
+          <a:fillRef idx="3">
+            <a:schemeClr val="accent1"/>
+          </a:fillRef>
+          <a:effectRef idx="2">
+            <a:schemeClr val="accent1"/>
+          </a:effectRef>
+          <a:fontRef idx="minor">
+            <a:schemeClr val="lt1"/>
+          </a:fontRef>
+        </p:style>
+        <p:txBody>
+          <a:bodyPr rtlCol="0" anchor="ctr" wrap="square"/>
+          <a:lstStyle/>
+          <a:p>
+            <a:pPr algn="ctr"/>
+            <a:r>
+              <a:rPr sz="2000" b="1">
+                <a:solidFill>
+                  <a:srgbClr val="1757AC"/>
+                </a:solidFill>
+                <a:latin typeface="Times New Roman"/>
+              </a:rPr>
+              <a:t>ACT</a:t>
+            </a:r>
+          </a:p>
+          <a:p>
+            <a:pPr algn="ctr">
+              <a:spcBef>
+                <a:spcPts val="600"/>
+              </a:spcBef>
+            </a:pPr>
+            <a:r>
+              <a:rPr sz="1500">
+                <a:solidFill>
+                  <a:srgbClr val="000000"/>
+                </a:solidFill>
+                <a:latin typeface="Times New Roman"/>
+              </a:rPr>
+              <a:t>Dashboard + alerts</a:t>
             </a:r>
           </a:p>
         </p:txBody>
@@ -4267,7 +4655,7 @@
                 </a:solidFill>
                 <a:latin typeface="Times New Roman"/>
               </a:rPr>
-              <a:t>Perform calibration, decision-curve analysis, and prospective evaluation with clinical collaborators.</a:t>
+              <a:t>Calibration + decision-curve analysis for bedside thresholds.</a:t>
             </a:r>
           </a:p>
           <a:p>
@@ -4288,7 +4676,7 @@
                 </a:solidFill>
                 <a:latin typeface="Times New Roman"/>
               </a:rPr>
-              <a:t>Add robust missing-data handling and test performance across hospitals and patient subgroups.</a:t>
+              <a:t>Subgroup and fairness validation across age, sex, and hospitals.</a:t>
             </a:r>
           </a:p>
           <a:p>
@@ -4309,7 +4697,7 @@
                 </a:solidFill>
                 <a:latin typeface="Times New Roman"/>
               </a:rPr>
-              <a:t>Compare attention-LSTM with transformer and graph-based temporal models.</a:t>
+              <a:t>Edge/TinyML deployment for wearable live vitals.</a:t>
             </a:r>
           </a:p>
           <a:p>
@@ -4330,7 +4718,7 @@
                 </a:solidFill>
                 <a:latin typeface="Times New Roman"/>
               </a:rPr>
-              <a:t>Explore multimodal fusion with clinical notes and safer integration with real bedside data streams.</a:t>
+              <a:t>Prospective clinical pilot with collaborators.</a:t>
             </a:r>
           </a:p>
           <a:p>
@@ -4351,7 +4739,7 @@
                 </a:solidFill>
                 <a:latin typeface="Times New Roman"/>
               </a:rPr>
-              <a:t>Investigate privacy-preserving and edge-assisted deployment only after clinical validation.</a:t>
+              <a:t>Privacy-preserving multi-hospital training.</a:t>
             </a:r>
           </a:p>
         </p:txBody>
@@ -4763,8 +5151,8 @@
               <a:buChar char="•"/>
             </a:pPr>
             <a:r>
-              <a:rPr/>
-              <a:t>[1] Y. Wang, Y. Bai, and G. Jin, Explainable Deep-Learning Models..., Frontiers in Physiology, vol. 17, 2026.</a:t>
+              <a:rPr sz="1300"/>
+              <a:t>[1] Zheng et al. (2025). Development and Validation of a Dynamic Real-Time Risk Prediction Model for ICU Patients Based on Longitudinal Irregular Data. JMIR 27, e69293. doi:10.2196/69293</a:t>
             </a:r>
           </a:p>
           <a:p>
@@ -4779,8 +5167,8 @@
               <a:buChar char="•"/>
             </a:pPr>
             <a:r>
-              <a:rPr/>
-              <a:t>[2] Z. Yan et al., Deep learning-based in-hospital mortality prediction..., PeerJ, vol. 14, e21631, 2026.</a:t>
+              <a:rPr sz="1300"/>
+              <a:t>[2] Wang, Bai &amp; Jin (2026). Explainable Deep-Learning Models for ICU Outcomes. Frontiers in Physiology 17.</a:t>
             </a:r>
           </a:p>
           <a:p>
@@ -4795,8 +5183,8 @@
               <a:buChar char="•"/>
             </a:pPr>
             <a:r>
-              <a:rPr/>
-              <a:t>[3] B. Sadanandan, Multimodal Deep Learning for Early Prediction..., arXiv:2603.14719, 2026.</a:t>
+              <a:rPr sz="1300"/>
+              <a:t>[3] Yan et al. (2026). Deep Learning-Based In-Hospital Mortality Prediction Using Long-Term Sequential Data in ICU Patients. PeerJ 14, e21631.</a:t>
             </a:r>
           </a:p>
           <a:p>
@@ -4811,8 +5199,8 @@
               <a:buChar char="•"/>
             </a:pPr>
             <a:r>
-              <a:rPr/>
-              <a:t>[4] Y. Wu et al., Revisiting the potential value of vital signs..., Journal of Big Data, vol. 11, no. 40, 2024.</a:t>
+              <a:rPr sz="1300"/>
+              <a:t>[4] Sadanandan (2026). Multimodal Deep Learning for Early Prediction of Patient Deterioration in the ICU. arXiv:2603.14719.</a:t>
             </a:r>
           </a:p>
           <a:p>
@@ -4827,8 +5215,8 @@
               <a:buChar char="•"/>
             </a:pPr>
             <a:r>
-              <a:rPr/>
-              <a:t>[5] P. Xie et al., Unlocking real-time ICU mortality prediction..., npj Digital Medicine, vol. 8, 733, 2025.</a:t>
+              <a:rPr sz="1300"/>
+              <a:t>[5] Wu et al. (2024). Revisiting the Potential Value of Vital Signs in Real-Time Prediction of Mortality Risk in ICU Patients. J Big Data 11, 40.</a:t>
             </a:r>
           </a:p>
           <a:p>
@@ -4843,8 +5231,8 @@
               <a:buChar char="•"/>
             </a:pPr>
             <a:r>
-              <a:rPr/>
-              <a:t>[6] E. Choi et al., Deep Interpretable Early Warning System..., IEEE JBHI, vol. 24, no. 9, 2020.</a:t>
+              <a:rPr sz="1300"/>
+              <a:t>[6] Xie et al. (2025). Unlocking Real-Time ICU Mortality Prediction: RealMIP Continuous Data Recovery. npj Digital Medicine 8, 733.</a:t>
             </a:r>
           </a:p>
           <a:p>
@@ -4859,8 +5247,8 @@
               <a:buChar char="•"/>
             </a:pPr>
             <a:r>
-              <a:rPr/>
-              <a:t>[7] M. R. Scheid et al., Clinical wearable deep learning based deterioration prediction..., Nature Communications, vol. 16, 9513, 2025.</a:t>
+              <a:rPr sz="1300"/>
+              <a:t>[7] Choi et al. (2020). Deep Interpretable Early Warning System for Clinical Deterioration. IEEE JBHI 24(9).</a:t>
             </a:r>
           </a:p>
           <a:p>
@@ -4875,8 +5263,18 @@
               <a:buChar char="•"/>
             </a:pPr>
             <a:r>
-              <a:rPr/>
-              <a:t>[8] PhysioNet, Computing in Cardiology Challenge 2012, physionet.org/content/challenge-2012/.</a:t>
+              <a:rPr sz="1300"/>
+              <a:t>[8] Li et al. (2025). Attention Residual LSTM-FCN for Clinical Time-Series Prediction. IEEE Access 13.</a:t>
+            </a:r>
+          </a:p>
+          <a:p>
+            <a:r>
+              <a:t>[9] Scheid et al. (2025). Wearable Deep Learning for Continuous In-Hospital Deterioration Prediction. Nature Communications 16, 9513.</a:t>
+            </a:r>
+          </a:p>
+          <a:p>
+            <a:r>
+              <a:t>[10] PhysioNet Challenge 2012. Predicting Mortality of ICU Patients. physionet.org/content/challenge-2012/</a:t>
             </a:r>
           </a:p>
         </p:txBody>
@@ -5246,7 +5644,7 @@
                 </a:solidFill>
                 <a:latin typeface="Times New Roman"/>
               </a:rPr>
-              <a:t>Clinicians need an early-warning aid that processes recent patient history and presents understandable reasons for its risk score.</a:t>
+              <a:t>Need: an early-warning aid reading recent history, with understandable reasons.</a:t>
             </a:r>
           </a:p>
           <a:p>
@@ -6130,7 +6528,7 @@
                 </a:solidFill>
                 <a:latin typeface="Times New Roman"/>
               </a:rPr>
-              <a:t>Limitation: retrospective data till discharge; AUROC rises to 98.9 at discharge (hindsight bias). SynCura fixes this with 90-min only, no future info.</a:t>
+              <a:t>Limitation: retrospective data till discharge; AUROC rises to 0.989 at discharge (hindsight bias). SynCura fixes this with 90-min only, no future info.</a:t>
             </a:r>
           </a:p>
         </p:txBody>
@@ -6369,7 +6767,7 @@
                 </a:solidFill>
                 <a:latin typeface="Times New Roman"/>
               </a:rPr>
-              <a:t>Different/better - learns from mistakes: confirmed misses/false alarms queue into weighted retraining.</a:t>
+              <a:t>Design goal - learns from mistakes: confirmed misses/false alarms queue into weighted retraining.</a:t>
             </a:r>
           </a:p>
         </p:txBody>
@@ -7307,7 +7705,7 @@
                 </a:solidFill>
                 <a:latin typeface="Times New Roman"/>
               </a:rPr>
-              <a:t>Investigate earlier warning relative to the NEWS2 baseline, measured properly.</a:t>
+              <a:t>Investigate earlier warning relative to the NEWS2 baseline, via quantified lead time.</a:t>
             </a:r>
           </a:p>
           <a:p>
@@ -7481,8 +7879,8 @@
         </p:nvSpPr>
         <p:spPr>
           <a:xfrm>
-            <a:off x="990295" y="3261665"/>
-            <a:ext cx="16303752" cy="6035040"/>
+            <a:off x="987552" y="3566160"/>
+            <a:ext cx="8229600" cy="3840480"/>
           </a:xfrm>
           <a:prstGeom prst="rect">
             <a:avLst/>
@@ -7510,7 +7908,7 @@
                 </a:solidFill>
                 <a:latin typeface="Times New Roman"/>
               </a:rPr>
-              <a:t>Deployed ensemble: 0.840 validation AUC and 0.844 AUC on the fresh unseen 20% set-B holdout.</a:t>
+              <a:t>Ensemble s48+c93+s45: val 0.840, fresh holdout 0.844.</a:t>
             </a:r>
           </a:p>
           <a:p>
@@ -7522,7 +7920,7 @@
                 </a:solidFill>
                 <a:latin typeface="Times New Roman"/>
               </a:rPr>
-              <a:t>Holdout performance exceeds validation performance, indicating no overfitting to the validation split.</a:t>
+              <a:t>Full metrics: sensitivity, precision, false alarms, lead time vs NEWS2.</a:t>
             </a:r>
           </a:p>
           <a:p>
@@ -7534,23 +7932,35 @@
                 </a:solidFill>
                 <a:latin typeface="Times New Roman"/>
               </a:rPr>
-              <a:t>Evaluation also reports sensitivity, specificity, precision, false-alarm count, and lead-time estimate, benchmarked against the NEWS2 baseline.</a:t>
-            </a:r>
-          </a:p>
-          <a:p>
-            <a:pPr/>
-            <a:r>
-              <a:rPr sz="2100">
-                <a:solidFill>
-                  <a:srgbClr val="000000"/>
-                </a:solidFill>
-                <a:latin typeface="Times New Roman"/>
-              </a:rPr>
-              <a:t>Next evaluation steps: calibration, threshold analysis, and prospective validation before clinical use.</a:t>
-            </a:r>
-          </a:p>
-        </p:txBody>
-      </p:sp>
+              <a:t>Holdout ≥ val suggests no major overfit (CIs pending).</a:t>
+            </a:r>
+          </a:p>
+        </p:txBody>
+      </p:sp>
+      <p:pic>
+        <p:nvPicPr>
+          <p:cNvPr id="7" name="Picture 6" descr="val_fig.png"/>
+          <p:cNvPicPr>
+            <a:picLocks noChangeAspect="1"/>
+          </p:cNvPicPr>
+          <p:nvPr/>
+        </p:nvPicPr>
+        <p:blipFill>
+          <a:blip r:embed="rId4"/>
+          <a:stretch>
+            <a:fillRect/>
+          </a:stretch>
+        </p:blipFill>
+        <p:spPr>
+          <a:xfrm>
+            <a:off x="9692640" y="3566160"/>
+            <a:ext cx="7589520" cy="3438144"/>
+          </a:xfrm>
+          <a:prstGeom prst="rect">
+            <a:avLst/>
+          </a:prstGeom>
+        </p:spPr>
+      </p:pic>
     </p:spTree>
   </p:cSld>
   <p:clrMapOvr>
